--- a/docs/preview/lesnaya-yagodka-predlozhenie.pptx
+++ b/docs/preview/lesnaya-yagodka-predlozhenie.pptx
@@ -1131,7 +1131,7 @@
           <a:p>
             <a:r>
               <a:rPr lang="en-US" dirty="0"/>
-              <a:t>Главная мысль: до 7 млн доводит не сайт сам по себе, а связка «цена + средний чек + мощность цеха». Сайт и автоматизация делают так, чтобы каждая коробка продавалась дороже и без ручной работы, а очередь показывала, насколько расширять цех. Цифру [__] спросить у Марины. Цитату проверить по источнику.</a:t>
+              <a:t>Показать, что мы понимаем ограничение цеха и не обещаем чудес. Цифру [__] спросить у Марины. Цитату проверить по источнику.</a:t>
             </a:r>
             <a:endParaRPr lang="en-US" dirty="0"/>
           </a:p>
@@ -1219,7 +1219,7 @@
           <a:p>
             <a:r>
               <a:rPr lang="en-US" dirty="0"/>
-              <a:t>Проценты — осторожные ориентиры, а не обещания. Каждый рычаг проверяем на её данных после запуска.</a:t>
+              <a:t>Часы — пример, чтобы показать масштаб. На созвоне попросить Марину прикинуть свои. 70 часов в месяц — почти две рабочие недели одного человека.</a:t>
             </a:r>
             <a:endParaRPr lang="en-US" dirty="0"/>
           </a:p>
@@ -1307,7 +1307,7 @@
           <a:p>
             <a:r>
               <a:rPr lang="en-US" dirty="0"/>
-              <a:t>Это сценарий, а не прогноз. Цены и объёмы — ориентиры, их подставим из её данных. Важно проговорить: сайт снимает ограничения по продажам и рутине, а ограничение по цеху снимается на основе данных, которые сайт соберёт.</a:t>
+              <a:t>Не обещать 7 млн. Показать формулу и рычаги. Цифры [__] заполнить после разговора: мощность цеха и цель по выручке.</a:t>
             </a:r>
             <a:endParaRPr lang="en-US" dirty="0"/>
           </a:p>
@@ -2188,7 +2188,7 @@
                 <a:ea typeface="Arial" pitchFamily="34" charset="-122"/>
                 <a:cs typeface="Arial" pitchFamily="34" charset="-120"/>
               </a:rPr>
-              <a:t>Новый сайт и админка, собранные вокруг того, как вы работаете: партии в 18:00, «нет в наличии», ручная работа.</a:t>
+              <a:t>Машина делает рутину, вы — зефир. Сайт и админка под вашу модель: партии, очередь, цех, СДЭК и деньги.</a:t>
             </a:r>
             <a:endParaRPr lang="en-US" sz="1800" dirty="0"/>
           </a:p>
@@ -3151,7 +3151,7 @@
                 <a:ea typeface="Arial" pitchFamily="34" charset="-122"/>
                 <a:cs typeface="Arial" pitchFamily="34" charset="-120"/>
               </a:rPr>
-              <a:t>«Лавка на автопилоте» — около 4% от одного месяца целевой выручки. Оплата частями: 40 / 30 / 30 · Лесная ягодка · 10</a:t>
+              <a:t>Окупается возвращёнными часами команды и полностью проданными партиями. Оплата частями: 40 / 30 / 30 · Лесная ягодка · 10</a:t>
             </a:r>
             <a:endParaRPr lang="en-US" sz="1100" dirty="0"/>
           </a:p>
@@ -5676,7 +5676,7 @@
                 <a:ea typeface="Arial" pitchFamily="34" charset="-122"/>
                 <a:cs typeface="Arial" pitchFamily="34" charset="-120"/>
               </a:rPr>
-              <a:t>ЦЕЛЬ</a:t>
+              <a:t>ЧЕСТНО О ГЛАВНОМ</a:t>
             </a:r>
             <a:endParaRPr lang="en-US" sz="1200" dirty="0"/>
           </a:p>
@@ -5691,7 +5691,7 @@
         <p:spPr>
           <a:xfrm>
             <a:off x="731520" y="1005840"/>
-            <a:ext cx="10058400" cy="1280160"/>
+            <a:ext cx="10515600" cy="1280160"/>
           </a:xfrm>
           <a:prstGeom prst="rect">
             <a:avLst/>
@@ -5715,7 +5715,7 @@
                 <a:ea typeface="Georgia" pitchFamily="34" charset="-122"/>
                 <a:cs typeface="Georgia" pitchFamily="34" charset="-120"/>
               </a:rPr>
-              <a:t>7 млн ₽ в месяц — это </a:t>
+              <a:t>Цех не растянешь. Растянуть можно </a:t>
             </a:r>
             <a:pPr indent="0" marL="0">
               <a:buNone/>
@@ -5729,7 +5729,7 @@
                 <a:ea typeface="Georgia" pitchFamily="34" charset="-122"/>
                 <a:cs typeface="Georgia" pitchFamily="34" charset="-120"/>
               </a:rPr>
-              <a:t>3 900 коробок</a:t>
+              <a:t>время и каждую коробку</a:t>
             </a:r>
             <a:endParaRPr lang="en-US" sz="4000" dirty="0"/>
           </a:p>
@@ -5737,52 +5737,13 @@
       </p:sp>
       <p:sp>
         <p:nvSpPr>
-          <p:cNvPr id="4" name="Text 2"/>
-          <p:cNvSpPr txBox="1"/>
-          <p:nvPr/>
-        </p:nvSpPr>
-        <p:spPr>
-          <a:xfrm>
-            <a:off x="731520" y="2011680"/>
-            <a:ext cx="10058400" cy="731520"/>
-          </a:xfrm>
-          <a:prstGeom prst="rect">
-            <a:avLst/>
-          </a:prstGeom>
-          <a:noFill/>
-          <a:ln/>
-        </p:spPr>
-        <p:txBody>
-          <a:bodyPr wrap="square" lIns="0" tIns="0" rIns="0" bIns="0" rtlCol="0" anchor="t"/>
-          <a:lstStyle/>
-          <a:p>
-            <a:pPr indent="0" marL="0">
-              <a:buNone/>
-            </a:pPr>
-            <a:r>
-              <a:rPr lang="en-US" sz="1700" dirty="0">
-                <a:solidFill>
-                  <a:srgbClr val="5E5D56"/>
-                </a:solidFill>
-                <a:latin typeface="Arial" pitchFamily="34" charset="0"/>
-                <a:ea typeface="Arial" pitchFamily="34" charset="-122"/>
-                <a:cs typeface="Arial" pitchFamily="34" charset="-120"/>
-              </a:rPr>
-              <a:t>При средней коробке 1 800 ₽ (цены с вашего сайта: 1 750–1 850 ₽ за 550 г). Это 130 коробок каждый день.</a:t>
-            </a:r>
-            <a:endParaRPr lang="en-US" sz="1700" dirty="0"/>
-          </a:p>
-        </p:txBody>
-      </p:sp>
-      <p:sp>
-        <p:nvSpPr>
-          <p:cNvPr id="5" name="Shape 3"/>
+          <p:cNvPr id="4" name="Shape 2"/>
           <p:cNvSpPr/>
           <p:nvPr/>
         </p:nvSpPr>
         <p:spPr>
           <a:xfrm>
-            <a:off x="731520" y="3108960"/>
+            <a:off x="731520" y="2651760"/>
             <a:ext cx="3331464" cy="0"/>
           </a:xfrm>
           <a:prstGeom prst="line">
@@ -5799,13 +5760,13 @@
       </p:sp>
       <p:sp>
         <p:nvSpPr>
-          <p:cNvPr id="6" name="Text 4"/>
-          <p:cNvSpPr txBox="1"/>
-          <p:nvPr/>
-        </p:nvSpPr>
-        <p:spPr>
-          <a:xfrm>
-            <a:off x="731520" y="3291840"/>
+          <p:cNvPr id="5" name="Text 3"/>
+          <p:cNvSpPr txBox="1"/>
+          <p:nvPr/>
+        </p:nvSpPr>
+        <p:spPr>
+          <a:xfrm>
+            <a:off x="731520" y="2834640"/>
             <a:ext cx="3331464" cy="320040"/>
           </a:xfrm>
           <a:prstGeom prst="rect">
@@ -5830,7 +5791,7 @@
                 <a:ea typeface="Arial" pitchFamily="34" charset="-122"/>
                 <a:cs typeface="Arial" pitchFamily="34" charset="-120"/>
               </a:rPr>
-              <a:t>СЕЙЧАС</a:t>
+              <a:t>ОГРАНИЧЕНИЕ</a:t>
             </a:r>
             <a:endParaRPr lang="en-US" sz="1200" dirty="0"/>
           </a:p>
@@ -5838,13 +5799,13 @@
       </p:sp>
       <p:sp>
         <p:nvSpPr>
-          <p:cNvPr id="7" name="Text 5"/>
-          <p:cNvSpPr txBox="1"/>
-          <p:nvPr/>
-        </p:nvSpPr>
-        <p:spPr>
-          <a:xfrm>
-            <a:off x="731520" y="3657600"/>
+          <p:cNvPr id="6" name="Text 4"/>
+          <p:cNvSpPr txBox="1"/>
+          <p:nvPr/>
+        </p:nvSpPr>
+        <p:spPr>
+          <a:xfrm>
+            <a:off x="731520" y="3200400"/>
             <a:ext cx="3331464" cy="914400"/>
           </a:xfrm>
           <a:prstGeom prst="rect">
@@ -5861,7 +5822,7 @@
               <a:buNone/>
             </a:pPr>
             <a:r>
-              <a:rPr lang="en-US" sz="2600" dirty="0">
+              <a:rPr lang="en-US" sz="2200" dirty="0">
                 <a:solidFill>
                   <a:srgbClr val="2A2A26"/>
                 </a:solidFill>
@@ -5869,22 +5830,22 @@
                 <a:ea typeface="Georgia" pitchFamily="34" charset="-122"/>
                 <a:cs typeface="Georgia" pitchFamily="34" charset="-120"/>
               </a:rPr>
-              <a:t>[__] коробок в месяц</a:t>
-            </a:r>
-            <a:endParaRPr lang="en-US" sz="2600" dirty="0"/>
-          </a:p>
-        </p:txBody>
-      </p:sp>
-      <p:sp>
-        <p:nvSpPr>
-          <p:cNvPr id="8" name="Text 6"/>
-          <p:cNvSpPr txBox="1"/>
-          <p:nvPr/>
-        </p:nvSpPr>
-        <p:spPr>
-          <a:xfrm>
-            <a:off x="731520" y="4663440"/>
-            <a:ext cx="3331464" cy="731520"/>
+              <a:t>Цех делает [__] коробок в месяц</a:t>
+            </a:r>
+            <a:endParaRPr lang="en-US" sz="2200" dirty="0"/>
+          </a:p>
+        </p:txBody>
+      </p:sp>
+      <p:sp>
+        <p:nvSpPr>
+          <p:cNvPr id="7" name="Text 5"/>
+          <p:cNvSpPr txBox="1"/>
+          <p:nvPr/>
+        </p:nvSpPr>
+        <p:spPr>
+          <a:xfrm>
+            <a:off x="731520" y="4160520"/>
+            <a:ext cx="3331464" cy="1097280"/>
           </a:xfrm>
           <a:prstGeom prst="rect">
             <a:avLst/>
@@ -5897,10 +5858,13 @@
           <a:lstStyle/>
           <a:p>
             <a:pPr indent="0" marL="0">
-              <a:buNone/>
-            </a:pPr>
-            <a:r>
-              <a:rPr lang="en-US" sz="1500" dirty="0">
+              <a:lnSpc>
+                <a:spcPct val="120000"/>
+              </a:lnSpc>
+              <a:buNone/>
+            </a:pPr>
+            <a:r>
+              <a:rPr lang="en-US" sz="1400" dirty="0">
                 <a:solidFill>
                   <a:srgbClr val="5E5D56"/>
                 </a:solidFill>
@@ -5908,21 +5872,21 @@
                 <a:ea typeface="Arial" pitchFamily="34" charset="-122"/>
                 <a:cs typeface="Arial" pitchFamily="34" charset="-120"/>
               </a:rPr>
-              <a:t>столько успевает цех</a:t>
-            </a:r>
-            <a:endParaRPr lang="en-US" sz="1500" dirty="0"/>
-          </a:p>
-        </p:txBody>
-      </p:sp>
-      <p:sp>
-        <p:nvSpPr>
-          <p:cNvPr id="9" name="Shape 7"/>
+              <a:t>Это жёсткий потолок, и продавать больше, чем сварено, нельзя</a:t>
+            </a:r>
+            <a:endParaRPr lang="en-US" sz="1400" dirty="0"/>
+          </a:p>
+        </p:txBody>
+      </p:sp>
+      <p:sp>
+        <p:nvSpPr>
+          <p:cNvPr id="8" name="Shape 6"/>
           <p:cNvSpPr/>
           <p:nvPr/>
         </p:nvSpPr>
         <p:spPr>
           <a:xfrm>
-            <a:off x="4428744" y="3108960"/>
+            <a:off x="4428744" y="2651760"/>
             <a:ext cx="3331464" cy="0"/>
           </a:xfrm>
           <a:prstGeom prst="line">
@@ -5939,13 +5903,13 @@
       </p:sp>
       <p:sp>
         <p:nvSpPr>
-          <p:cNvPr id="10" name="Text 8"/>
-          <p:cNvSpPr txBox="1"/>
-          <p:nvPr/>
-        </p:nvSpPr>
-        <p:spPr>
-          <a:xfrm>
-            <a:off x="4428744" y="3291840"/>
+          <p:cNvPr id="9" name="Text 7"/>
+          <p:cNvSpPr txBox="1"/>
+          <p:nvPr/>
+        </p:nvSpPr>
+        <p:spPr>
+          <a:xfrm>
+            <a:off x="4428744" y="2834640"/>
             <a:ext cx="3331464" cy="320040"/>
           </a:xfrm>
           <a:prstGeom prst="rect">
@@ -5970,7 +5934,7 @@
                 <a:ea typeface="Arial" pitchFamily="34" charset="-122"/>
                 <a:cs typeface="Arial" pitchFamily="34" charset="-120"/>
               </a:rPr>
-              <a:t>ЦЕЛЬ</a:t>
+              <a:t>ЧТО МОЖНО РАСТЯНУТЬ</a:t>
             </a:r>
             <a:endParaRPr lang="en-US" sz="1200" dirty="0"/>
           </a:p>
@@ -5978,13 +5942,13 @@
       </p:sp>
       <p:sp>
         <p:nvSpPr>
-          <p:cNvPr id="11" name="Text 9"/>
-          <p:cNvSpPr txBox="1"/>
-          <p:nvPr/>
-        </p:nvSpPr>
-        <p:spPr>
-          <a:xfrm>
-            <a:off x="4428744" y="3657600"/>
+          <p:cNvPr id="10" name="Text 8"/>
+          <p:cNvSpPr txBox="1"/>
+          <p:nvPr/>
+        </p:nvSpPr>
+        <p:spPr>
+          <a:xfrm>
+            <a:off x="4428744" y="3200400"/>
             <a:ext cx="3331464" cy="914400"/>
           </a:xfrm>
           <a:prstGeom prst="rect">
@@ -6001,7 +5965,7 @@
               <a:buNone/>
             </a:pPr>
             <a:r>
-              <a:rPr lang="en-US" sz="2600" dirty="0">
+              <a:rPr lang="en-US" sz="2200" dirty="0">
                 <a:solidFill>
                   <a:srgbClr val="2A2A26"/>
                 </a:solidFill>
@@ -6009,22 +5973,22 @@
                 <a:ea typeface="Georgia" pitchFamily="34" charset="-122"/>
                 <a:cs typeface="Georgia" pitchFamily="34" charset="-120"/>
               </a:rPr>
-              <a:t>3 900 коробок в месяц</a:t>
-            </a:r>
-            <a:endParaRPr lang="en-US" sz="2600" dirty="0"/>
-          </a:p>
-        </p:txBody>
-      </p:sp>
-      <p:sp>
-        <p:nvSpPr>
-          <p:cNvPr id="12" name="Text 10"/>
-          <p:cNvSpPr txBox="1"/>
-          <p:nvPr/>
-        </p:nvSpPr>
-        <p:spPr>
-          <a:xfrm>
-            <a:off x="4428744" y="4663440"/>
-            <a:ext cx="3331464" cy="731520"/>
+              <a:t>Часы команды и выручку с коробки</a:t>
+            </a:r>
+            <a:endParaRPr lang="en-US" sz="2200" dirty="0"/>
+          </a:p>
+        </p:txBody>
+      </p:sp>
+      <p:sp>
+        <p:nvSpPr>
+          <p:cNvPr id="11" name="Text 9"/>
+          <p:cNvSpPr txBox="1"/>
+          <p:nvPr/>
+        </p:nvSpPr>
+        <p:spPr>
+          <a:xfrm>
+            <a:off x="4428744" y="4160520"/>
+            <a:ext cx="3331464" cy="1097280"/>
           </a:xfrm>
           <a:prstGeom prst="rect">
             <a:avLst/>
@@ -6037,10 +6001,13 @@
           <a:lstStyle/>
           <a:p>
             <a:pPr indent="0" marL="0">
-              <a:buNone/>
-            </a:pPr>
-            <a:r>
-              <a:rPr lang="en-US" sz="1500" dirty="0">
+              <a:lnSpc>
+                <a:spcPct val="120000"/>
+              </a:lnSpc>
+              <a:buNone/>
+            </a:pPr>
+            <a:r>
+              <a:rPr lang="en-US" sz="1400" dirty="0">
                 <a:solidFill>
                   <a:srgbClr val="5E5D56"/>
                 </a:solidFill>
@@ -6048,21 +6015,21 @@
                 <a:ea typeface="Arial" pitchFamily="34" charset="-122"/>
                 <a:cs typeface="Arial" pitchFamily="34" charset="-120"/>
               </a:rPr>
-              <a:t>или меньше коробок, но дороже чек</a:t>
-            </a:r>
-            <a:endParaRPr lang="en-US" sz="1500" dirty="0"/>
-          </a:p>
-        </p:txBody>
-      </p:sp>
-      <p:sp>
-        <p:nvSpPr>
-          <p:cNvPr id="13" name="Shape 11"/>
+              <a:t>Рутина съедает часы, а коробки продаются дешевле, чем могли бы</a:t>
+            </a:r>
+            <a:endParaRPr lang="en-US" sz="1400" dirty="0"/>
+          </a:p>
+        </p:txBody>
+      </p:sp>
+      <p:sp>
+        <p:nvSpPr>
+          <p:cNvPr id="12" name="Shape 10"/>
           <p:cNvSpPr/>
           <p:nvPr/>
         </p:nvSpPr>
         <p:spPr>
           <a:xfrm>
-            <a:off x="8125968" y="3108960"/>
+            <a:off x="8125968" y="2651760"/>
             <a:ext cx="3331464" cy="0"/>
           </a:xfrm>
           <a:prstGeom prst="line">
@@ -6079,13 +6046,13 @@
       </p:sp>
       <p:sp>
         <p:nvSpPr>
-          <p:cNvPr id="14" name="Text 12"/>
-          <p:cNvSpPr txBox="1"/>
-          <p:nvPr/>
-        </p:nvSpPr>
-        <p:spPr>
-          <a:xfrm>
-            <a:off x="8125968" y="3291840"/>
+          <p:cNvPr id="13" name="Text 11"/>
+          <p:cNvSpPr txBox="1"/>
+          <p:nvPr/>
+        </p:nvSpPr>
+        <p:spPr>
+          <a:xfrm>
+            <a:off x="8125968" y="2834640"/>
             <a:ext cx="3331464" cy="320040"/>
           </a:xfrm>
           <a:prstGeom prst="rect">
@@ -6110,7 +6077,7 @@
                 <a:ea typeface="Arial" pitchFamily="34" charset="-122"/>
                 <a:cs typeface="Arial" pitchFamily="34" charset="-120"/>
               </a:rPr>
-              <a:t>ЧТО УПИРАЕТСЯ</a:t>
+              <a:t>ЗАДАЧА СИСТЕМЫ</a:t>
             </a:r>
             <a:endParaRPr lang="en-US" sz="1200" dirty="0"/>
           </a:p>
@@ -6118,13 +6085,13 @@
       </p:sp>
       <p:sp>
         <p:nvSpPr>
-          <p:cNvPr id="15" name="Text 13"/>
-          <p:cNvSpPr txBox="1"/>
-          <p:nvPr/>
-        </p:nvSpPr>
-        <p:spPr>
-          <a:xfrm>
-            <a:off x="8125968" y="3657600"/>
+          <p:cNvPr id="14" name="Text 12"/>
+          <p:cNvSpPr txBox="1"/>
+          <p:nvPr/>
+        </p:nvSpPr>
+        <p:spPr>
+          <a:xfrm>
+            <a:off x="8125968" y="3200400"/>
             <a:ext cx="3331464" cy="914400"/>
           </a:xfrm>
           <a:prstGeom prst="rect">
@@ -6141,7 +6108,7 @@
               <a:buNone/>
             </a:pPr>
             <a:r>
-              <a:rPr lang="en-US" sz="2600" dirty="0">
+              <a:rPr lang="en-US" sz="2200" dirty="0">
                 <a:solidFill>
                   <a:srgbClr val="2A2A26"/>
                 </a:solidFill>
@@ -6149,22 +6116,22 @@
                 <a:ea typeface="Georgia" pitchFamily="34" charset="-122"/>
                 <a:cs typeface="Georgia" pitchFamily="34" charset="-120"/>
               </a:rPr>
-              <a:t>мощность цеха</a:t>
-            </a:r>
-            <a:endParaRPr lang="en-US" sz="2600" dirty="0"/>
-          </a:p>
-        </p:txBody>
-      </p:sp>
-      <p:sp>
-        <p:nvSpPr>
-          <p:cNvPr id="16" name="Text 14"/>
-          <p:cNvSpPr txBox="1"/>
-          <p:nvPr/>
-        </p:nvSpPr>
-        <p:spPr>
-          <a:xfrm>
-            <a:off x="8125968" y="4663440"/>
-            <a:ext cx="3331464" cy="731520"/>
+              <a:t>Продать 100% партии заранее</a:t>
+            </a:r>
+            <a:endParaRPr lang="en-US" sz="2200" dirty="0"/>
+          </a:p>
+        </p:txBody>
+      </p:sp>
+      <p:sp>
+        <p:nvSpPr>
+          <p:cNvPr id="15" name="Text 13"/>
+          <p:cNvSpPr txBox="1"/>
+          <p:nvPr/>
+        </p:nvSpPr>
+        <p:spPr>
+          <a:xfrm>
+            <a:off x="8125968" y="4160520"/>
+            <a:ext cx="3331464" cy="1097280"/>
           </a:xfrm>
           <a:prstGeom prst="rect">
             <a:avLst/>
@@ -6177,10 +6144,13 @@
           <a:lstStyle/>
           <a:p>
             <a:pPr indent="0" marL="0">
-              <a:buNone/>
-            </a:pPr>
-            <a:r>
-              <a:rPr lang="en-US" sz="1500" dirty="0">
+              <a:lnSpc>
+                <a:spcPct val="120000"/>
+              </a:lnSpc>
+              <a:buNone/>
+            </a:pPr>
+            <a:r>
+              <a:rPr lang="en-US" sz="1400" dirty="0">
                 <a:solidFill>
                   <a:srgbClr val="5E5D56"/>
                 </a:solidFill>
@@ -6188,15 +6158,15 @@
                 <a:ea typeface="Arial" pitchFamily="34" charset="-122"/>
                 <a:cs typeface="Arial" pitchFamily="34" charset="-120"/>
               </a:rPr>
-              <a:t>не сайт: спрос уже больше предложения</a:t>
-            </a:r>
-            <a:endParaRPr lang="en-US" sz="1500" dirty="0"/>
-          </a:p>
-        </p:txBody>
-      </p:sp>
-      <p:sp>
-        <p:nvSpPr>
-          <p:cNvPr id="17" name="Text 15"/>
+              <a:t>И забрать у людей всё, что не зефир: директ, накладные, подсчёты</a:t>
+            </a:r>
+            <a:endParaRPr lang="en-US" sz="1400" dirty="0"/>
+          </a:p>
+        </p:txBody>
+      </p:sp>
+      <p:sp>
+        <p:nvSpPr>
+          <p:cNvPr id="16" name="Text 14"/>
           <p:cNvSpPr txBox="1"/>
           <p:nvPr/>
         </p:nvSpPr>
@@ -6235,7 +6205,7 @@
       </p:sp>
       <p:sp>
         <p:nvSpPr>
-          <p:cNvPr id="18" name="Text 16"/>
+          <p:cNvPr id="17" name="Text 15"/>
           <p:cNvSpPr txBox="1"/>
           <p:nvPr/>
         </p:nvSpPr>
@@ -6337,7 +6307,7 @@
                 <a:ea typeface="Arial" pitchFamily="34" charset="-122"/>
                 <a:cs typeface="Arial" pitchFamily="34" charset="-120"/>
               </a:rPr>
-              <a:t>КАК ДОЙТИ</a:t>
+              <a:t>КУДА УХОДИТ ВРЕМЯ</a:t>
             </a:r>
             <a:endParaRPr lang="en-US" sz="1200" dirty="0"/>
           </a:p>
@@ -6368,7 +6338,7 @@
               <a:buNone/>
             </a:pPr>
             <a:r>
-              <a:rPr lang="en-US" sz="3600" dirty="0">
+              <a:rPr lang="en-US" sz="4000" dirty="0">
                 <a:solidFill>
                   <a:srgbClr val="2A2A26"/>
                 </a:solidFill>
@@ -6376,13 +6346,13 @@
                 <a:ea typeface="Georgia" pitchFamily="34" charset="-122"/>
                 <a:cs typeface="Georgia" pitchFamily="34" charset="-120"/>
               </a:rPr>
-              <a:t>Пять рычагов, и что для каждого </a:t>
-            </a:r>
-            <a:pPr indent="0" marL="0">
-              <a:buNone/>
-            </a:pPr>
-            <a:r>
-              <a:rPr lang="en-US" sz="3600" i="1" dirty="0">
+              <a:t>Всё, что не зефир, </a:t>
+            </a:r>
+            <a:pPr indent="0" marL="0">
+              <a:buNone/>
+            </a:pPr>
+            <a:r>
+              <a:rPr lang="en-US" sz="4000" i="1" dirty="0">
                 <a:solidFill>
                   <a:srgbClr val="4A6B3A"/>
                 </a:solidFill>
@@ -6390,9 +6360,9 @@
                 <a:ea typeface="Georgia" pitchFamily="34" charset="-122"/>
                 <a:cs typeface="Georgia" pitchFamily="34" charset="-120"/>
               </a:rPr>
-              <a:t>делает сайт</a:t>
-            </a:r>
-            <a:endParaRPr lang="en-US" sz="3600" dirty="0"/>
+              <a:t>делает машина</a:t>
+            </a:r>
+            <a:endParaRPr lang="en-US" sz="4000" dirty="0"/>
           </a:p>
         </p:txBody>
       </p:sp>
@@ -6411,7 +6381,7 @@
           </p:nvPr>
         </p:nvGraphicFramePr>
         <p:xfrm>
-          <a:off x="731520" y="2148840"/>
+          <a:off x="731520" y="2103120"/>
           <a:ext cx="10725912" cy="914400"/>
         </p:xfrm>
         <a:graphic>
@@ -6419,11 +6389,12 @@
             <a:tbl>
               <a:tblPr/>
               <a:tblGrid>
-                <a:gridCol w="2560320"/>
-                <a:gridCol w="5394960"/>
-                <a:gridCol w="2770632"/>
+                <a:gridCol w="3108960"/>
+                <a:gridCol w="4937760"/>
+                <a:gridCol w="1371600"/>
+                <a:gridCol w="1307592"/>
               </a:tblGrid>
-              <a:tr h="621792">
+              <a:tr h="457200">
                 <a:tc>
                   <a:txBody>
                     <a:bodyPr/>
@@ -6441,7 +6412,7 @@
                           <a:ea typeface="Arial" pitchFamily="34" charset="-122"/>
                           <a:cs typeface="Arial" pitchFamily="34" charset="-120"/>
                         </a:rPr>
-                        <a:t>Рычаг</a:t>
+                        <a:t>Что съедает время</a:t>
                       </a:r>
                       <a:endParaRPr lang="en-US" sz="1300" dirty="0">
                         <a:latin typeface="Arial" charset="0"/>
@@ -6506,7 +6477,72 @@
                           <a:ea typeface="Arial" pitchFamily="34" charset="-122"/>
                           <a:cs typeface="Arial" pitchFamily="34" charset="-120"/>
                         </a:rPr>
-                        <a:t>Что делает сайт и админка</a:t>
+                        <a:t>Кто делает теперь</a:t>
+                      </a:r>
+                      <a:endParaRPr lang="en-US" sz="1300" dirty="0">
+                        <a:latin typeface="Arial" charset="0"/>
+                        <a:ea typeface="Arial" charset="0"/>
+                        <a:cs typeface="Arial" charset="0"/>
+                      </a:endParaRPr>
+                    </a:p>
+                  </a:txBody>
+                  <a:tcPr marL="73152" marR="73152" marT="73152" marB="73152" anchor="ctr">
+                    <a:lnL w="9525" cap="flat" cmpd="sng" algn="ctr">
+                      <a:solidFill>
+                        <a:srgbClr val="B9B3A8"/>
+                      </a:solidFill>
+                      <a:prstDash val="solid"/>
+                      <a:round/>
+                      <a:headEnd type="none" w="med" len="med"/>
+                      <a:tailEnd type="none" w="med" len="med"/>
+                    </a:lnL>
+                    <a:lnR w="9525" cap="flat" cmpd="sng" algn="ctr">
+                      <a:solidFill>
+                        <a:srgbClr val="B9B3A8"/>
+                      </a:solidFill>
+                      <a:prstDash val="solid"/>
+                      <a:round/>
+                      <a:headEnd type="none" w="med" len="med"/>
+                      <a:tailEnd type="none" w="med" len="med"/>
+                    </a:lnR>
+                    <a:lnT w="9525" cap="flat" cmpd="sng" algn="ctr">
+                      <a:solidFill>
+                        <a:srgbClr val="B9B3A8"/>
+                      </a:solidFill>
+                      <a:prstDash val="solid"/>
+                      <a:round/>
+                      <a:headEnd type="none" w="med" len="med"/>
+                      <a:tailEnd type="none" w="med" len="med"/>
+                    </a:lnT>
+                    <a:lnB w="9525" cap="flat" cmpd="sng" algn="ctr">
+                      <a:solidFill>
+                        <a:srgbClr val="B9B3A8"/>
+                      </a:solidFill>
+                      <a:prstDash val="solid"/>
+                      <a:round/>
+                      <a:headEnd type="none" w="med" len="med"/>
+                      <a:tailEnd type="none" w="med" len="med"/>
+                    </a:lnB>
+                  </a:tcPr>
+                </a:tc>
+                <a:tc>
+                  <a:txBody>
+                    <a:bodyPr/>
+                    <a:lstStyle/>
+                    <a:p>
+                      <a:pPr indent="0" marL="0">
+                        <a:buNone/>
+                      </a:pPr>
+                      <a:r>
+                        <a:rPr lang="en-US" sz="1300" b="1" dirty="0">
+                          <a:solidFill>
+                            <a:srgbClr val="5E5D56"/>
+                          </a:solidFill>
+                          <a:latin typeface="Arial" pitchFamily="34" charset="0"/>
+                          <a:ea typeface="Arial" pitchFamily="34" charset="-122"/>
+                          <a:cs typeface="Arial" pitchFamily="34" charset="-120"/>
+                        </a:rPr>
+                        <a:t>Сейчас, в неделю</a:t>
                       </a:r>
                       <a:endParaRPr lang="en-US" sz="1300" dirty="0">
                         <a:latin typeface="Arial" charset="0"/>
@@ -6571,7 +6607,7 @@
                           <a:ea typeface="Arial" pitchFamily="34" charset="-122"/>
                           <a:cs typeface="Arial" pitchFamily="34" charset="-120"/>
                         </a:rPr>
-                        <a:t>Эффект</a:t>
+                        <a:t>С системой</a:t>
                       </a:r>
                       <a:endParaRPr lang="en-US" sz="1300" dirty="0">
                         <a:latin typeface="Arial" charset="0"/>
@@ -6620,7 +6656,7 @@
                   </a:tcPr>
                 </a:tc>
               </a:tr>
-              <a:tr h="621792">
+              <a:tr h="457200">
                 <a:tc>
                   <a:txBody>
                     <a:bodyPr/>
@@ -6630,7 +6666,7 @@
                         <a:buNone/>
                       </a:pPr>
                       <a:r>
-                        <a:rPr lang="en-US" sz="1400" b="1" dirty="0">
+                        <a:rPr lang="en-US" sz="1400" dirty="0">
                           <a:solidFill>
                             <a:srgbClr val="2A2A26"/>
                           </a:solidFill>
@@ -6638,7 +6674,7 @@
                           <a:ea typeface="Arial" pitchFamily="34" charset="-122"/>
                           <a:cs typeface="Arial" pitchFamily="34" charset="-120"/>
                         </a:rPr>
-                        <a:t>Цена</a:t>
+                        <a:t>Ответы «когда будет малина?»</a:t>
                       </a:r>
                       <a:endParaRPr lang="en-US" sz="1400" dirty="0">
                         <a:latin typeface="Arial" charset="0"/>
@@ -6703,7 +6739,7 @@
                           <a:ea typeface="Arial" pitchFamily="34" charset="-122"/>
                           <a:cs typeface="Arial" pitchFamily="34" charset="-120"/>
                         </a:rPr>
-                        <a:t>Спрос больше предложения. Очередь показывает, по какой цене разбирают партию</a:t>
+                        <a:t>Очередь на вкус и сообщение, когда он появился</a:t>
                       </a:r>
                       <a:endParaRPr lang="en-US" sz="1400" dirty="0">
                         <a:latin typeface="Arial" charset="0"/>
@@ -6751,6 +6787,138 @@
                     </a:lnB>
                   </a:tcPr>
                 </a:tc>
+                <a:tc>
+                  <a:txBody>
+                    <a:bodyPr/>
+                    <a:lstStyle/>
+                    <a:p>
+                      <a:pPr algn="r" indent="0" marL="0">
+                        <a:buNone/>
+                      </a:pPr>
+                      <a:r>
+                        <a:rPr lang="en-US" sz="1400" dirty="0">
+                          <a:solidFill>
+                            <a:srgbClr val="2A2A26"/>
+                          </a:solidFill>
+                          <a:latin typeface="Arial" pitchFamily="34" charset="0"/>
+                          <a:ea typeface="Arial" pitchFamily="34" charset="-122"/>
+                          <a:cs typeface="Arial" pitchFamily="34" charset="-120"/>
+                        </a:rPr>
+                        <a:t>7 ч</a:t>
+                      </a:r>
+                      <a:endParaRPr lang="en-US" sz="1400" dirty="0">
+                        <a:latin typeface="Arial" charset="0"/>
+                        <a:ea typeface="Arial" charset="0"/>
+                        <a:cs typeface="Arial" charset="0"/>
+                      </a:endParaRPr>
+                    </a:p>
+                  </a:txBody>
+                  <a:tcPr marL="73152" marR="73152" marT="73152" marB="73152" anchor="ctr">
+                    <a:lnL w="9525" cap="flat" cmpd="sng" algn="ctr">
+                      <a:solidFill>
+                        <a:srgbClr val="B9B3A8"/>
+                      </a:solidFill>
+                      <a:prstDash val="solid"/>
+                      <a:round/>
+                      <a:headEnd type="none" w="med" len="med"/>
+                      <a:tailEnd type="none" w="med" len="med"/>
+                    </a:lnL>
+                    <a:lnR w="9525" cap="flat" cmpd="sng" algn="ctr">
+                      <a:solidFill>
+                        <a:srgbClr val="B9B3A8"/>
+                      </a:solidFill>
+                      <a:prstDash val="solid"/>
+                      <a:round/>
+                      <a:headEnd type="none" w="med" len="med"/>
+                      <a:tailEnd type="none" w="med" len="med"/>
+                    </a:lnR>
+                    <a:lnT w="9525" cap="flat" cmpd="sng" algn="ctr">
+                      <a:solidFill>
+                        <a:srgbClr val="B9B3A8"/>
+                      </a:solidFill>
+                      <a:prstDash val="solid"/>
+                      <a:round/>
+                      <a:headEnd type="none" w="med" len="med"/>
+                      <a:tailEnd type="none" w="med" len="med"/>
+                    </a:lnT>
+                    <a:lnB w="9525" cap="flat" cmpd="sng" algn="ctr">
+                      <a:solidFill>
+                        <a:srgbClr val="B9B3A8"/>
+                      </a:solidFill>
+                      <a:prstDash val="solid"/>
+                      <a:round/>
+                      <a:headEnd type="none" w="med" len="med"/>
+                      <a:tailEnd type="none" w="med" len="med"/>
+                    </a:lnB>
+                  </a:tcPr>
+                </a:tc>
+                <a:tc>
+                  <a:txBody>
+                    <a:bodyPr/>
+                    <a:lstStyle/>
+                    <a:p>
+                      <a:pPr algn="r" indent="0" marL="0">
+                        <a:buNone/>
+                      </a:pPr>
+                      <a:r>
+                        <a:rPr lang="en-US" sz="1400" b="1" dirty="0">
+                          <a:solidFill>
+                            <a:srgbClr val="4A6B3A"/>
+                          </a:solidFill>
+                          <a:latin typeface="Arial" pitchFamily="34" charset="0"/>
+                          <a:ea typeface="Arial" pitchFamily="34" charset="-122"/>
+                          <a:cs typeface="Arial" pitchFamily="34" charset="-120"/>
+                        </a:rPr>
+                        <a:t>1 ч</a:t>
+                      </a:r>
+                      <a:endParaRPr lang="en-US" sz="1400" dirty="0">
+                        <a:latin typeface="Arial" charset="0"/>
+                        <a:ea typeface="Arial" charset="0"/>
+                        <a:cs typeface="Arial" charset="0"/>
+                      </a:endParaRPr>
+                    </a:p>
+                  </a:txBody>
+                  <a:tcPr marL="73152" marR="73152" marT="73152" marB="73152" anchor="ctr">
+                    <a:lnL w="9525" cap="flat" cmpd="sng" algn="ctr">
+                      <a:solidFill>
+                        <a:srgbClr val="B9B3A8"/>
+                      </a:solidFill>
+                      <a:prstDash val="solid"/>
+                      <a:round/>
+                      <a:headEnd type="none" w="med" len="med"/>
+                      <a:tailEnd type="none" w="med" len="med"/>
+                    </a:lnL>
+                    <a:lnR w="9525" cap="flat" cmpd="sng" algn="ctr">
+                      <a:solidFill>
+                        <a:srgbClr val="B9B3A8"/>
+                      </a:solidFill>
+                      <a:prstDash val="solid"/>
+                      <a:round/>
+                      <a:headEnd type="none" w="med" len="med"/>
+                      <a:tailEnd type="none" w="med" len="med"/>
+                    </a:lnR>
+                    <a:lnT w="9525" cap="flat" cmpd="sng" algn="ctr">
+                      <a:solidFill>
+                        <a:srgbClr val="B9B3A8"/>
+                      </a:solidFill>
+                      <a:prstDash val="solid"/>
+                      <a:round/>
+                      <a:headEnd type="none" w="med" len="med"/>
+                      <a:tailEnd type="none" w="med" len="med"/>
+                    </a:lnT>
+                    <a:lnB w="9525" cap="flat" cmpd="sng" algn="ctr">
+                      <a:solidFill>
+                        <a:srgbClr val="B9B3A8"/>
+                      </a:solidFill>
+                      <a:prstDash val="solid"/>
+                      <a:round/>
+                      <a:headEnd type="none" w="med" len="med"/>
+                      <a:tailEnd type="none" w="med" len="med"/>
+                    </a:lnB>
+                  </a:tcPr>
+                </a:tc>
+              </a:tr>
+              <a:tr h="457200">
                 <a:tc>
                   <a:txBody>
                     <a:bodyPr/>
@@ -6762,80 +6930,13 @@
                       <a:r>
                         <a:rPr lang="en-US" sz="1400" dirty="0">
                           <a:solidFill>
-                            <a:srgbClr val="4A6B3A"/>
-                          </a:solidFill>
-                          <a:latin typeface="Arial" pitchFamily="34" charset="0"/>
-                          <a:ea typeface="Arial" pitchFamily="34" charset="-122"/>
-                          <a:cs typeface="Arial" pitchFamily="34" charset="-120"/>
-                        </a:rPr>
-                        <a:t>+10% к цене коробки</a:t>
-                      </a:r>
-                      <a:endParaRPr lang="en-US" sz="1400" dirty="0">
-                        <a:latin typeface="Arial" charset="0"/>
-                        <a:ea typeface="Arial" charset="0"/>
-                        <a:cs typeface="Arial" charset="0"/>
-                      </a:endParaRPr>
-                    </a:p>
-                  </a:txBody>
-                  <a:tcPr marL="73152" marR="73152" marT="73152" marB="73152" anchor="ctr">
-                    <a:lnL w="9525" cap="flat" cmpd="sng" algn="ctr">
-                      <a:solidFill>
-                        <a:srgbClr val="B9B3A8"/>
-                      </a:solidFill>
-                      <a:prstDash val="solid"/>
-                      <a:round/>
-                      <a:headEnd type="none" w="med" len="med"/>
-                      <a:tailEnd type="none" w="med" len="med"/>
-                    </a:lnL>
-                    <a:lnR w="9525" cap="flat" cmpd="sng" algn="ctr">
-                      <a:solidFill>
-                        <a:srgbClr val="B9B3A8"/>
-                      </a:solidFill>
-                      <a:prstDash val="solid"/>
-                      <a:round/>
-                      <a:headEnd type="none" w="med" len="med"/>
-                      <a:tailEnd type="none" w="med" len="med"/>
-                    </a:lnR>
-                    <a:lnT w="9525" cap="flat" cmpd="sng" algn="ctr">
-                      <a:solidFill>
-                        <a:srgbClr val="B9B3A8"/>
-                      </a:solidFill>
-                      <a:prstDash val="solid"/>
-                      <a:round/>
-                      <a:headEnd type="none" w="med" len="med"/>
-                      <a:tailEnd type="none" w="med" len="med"/>
-                    </a:lnT>
-                    <a:lnB w="9525" cap="flat" cmpd="sng" algn="ctr">
-                      <a:solidFill>
-                        <a:srgbClr val="B9B3A8"/>
-                      </a:solidFill>
-                      <a:prstDash val="solid"/>
-                      <a:round/>
-                      <a:headEnd type="none" w="med" len="med"/>
-                      <a:tailEnd type="none" w="med" len="med"/>
-                    </a:lnB>
-                  </a:tcPr>
-                </a:tc>
-              </a:tr>
-              <a:tr h="621792">
-                <a:tc>
-                  <a:txBody>
-                    <a:bodyPr/>
-                    <a:lstStyle/>
-                    <a:p>
-                      <a:pPr indent="0" marL="0">
-                        <a:buNone/>
-                      </a:pPr>
-                      <a:r>
-                        <a:rPr lang="en-US" sz="1400" b="1" dirty="0">
-                          <a:solidFill>
                             <a:srgbClr val="2A2A26"/>
                           </a:solidFill>
                           <a:latin typeface="Arial" pitchFamily="34" charset="0"/>
                           <a:ea typeface="Arial" pitchFamily="34" charset="-122"/>
                           <a:cs typeface="Arial" pitchFamily="34" charset="-120"/>
                         </a:rPr>
-                        <a:t>Средний чек</a:t>
+                        <a:t>Выкладка партии, остатки, пост</a:t>
                       </a:r>
                       <a:endParaRPr lang="en-US" sz="1400" dirty="0">
                         <a:latin typeface="Arial" charset="0"/>
@@ -6900,7 +7001,7 @@
                           <a:ea typeface="Arial" pitchFamily="34" charset="-122"/>
                           <a:cs typeface="Arial" pitchFamily="34" charset="-120"/>
                         </a:rPr>
-                        <a:t>Наборы, подарочная упаковка, порог бесплатной доставки</a:t>
+                        <a:t>Партия и пост в Telegram выходят сами в 18:00</a:t>
                       </a:r>
                       <a:endParaRPr lang="en-US" sz="1400" dirty="0">
                         <a:latin typeface="Arial" charset="0"/>
@@ -6948,6 +7049,138 @@
                     </a:lnB>
                   </a:tcPr>
                 </a:tc>
+                <a:tc>
+                  <a:txBody>
+                    <a:bodyPr/>
+                    <a:lstStyle/>
+                    <a:p>
+                      <a:pPr algn="r" indent="0" marL="0">
+                        <a:buNone/>
+                      </a:pPr>
+                      <a:r>
+                        <a:rPr lang="en-US" sz="1400" dirty="0">
+                          <a:solidFill>
+                            <a:srgbClr val="2A2A26"/>
+                          </a:solidFill>
+                          <a:latin typeface="Arial" pitchFamily="34" charset="0"/>
+                          <a:ea typeface="Arial" pitchFamily="34" charset="-122"/>
+                          <a:cs typeface="Arial" pitchFamily="34" charset="-120"/>
+                        </a:rPr>
+                        <a:t>3 ч</a:t>
+                      </a:r>
+                      <a:endParaRPr lang="en-US" sz="1400" dirty="0">
+                        <a:latin typeface="Arial" charset="0"/>
+                        <a:ea typeface="Arial" charset="0"/>
+                        <a:cs typeface="Arial" charset="0"/>
+                      </a:endParaRPr>
+                    </a:p>
+                  </a:txBody>
+                  <a:tcPr marL="73152" marR="73152" marT="73152" marB="73152" anchor="ctr">
+                    <a:lnL w="9525" cap="flat" cmpd="sng" algn="ctr">
+                      <a:solidFill>
+                        <a:srgbClr val="B9B3A8"/>
+                      </a:solidFill>
+                      <a:prstDash val="solid"/>
+                      <a:round/>
+                      <a:headEnd type="none" w="med" len="med"/>
+                      <a:tailEnd type="none" w="med" len="med"/>
+                    </a:lnL>
+                    <a:lnR w="9525" cap="flat" cmpd="sng" algn="ctr">
+                      <a:solidFill>
+                        <a:srgbClr val="B9B3A8"/>
+                      </a:solidFill>
+                      <a:prstDash val="solid"/>
+                      <a:round/>
+                      <a:headEnd type="none" w="med" len="med"/>
+                      <a:tailEnd type="none" w="med" len="med"/>
+                    </a:lnR>
+                    <a:lnT w="9525" cap="flat" cmpd="sng" algn="ctr">
+                      <a:solidFill>
+                        <a:srgbClr val="B9B3A8"/>
+                      </a:solidFill>
+                      <a:prstDash val="solid"/>
+                      <a:round/>
+                      <a:headEnd type="none" w="med" len="med"/>
+                      <a:tailEnd type="none" w="med" len="med"/>
+                    </a:lnT>
+                    <a:lnB w="9525" cap="flat" cmpd="sng" algn="ctr">
+                      <a:solidFill>
+                        <a:srgbClr val="B9B3A8"/>
+                      </a:solidFill>
+                      <a:prstDash val="solid"/>
+                      <a:round/>
+                      <a:headEnd type="none" w="med" len="med"/>
+                      <a:tailEnd type="none" w="med" len="med"/>
+                    </a:lnB>
+                  </a:tcPr>
+                </a:tc>
+                <a:tc>
+                  <a:txBody>
+                    <a:bodyPr/>
+                    <a:lstStyle/>
+                    <a:p>
+                      <a:pPr algn="r" indent="0" marL="0">
+                        <a:buNone/>
+                      </a:pPr>
+                      <a:r>
+                        <a:rPr lang="en-US" sz="1400" b="1" dirty="0">
+                          <a:solidFill>
+                            <a:srgbClr val="4A6B3A"/>
+                          </a:solidFill>
+                          <a:latin typeface="Arial" pitchFamily="34" charset="0"/>
+                          <a:ea typeface="Arial" pitchFamily="34" charset="-122"/>
+                          <a:cs typeface="Arial" pitchFamily="34" charset="-120"/>
+                        </a:rPr>
+                        <a:t>0,5 ч</a:t>
+                      </a:r>
+                      <a:endParaRPr lang="en-US" sz="1400" dirty="0">
+                        <a:latin typeface="Arial" charset="0"/>
+                        <a:ea typeface="Arial" charset="0"/>
+                        <a:cs typeface="Arial" charset="0"/>
+                      </a:endParaRPr>
+                    </a:p>
+                  </a:txBody>
+                  <a:tcPr marL="73152" marR="73152" marT="73152" marB="73152" anchor="ctr">
+                    <a:lnL w="9525" cap="flat" cmpd="sng" algn="ctr">
+                      <a:solidFill>
+                        <a:srgbClr val="B9B3A8"/>
+                      </a:solidFill>
+                      <a:prstDash val="solid"/>
+                      <a:round/>
+                      <a:headEnd type="none" w="med" len="med"/>
+                      <a:tailEnd type="none" w="med" len="med"/>
+                    </a:lnL>
+                    <a:lnR w="9525" cap="flat" cmpd="sng" algn="ctr">
+                      <a:solidFill>
+                        <a:srgbClr val="B9B3A8"/>
+                      </a:solidFill>
+                      <a:prstDash val="solid"/>
+                      <a:round/>
+                      <a:headEnd type="none" w="med" len="med"/>
+                      <a:tailEnd type="none" w="med" len="med"/>
+                    </a:lnR>
+                    <a:lnT w="9525" cap="flat" cmpd="sng" algn="ctr">
+                      <a:solidFill>
+                        <a:srgbClr val="B9B3A8"/>
+                      </a:solidFill>
+                      <a:prstDash val="solid"/>
+                      <a:round/>
+                      <a:headEnd type="none" w="med" len="med"/>
+                      <a:tailEnd type="none" w="med" len="med"/>
+                    </a:lnT>
+                    <a:lnB w="9525" cap="flat" cmpd="sng" algn="ctr">
+                      <a:solidFill>
+                        <a:srgbClr val="B9B3A8"/>
+                      </a:solidFill>
+                      <a:prstDash val="solid"/>
+                      <a:round/>
+                      <a:headEnd type="none" w="med" len="med"/>
+                      <a:tailEnd type="none" w="med" len="med"/>
+                    </a:lnB>
+                  </a:tcPr>
+                </a:tc>
+              </a:tr>
+              <a:tr h="457200">
                 <a:tc>
                   <a:txBody>
                     <a:bodyPr/>
@@ -6959,80 +7192,13 @@
                       <a:r>
                         <a:rPr lang="en-US" sz="1400" dirty="0">
                           <a:solidFill>
-                            <a:srgbClr val="4A6B3A"/>
-                          </a:solidFill>
-                          <a:latin typeface="Arial" pitchFamily="34" charset="0"/>
-                          <a:ea typeface="Arial" pitchFamily="34" charset="-122"/>
-                          <a:cs typeface="Arial" pitchFamily="34" charset="-120"/>
-                        </a:rPr>
-                        <a:t>1,3 коробки в заказе вместо 1</a:t>
-                      </a:r>
-                      <a:endParaRPr lang="en-US" sz="1400" dirty="0">
-                        <a:latin typeface="Arial" charset="0"/>
-                        <a:ea typeface="Arial" charset="0"/>
-                        <a:cs typeface="Arial" charset="0"/>
-                      </a:endParaRPr>
-                    </a:p>
-                  </a:txBody>
-                  <a:tcPr marL="73152" marR="73152" marT="73152" marB="73152" anchor="ctr">
-                    <a:lnL w="9525" cap="flat" cmpd="sng" algn="ctr">
-                      <a:solidFill>
-                        <a:srgbClr val="B9B3A8"/>
-                      </a:solidFill>
-                      <a:prstDash val="solid"/>
-                      <a:round/>
-                      <a:headEnd type="none" w="med" len="med"/>
-                      <a:tailEnd type="none" w="med" len="med"/>
-                    </a:lnL>
-                    <a:lnR w="9525" cap="flat" cmpd="sng" algn="ctr">
-                      <a:solidFill>
-                        <a:srgbClr val="B9B3A8"/>
-                      </a:solidFill>
-                      <a:prstDash val="solid"/>
-                      <a:round/>
-                      <a:headEnd type="none" w="med" len="med"/>
-                      <a:tailEnd type="none" w="med" len="med"/>
-                    </a:lnR>
-                    <a:lnT w="9525" cap="flat" cmpd="sng" algn="ctr">
-                      <a:solidFill>
-                        <a:srgbClr val="B9B3A8"/>
-                      </a:solidFill>
-                      <a:prstDash val="solid"/>
-                      <a:round/>
-                      <a:headEnd type="none" w="med" len="med"/>
-                      <a:tailEnd type="none" w="med" len="med"/>
-                    </a:lnT>
-                    <a:lnB w="9525" cap="flat" cmpd="sng" algn="ctr">
-                      <a:solidFill>
-                        <a:srgbClr val="B9B3A8"/>
-                      </a:solidFill>
-                      <a:prstDash val="solid"/>
-                      <a:round/>
-                      <a:headEnd type="none" w="med" len="med"/>
-                      <a:tailEnd type="none" w="med" len="med"/>
-                    </a:lnB>
-                  </a:tcPr>
-                </a:tc>
-              </a:tr>
-              <a:tr h="621792">
-                <a:tc>
-                  <a:txBody>
-                    <a:bodyPr/>
-                    <a:lstStyle/>
-                    <a:p>
-                      <a:pPr indent="0" marL="0">
-                        <a:buNone/>
-                      </a:pPr>
-                      <a:r>
-                        <a:rPr lang="en-US" sz="1400" b="1" dirty="0">
-                          <a:solidFill>
                             <a:srgbClr val="2A2A26"/>
                           </a:solidFill>
                           <a:latin typeface="Arial" pitchFamily="34" charset="0"/>
                           <a:ea typeface="Arial" pitchFamily="34" charset="-122"/>
                           <a:cs typeface="Arial" pitchFamily="34" charset="-120"/>
                         </a:rPr>
-                        <a:t>Корпоративные и подарки</a:t>
+                        <a:t>Сверка оплат и чеки</a:t>
                       </a:r>
                       <a:endParaRPr lang="en-US" sz="1400" dirty="0">
                         <a:latin typeface="Arial" charset="0"/>
@@ -7097,7 +7263,7 @@
                           <a:ea typeface="Arial" pitchFamily="34" charset="-122"/>
                           <a:cs typeface="Arial" pitchFamily="34" charset="-120"/>
                         </a:rPr>
-                        <a:t>Заказ «к дате», счёт для юрлица, новогодние наборы</a:t>
+                        <a:t>Оплата, чек и статус заказа — автоматически</a:t>
                       </a:r>
                       <a:endParaRPr lang="en-US" sz="1400" dirty="0">
                         <a:latin typeface="Arial" charset="0"/>
@@ -7145,6 +7311,138 @@
                     </a:lnB>
                   </a:tcPr>
                 </a:tc>
+                <a:tc>
+                  <a:txBody>
+                    <a:bodyPr/>
+                    <a:lstStyle/>
+                    <a:p>
+                      <a:pPr algn="r" indent="0" marL="0">
+                        <a:buNone/>
+                      </a:pPr>
+                      <a:r>
+                        <a:rPr lang="en-US" sz="1400" dirty="0">
+                          <a:solidFill>
+                            <a:srgbClr val="2A2A26"/>
+                          </a:solidFill>
+                          <a:latin typeface="Arial" pitchFamily="34" charset="0"/>
+                          <a:ea typeface="Arial" pitchFamily="34" charset="-122"/>
+                          <a:cs typeface="Arial" pitchFamily="34" charset="-120"/>
+                        </a:rPr>
+                        <a:t>2 ч</a:t>
+                      </a:r>
+                      <a:endParaRPr lang="en-US" sz="1400" dirty="0">
+                        <a:latin typeface="Arial" charset="0"/>
+                        <a:ea typeface="Arial" charset="0"/>
+                        <a:cs typeface="Arial" charset="0"/>
+                      </a:endParaRPr>
+                    </a:p>
+                  </a:txBody>
+                  <a:tcPr marL="73152" marR="73152" marT="73152" marB="73152" anchor="ctr">
+                    <a:lnL w="9525" cap="flat" cmpd="sng" algn="ctr">
+                      <a:solidFill>
+                        <a:srgbClr val="B9B3A8"/>
+                      </a:solidFill>
+                      <a:prstDash val="solid"/>
+                      <a:round/>
+                      <a:headEnd type="none" w="med" len="med"/>
+                      <a:tailEnd type="none" w="med" len="med"/>
+                    </a:lnL>
+                    <a:lnR w="9525" cap="flat" cmpd="sng" algn="ctr">
+                      <a:solidFill>
+                        <a:srgbClr val="B9B3A8"/>
+                      </a:solidFill>
+                      <a:prstDash val="solid"/>
+                      <a:round/>
+                      <a:headEnd type="none" w="med" len="med"/>
+                      <a:tailEnd type="none" w="med" len="med"/>
+                    </a:lnR>
+                    <a:lnT w="9525" cap="flat" cmpd="sng" algn="ctr">
+                      <a:solidFill>
+                        <a:srgbClr val="B9B3A8"/>
+                      </a:solidFill>
+                      <a:prstDash val="solid"/>
+                      <a:round/>
+                      <a:headEnd type="none" w="med" len="med"/>
+                      <a:tailEnd type="none" w="med" len="med"/>
+                    </a:lnT>
+                    <a:lnB w="9525" cap="flat" cmpd="sng" algn="ctr">
+                      <a:solidFill>
+                        <a:srgbClr val="B9B3A8"/>
+                      </a:solidFill>
+                      <a:prstDash val="solid"/>
+                      <a:round/>
+                      <a:headEnd type="none" w="med" len="med"/>
+                      <a:tailEnd type="none" w="med" len="med"/>
+                    </a:lnB>
+                  </a:tcPr>
+                </a:tc>
+                <a:tc>
+                  <a:txBody>
+                    <a:bodyPr/>
+                    <a:lstStyle/>
+                    <a:p>
+                      <a:pPr algn="r" indent="0" marL="0">
+                        <a:buNone/>
+                      </a:pPr>
+                      <a:r>
+                        <a:rPr lang="en-US" sz="1400" b="1" dirty="0">
+                          <a:solidFill>
+                            <a:srgbClr val="4A6B3A"/>
+                          </a:solidFill>
+                          <a:latin typeface="Arial" pitchFamily="34" charset="0"/>
+                          <a:ea typeface="Arial" pitchFamily="34" charset="-122"/>
+                          <a:cs typeface="Arial" pitchFamily="34" charset="-120"/>
+                        </a:rPr>
+                        <a:t>0</a:t>
+                      </a:r>
+                      <a:endParaRPr lang="en-US" sz="1400" dirty="0">
+                        <a:latin typeface="Arial" charset="0"/>
+                        <a:ea typeface="Arial" charset="0"/>
+                        <a:cs typeface="Arial" charset="0"/>
+                      </a:endParaRPr>
+                    </a:p>
+                  </a:txBody>
+                  <a:tcPr marL="73152" marR="73152" marT="73152" marB="73152" anchor="ctr">
+                    <a:lnL w="9525" cap="flat" cmpd="sng" algn="ctr">
+                      <a:solidFill>
+                        <a:srgbClr val="B9B3A8"/>
+                      </a:solidFill>
+                      <a:prstDash val="solid"/>
+                      <a:round/>
+                      <a:headEnd type="none" w="med" len="med"/>
+                      <a:tailEnd type="none" w="med" len="med"/>
+                    </a:lnL>
+                    <a:lnR w="9525" cap="flat" cmpd="sng" algn="ctr">
+                      <a:solidFill>
+                        <a:srgbClr val="B9B3A8"/>
+                      </a:solidFill>
+                      <a:prstDash val="solid"/>
+                      <a:round/>
+                      <a:headEnd type="none" w="med" len="med"/>
+                      <a:tailEnd type="none" w="med" len="med"/>
+                    </a:lnR>
+                    <a:lnT w="9525" cap="flat" cmpd="sng" algn="ctr">
+                      <a:solidFill>
+                        <a:srgbClr val="B9B3A8"/>
+                      </a:solidFill>
+                      <a:prstDash val="solid"/>
+                      <a:round/>
+                      <a:headEnd type="none" w="med" len="med"/>
+                      <a:tailEnd type="none" w="med" len="med"/>
+                    </a:lnT>
+                    <a:lnB w="9525" cap="flat" cmpd="sng" algn="ctr">
+                      <a:solidFill>
+                        <a:srgbClr val="B9B3A8"/>
+                      </a:solidFill>
+                      <a:prstDash val="solid"/>
+                      <a:round/>
+                      <a:headEnd type="none" w="med" len="med"/>
+                      <a:tailEnd type="none" w="med" len="med"/>
+                    </a:lnB>
+                  </a:tcPr>
+                </a:tc>
+              </a:tr>
+              <a:tr h="457200">
                 <a:tc>
                   <a:txBody>
                     <a:bodyPr/>
@@ -7156,80 +7454,13 @@
                       <a:r>
                         <a:rPr lang="en-US" sz="1400" dirty="0">
                           <a:solidFill>
-                            <a:srgbClr val="4A6B3A"/>
-                          </a:solidFill>
-                          <a:latin typeface="Arial" pitchFamily="34" charset="0"/>
-                          <a:ea typeface="Arial" pitchFamily="34" charset="-122"/>
-                          <a:cs typeface="Arial" pitchFamily="34" charset="-120"/>
-                        </a:rPr>
-                        <a:t>крупные заказы в сезон</a:t>
-                      </a:r>
-                      <a:endParaRPr lang="en-US" sz="1400" dirty="0">
-                        <a:latin typeface="Arial" charset="0"/>
-                        <a:ea typeface="Arial" charset="0"/>
-                        <a:cs typeface="Arial" charset="0"/>
-                      </a:endParaRPr>
-                    </a:p>
-                  </a:txBody>
-                  <a:tcPr marL="73152" marR="73152" marT="73152" marB="73152" anchor="ctr">
-                    <a:lnL w="9525" cap="flat" cmpd="sng" algn="ctr">
-                      <a:solidFill>
-                        <a:srgbClr val="B9B3A8"/>
-                      </a:solidFill>
-                      <a:prstDash val="solid"/>
-                      <a:round/>
-                      <a:headEnd type="none" w="med" len="med"/>
-                      <a:tailEnd type="none" w="med" len="med"/>
-                    </a:lnL>
-                    <a:lnR w="9525" cap="flat" cmpd="sng" algn="ctr">
-                      <a:solidFill>
-                        <a:srgbClr val="B9B3A8"/>
-                      </a:solidFill>
-                      <a:prstDash val="solid"/>
-                      <a:round/>
-                      <a:headEnd type="none" w="med" len="med"/>
-                      <a:tailEnd type="none" w="med" len="med"/>
-                    </a:lnR>
-                    <a:lnT w="9525" cap="flat" cmpd="sng" algn="ctr">
-                      <a:solidFill>
-                        <a:srgbClr val="B9B3A8"/>
-                      </a:solidFill>
-                      <a:prstDash val="solid"/>
-                      <a:round/>
-                      <a:headEnd type="none" w="med" len="med"/>
-                      <a:tailEnd type="none" w="med" len="med"/>
-                    </a:lnT>
-                    <a:lnB w="9525" cap="flat" cmpd="sng" algn="ctr">
-                      <a:solidFill>
-                        <a:srgbClr val="B9B3A8"/>
-                      </a:solidFill>
-                      <a:prstDash val="solid"/>
-                      <a:round/>
-                      <a:headEnd type="none" w="med" len="med"/>
-                      <a:tailEnd type="none" w="med" len="med"/>
-                    </a:lnB>
-                  </a:tcPr>
-                </a:tc>
-              </a:tr>
-              <a:tr h="621792">
-                <a:tc>
-                  <a:txBody>
-                    <a:bodyPr/>
-                    <a:lstStyle/>
-                    <a:p>
-                      <a:pPr indent="0" marL="0">
-                        <a:buNone/>
-                      </a:pPr>
-                      <a:r>
-                        <a:rPr lang="en-US" sz="1400" b="1" dirty="0">
-                          <a:solidFill>
                             <a:srgbClr val="2A2A26"/>
                           </a:solidFill>
                           <a:latin typeface="Arial" pitchFamily="34" charset="0"/>
                           <a:ea typeface="Arial" pitchFamily="34" charset="-122"/>
                           <a:cs typeface="Arial" pitchFamily="34" charset="-120"/>
                         </a:rPr>
-                        <a:t>Подписка «Коробка сезона»</a:t>
+                        <a:t>Накладные СДЭК, «где мой заказ?»</a:t>
                       </a:r>
                       <a:endParaRPr lang="en-US" sz="1400" dirty="0">
                         <a:latin typeface="Arial" charset="0"/>
@@ -7294,7 +7525,7 @@
                           <a:ea typeface="Arial" pitchFamily="34" charset="-122"/>
                           <a:cs typeface="Arial" pitchFamily="34" charset="-120"/>
                         </a:rPr>
-                        <a:t>Автосписание раз в месяц, место в партии заранее</a:t>
+                        <a:t>Накладные пачкой, трек и статусы уходят сами</a:t>
                       </a:r>
                       <a:endParaRPr lang="en-US" sz="1400" dirty="0">
                         <a:latin typeface="Arial" charset="0"/>
@@ -7342,6 +7573,138 @@
                     </a:lnB>
                   </a:tcPr>
                 </a:tc>
+                <a:tc>
+                  <a:txBody>
+                    <a:bodyPr/>
+                    <a:lstStyle/>
+                    <a:p>
+                      <a:pPr algn="r" indent="0" marL="0">
+                        <a:buNone/>
+                      </a:pPr>
+                      <a:r>
+                        <a:rPr lang="en-US" sz="1400" dirty="0">
+                          <a:solidFill>
+                            <a:srgbClr val="2A2A26"/>
+                          </a:solidFill>
+                          <a:latin typeface="Arial" pitchFamily="34" charset="0"/>
+                          <a:ea typeface="Arial" pitchFamily="34" charset="-122"/>
+                          <a:cs typeface="Arial" pitchFamily="34" charset="-120"/>
+                        </a:rPr>
+                        <a:t>5 ч</a:t>
+                      </a:r>
+                      <a:endParaRPr lang="en-US" sz="1400" dirty="0">
+                        <a:latin typeface="Arial" charset="0"/>
+                        <a:ea typeface="Arial" charset="0"/>
+                        <a:cs typeface="Arial" charset="0"/>
+                      </a:endParaRPr>
+                    </a:p>
+                  </a:txBody>
+                  <a:tcPr marL="73152" marR="73152" marT="73152" marB="73152" anchor="ctr">
+                    <a:lnL w="9525" cap="flat" cmpd="sng" algn="ctr">
+                      <a:solidFill>
+                        <a:srgbClr val="B9B3A8"/>
+                      </a:solidFill>
+                      <a:prstDash val="solid"/>
+                      <a:round/>
+                      <a:headEnd type="none" w="med" len="med"/>
+                      <a:tailEnd type="none" w="med" len="med"/>
+                    </a:lnL>
+                    <a:lnR w="9525" cap="flat" cmpd="sng" algn="ctr">
+                      <a:solidFill>
+                        <a:srgbClr val="B9B3A8"/>
+                      </a:solidFill>
+                      <a:prstDash val="solid"/>
+                      <a:round/>
+                      <a:headEnd type="none" w="med" len="med"/>
+                      <a:tailEnd type="none" w="med" len="med"/>
+                    </a:lnR>
+                    <a:lnT w="9525" cap="flat" cmpd="sng" algn="ctr">
+                      <a:solidFill>
+                        <a:srgbClr val="B9B3A8"/>
+                      </a:solidFill>
+                      <a:prstDash val="solid"/>
+                      <a:round/>
+                      <a:headEnd type="none" w="med" len="med"/>
+                      <a:tailEnd type="none" w="med" len="med"/>
+                    </a:lnT>
+                    <a:lnB w="9525" cap="flat" cmpd="sng" algn="ctr">
+                      <a:solidFill>
+                        <a:srgbClr val="B9B3A8"/>
+                      </a:solidFill>
+                      <a:prstDash val="solid"/>
+                      <a:round/>
+                      <a:headEnd type="none" w="med" len="med"/>
+                      <a:tailEnd type="none" w="med" len="med"/>
+                    </a:lnB>
+                  </a:tcPr>
+                </a:tc>
+                <a:tc>
+                  <a:txBody>
+                    <a:bodyPr/>
+                    <a:lstStyle/>
+                    <a:p>
+                      <a:pPr algn="r" indent="0" marL="0">
+                        <a:buNone/>
+                      </a:pPr>
+                      <a:r>
+                        <a:rPr lang="en-US" sz="1400" b="1" dirty="0">
+                          <a:solidFill>
+                            <a:srgbClr val="4A6B3A"/>
+                          </a:solidFill>
+                          <a:latin typeface="Arial" pitchFamily="34" charset="0"/>
+                          <a:ea typeface="Arial" pitchFamily="34" charset="-122"/>
+                          <a:cs typeface="Arial" pitchFamily="34" charset="-120"/>
+                        </a:rPr>
+                        <a:t>1 ч</a:t>
+                      </a:r>
+                      <a:endParaRPr lang="en-US" sz="1400" dirty="0">
+                        <a:latin typeface="Arial" charset="0"/>
+                        <a:ea typeface="Arial" charset="0"/>
+                        <a:cs typeface="Arial" charset="0"/>
+                      </a:endParaRPr>
+                    </a:p>
+                  </a:txBody>
+                  <a:tcPr marL="73152" marR="73152" marT="73152" marB="73152" anchor="ctr">
+                    <a:lnL w="9525" cap="flat" cmpd="sng" algn="ctr">
+                      <a:solidFill>
+                        <a:srgbClr val="B9B3A8"/>
+                      </a:solidFill>
+                      <a:prstDash val="solid"/>
+                      <a:round/>
+                      <a:headEnd type="none" w="med" len="med"/>
+                      <a:tailEnd type="none" w="med" len="med"/>
+                    </a:lnL>
+                    <a:lnR w="9525" cap="flat" cmpd="sng" algn="ctr">
+                      <a:solidFill>
+                        <a:srgbClr val="B9B3A8"/>
+                      </a:solidFill>
+                      <a:prstDash val="solid"/>
+                      <a:round/>
+                      <a:headEnd type="none" w="med" len="med"/>
+                      <a:tailEnd type="none" w="med" len="med"/>
+                    </a:lnR>
+                    <a:lnT w="9525" cap="flat" cmpd="sng" algn="ctr">
+                      <a:solidFill>
+                        <a:srgbClr val="B9B3A8"/>
+                      </a:solidFill>
+                      <a:prstDash val="solid"/>
+                      <a:round/>
+                      <a:headEnd type="none" w="med" len="med"/>
+                      <a:tailEnd type="none" w="med" len="med"/>
+                    </a:lnT>
+                    <a:lnB w="9525" cap="flat" cmpd="sng" algn="ctr">
+                      <a:solidFill>
+                        <a:srgbClr val="B9B3A8"/>
+                      </a:solidFill>
+                      <a:prstDash val="solid"/>
+                      <a:round/>
+                      <a:headEnd type="none" w="med" len="med"/>
+                      <a:tailEnd type="none" w="med" len="med"/>
+                    </a:lnB>
+                  </a:tcPr>
+                </a:tc>
+              </a:tr>
+              <a:tr h="457200">
                 <a:tc>
                   <a:txBody>
                     <a:bodyPr/>
@@ -7353,80 +7716,13 @@
                       <a:r>
                         <a:rPr lang="en-US" sz="1400" dirty="0">
                           <a:solidFill>
-                            <a:srgbClr val="4A6B3A"/>
-                          </a:solidFill>
-                          <a:latin typeface="Arial" pitchFamily="34" charset="0"/>
-                          <a:ea typeface="Arial" pitchFamily="34" charset="-122"/>
-                          <a:cs typeface="Arial" pitchFamily="34" charset="-120"/>
-                        </a:rPr>
-                        <a:t>предсказуемая выручка</a:t>
-                      </a:r>
-                      <a:endParaRPr lang="en-US" sz="1400" dirty="0">
-                        <a:latin typeface="Arial" charset="0"/>
-                        <a:ea typeface="Arial" charset="0"/>
-                        <a:cs typeface="Arial" charset="0"/>
-                      </a:endParaRPr>
-                    </a:p>
-                  </a:txBody>
-                  <a:tcPr marL="73152" marR="73152" marT="73152" marB="73152" anchor="ctr">
-                    <a:lnL w="9525" cap="flat" cmpd="sng" algn="ctr">
-                      <a:solidFill>
-                        <a:srgbClr val="B9B3A8"/>
-                      </a:solidFill>
-                      <a:prstDash val="solid"/>
-                      <a:round/>
-                      <a:headEnd type="none" w="med" len="med"/>
-                      <a:tailEnd type="none" w="med" len="med"/>
-                    </a:lnL>
-                    <a:lnR w="9525" cap="flat" cmpd="sng" algn="ctr">
-                      <a:solidFill>
-                        <a:srgbClr val="B9B3A8"/>
-                      </a:solidFill>
-                      <a:prstDash val="solid"/>
-                      <a:round/>
-                      <a:headEnd type="none" w="med" len="med"/>
-                      <a:tailEnd type="none" w="med" len="med"/>
-                    </a:lnR>
-                    <a:lnT w="9525" cap="flat" cmpd="sng" algn="ctr">
-                      <a:solidFill>
-                        <a:srgbClr val="B9B3A8"/>
-                      </a:solidFill>
-                      <a:prstDash val="solid"/>
-                      <a:round/>
-                      <a:headEnd type="none" w="med" len="med"/>
-                      <a:tailEnd type="none" w="med" len="med"/>
-                    </a:lnT>
-                    <a:lnB w="9525" cap="flat" cmpd="sng" algn="ctr">
-                      <a:solidFill>
-                        <a:srgbClr val="B9B3A8"/>
-                      </a:solidFill>
-                      <a:prstDash val="solid"/>
-                      <a:round/>
-                      <a:headEnd type="none" w="med" len="med"/>
-                      <a:tailEnd type="none" w="med" len="med"/>
-                    </a:lnB>
-                  </a:tcPr>
-                </a:tc>
-              </a:tr>
-              <a:tr h="621792">
-                <a:tc>
-                  <a:txBody>
-                    <a:bodyPr/>
-                    <a:lstStyle/>
-                    <a:p>
-                      <a:pPr indent="0" marL="0">
-                        <a:buNone/>
-                      </a:pPr>
-                      <a:r>
-                        <a:rPr lang="en-US" sz="1400" b="1" dirty="0">
-                          <a:solidFill>
                             <a:srgbClr val="2A2A26"/>
                           </a:solidFill>
                           <a:latin typeface="Arial" pitchFamily="34" charset="0"/>
                           <a:ea typeface="Arial" pitchFamily="34" charset="-122"/>
                           <a:cs typeface="Arial" pitchFamily="34" charset="-120"/>
                         </a:rPr>
-                        <a:t>Мощность цеха</a:t>
+                        <a:t>Что варить и что закупить</a:t>
                       </a:r>
                       <a:endParaRPr lang="en-US" sz="1400" dirty="0">
                         <a:latin typeface="Arial" charset="0"/>
@@ -7491,7 +7787,204 @@
                           <a:ea typeface="Arial" pitchFamily="34" charset="-122"/>
                           <a:cs typeface="Arial" pitchFamily="34" charset="-120"/>
                         </a:rPr>
-                        <a:t>Очередь и предоплата: видно, сколько варить и когда расширяться</a:t>
+                        <a:t>Лист для цеха и расход сырья по техкартам</a:t>
+                      </a:r>
+                      <a:endParaRPr lang="en-US" sz="1400" dirty="0">
+                        <a:latin typeface="Arial" charset="0"/>
+                        <a:ea typeface="Arial" charset="0"/>
+                        <a:cs typeface="Arial" charset="0"/>
+                      </a:endParaRPr>
+                    </a:p>
+                  </a:txBody>
+                  <a:tcPr marL="73152" marR="73152" marT="73152" marB="73152" anchor="ctr">
+                    <a:lnL w="9525" cap="flat" cmpd="sng" algn="ctr">
+                      <a:solidFill>
+                        <a:srgbClr val="B9B3A8"/>
+                      </a:solidFill>
+                      <a:prstDash val="solid"/>
+                      <a:round/>
+                      <a:headEnd type="none" w="med" len="med"/>
+                      <a:tailEnd type="none" w="med" len="med"/>
+                    </a:lnL>
+                    <a:lnR w="9525" cap="flat" cmpd="sng" algn="ctr">
+                      <a:solidFill>
+                        <a:srgbClr val="B9B3A8"/>
+                      </a:solidFill>
+                      <a:prstDash val="solid"/>
+                      <a:round/>
+                      <a:headEnd type="none" w="med" len="med"/>
+                      <a:tailEnd type="none" w="med" len="med"/>
+                    </a:lnR>
+                    <a:lnT w="9525" cap="flat" cmpd="sng" algn="ctr">
+                      <a:solidFill>
+                        <a:srgbClr val="B9B3A8"/>
+                      </a:solidFill>
+                      <a:prstDash val="solid"/>
+                      <a:round/>
+                      <a:headEnd type="none" w="med" len="med"/>
+                      <a:tailEnd type="none" w="med" len="med"/>
+                    </a:lnT>
+                    <a:lnB w="9525" cap="flat" cmpd="sng" algn="ctr">
+                      <a:solidFill>
+                        <a:srgbClr val="B9B3A8"/>
+                      </a:solidFill>
+                      <a:prstDash val="solid"/>
+                      <a:round/>
+                      <a:headEnd type="none" w="med" len="med"/>
+                      <a:tailEnd type="none" w="med" len="med"/>
+                    </a:lnB>
+                  </a:tcPr>
+                </a:tc>
+                <a:tc>
+                  <a:txBody>
+                    <a:bodyPr/>
+                    <a:lstStyle/>
+                    <a:p>
+                      <a:pPr algn="r" indent="0" marL="0">
+                        <a:buNone/>
+                      </a:pPr>
+                      <a:r>
+                        <a:rPr lang="en-US" sz="1400" dirty="0">
+                          <a:solidFill>
+                            <a:srgbClr val="2A2A26"/>
+                          </a:solidFill>
+                          <a:latin typeface="Arial" pitchFamily="34" charset="0"/>
+                          <a:ea typeface="Arial" pitchFamily="34" charset="-122"/>
+                          <a:cs typeface="Arial" pitchFamily="34" charset="-120"/>
+                        </a:rPr>
+                        <a:t>2 ч</a:t>
+                      </a:r>
+                      <a:endParaRPr lang="en-US" sz="1400" dirty="0">
+                        <a:latin typeface="Arial" charset="0"/>
+                        <a:ea typeface="Arial" charset="0"/>
+                        <a:cs typeface="Arial" charset="0"/>
+                      </a:endParaRPr>
+                    </a:p>
+                  </a:txBody>
+                  <a:tcPr marL="73152" marR="73152" marT="73152" marB="73152" anchor="ctr">
+                    <a:lnL w="9525" cap="flat" cmpd="sng" algn="ctr">
+                      <a:solidFill>
+                        <a:srgbClr val="B9B3A8"/>
+                      </a:solidFill>
+                      <a:prstDash val="solid"/>
+                      <a:round/>
+                      <a:headEnd type="none" w="med" len="med"/>
+                      <a:tailEnd type="none" w="med" len="med"/>
+                    </a:lnL>
+                    <a:lnR w="9525" cap="flat" cmpd="sng" algn="ctr">
+                      <a:solidFill>
+                        <a:srgbClr val="B9B3A8"/>
+                      </a:solidFill>
+                      <a:prstDash val="solid"/>
+                      <a:round/>
+                      <a:headEnd type="none" w="med" len="med"/>
+                      <a:tailEnd type="none" w="med" len="med"/>
+                    </a:lnR>
+                    <a:lnT w="9525" cap="flat" cmpd="sng" algn="ctr">
+                      <a:solidFill>
+                        <a:srgbClr val="B9B3A8"/>
+                      </a:solidFill>
+                      <a:prstDash val="solid"/>
+                      <a:round/>
+                      <a:headEnd type="none" w="med" len="med"/>
+                      <a:tailEnd type="none" w="med" len="med"/>
+                    </a:lnT>
+                    <a:lnB w="9525" cap="flat" cmpd="sng" algn="ctr">
+                      <a:solidFill>
+                        <a:srgbClr val="B9B3A8"/>
+                      </a:solidFill>
+                      <a:prstDash val="solid"/>
+                      <a:round/>
+                      <a:headEnd type="none" w="med" len="med"/>
+                      <a:tailEnd type="none" w="med" len="med"/>
+                    </a:lnB>
+                  </a:tcPr>
+                </a:tc>
+                <a:tc>
+                  <a:txBody>
+                    <a:bodyPr/>
+                    <a:lstStyle/>
+                    <a:p>
+                      <a:pPr algn="r" indent="0" marL="0">
+                        <a:buNone/>
+                      </a:pPr>
+                      <a:r>
+                        <a:rPr lang="en-US" sz="1400" b="1" dirty="0">
+                          <a:solidFill>
+                            <a:srgbClr val="4A6B3A"/>
+                          </a:solidFill>
+                          <a:latin typeface="Arial" pitchFamily="34" charset="0"/>
+                          <a:ea typeface="Arial" pitchFamily="34" charset="-122"/>
+                          <a:cs typeface="Arial" pitchFamily="34" charset="-120"/>
+                        </a:rPr>
+                        <a:t>0,5 ч</a:t>
+                      </a:r>
+                      <a:endParaRPr lang="en-US" sz="1400" dirty="0">
+                        <a:latin typeface="Arial" charset="0"/>
+                        <a:ea typeface="Arial" charset="0"/>
+                        <a:cs typeface="Arial" charset="0"/>
+                      </a:endParaRPr>
+                    </a:p>
+                  </a:txBody>
+                  <a:tcPr marL="73152" marR="73152" marT="73152" marB="73152" anchor="ctr">
+                    <a:lnL w="9525" cap="flat" cmpd="sng" algn="ctr">
+                      <a:solidFill>
+                        <a:srgbClr val="B9B3A8"/>
+                      </a:solidFill>
+                      <a:prstDash val="solid"/>
+                      <a:round/>
+                      <a:headEnd type="none" w="med" len="med"/>
+                      <a:tailEnd type="none" w="med" len="med"/>
+                    </a:lnL>
+                    <a:lnR w="9525" cap="flat" cmpd="sng" algn="ctr">
+                      <a:solidFill>
+                        <a:srgbClr val="B9B3A8"/>
+                      </a:solidFill>
+                      <a:prstDash val="solid"/>
+                      <a:round/>
+                      <a:headEnd type="none" w="med" len="med"/>
+                      <a:tailEnd type="none" w="med" len="med"/>
+                    </a:lnR>
+                    <a:lnT w="9525" cap="flat" cmpd="sng" algn="ctr">
+                      <a:solidFill>
+                        <a:srgbClr val="B9B3A8"/>
+                      </a:solidFill>
+                      <a:prstDash val="solid"/>
+                      <a:round/>
+                      <a:headEnd type="none" w="med" len="med"/>
+                      <a:tailEnd type="none" w="med" len="med"/>
+                    </a:lnT>
+                    <a:lnB w="9525" cap="flat" cmpd="sng" algn="ctr">
+                      <a:solidFill>
+                        <a:srgbClr val="B9B3A8"/>
+                      </a:solidFill>
+                      <a:prstDash val="solid"/>
+                      <a:round/>
+                      <a:headEnd type="none" w="med" len="med"/>
+                      <a:tailEnd type="none" w="med" len="med"/>
+                    </a:lnB>
+                  </a:tcPr>
+                </a:tc>
+              </a:tr>
+              <a:tr h="457200">
+                <a:tc>
+                  <a:txBody>
+                    <a:bodyPr/>
+                    <a:lstStyle/>
+                    <a:p>
+                      <a:pPr indent="0" marL="0">
+                        <a:buNone/>
+                      </a:pPr>
+                      <a:r>
+                        <a:rPr lang="en-US" sz="1400" dirty="0">
+                          <a:solidFill>
+                            <a:srgbClr val="2A2A26"/>
+                          </a:solidFill>
+                          <a:latin typeface="Arial" pitchFamily="34" charset="0"/>
+                          <a:ea typeface="Arial" pitchFamily="34" charset="-122"/>
+                          <a:cs typeface="Arial" pitchFamily="34" charset="-120"/>
+                        </a:rPr>
+                        <a:t>Учёт денег в тетради или таблице</a:t>
                       </a:r>
                       <a:endParaRPr lang="en-US" sz="1400" dirty="0">
                         <a:latin typeface="Arial" charset="0"/>
@@ -7550,13 +8043,405 @@
                       <a:r>
                         <a:rPr lang="en-US" sz="1400" dirty="0">
                           <a:solidFill>
+                            <a:srgbClr val="5E5D56"/>
+                          </a:solidFill>
+                          <a:latin typeface="Arial" pitchFamily="34" charset="0"/>
+                          <a:ea typeface="Arial" pitchFamily="34" charset="-122"/>
+                          <a:cs typeface="Arial" pitchFamily="34" charset="-120"/>
+                        </a:rPr>
+                        <a:t>Прибыль по вкусу и партии считается сама</a:t>
+                      </a:r>
+                      <a:endParaRPr lang="en-US" sz="1400" dirty="0">
+                        <a:latin typeface="Arial" charset="0"/>
+                        <a:ea typeface="Arial" charset="0"/>
+                        <a:cs typeface="Arial" charset="0"/>
+                      </a:endParaRPr>
+                    </a:p>
+                  </a:txBody>
+                  <a:tcPr marL="73152" marR="73152" marT="73152" marB="73152" anchor="ctr">
+                    <a:lnL w="9525" cap="flat" cmpd="sng" algn="ctr">
+                      <a:solidFill>
+                        <a:srgbClr val="B9B3A8"/>
+                      </a:solidFill>
+                      <a:prstDash val="solid"/>
+                      <a:round/>
+                      <a:headEnd type="none" w="med" len="med"/>
+                      <a:tailEnd type="none" w="med" len="med"/>
+                    </a:lnL>
+                    <a:lnR w="9525" cap="flat" cmpd="sng" algn="ctr">
+                      <a:solidFill>
+                        <a:srgbClr val="B9B3A8"/>
+                      </a:solidFill>
+                      <a:prstDash val="solid"/>
+                      <a:round/>
+                      <a:headEnd type="none" w="med" len="med"/>
+                      <a:tailEnd type="none" w="med" len="med"/>
+                    </a:lnR>
+                    <a:lnT w="9525" cap="flat" cmpd="sng" algn="ctr">
+                      <a:solidFill>
+                        <a:srgbClr val="B9B3A8"/>
+                      </a:solidFill>
+                      <a:prstDash val="solid"/>
+                      <a:round/>
+                      <a:headEnd type="none" w="med" len="med"/>
+                      <a:tailEnd type="none" w="med" len="med"/>
+                    </a:lnT>
+                    <a:lnB w="9525" cap="flat" cmpd="sng" algn="ctr">
+                      <a:solidFill>
+                        <a:srgbClr val="B9B3A8"/>
+                      </a:solidFill>
+                      <a:prstDash val="solid"/>
+                      <a:round/>
+                      <a:headEnd type="none" w="med" len="med"/>
+                      <a:tailEnd type="none" w="med" len="med"/>
+                    </a:lnB>
+                  </a:tcPr>
+                </a:tc>
+                <a:tc>
+                  <a:txBody>
+                    <a:bodyPr/>
+                    <a:lstStyle/>
+                    <a:p>
+                      <a:pPr algn="r" indent="0" marL="0">
+                        <a:buNone/>
+                      </a:pPr>
+                      <a:r>
+                        <a:rPr lang="en-US" sz="1400" dirty="0">
+                          <a:solidFill>
+                            <a:srgbClr val="2A2A26"/>
+                          </a:solidFill>
+                          <a:latin typeface="Arial" pitchFamily="34" charset="0"/>
+                          <a:ea typeface="Arial" pitchFamily="34" charset="-122"/>
+                          <a:cs typeface="Arial" pitchFamily="34" charset="-120"/>
+                        </a:rPr>
+                        <a:t>2 ч</a:t>
+                      </a:r>
+                      <a:endParaRPr lang="en-US" sz="1400" dirty="0">
+                        <a:latin typeface="Arial" charset="0"/>
+                        <a:ea typeface="Arial" charset="0"/>
+                        <a:cs typeface="Arial" charset="0"/>
+                      </a:endParaRPr>
+                    </a:p>
+                  </a:txBody>
+                  <a:tcPr marL="73152" marR="73152" marT="73152" marB="73152" anchor="ctr">
+                    <a:lnL w="9525" cap="flat" cmpd="sng" algn="ctr">
+                      <a:solidFill>
+                        <a:srgbClr val="B9B3A8"/>
+                      </a:solidFill>
+                      <a:prstDash val="solid"/>
+                      <a:round/>
+                      <a:headEnd type="none" w="med" len="med"/>
+                      <a:tailEnd type="none" w="med" len="med"/>
+                    </a:lnL>
+                    <a:lnR w="9525" cap="flat" cmpd="sng" algn="ctr">
+                      <a:solidFill>
+                        <a:srgbClr val="B9B3A8"/>
+                      </a:solidFill>
+                      <a:prstDash val="solid"/>
+                      <a:round/>
+                      <a:headEnd type="none" w="med" len="med"/>
+                      <a:tailEnd type="none" w="med" len="med"/>
+                    </a:lnR>
+                    <a:lnT w="9525" cap="flat" cmpd="sng" algn="ctr">
+                      <a:solidFill>
+                        <a:srgbClr val="B9B3A8"/>
+                      </a:solidFill>
+                      <a:prstDash val="solid"/>
+                      <a:round/>
+                      <a:headEnd type="none" w="med" len="med"/>
+                      <a:tailEnd type="none" w="med" len="med"/>
+                    </a:lnT>
+                    <a:lnB w="9525" cap="flat" cmpd="sng" algn="ctr">
+                      <a:solidFill>
+                        <a:srgbClr val="B9B3A8"/>
+                      </a:solidFill>
+                      <a:prstDash val="solid"/>
+                      <a:round/>
+                      <a:headEnd type="none" w="med" len="med"/>
+                      <a:tailEnd type="none" w="med" len="med"/>
+                    </a:lnB>
+                  </a:tcPr>
+                </a:tc>
+                <a:tc>
+                  <a:txBody>
+                    <a:bodyPr/>
+                    <a:lstStyle/>
+                    <a:p>
+                      <a:pPr algn="r" indent="0" marL="0">
+                        <a:buNone/>
+                      </a:pPr>
+                      <a:r>
+                        <a:rPr lang="en-US" sz="1400" b="1" dirty="0">
+                          <a:solidFill>
                             <a:srgbClr val="4A6B3A"/>
                           </a:solidFill>
                           <a:latin typeface="Arial" pitchFamily="34" charset="0"/>
                           <a:ea typeface="Arial" pitchFamily="34" charset="-122"/>
                           <a:cs typeface="Arial" pitchFamily="34" charset="-120"/>
                         </a:rPr>
-                        <a:t>рост партии на данных</a:t>
+                        <a:t>0,5 ч</a:t>
+                      </a:r>
+                      <a:endParaRPr lang="en-US" sz="1400" dirty="0">
+                        <a:latin typeface="Arial" charset="0"/>
+                        <a:ea typeface="Arial" charset="0"/>
+                        <a:cs typeface="Arial" charset="0"/>
+                      </a:endParaRPr>
+                    </a:p>
+                  </a:txBody>
+                  <a:tcPr marL="73152" marR="73152" marT="73152" marB="73152" anchor="ctr">
+                    <a:lnL w="9525" cap="flat" cmpd="sng" algn="ctr">
+                      <a:solidFill>
+                        <a:srgbClr val="B9B3A8"/>
+                      </a:solidFill>
+                      <a:prstDash val="solid"/>
+                      <a:round/>
+                      <a:headEnd type="none" w="med" len="med"/>
+                      <a:tailEnd type="none" w="med" len="med"/>
+                    </a:lnL>
+                    <a:lnR w="9525" cap="flat" cmpd="sng" algn="ctr">
+                      <a:solidFill>
+                        <a:srgbClr val="B9B3A8"/>
+                      </a:solidFill>
+                      <a:prstDash val="solid"/>
+                      <a:round/>
+                      <a:headEnd type="none" w="med" len="med"/>
+                      <a:tailEnd type="none" w="med" len="med"/>
+                    </a:lnR>
+                    <a:lnT w="9525" cap="flat" cmpd="sng" algn="ctr">
+                      <a:solidFill>
+                        <a:srgbClr val="B9B3A8"/>
+                      </a:solidFill>
+                      <a:prstDash val="solid"/>
+                      <a:round/>
+                      <a:headEnd type="none" w="med" len="med"/>
+                      <a:tailEnd type="none" w="med" len="med"/>
+                    </a:lnT>
+                    <a:lnB w="9525" cap="flat" cmpd="sng" algn="ctr">
+                      <a:solidFill>
+                        <a:srgbClr val="B9B3A8"/>
+                      </a:solidFill>
+                      <a:prstDash val="solid"/>
+                      <a:round/>
+                      <a:headEnd type="none" w="med" len="med"/>
+                      <a:tailEnd type="none" w="med" len="med"/>
+                    </a:lnB>
+                  </a:tcPr>
+                </a:tc>
+              </a:tr>
+              <a:tr h="457200">
+                <a:tc>
+                  <a:txBody>
+                    <a:bodyPr/>
+                    <a:lstStyle/>
+                    <a:p>
+                      <a:pPr indent="0" marL="0">
+                        <a:buNone/>
+                      </a:pPr>
+                      <a:r>
+                        <a:rPr lang="en-US" sz="1400" b="1" dirty="0">
+                          <a:solidFill>
+                            <a:srgbClr val="2A2A26"/>
+                          </a:solidFill>
+                          <a:latin typeface="Arial" pitchFamily="34" charset="0"/>
+                          <a:ea typeface="Arial" pitchFamily="34" charset="-122"/>
+                          <a:cs typeface="Arial" pitchFamily="34" charset="-120"/>
+                        </a:rPr>
+                        <a:t>Итого</a:t>
+                      </a:r>
+                      <a:endParaRPr lang="en-US" sz="1400" dirty="0">
+                        <a:latin typeface="Arial" charset="0"/>
+                        <a:ea typeface="Arial" charset="0"/>
+                        <a:cs typeface="Arial" charset="0"/>
+                      </a:endParaRPr>
+                    </a:p>
+                  </a:txBody>
+                  <a:tcPr marL="73152" marR="73152" marT="73152" marB="73152" anchor="ctr">
+                    <a:lnL w="9525" cap="flat" cmpd="sng" algn="ctr">
+                      <a:solidFill>
+                        <a:srgbClr val="B9B3A8"/>
+                      </a:solidFill>
+                      <a:prstDash val="solid"/>
+                      <a:round/>
+                      <a:headEnd type="none" w="med" len="med"/>
+                      <a:tailEnd type="none" w="med" len="med"/>
+                    </a:lnL>
+                    <a:lnR w="9525" cap="flat" cmpd="sng" algn="ctr">
+                      <a:solidFill>
+                        <a:srgbClr val="B9B3A8"/>
+                      </a:solidFill>
+                      <a:prstDash val="solid"/>
+                      <a:round/>
+                      <a:headEnd type="none" w="med" len="med"/>
+                      <a:tailEnd type="none" w="med" len="med"/>
+                    </a:lnR>
+                    <a:lnT w="9525" cap="flat" cmpd="sng" algn="ctr">
+                      <a:solidFill>
+                        <a:srgbClr val="B9B3A8"/>
+                      </a:solidFill>
+                      <a:prstDash val="solid"/>
+                      <a:round/>
+                      <a:headEnd type="none" w="med" len="med"/>
+                      <a:tailEnd type="none" w="med" len="med"/>
+                    </a:lnT>
+                    <a:lnB w="9525" cap="flat" cmpd="sng" algn="ctr">
+                      <a:solidFill>
+                        <a:srgbClr val="B9B3A8"/>
+                      </a:solidFill>
+                      <a:prstDash val="solid"/>
+                      <a:round/>
+                      <a:headEnd type="none" w="med" len="med"/>
+                      <a:tailEnd type="none" w="med" len="med"/>
+                    </a:lnB>
+                  </a:tcPr>
+                </a:tc>
+                <a:tc>
+                  <a:txBody>
+                    <a:bodyPr/>
+                    <a:lstStyle/>
+                    <a:p>
+                      <a:pPr indent="0" marL="0">
+                        <a:buNone/>
+                      </a:pPr>
+                      <a:r>
+                        <a:rPr lang="en-US" sz="1400" b="1" dirty="0">
+                          <a:solidFill>
+                            <a:srgbClr val="4A6B3A"/>
+                          </a:solidFill>
+                          <a:latin typeface="Arial" pitchFamily="34" charset="0"/>
+                          <a:ea typeface="Arial" pitchFamily="34" charset="-122"/>
+                          <a:cs typeface="Arial" pitchFamily="34" charset="-120"/>
+                        </a:rPr>
+                        <a:t>≈ 70 часов в месяц возвращаются в цех и к вам</a:t>
+                      </a:r>
+                      <a:endParaRPr lang="en-US" sz="1400" dirty="0">
+                        <a:latin typeface="Arial" charset="0"/>
+                        <a:ea typeface="Arial" charset="0"/>
+                        <a:cs typeface="Arial" charset="0"/>
+                      </a:endParaRPr>
+                    </a:p>
+                  </a:txBody>
+                  <a:tcPr marL="73152" marR="73152" marT="73152" marB="73152" anchor="ctr">
+                    <a:lnL w="9525" cap="flat" cmpd="sng" algn="ctr">
+                      <a:solidFill>
+                        <a:srgbClr val="B9B3A8"/>
+                      </a:solidFill>
+                      <a:prstDash val="solid"/>
+                      <a:round/>
+                      <a:headEnd type="none" w="med" len="med"/>
+                      <a:tailEnd type="none" w="med" len="med"/>
+                    </a:lnL>
+                    <a:lnR w="9525" cap="flat" cmpd="sng" algn="ctr">
+                      <a:solidFill>
+                        <a:srgbClr val="B9B3A8"/>
+                      </a:solidFill>
+                      <a:prstDash val="solid"/>
+                      <a:round/>
+                      <a:headEnd type="none" w="med" len="med"/>
+                      <a:tailEnd type="none" w="med" len="med"/>
+                    </a:lnR>
+                    <a:lnT w="9525" cap="flat" cmpd="sng" algn="ctr">
+                      <a:solidFill>
+                        <a:srgbClr val="B9B3A8"/>
+                      </a:solidFill>
+                      <a:prstDash val="solid"/>
+                      <a:round/>
+                      <a:headEnd type="none" w="med" len="med"/>
+                      <a:tailEnd type="none" w="med" len="med"/>
+                    </a:lnT>
+                    <a:lnB w="9525" cap="flat" cmpd="sng" algn="ctr">
+                      <a:solidFill>
+                        <a:srgbClr val="B9B3A8"/>
+                      </a:solidFill>
+                      <a:prstDash val="solid"/>
+                      <a:round/>
+                      <a:headEnd type="none" w="med" len="med"/>
+                      <a:tailEnd type="none" w="med" len="med"/>
+                    </a:lnB>
+                  </a:tcPr>
+                </a:tc>
+                <a:tc>
+                  <a:txBody>
+                    <a:bodyPr/>
+                    <a:lstStyle/>
+                    <a:p>
+                      <a:pPr algn="r" indent="0" marL="0">
+                        <a:buNone/>
+                      </a:pPr>
+                      <a:r>
+                        <a:rPr lang="en-US" sz="1400" b="1" dirty="0">
+                          <a:solidFill>
+                            <a:srgbClr val="2A2A26"/>
+                          </a:solidFill>
+                          <a:latin typeface="Arial" pitchFamily="34" charset="0"/>
+                          <a:ea typeface="Arial" pitchFamily="34" charset="-122"/>
+                          <a:cs typeface="Arial" pitchFamily="34" charset="-120"/>
+                        </a:rPr>
+                        <a:t>21 ч</a:t>
+                      </a:r>
+                      <a:endParaRPr lang="en-US" sz="1400" dirty="0">
+                        <a:latin typeface="Arial" charset="0"/>
+                        <a:ea typeface="Arial" charset="0"/>
+                        <a:cs typeface="Arial" charset="0"/>
+                      </a:endParaRPr>
+                    </a:p>
+                  </a:txBody>
+                  <a:tcPr marL="73152" marR="73152" marT="73152" marB="73152" anchor="ctr">
+                    <a:lnL w="9525" cap="flat" cmpd="sng" algn="ctr">
+                      <a:solidFill>
+                        <a:srgbClr val="B9B3A8"/>
+                      </a:solidFill>
+                      <a:prstDash val="solid"/>
+                      <a:round/>
+                      <a:headEnd type="none" w="med" len="med"/>
+                      <a:tailEnd type="none" w="med" len="med"/>
+                    </a:lnL>
+                    <a:lnR w="9525" cap="flat" cmpd="sng" algn="ctr">
+                      <a:solidFill>
+                        <a:srgbClr val="B9B3A8"/>
+                      </a:solidFill>
+                      <a:prstDash val="solid"/>
+                      <a:round/>
+                      <a:headEnd type="none" w="med" len="med"/>
+                      <a:tailEnd type="none" w="med" len="med"/>
+                    </a:lnR>
+                    <a:lnT w="9525" cap="flat" cmpd="sng" algn="ctr">
+                      <a:solidFill>
+                        <a:srgbClr val="B9B3A8"/>
+                      </a:solidFill>
+                      <a:prstDash val="solid"/>
+                      <a:round/>
+                      <a:headEnd type="none" w="med" len="med"/>
+                      <a:tailEnd type="none" w="med" len="med"/>
+                    </a:lnT>
+                    <a:lnB w="9525" cap="flat" cmpd="sng" algn="ctr">
+                      <a:solidFill>
+                        <a:srgbClr val="B9B3A8"/>
+                      </a:solidFill>
+                      <a:prstDash val="solid"/>
+                      <a:round/>
+                      <a:headEnd type="none" w="med" len="med"/>
+                      <a:tailEnd type="none" w="med" len="med"/>
+                    </a:lnB>
+                  </a:tcPr>
+                </a:tc>
+                <a:tc>
+                  <a:txBody>
+                    <a:bodyPr/>
+                    <a:lstStyle/>
+                    <a:p>
+                      <a:pPr algn="r" indent="0" marL="0">
+                        <a:buNone/>
+                      </a:pPr>
+                      <a:r>
+                        <a:rPr lang="en-US" sz="1400" b="1" dirty="0">
+                          <a:solidFill>
+                            <a:srgbClr val="4A6B3A"/>
+                          </a:solidFill>
+                          <a:latin typeface="Arial" pitchFamily="34" charset="0"/>
+                          <a:ea typeface="Arial" pitchFamily="34" charset="-122"/>
+                          <a:cs typeface="Arial" pitchFamily="34" charset="-120"/>
+                        </a:rPr>
+                        <a:t>3,5 ч</a:t>
                       </a:r>
                       <a:endParaRPr lang="en-US" sz="1400" dirty="0">
                         <a:latin typeface="Arial" charset="0"/>
@@ -7713,7 +8598,7 @@
                 <a:ea typeface="Arial" pitchFamily="34" charset="-122"/>
                 <a:cs typeface="Arial" pitchFamily="34" charset="-120"/>
               </a:rPr>
-              <a:t>СЦЕНАРИЙ ЧЕРЕЗ 12 МЕСЯЦЕВ</a:t>
+              <a:t>РОСТ ПРИ ТОМ ЖЕ ЦЕХЕ</a:t>
             </a:r>
             <a:endParaRPr lang="en-US" sz="1200" dirty="0"/>
           </a:p>
@@ -7728,7 +8613,7 @@
         <p:spPr>
           <a:xfrm>
             <a:off x="731520" y="1005840"/>
-            <a:ext cx="6400800" cy="1280160"/>
+            <a:ext cx="10515600" cy="1280160"/>
           </a:xfrm>
           <a:prstGeom prst="rect">
             <a:avLst/>
@@ -7744,7 +8629,7 @@
               <a:buNone/>
             </a:pPr>
             <a:r>
-              <a:rPr lang="en-US" sz="4000" dirty="0">
+              <a:rPr lang="en-US" sz="3600" dirty="0">
                 <a:solidFill>
                   <a:srgbClr val="2A2A26"/>
                 </a:solidFill>
@@ -7752,13 +8637,13 @@
                 <a:ea typeface="Georgia" pitchFamily="34" charset="-122"/>
                 <a:cs typeface="Georgia" pitchFamily="34" charset="-120"/>
               </a:rPr>
-              <a:t>Из чего может сложиться </a:t>
-            </a:r>
-            <a:pPr indent="0" marL="0">
-              <a:buNone/>
-            </a:pPr>
-            <a:r>
-              <a:rPr lang="en-US" sz="4000" i="1" dirty="0">
+              <a:t>Где деньги, если коробок </a:t>
+            </a:r>
+            <a:pPr indent="0" marL="0">
+              <a:buNone/>
+            </a:pPr>
+            <a:r>
+              <a:rPr lang="en-US" sz="3600" i="1" dirty="0">
                 <a:solidFill>
                   <a:srgbClr val="4A6B3A"/>
                 </a:solidFill>
@@ -7766,9 +8651,9 @@
                 <a:ea typeface="Georgia" pitchFamily="34" charset="-122"/>
                 <a:cs typeface="Georgia" pitchFamily="34" charset="-120"/>
               </a:rPr>
-              <a:t>7 млн ₽</a:t>
-            </a:r>
-            <a:endParaRPr lang="en-US" sz="4000" dirty="0"/>
+              <a:t>больше не станет</a:t>
+            </a:r>
+            <a:endParaRPr lang="en-US" sz="3600" dirty="0"/>
           </a:p>
         </p:txBody>
       </p:sp>
@@ -7780,8 +8665,8 @@
         </p:nvSpPr>
         <p:spPr>
           <a:xfrm>
-            <a:off x="731520" y="2148840"/>
-            <a:ext cx="6766560" cy="0"/>
+            <a:off x="731520" y="2103120"/>
+            <a:ext cx="6675120" cy="0"/>
           </a:xfrm>
           <a:prstGeom prst="line">
             <a:avLst/>
@@ -7803,8 +8688,8 @@
         </p:nvSpPr>
         <p:spPr>
           <a:xfrm>
-            <a:off x="731520" y="2258568"/>
-            <a:ext cx="4206240" cy="640080"/>
+            <a:off x="731520" y="2194560"/>
+            <a:ext cx="6675120" cy="320040"/>
           </a:xfrm>
           <a:prstGeom prst="rect">
             <a:avLst/>
@@ -7820,7 +8705,7 @@
               <a:buNone/>
             </a:pPr>
             <a:r>
-              <a:rPr lang="en-US" sz="1400" dirty="0">
+              <a:rPr lang="en-US" sz="1500" b="1" dirty="0">
                 <a:solidFill>
                   <a:srgbClr val="2A2A26"/>
                 </a:solidFill>
@@ -7828,16 +8713,38 @@
                 <a:ea typeface="Arial" pitchFamily="34" charset="-122"/>
                 <a:cs typeface="Arial" pitchFamily="34" charset="-120"/>
               </a:rPr>
-              <a:t>Розница на сайте</a:t>
-            </a:r>
-            <a:endParaRPr lang="en-US" sz="1400" dirty="0"/>
-          </a:p>
-          <a:p>
-            <a:pPr indent="0" marL="0">
-              <a:buNone/>
-            </a:pPr>
-            <a:r>
-              <a:rPr lang="en-US" sz="1400" dirty="0">
+              <a:t>Каждая партия продана на 100% и заранее</a:t>
+            </a:r>
+            <a:endParaRPr lang="en-US" sz="1500" dirty="0"/>
+          </a:p>
+        </p:txBody>
+      </p:sp>
+      <p:sp>
+        <p:nvSpPr>
+          <p:cNvPr id="6" name="Text 4"/>
+          <p:cNvSpPr txBox="1"/>
+          <p:nvPr/>
+        </p:nvSpPr>
+        <p:spPr>
+          <a:xfrm>
+            <a:off x="731520" y="2496312"/>
+            <a:ext cx="6675120" cy="320040"/>
+          </a:xfrm>
+          <a:prstGeom prst="rect">
+            <a:avLst/>
+          </a:prstGeom>
+          <a:noFill/>
+          <a:ln/>
+        </p:spPr>
+        <p:txBody>
+          <a:bodyPr wrap="square" lIns="0" tIns="0" rIns="0" bIns="0" rtlCol="0" anchor="t"/>
+          <a:lstStyle/>
+          <a:p>
+            <a:pPr indent="0" marL="0">
+              <a:buNone/>
+            </a:pPr>
+            <a:r>
+              <a:rPr lang="en-US" sz="1300" dirty="0">
                 <a:solidFill>
                   <a:srgbClr val="5E5D56"/>
                 </a:solidFill>
@@ -7845,48 +8752,9 @@
                 <a:ea typeface="Arial" pitchFamily="34" charset="-122"/>
                 <a:cs typeface="Arial" pitchFamily="34" charset="-120"/>
               </a:rPr>
-              <a:t>2 000 коробок × 2 000 ₽</a:t>
-            </a:r>
-            <a:endParaRPr lang="en-US" sz="1400" dirty="0"/>
-          </a:p>
-        </p:txBody>
-      </p:sp>
-      <p:sp>
-        <p:nvSpPr>
-          <p:cNvPr id="6" name="Text 4"/>
-          <p:cNvSpPr txBox="1"/>
-          <p:nvPr/>
-        </p:nvSpPr>
-        <p:spPr>
-          <a:xfrm>
-            <a:off x="4937760" y="2331720"/>
-            <a:ext cx="2560320" cy="411480"/>
-          </a:xfrm>
-          <a:prstGeom prst="rect">
-            <a:avLst/>
-          </a:prstGeom>
-          <a:noFill/>
-          <a:ln/>
-        </p:spPr>
-        <p:txBody>
-          <a:bodyPr wrap="square" lIns="0" tIns="0" rIns="0" bIns="0" rtlCol="0" anchor="t"/>
-          <a:lstStyle/>
-          <a:p>
-            <a:pPr algn="r" indent="0" marL="0">
-              <a:buNone/>
-            </a:pPr>
-            <a:r>
-              <a:rPr lang="en-US" sz="1700" b="1" dirty="0">
-                <a:solidFill>
-                  <a:srgbClr val="2A2A26"/>
-                </a:solidFill>
-                <a:latin typeface="Arial" pitchFamily="34" charset="0"/>
-                <a:ea typeface="Arial" pitchFamily="34" charset="-122"/>
-                <a:cs typeface="Arial" pitchFamily="34" charset="-120"/>
-              </a:rPr>
-              <a:t>4 000 000 ₽</a:t>
-            </a:r>
-            <a:endParaRPr lang="en-US" sz="1700" dirty="0"/>
+              <a:t>Очередь с предоплатой: ни одной непроданной коробки, ни одной отмены</a:t>
+            </a:r>
+            <a:endParaRPr lang="en-US" sz="1300" dirty="0"/>
           </a:p>
         </p:txBody>
       </p:sp>
@@ -7898,8 +8766,8 @@
         </p:nvSpPr>
         <p:spPr>
           <a:xfrm>
-            <a:off x="731520" y="2926080"/>
-            <a:ext cx="6766560" cy="0"/>
+            <a:off x="731520" y="2852928"/>
+            <a:ext cx="6675120" cy="0"/>
           </a:xfrm>
           <a:prstGeom prst="line">
             <a:avLst/>
@@ -7921,8 +8789,8 @@
         </p:nvSpPr>
         <p:spPr>
           <a:xfrm>
-            <a:off x="731520" y="3035808"/>
-            <a:ext cx="4206240" cy="640080"/>
+            <a:off x="731520" y="2944368"/>
+            <a:ext cx="6675120" cy="320040"/>
           </a:xfrm>
           <a:prstGeom prst="rect">
             <a:avLst/>
@@ -7938,7 +8806,7 @@
               <a:buNone/>
             </a:pPr>
             <a:r>
-              <a:rPr lang="en-US" sz="1400" dirty="0">
+              <a:rPr lang="en-US" sz="1500" b="1" dirty="0">
                 <a:solidFill>
                   <a:srgbClr val="2A2A26"/>
                 </a:solidFill>
@@ -7946,16 +8814,38 @@
                 <a:ea typeface="Arial" pitchFamily="34" charset="-122"/>
                 <a:cs typeface="Arial" pitchFamily="34" charset="-120"/>
               </a:rPr>
-              <a:t>Подарочные и корпоративные наборы</a:t>
-            </a:r>
-            <a:endParaRPr lang="en-US" sz="1400" dirty="0"/>
-          </a:p>
-          <a:p>
-            <a:pPr indent="0" marL="0">
-              <a:buNone/>
-            </a:pPr>
-            <a:r>
-              <a:rPr lang="en-US" sz="1400" dirty="0">
+              <a:t>Честная цена</a:t>
+            </a:r>
+            <a:endParaRPr lang="en-US" sz="1500" dirty="0"/>
+          </a:p>
+        </p:txBody>
+      </p:sp>
+      <p:sp>
+        <p:nvSpPr>
+          <p:cNvPr id="9" name="Text 7"/>
+          <p:cNvSpPr txBox="1"/>
+          <p:nvPr/>
+        </p:nvSpPr>
+        <p:spPr>
+          <a:xfrm>
+            <a:off x="731520" y="3246120"/>
+            <a:ext cx="6675120" cy="320040"/>
+          </a:xfrm>
+          <a:prstGeom prst="rect">
+            <a:avLst/>
+          </a:prstGeom>
+          <a:noFill/>
+          <a:ln/>
+        </p:spPr>
+        <p:txBody>
+          <a:bodyPr wrap="square" lIns="0" tIns="0" rIns="0" bIns="0" rtlCol="0" anchor="t"/>
+          <a:lstStyle/>
+          <a:p>
+            <a:pPr indent="0" marL="0">
+              <a:buNone/>
+            </a:pPr>
+            <a:r>
+              <a:rPr lang="en-US" sz="1300" dirty="0">
                 <a:solidFill>
                   <a:srgbClr val="5E5D56"/>
                 </a:solidFill>
@@ -7963,48 +8853,9 @@
                 <a:ea typeface="Arial" pitchFamily="34" charset="-122"/>
                 <a:cs typeface="Arial" pitchFamily="34" charset="-120"/>
               </a:rPr>
-              <a:t>600 наборов × 3 500 ₽</a:t>
-            </a:r>
-            <a:endParaRPr lang="en-US" sz="1400" dirty="0"/>
-          </a:p>
-        </p:txBody>
-      </p:sp>
-      <p:sp>
-        <p:nvSpPr>
-          <p:cNvPr id="9" name="Text 7"/>
-          <p:cNvSpPr txBox="1"/>
-          <p:nvPr/>
-        </p:nvSpPr>
-        <p:spPr>
-          <a:xfrm>
-            <a:off x="4937760" y="3108960"/>
-            <a:ext cx="2560320" cy="411480"/>
-          </a:xfrm>
-          <a:prstGeom prst="rect">
-            <a:avLst/>
-          </a:prstGeom>
-          <a:noFill/>
-          <a:ln/>
-        </p:spPr>
-        <p:txBody>
-          <a:bodyPr wrap="square" lIns="0" tIns="0" rIns="0" bIns="0" rtlCol="0" anchor="t"/>
-          <a:lstStyle/>
-          <a:p>
-            <a:pPr algn="r" indent="0" marL="0">
-              <a:buNone/>
-            </a:pPr>
-            <a:r>
-              <a:rPr lang="en-US" sz="1700" b="1" dirty="0">
-                <a:solidFill>
-                  <a:srgbClr val="2A2A26"/>
-                </a:solidFill>
-                <a:latin typeface="Arial" pitchFamily="34" charset="0"/>
-                <a:ea typeface="Arial" pitchFamily="34" charset="-122"/>
-                <a:cs typeface="Arial" pitchFamily="34" charset="-120"/>
-              </a:rPr>
-              <a:t>2 100 000 ₽</a:t>
-            </a:r>
-            <a:endParaRPr lang="en-US" sz="1700" dirty="0"/>
+              <a:t>Спрос вдвое выше предложения: очередь покажет справедливую цену</a:t>
+            </a:r>
+            <a:endParaRPr lang="en-US" sz="1300" dirty="0"/>
           </a:p>
         </p:txBody>
       </p:sp>
@@ -8016,8 +8867,8 @@
         </p:nvSpPr>
         <p:spPr>
           <a:xfrm>
-            <a:off x="731520" y="3703320"/>
-            <a:ext cx="6766560" cy="0"/>
+            <a:off x="731520" y="3602736"/>
+            <a:ext cx="6675120" cy="0"/>
           </a:xfrm>
           <a:prstGeom prst="line">
             <a:avLst/>
@@ -8039,8 +8890,8 @@
         </p:nvSpPr>
         <p:spPr>
           <a:xfrm>
-            <a:off x="731520" y="3813048"/>
-            <a:ext cx="4206240" cy="640080"/>
+            <a:off x="731520" y="3694176"/>
+            <a:ext cx="6675120" cy="320040"/>
           </a:xfrm>
           <a:prstGeom prst="rect">
             <a:avLst/>
@@ -8056,7 +8907,7 @@
               <a:buNone/>
             </a:pPr>
             <a:r>
-              <a:rPr lang="en-US" sz="1400" dirty="0">
+              <a:rPr lang="en-US" sz="1500" b="1" dirty="0">
                 <a:solidFill>
                   <a:srgbClr val="2A2A26"/>
                 </a:solidFill>
@@ -8064,16 +8915,38 @@
                 <a:ea typeface="Arial" pitchFamily="34" charset="-122"/>
                 <a:cs typeface="Arial" pitchFamily="34" charset="-120"/>
               </a:rPr>
-              <a:t>Подписка «Коробка сезона»</a:t>
-            </a:r>
-            <a:endParaRPr lang="en-US" sz="1400" dirty="0"/>
-          </a:p>
-          <a:p>
-            <a:pPr indent="0" marL="0">
-              <a:buNone/>
-            </a:pPr>
-            <a:r>
-              <a:rPr lang="en-US" sz="1400" dirty="0">
+              <a:t>Больше с каждой коробки</a:t>
+            </a:r>
+            <a:endParaRPr lang="en-US" sz="1500" dirty="0"/>
+          </a:p>
+        </p:txBody>
+      </p:sp>
+      <p:sp>
+        <p:nvSpPr>
+          <p:cNvPr id="12" name="Text 10"/>
+          <p:cNvSpPr txBox="1"/>
+          <p:nvPr/>
+        </p:nvSpPr>
+        <p:spPr>
+          <a:xfrm>
+            <a:off x="731520" y="3995928"/>
+            <a:ext cx="6675120" cy="320040"/>
+          </a:xfrm>
+          <a:prstGeom prst="rect">
+            <a:avLst/>
+          </a:prstGeom>
+          <a:noFill/>
+          <a:ln/>
+        </p:spPr>
+        <p:txBody>
+          <a:bodyPr wrap="square" lIns="0" tIns="0" rIns="0" bIns="0" rtlCol="0" anchor="t"/>
+          <a:lstStyle/>
+          <a:p>
+            <a:pPr indent="0" marL="0">
+              <a:buNone/>
+            </a:pPr>
+            <a:r>
+              <a:rPr lang="en-US" sz="1300" dirty="0">
                 <a:solidFill>
                   <a:srgbClr val="5E5D56"/>
                 </a:solidFill>
@@ -8081,48 +8954,9 @@
                 <a:ea typeface="Arial" pitchFamily="34" charset="-122"/>
                 <a:cs typeface="Arial" pitchFamily="34" charset="-120"/>
               </a:rPr>
-              <a:t>300 подписчиков × 2 000 ₽</a:t>
-            </a:r>
-            <a:endParaRPr lang="en-US" sz="1400" dirty="0"/>
-          </a:p>
-        </p:txBody>
-      </p:sp>
-      <p:sp>
-        <p:nvSpPr>
-          <p:cNvPr id="12" name="Text 10"/>
-          <p:cNvSpPr txBox="1"/>
-          <p:nvPr/>
-        </p:nvSpPr>
-        <p:spPr>
-          <a:xfrm>
-            <a:off x="4937760" y="3886200"/>
-            <a:ext cx="2560320" cy="411480"/>
-          </a:xfrm>
-          <a:prstGeom prst="rect">
-            <a:avLst/>
-          </a:prstGeom>
-          <a:noFill/>
-          <a:ln/>
-        </p:spPr>
-        <p:txBody>
-          <a:bodyPr wrap="square" lIns="0" tIns="0" rIns="0" bIns="0" rtlCol="0" anchor="t"/>
-          <a:lstStyle/>
-          <a:p>
-            <a:pPr algn="r" indent="0" marL="0">
-              <a:buNone/>
-            </a:pPr>
-            <a:r>
-              <a:rPr lang="en-US" sz="1700" b="1" dirty="0">
-                <a:solidFill>
-                  <a:srgbClr val="2A2A26"/>
-                </a:solidFill>
-                <a:latin typeface="Arial" pitchFamily="34" charset="0"/>
-                <a:ea typeface="Arial" pitchFamily="34" charset="-122"/>
-                <a:cs typeface="Arial" pitchFamily="34" charset="-120"/>
-              </a:rPr>
-              <a:t>600 000 ₽</a:t>
-            </a:r>
-            <a:endParaRPr lang="en-US" sz="1700" dirty="0"/>
+              <a:t>Наборы, подарочная упаковка, корпоративные заказы к Новому году</a:t>
+            </a:r>
+            <a:endParaRPr lang="en-US" sz="1300" dirty="0"/>
           </a:p>
         </p:txBody>
       </p:sp>
@@ -8134,8 +8968,8 @@
         </p:nvSpPr>
         <p:spPr>
           <a:xfrm>
-            <a:off x="731520" y="4480560"/>
-            <a:ext cx="6766560" cy="0"/>
+            <a:off x="731520" y="4352544"/>
+            <a:ext cx="6675120" cy="0"/>
           </a:xfrm>
           <a:prstGeom prst="line">
             <a:avLst/>
@@ -8157,8 +8991,8 @@
         </p:nvSpPr>
         <p:spPr>
           <a:xfrm>
-            <a:off x="731520" y="4590288"/>
-            <a:ext cx="4206240" cy="640080"/>
+            <a:off x="731520" y="4443984"/>
+            <a:ext cx="6675120" cy="320040"/>
           </a:xfrm>
           <a:prstGeom prst="rect">
             <a:avLst/>
@@ -8174,7 +9008,7 @@
               <a:buNone/>
             </a:pPr>
             <a:r>
-              <a:rPr lang="en-US" sz="1400" dirty="0">
+              <a:rPr lang="en-US" sz="1500" b="1" dirty="0">
                 <a:solidFill>
                   <a:srgbClr val="2A2A26"/>
                 </a:solidFill>
@@ -8182,16 +9016,38 @@
                 <a:ea typeface="Arial" pitchFamily="34" charset="-122"/>
                 <a:cs typeface="Arial" pitchFamily="34" charset="-120"/>
               </a:rPr>
-              <a:t>Опт и маркетплейсы</a:t>
-            </a:r>
-            <a:endParaRPr lang="en-US" sz="1400" dirty="0"/>
-          </a:p>
-          <a:p>
-            <a:pPr indent="0" marL="0">
-              <a:buNone/>
-            </a:pPr>
-            <a:r>
-              <a:rPr lang="en-US" sz="1400" dirty="0">
+              <a:t>Подписка «Коробка сезона»</a:t>
+            </a:r>
+            <a:endParaRPr lang="en-US" sz="1500" dirty="0"/>
+          </a:p>
+        </p:txBody>
+      </p:sp>
+      <p:sp>
+        <p:nvSpPr>
+          <p:cNvPr id="15" name="Text 13"/>
+          <p:cNvSpPr txBox="1"/>
+          <p:nvPr/>
+        </p:nvSpPr>
+        <p:spPr>
+          <a:xfrm>
+            <a:off x="731520" y="4745736"/>
+            <a:ext cx="6675120" cy="320040"/>
+          </a:xfrm>
+          <a:prstGeom prst="rect">
+            <a:avLst/>
+          </a:prstGeom>
+          <a:noFill/>
+          <a:ln/>
+        </p:spPr>
+        <p:txBody>
+          <a:bodyPr wrap="square" lIns="0" tIns="0" rIns="0" bIns="0" rtlCol="0" anchor="t"/>
+          <a:lstStyle/>
+          <a:p>
+            <a:pPr indent="0" marL="0">
+              <a:buNone/>
+            </a:pPr>
+            <a:r>
+              <a:rPr lang="en-US" sz="1300" dirty="0">
                 <a:solidFill>
                   <a:srgbClr val="5E5D56"/>
                 </a:solidFill>
@@ -8199,48 +9055,9 @@
                 <a:ea typeface="Arial" pitchFamily="34" charset="-122"/>
                 <a:cs typeface="Arial" pitchFamily="34" charset="-120"/>
               </a:rPr>
-              <a:t>кофейни, Wildberries</a:t>
-            </a:r>
-            <a:endParaRPr lang="en-US" sz="1400" dirty="0"/>
-          </a:p>
-        </p:txBody>
-      </p:sp>
-      <p:sp>
-        <p:nvSpPr>
-          <p:cNvPr id="15" name="Text 13"/>
-          <p:cNvSpPr txBox="1"/>
-          <p:nvPr/>
-        </p:nvSpPr>
-        <p:spPr>
-          <a:xfrm>
-            <a:off x="4937760" y="4663440"/>
-            <a:ext cx="2560320" cy="411480"/>
-          </a:xfrm>
-          <a:prstGeom prst="rect">
-            <a:avLst/>
-          </a:prstGeom>
-          <a:noFill/>
-          <a:ln/>
-        </p:spPr>
-        <p:txBody>
-          <a:bodyPr wrap="square" lIns="0" tIns="0" rIns="0" bIns="0" rtlCol="0" anchor="t"/>
-          <a:lstStyle/>
-          <a:p>
-            <a:pPr algn="r" indent="0" marL="0">
-              <a:buNone/>
-            </a:pPr>
-            <a:r>
-              <a:rPr lang="en-US" sz="1700" b="1" dirty="0">
-                <a:solidFill>
-                  <a:srgbClr val="2A2A26"/>
-                </a:solidFill>
-                <a:latin typeface="Arial" pitchFamily="34" charset="0"/>
-                <a:ea typeface="Arial" pitchFamily="34" charset="-122"/>
-                <a:cs typeface="Arial" pitchFamily="34" charset="-120"/>
-              </a:rPr>
-              <a:t>300 000 ₽</a:t>
-            </a:r>
-            <a:endParaRPr lang="en-US" sz="1700" dirty="0"/>
+              <a:t>Будущие партии проданы заранее, деньги приходят до варки</a:t>
+            </a:r>
+            <a:endParaRPr lang="en-US" sz="1300" dirty="0"/>
           </a:p>
         </p:txBody>
       </p:sp>
@@ -8252,8 +9069,8 @@
         </p:nvSpPr>
         <p:spPr>
           <a:xfrm>
-            <a:off x="731520" y="5257800"/>
-            <a:ext cx="6766560" cy="0"/>
+            <a:off x="731520" y="5102352"/>
+            <a:ext cx="6675120" cy="0"/>
           </a:xfrm>
           <a:prstGeom prst="line">
             <a:avLst/>
@@ -8275,8 +9092,8 @@
         </p:nvSpPr>
         <p:spPr>
           <a:xfrm>
-            <a:off x="731520" y="5440680"/>
-            <a:ext cx="3657600" cy="457200"/>
+            <a:off x="731520" y="5193792"/>
+            <a:ext cx="6675120" cy="320040"/>
           </a:xfrm>
           <a:prstGeom prst="rect">
             <a:avLst/>
@@ -8292,7 +9109,7 @@
               <a:buNone/>
             </a:pPr>
             <a:r>
-              <a:rPr lang="en-US" sz="1700" b="1" dirty="0">
+              <a:rPr lang="en-US" sz="1500" b="1" dirty="0">
                 <a:solidFill>
                   <a:srgbClr val="2A2A26"/>
                 </a:solidFill>
@@ -8300,9 +9117,9 @@
                 <a:ea typeface="Arial" pitchFamily="34" charset="-122"/>
                 <a:cs typeface="Arial" pitchFamily="34" charset="-120"/>
               </a:rPr>
-              <a:t>Итого в месяц</a:t>
-            </a:r>
-            <a:endParaRPr lang="en-US" sz="1700" dirty="0"/>
+              <a:t>Часы возвращаются в цех</a:t>
+            </a:r>
+            <a:endParaRPr lang="en-US" sz="1500" dirty="0"/>
           </a:p>
         </p:txBody>
       </p:sp>
@@ -8314,8 +9131,8 @@
         </p:nvSpPr>
         <p:spPr>
           <a:xfrm>
-            <a:off x="3840480" y="5349240"/>
-            <a:ext cx="3657600" cy="640080"/>
+            <a:off x="731520" y="5495544"/>
+            <a:ext cx="6675120" cy="320040"/>
           </a:xfrm>
           <a:prstGeom prst="rect">
             <a:avLst/>
@@ -8327,21 +9144,21 @@
           <a:bodyPr wrap="square" lIns="0" tIns="0" rIns="0" bIns="0" rtlCol="0" anchor="t"/>
           <a:lstStyle/>
           <a:p>
-            <a:pPr algn="r" indent="0" marL="0">
-              <a:buNone/>
-            </a:pPr>
-            <a:r>
-              <a:rPr lang="en-US" sz="3000" dirty="0">
-                <a:solidFill>
-                  <a:srgbClr val="4A6B3A"/>
-                </a:solidFill>
-                <a:latin typeface="Georgia" pitchFamily="34" charset="0"/>
-                <a:ea typeface="Georgia" pitchFamily="34" charset="-122"/>
-                <a:cs typeface="Georgia" pitchFamily="34" charset="-120"/>
-              </a:rPr>
-              <a:t>7 000 000 ₽</a:t>
-            </a:r>
-            <a:endParaRPr lang="en-US" sz="3000" dirty="0"/>
+            <a:pPr indent="0" marL="0">
+              <a:buNone/>
+            </a:pPr>
+            <a:r>
+              <a:rPr lang="en-US" sz="1300" dirty="0">
+                <a:solidFill>
+                  <a:srgbClr val="5E5D56"/>
+                </a:solidFill>
+                <a:latin typeface="Arial" pitchFamily="34" charset="0"/>
+                <a:ea typeface="Arial" pitchFamily="34" charset="-122"/>
+                <a:cs typeface="Arial" pitchFamily="34" charset="-120"/>
+              </a:rPr>
+              <a:t>Те же люди варят больше, потому что не сидят в директе и СДЭК</a:t>
+            </a:r>
+            <a:endParaRPr lang="en-US" sz="1300" dirty="0"/>
           </a:p>
         </p:txBody>
       </p:sp>
@@ -8353,8 +9170,8 @@
         </p:nvSpPr>
         <p:spPr>
           <a:xfrm>
-            <a:off x="8138160" y="2148840"/>
-            <a:ext cx="3319272" cy="3566160"/>
+            <a:off x="7955280" y="2103120"/>
+            <a:ext cx="3502152" cy="3749040"/>
           </a:xfrm>
           <a:prstGeom prst="rect">
             <a:avLst/>
@@ -8378,8 +9195,8 @@
         </p:nvSpPr>
         <p:spPr>
           <a:xfrm>
-            <a:off x="8412480" y="2377440"/>
-            <a:ext cx="2770632" cy="365760"/>
+            <a:off x="8229600" y="2331720"/>
+            <a:ext cx="2953512" cy="365760"/>
           </a:xfrm>
           <a:prstGeom prst="rect">
             <a:avLst/>
@@ -8395,17 +9212,17 @@
               <a:buNone/>
             </a:pPr>
             <a:r>
-              <a:rPr lang="en-US" sz="1600" b="1" dirty="0">
-                <a:solidFill>
-                  <a:srgbClr val="2A2A26"/>
+              <a:rPr lang="en-US" sz="1200" spc="200" kern="0" dirty="0">
+                <a:solidFill>
+                  <a:srgbClr val="4A6B3A"/>
                 </a:solidFill>
                 <a:latin typeface="Arial" pitchFamily="34" charset="0"/>
                 <a:ea typeface="Arial" pitchFamily="34" charset="-122"/>
                 <a:cs typeface="Arial" pitchFamily="34" charset="-120"/>
               </a:rPr>
-              <a:t>Честно о главном</a:t>
-            </a:r>
-            <a:endParaRPr lang="en-US" sz="1600" dirty="0"/>
+              <a:t>Формула</a:t>
+            </a:r>
+            <a:endParaRPr lang="en-US" sz="1200" dirty="0"/>
           </a:p>
         </p:txBody>
       </p:sp>
@@ -8417,8 +9234,47 @@
         </p:nvSpPr>
         <p:spPr>
           <a:xfrm>
-            <a:off x="8412480" y="2834640"/>
-            <a:ext cx="2770632" cy="2743200"/>
+            <a:off x="8229600" y="2697480"/>
+            <a:ext cx="2953512" cy="822960"/>
+          </a:xfrm>
+          <a:prstGeom prst="rect">
+            <a:avLst/>
+          </a:prstGeom>
+          <a:noFill/>
+          <a:ln/>
+        </p:spPr>
+        <p:txBody>
+          <a:bodyPr wrap="square" lIns="0" tIns="0" rIns="0" bIns="0" rtlCol="0" anchor="t"/>
+          <a:lstStyle/>
+          <a:p>
+            <a:pPr indent="0" marL="0">
+              <a:buNone/>
+            </a:pPr>
+            <a:r>
+              <a:rPr lang="en-US" sz="2000" dirty="0">
+                <a:solidFill>
+                  <a:srgbClr val="2A2A26"/>
+                </a:solidFill>
+                <a:latin typeface="Georgia" pitchFamily="34" charset="0"/>
+                <a:ea typeface="Georgia" pitchFamily="34" charset="-122"/>
+                <a:cs typeface="Georgia" pitchFamily="34" charset="-120"/>
+              </a:rPr>
+              <a:t>Выручка = коробки × выручка с коробки</a:t>
+            </a:r>
+            <a:endParaRPr lang="en-US" sz="2000" dirty="0"/>
+          </a:p>
+        </p:txBody>
+      </p:sp>
+      <p:sp>
+        <p:nvSpPr>
+          <p:cNvPr id="22" name="Text 20"/>
+          <p:cNvSpPr txBox="1"/>
+          <p:nvPr/>
+        </p:nvSpPr>
+        <p:spPr>
+          <a:xfrm>
+            <a:off x="8229600" y="3611880"/>
+            <a:ext cx="2953512" cy="2103120"/>
           </a:xfrm>
           <a:prstGeom prst="rect">
             <a:avLst/>
@@ -8437,7 +9293,7 @@
               <a:buNone/>
             </a:pPr>
             <a:r>
-              <a:rPr lang="en-US" sz="1400" dirty="0">
+              <a:rPr lang="en-US" sz="1300" dirty="0">
                 <a:solidFill>
                   <a:srgbClr val="5E5D56"/>
                 </a:solidFill>
@@ -8445,15 +9301,15 @@
                 <a:ea typeface="Arial" pitchFamily="34" charset="-122"/>
                 <a:cs typeface="Arial" pitchFamily="34" charset="-120"/>
               </a:rPr>
-              <a:t>Для этого нужно около 3 600 коробок в месяц. Цех должен вырасти, и сайт даёт для этого три вещи: очередь (видно спрос), предоплату (деньги вперёд) и учёт прибыли (видно, какие вкусы расширять).</a:t>
-            </a:r>
-            <a:endParaRPr lang="en-US" sz="1400" dirty="0"/>
-          </a:p>
-        </p:txBody>
-      </p:sp>
-      <p:sp>
-        <p:nvSpPr>
-          <p:cNvPr id="22" name="Text 20"/>
+              <a:t>Коробки ограничены цехом. Поэтому к 7 млн ₽ ведёт выручка с коробки и часы, возвращённые в производство. Например, при [__] коробках в месяц нужно [__] ₽ с коробки — посчитаем вместе на ваших цифрах.</a:t>
+            </a:r>
+            <a:endParaRPr lang="en-US" sz="1300" dirty="0"/>
+          </a:p>
+        </p:txBody>
+      </p:sp>
+      <p:sp>
+        <p:nvSpPr>
+          <p:cNvPr id="23" name="Text 21"/>
           <p:cNvSpPr txBox="1"/>
           <p:nvPr/>
         </p:nvSpPr>

--- a/docs/preview/lesnaya-yagodka-predlozhenie.pptx
+++ b/docs/preview/lesnaya-yagodka-predlozhenie.pptx
@@ -1869,6 +1869,2780 @@
 
 <file path=ppt/slides/slide10.xml><?xml version="1.0" encoding="utf-8"?>
 <p:sld xmlns:a="http://schemas.openxmlformats.org/drawingml/2006/main" xmlns:r="http://schemas.openxmlformats.org/officeDocument/2006/relationships" xmlns:p="http://schemas.openxmlformats.org/presentationml/2006/main">
+  <p:cSld name="Slide 6">
+    <p:bg>
+      <p:bgPr>
+        <a:solidFill>
+          <a:srgbClr val="ECE7DF"/>
+        </a:solidFill>
+        <a:effectLst/>
+      </p:bgPr>
+    </p:bg>
+    <p:spTree>
+      <p:nvGrpSpPr>
+        <p:cNvPr id="1" name=""/>
+        <p:cNvGrpSpPr/>
+        <p:nvPr/>
+      </p:nvGrpSpPr>
+      <p:grpSpPr>
+        <a:xfrm>
+          <a:off x="0" y="0"/>
+          <a:ext cx="0" cy="0"/>
+          <a:chOff x="0" y="0"/>
+          <a:chExt cx="0" cy="0"/>
+        </a:xfrm>
+      </p:grpSpPr>
+      <p:sp>
+        <p:nvSpPr>
+          <p:cNvPr id="2" name="Text 0"/>
+          <p:cNvSpPr txBox="1"/>
+          <p:nvPr/>
+        </p:nvSpPr>
+        <p:spPr>
+          <a:xfrm>
+            <a:off x="731520" y="640080"/>
+            <a:ext cx="10725912" cy="320040"/>
+          </a:xfrm>
+          <a:prstGeom prst="rect">
+            <a:avLst/>
+          </a:prstGeom>
+          <a:noFill/>
+          <a:ln/>
+        </p:spPr>
+        <p:txBody>
+          <a:bodyPr wrap="square" lIns="0" tIns="0" rIns="0" bIns="0" rtlCol="0" anchor="t"/>
+          <a:lstStyle/>
+          <a:p>
+            <a:pPr marL="0" indent="0">
+              <a:buNone/>
+            </a:pPr>
+            <a:r>
+              <a:rPr lang="en-US" sz="1200" kern="0" spc="300" dirty="0">
+                <a:solidFill>
+                  <a:srgbClr val="4A6B3A"/>
+                </a:solidFill>
+                <a:latin typeface="Arial" pitchFamily="34" charset="0"/>
+                <a:ea typeface="Arial" pitchFamily="34" charset="-122"/>
+                <a:cs typeface="Arial" pitchFamily="34" charset="-120"/>
+              </a:rPr>
+              <a:t>РАЗДЕЛ «ДЕНЬГИ»</a:t>
+            </a:r>
+            <a:endParaRPr lang="en-US" sz="1200" dirty="0"/>
+          </a:p>
+        </p:txBody>
+      </p:sp>
+      <p:sp>
+        <p:nvSpPr>
+          <p:cNvPr id="3" name="Text 1"/>
+          <p:cNvSpPr txBox="1"/>
+          <p:nvPr/>
+        </p:nvSpPr>
+        <p:spPr>
+          <a:xfrm>
+            <a:off x="731520" y="1005840"/>
+            <a:ext cx="10058400" cy="1280160"/>
+          </a:xfrm>
+          <a:prstGeom prst="rect">
+            <a:avLst/>
+          </a:prstGeom>
+          <a:noFill/>
+          <a:ln/>
+        </p:spPr>
+        <p:txBody>
+          <a:bodyPr wrap="square" lIns="0" tIns="0" rIns="0" bIns="0" rtlCol="0" anchor="t"/>
+          <a:lstStyle/>
+          <a:p>
+            <a:pPr marL="0" indent="0">
+              <a:buNone/>
+            </a:pPr>
+            <a:r>
+              <a:rPr lang="en-US" sz="4000" dirty="0">
+                <a:solidFill>
+                  <a:srgbClr val="2A2A26"/>
+                </a:solidFill>
+                <a:latin typeface="Georgia" pitchFamily="34" charset="0"/>
+                <a:ea typeface="Georgia" pitchFamily="34" charset="-122"/>
+                <a:cs typeface="Georgia" pitchFamily="34" charset="-120"/>
+              </a:rPr>
+              <a:t>Впервые видно, сколько зарабатывает </a:t>
+            </a:r>
+            <a:r>
+              <a:rPr lang="en-US" sz="4000" i="1" dirty="0">
+                <a:solidFill>
+                  <a:srgbClr val="4A6B3A"/>
+                </a:solidFill>
+                <a:latin typeface="Georgia" pitchFamily="34" charset="0"/>
+                <a:ea typeface="Georgia" pitchFamily="34" charset="-122"/>
+                <a:cs typeface="Georgia" pitchFamily="34" charset="-120"/>
+              </a:rPr>
+              <a:t>каждый вкус</a:t>
+            </a:r>
+            <a:endParaRPr lang="en-US" sz="4000" dirty="0"/>
+          </a:p>
+        </p:txBody>
+      </p:sp>
+      <p:sp>
+        <p:nvSpPr>
+          <p:cNvPr id="4" name="Shape 2"/>
+          <p:cNvSpPr/>
+          <p:nvPr/>
+        </p:nvSpPr>
+        <p:spPr>
+          <a:xfrm>
+            <a:off x="731520" y="2651760"/>
+            <a:ext cx="3331464" cy="2194560"/>
+          </a:xfrm>
+          <a:prstGeom prst="rect">
+            <a:avLst/>
+          </a:prstGeom>
+          <a:solidFill>
+            <a:srgbClr val="F6F3EE"/>
+          </a:solidFill>
+          <a:ln w="12700">
+            <a:solidFill>
+              <a:srgbClr val="F6F3EE"/>
+            </a:solidFill>
+            <a:prstDash val="solid"/>
+          </a:ln>
+        </p:spPr>
+        <p:txBody>
+          <a:bodyPr/>
+          <a:p/>
+        </p:txBody>
+      </p:sp>
+      <p:sp>
+        <p:nvSpPr>
+          <p:cNvPr id="5" name="Text 3"/>
+          <p:cNvSpPr txBox="1"/>
+          <p:nvPr/>
+        </p:nvSpPr>
+        <p:spPr>
+          <a:xfrm>
+            <a:off x="1051560" y="2926080"/>
+            <a:ext cx="2691384" cy="411480"/>
+          </a:xfrm>
+          <a:prstGeom prst="rect">
+            <a:avLst/>
+          </a:prstGeom>
+          <a:noFill/>
+          <a:ln/>
+        </p:spPr>
+        <p:txBody>
+          <a:bodyPr wrap="square" lIns="0" tIns="0" rIns="0" bIns="0" rtlCol="0" anchor="t"/>
+          <a:lstStyle/>
+          <a:p>
+            <a:pPr marL="0" indent="0">
+              <a:buNone/>
+            </a:pPr>
+            <a:r>
+              <a:rPr lang="en-US" sz="1800" b="1" dirty="0">
+                <a:solidFill>
+                  <a:srgbClr val="2A2A26"/>
+                </a:solidFill>
+                <a:latin typeface="Arial" pitchFamily="34" charset="0"/>
+                <a:ea typeface="Arial" pitchFamily="34" charset="-122"/>
+                <a:cs typeface="Arial" pitchFamily="34" charset="-120"/>
+              </a:rPr>
+              <a:t>Себестоимость</a:t>
+            </a:r>
+            <a:endParaRPr lang="en-US" sz="1800" dirty="0"/>
+          </a:p>
+        </p:txBody>
+      </p:sp>
+      <p:sp>
+        <p:nvSpPr>
+          <p:cNvPr id="6" name="Text 4"/>
+          <p:cNvSpPr txBox="1"/>
+          <p:nvPr/>
+        </p:nvSpPr>
+        <p:spPr>
+          <a:xfrm>
+            <a:off x="1051560" y="3474720"/>
+            <a:ext cx="2691384" cy="1280160"/>
+          </a:xfrm>
+          <a:prstGeom prst="rect">
+            <a:avLst/>
+          </a:prstGeom>
+          <a:noFill/>
+          <a:ln/>
+        </p:spPr>
+        <p:txBody>
+          <a:bodyPr wrap="square" lIns="0" tIns="0" rIns="0" bIns="0" rtlCol="0" anchor="t"/>
+          <a:lstStyle/>
+          <a:p>
+            <a:pPr marL="0" indent="0">
+              <a:lnSpc>
+                <a:spcPct val="120000"/>
+              </a:lnSpc>
+              <a:buNone/>
+            </a:pPr>
+            <a:r>
+              <a:rPr lang="en-US" sz="1500" dirty="0">
+                <a:solidFill>
+                  <a:srgbClr val="5E5D56"/>
+                </a:solidFill>
+                <a:latin typeface="Arial" pitchFamily="34" charset="0"/>
+                <a:ea typeface="Arial" pitchFamily="34" charset="-122"/>
+                <a:cs typeface="Arial" pitchFamily="34" charset="-120"/>
+              </a:rPr>
+              <a:t>По техкарте: ягода, пюре, агар, упаковка, работа. Считается сама на каждую коробку.</a:t>
+            </a:r>
+            <a:endParaRPr lang="en-US" sz="1500" dirty="0"/>
+          </a:p>
+        </p:txBody>
+      </p:sp>
+      <p:sp>
+        <p:nvSpPr>
+          <p:cNvPr id="7" name="Shape 5"/>
+          <p:cNvSpPr/>
+          <p:nvPr/>
+        </p:nvSpPr>
+        <p:spPr>
+          <a:xfrm>
+            <a:off x="4428744" y="2651760"/>
+            <a:ext cx="3331464" cy="2194560"/>
+          </a:xfrm>
+          <a:prstGeom prst="rect">
+            <a:avLst/>
+          </a:prstGeom>
+          <a:solidFill>
+            <a:srgbClr val="F6F3EE"/>
+          </a:solidFill>
+          <a:ln w="12700">
+            <a:solidFill>
+              <a:srgbClr val="F6F3EE"/>
+            </a:solidFill>
+            <a:prstDash val="solid"/>
+          </a:ln>
+        </p:spPr>
+        <p:txBody>
+          <a:bodyPr/>
+          <a:p/>
+        </p:txBody>
+      </p:sp>
+      <p:sp>
+        <p:nvSpPr>
+          <p:cNvPr id="8" name="Text 6"/>
+          <p:cNvSpPr txBox="1"/>
+          <p:nvPr/>
+        </p:nvSpPr>
+        <p:spPr>
+          <a:xfrm>
+            <a:off x="4748784" y="2926080"/>
+            <a:ext cx="2691384" cy="411480"/>
+          </a:xfrm>
+          <a:prstGeom prst="rect">
+            <a:avLst/>
+          </a:prstGeom>
+          <a:noFill/>
+          <a:ln/>
+        </p:spPr>
+        <p:txBody>
+          <a:bodyPr wrap="square" lIns="0" tIns="0" rIns="0" bIns="0" rtlCol="0" anchor="t"/>
+          <a:lstStyle/>
+          <a:p>
+            <a:pPr marL="0" indent="0">
+              <a:buNone/>
+            </a:pPr>
+            <a:r>
+              <a:rPr lang="en-US" sz="1800" b="1" dirty="0">
+                <a:solidFill>
+                  <a:srgbClr val="2A2A26"/>
+                </a:solidFill>
+                <a:latin typeface="Arial" pitchFamily="34" charset="0"/>
+                <a:ea typeface="Arial" pitchFamily="34" charset="-122"/>
+                <a:cs typeface="Arial" pitchFamily="34" charset="-120"/>
+              </a:rPr>
+              <a:t>Прибыль</a:t>
+            </a:r>
+            <a:endParaRPr lang="en-US" sz="1800" dirty="0"/>
+          </a:p>
+        </p:txBody>
+      </p:sp>
+      <p:sp>
+        <p:nvSpPr>
+          <p:cNvPr id="9" name="Text 7"/>
+          <p:cNvSpPr txBox="1"/>
+          <p:nvPr/>
+        </p:nvSpPr>
+        <p:spPr>
+          <a:xfrm>
+            <a:off x="4748784" y="3474720"/>
+            <a:ext cx="2691384" cy="1280160"/>
+          </a:xfrm>
+          <a:prstGeom prst="rect">
+            <a:avLst/>
+          </a:prstGeom>
+          <a:noFill/>
+          <a:ln/>
+        </p:spPr>
+        <p:txBody>
+          <a:bodyPr wrap="square" lIns="0" tIns="0" rIns="0" bIns="0" rtlCol="0" anchor="t"/>
+          <a:lstStyle/>
+          <a:p>
+            <a:pPr marL="0" indent="0">
+              <a:lnSpc>
+                <a:spcPct val="120000"/>
+              </a:lnSpc>
+              <a:buNone/>
+            </a:pPr>
+            <a:r>
+              <a:rPr lang="en-US" sz="1500" dirty="0">
+                <a:solidFill>
+                  <a:srgbClr val="5E5D56"/>
+                </a:solidFill>
+                <a:latin typeface="Arial" pitchFamily="34" charset="0"/>
+                <a:ea typeface="Arial" pitchFamily="34" charset="-122"/>
+                <a:cs typeface="Arial" pitchFamily="34" charset="-120"/>
+              </a:rPr>
+              <a:t>По вкусу, партии и месяцу. Минус доставка и эквайринг.</a:t>
+            </a:r>
+            <a:endParaRPr lang="en-US" sz="1500" dirty="0"/>
+          </a:p>
+        </p:txBody>
+      </p:sp>
+      <p:sp>
+        <p:nvSpPr>
+          <p:cNvPr id="10" name="Shape 8"/>
+          <p:cNvSpPr/>
+          <p:nvPr/>
+        </p:nvSpPr>
+        <p:spPr>
+          <a:xfrm>
+            <a:off x="8125968" y="2651760"/>
+            <a:ext cx="3331464" cy="2194560"/>
+          </a:xfrm>
+          <a:prstGeom prst="rect">
+            <a:avLst/>
+          </a:prstGeom>
+          <a:solidFill>
+            <a:srgbClr val="F6F3EE"/>
+          </a:solidFill>
+          <a:ln w="12700">
+            <a:solidFill>
+              <a:srgbClr val="F6F3EE"/>
+            </a:solidFill>
+            <a:prstDash val="solid"/>
+          </a:ln>
+        </p:spPr>
+        <p:txBody>
+          <a:bodyPr/>
+          <a:p/>
+        </p:txBody>
+      </p:sp>
+      <p:sp>
+        <p:nvSpPr>
+          <p:cNvPr id="11" name="Text 9"/>
+          <p:cNvSpPr txBox="1"/>
+          <p:nvPr/>
+        </p:nvSpPr>
+        <p:spPr>
+          <a:xfrm>
+            <a:off x="8446008" y="2926080"/>
+            <a:ext cx="2691384" cy="411480"/>
+          </a:xfrm>
+          <a:prstGeom prst="rect">
+            <a:avLst/>
+          </a:prstGeom>
+          <a:noFill/>
+          <a:ln/>
+        </p:spPr>
+        <p:txBody>
+          <a:bodyPr wrap="square" lIns="0" tIns="0" rIns="0" bIns="0" rtlCol="0" anchor="t"/>
+          <a:lstStyle/>
+          <a:p>
+            <a:pPr marL="0" indent="0">
+              <a:buNone/>
+            </a:pPr>
+            <a:r>
+              <a:rPr lang="en-US" sz="1800" b="1" dirty="0">
+                <a:solidFill>
+                  <a:srgbClr val="2A2A26"/>
+                </a:solidFill>
+                <a:latin typeface="Arial" pitchFamily="34" charset="0"/>
+                <a:ea typeface="Arial" pitchFamily="34" charset="-122"/>
+                <a:cs typeface="Arial" pitchFamily="34" charset="-120"/>
+              </a:rPr>
+              <a:t>Для бухгалтера</a:t>
+            </a:r>
+            <a:endParaRPr lang="en-US" sz="1800" dirty="0"/>
+          </a:p>
+        </p:txBody>
+      </p:sp>
+      <p:sp>
+        <p:nvSpPr>
+          <p:cNvPr id="12" name="Text 10"/>
+          <p:cNvSpPr txBox="1"/>
+          <p:nvPr/>
+        </p:nvSpPr>
+        <p:spPr>
+          <a:xfrm>
+            <a:off x="8446008" y="3474720"/>
+            <a:ext cx="2691384" cy="1280160"/>
+          </a:xfrm>
+          <a:prstGeom prst="rect">
+            <a:avLst/>
+          </a:prstGeom>
+          <a:noFill/>
+          <a:ln/>
+        </p:spPr>
+        <p:txBody>
+          <a:bodyPr wrap="square" lIns="0" tIns="0" rIns="0" bIns="0" rtlCol="0" anchor="t"/>
+          <a:lstStyle/>
+          <a:p>
+            <a:pPr marL="0" indent="0">
+              <a:lnSpc>
+                <a:spcPct val="120000"/>
+              </a:lnSpc>
+              <a:buNone/>
+            </a:pPr>
+            <a:r>
+              <a:rPr lang="en-US" sz="1500" dirty="0">
+                <a:solidFill>
+                  <a:srgbClr val="5E5D56"/>
+                </a:solidFill>
+                <a:latin typeface="Arial" pitchFamily="34" charset="0"/>
+                <a:ea typeface="Arial" pitchFamily="34" charset="-122"/>
+                <a:cs typeface="Arial" pitchFamily="34" charset="-120"/>
+              </a:rPr>
+              <a:t>Расходы, оценка налога, сверка оплат и выгрузка одним файлом.</a:t>
+            </a:r>
+            <a:endParaRPr lang="en-US" sz="1500" dirty="0"/>
+          </a:p>
+        </p:txBody>
+      </p:sp>
+      <p:sp>
+        <p:nvSpPr>
+          <p:cNvPr id="13" name="Text 11"/>
+          <p:cNvSpPr txBox="1"/>
+          <p:nvPr/>
+        </p:nvSpPr>
+        <p:spPr>
+          <a:xfrm>
+            <a:off x="731520" y="5212080"/>
+            <a:ext cx="10725912" cy="457200"/>
+          </a:xfrm>
+          <a:prstGeom prst="rect">
+            <a:avLst/>
+          </a:prstGeom>
+          <a:noFill/>
+          <a:ln/>
+        </p:spPr>
+        <p:txBody>
+          <a:bodyPr wrap="square" lIns="0" tIns="0" rIns="0" bIns="0" rtlCol="0" anchor="t"/>
+          <a:lstStyle/>
+          <a:p>
+            <a:pPr marL="0" indent="0">
+              <a:buNone/>
+            </a:pPr>
+            <a:r>
+              <a:rPr lang="en-US" sz="1500" dirty="0">
+                <a:solidFill>
+                  <a:srgbClr val="5E5D56"/>
+                </a:solidFill>
+                <a:latin typeface="Arial" pitchFamily="34" charset="0"/>
+                <a:ea typeface="Arial" pitchFamily="34" charset="-122"/>
+                <a:cs typeface="Arial" pitchFamily="34" charset="-120"/>
+              </a:rPr>
+              <a:t>Это управленческий учёт: бухгалтер остаётся, но получает готовые данные.</a:t>
+            </a:r>
+            <a:endParaRPr lang="en-US" sz="1500" dirty="0"/>
+          </a:p>
+        </p:txBody>
+      </p:sp>
+      <p:sp>
+        <p:nvSpPr>
+          <p:cNvPr id="14" name="Text 12"/>
+          <p:cNvSpPr txBox="1"/>
+          <p:nvPr/>
+        </p:nvSpPr>
+        <p:spPr>
+          <a:xfrm>
+            <a:off x="731520" y="6263640"/>
+            <a:ext cx="3657600" cy="274320"/>
+          </a:xfrm>
+          <a:prstGeom prst="rect">
+            <a:avLst/>
+          </a:prstGeom>
+          <a:noFill/>
+          <a:ln/>
+        </p:spPr>
+        <p:txBody>
+          <a:bodyPr wrap="square" lIns="0" tIns="0" rIns="0" bIns="0" rtlCol="0" anchor="t"/>
+          <a:lstStyle/>
+          <a:p>
+            <a:pPr marL="0" indent="0">
+              <a:buNone/>
+            </a:pPr>
+            <a:r>
+              <a:rPr lang="en-US" sz="1100" dirty="0">
+                <a:solidFill>
+                  <a:srgbClr val="5E5D56"/>
+                </a:solidFill>
+                <a:latin typeface="Arial" pitchFamily="34" charset="0"/>
+                <a:ea typeface="Arial" pitchFamily="34" charset="-122"/>
+                <a:cs typeface="Arial" pitchFamily="34" charset="-120"/>
+              </a:rPr>
+              <a:t>Лесная ягодка · 10</a:t>
+            </a:r>
+            <a:endParaRPr lang="en-US" sz="1100" dirty="0"/>
+          </a:p>
+        </p:txBody>
+      </p:sp>
+    </p:spTree>
+  </p:cSld>
+  <p:clrMapOvr>
+    <a:masterClrMapping/>
+  </p:clrMapOvr>
+</p:sld>
+</file>
+
+<file path=ppt/slides/slide11.xml><?xml version="1.0" encoding="utf-8"?>
+<p:sld xmlns:a="http://schemas.openxmlformats.org/drawingml/2006/main" xmlns:p="http://schemas.openxmlformats.org/presentationml/2006/main" xmlns:r="http://schemas.openxmlformats.org/officeDocument/2006/relationships">
+  <p:cSld>
+    <p:bg>
+      <p:bgPr>
+        <a:solidFill>
+          <a:srgbClr val="ECE7DF"/>
+        </a:solidFill>
+        <a:effectLst/>
+      </p:bgPr>
+    </p:bg>
+    <p:spTree>
+      <p:nvGrpSpPr>
+        <p:cNvPr id="1" name=""/>
+        <p:cNvGrpSpPr/>
+        <p:nvPr/>
+      </p:nvGrpSpPr>
+      <p:grpSpPr/>
+      <p:pic>
+        <p:nvPicPr>
+          <p:cNvPr id="2" name="Picture 1" descr="image.png"/>
+          <p:cNvPicPr>
+            <a:picLocks noChangeAspect="1"/>
+          </p:cNvPicPr>
+          <p:nvPr/>
+        </p:nvPicPr>
+        <p:blipFill>
+          <a:blip r:embed="rId2"/>
+          <a:stretch>
+            <a:fillRect/>
+          </a:stretch>
+        </p:blipFill>
+        <p:spPr>
+          <a:xfrm>
+            <a:off x="812800" y="1739900"/>
+            <a:ext cx="1485900" cy="3117850"/>
+          </a:xfrm>
+          <a:prstGeom prst="rect">
+            <a:avLst/>
+          </a:prstGeom>
+        </p:spPr>
+      </p:pic>
+      <p:pic>
+        <p:nvPicPr>
+          <p:cNvPr id="3" name="Picture 2" descr="image.png"/>
+          <p:cNvPicPr>
+            <a:picLocks noChangeAspect="1"/>
+          </p:cNvPicPr>
+          <p:nvPr/>
+        </p:nvPicPr>
+        <p:blipFill>
+          <a:blip r:embed="rId3"/>
+          <a:stretch>
+            <a:fillRect/>
+          </a:stretch>
+        </p:blipFill>
+        <p:spPr>
+          <a:xfrm>
+            <a:off x="3530600" y="2400300"/>
+            <a:ext cx="1416050" cy="2457450"/>
+          </a:xfrm>
+          <a:prstGeom prst="rect">
+            <a:avLst/>
+          </a:prstGeom>
+        </p:spPr>
+      </p:pic>
+      <p:pic>
+        <p:nvPicPr>
+          <p:cNvPr id="4" name="Picture 3" descr="image.png"/>
+          <p:cNvPicPr>
+            <a:picLocks noChangeAspect="1"/>
+          </p:cNvPicPr>
+          <p:nvPr/>
+        </p:nvPicPr>
+        <p:blipFill>
+          <a:blip r:embed="rId4"/>
+          <a:stretch>
+            <a:fillRect/>
+          </a:stretch>
+        </p:blipFill>
+        <p:spPr>
+          <a:xfrm>
+            <a:off x="6248400" y="2000250"/>
+            <a:ext cx="1365250" cy="2857500"/>
+          </a:xfrm>
+          <a:prstGeom prst="rect">
+            <a:avLst/>
+          </a:prstGeom>
+        </p:spPr>
+      </p:pic>
+      <p:pic>
+        <p:nvPicPr>
+          <p:cNvPr id="5" name="Picture 4" descr="image.png"/>
+          <p:cNvPicPr>
+            <a:picLocks noChangeAspect="1"/>
+          </p:cNvPicPr>
+          <p:nvPr/>
+        </p:nvPicPr>
+        <p:blipFill>
+          <a:blip r:embed="rId5"/>
+          <a:stretch>
+            <a:fillRect/>
+          </a:stretch>
+        </p:blipFill>
+        <p:spPr>
+          <a:xfrm>
+            <a:off x="8966200" y="1460500"/>
+            <a:ext cx="1612900" cy="3397250"/>
+          </a:xfrm>
+          <a:prstGeom prst="rect">
+            <a:avLst/>
+          </a:prstGeom>
+        </p:spPr>
+      </p:pic>
+      <p:sp>
+        <p:nvSpPr>
+          <p:cNvPr id="6" name="TextBox 5"/>
+          <p:cNvSpPr txBox="1"/>
+          <p:nvPr/>
+        </p:nvSpPr>
+        <p:spPr>
+          <a:xfrm>
+            <a:off x="812800" y="457200"/>
+            <a:ext cx="5715000" cy="254000"/>
+          </a:xfrm>
+          <a:prstGeom prst="rect">
+            <a:avLst/>
+          </a:prstGeom>
+          <a:noFill/>
+        </p:spPr>
+        <p:txBody>
+          <a:bodyPr wrap="square" lIns="0" rIns="0" tIns="0" bIns="0" anchor="t">
+            <a:spAutoFit/>
+          </a:bodyPr>
+          <a:lstStyle/>
+          <a:p>
+            <a:r>
+              <a:rPr sz="1200" b="0" i="0" spc="300">
+                <a:solidFill>
+                  <a:srgbClr val="4A6B3A"/>
+                </a:solidFill>
+                <a:latin typeface="Arial"/>
+              </a:rPr>
+              <a:t>ПРИМЕРЫ</a:t>
+            </a:r>
+          </a:p>
+        </p:txBody>
+      </p:sp>
+      <p:sp>
+        <p:nvSpPr>
+          <p:cNvPr id="7" name="TextBox 6"/>
+          <p:cNvSpPr txBox="1"/>
+          <p:nvPr/>
+        </p:nvSpPr>
+        <p:spPr>
+          <a:xfrm>
+            <a:off x="812800" y="736600"/>
+            <a:ext cx="6350000" cy="731520"/>
+          </a:xfrm>
+          <a:prstGeom prst="rect">
+            <a:avLst/>
+          </a:prstGeom>
+          <a:noFill/>
+        </p:spPr>
+        <p:txBody>
+          <a:bodyPr wrap="square" lIns="0" rIns="0" tIns="0" bIns="0" anchor="t">
+            <a:spAutoFit/>
+          </a:bodyPr>
+          <a:lstStyle/>
+          <a:p>
+            <a:r>
+              <a:rPr sz="3200" b="0" i="0">
+                <a:solidFill>
+                  <a:srgbClr val="2A2A26"/>
+                </a:solidFill>
+                <a:latin typeface="Georgia"/>
+              </a:rPr>
+              <a:t>Что ещё можно сделать</a:t>
+            </a:r>
+          </a:p>
+        </p:txBody>
+      </p:sp>
+      <p:sp>
+        <p:nvSpPr>
+          <p:cNvPr id="8" name="TextBox 7"/>
+          <p:cNvSpPr txBox="1"/>
+          <p:nvPr/>
+        </p:nvSpPr>
+        <p:spPr>
+          <a:xfrm>
+            <a:off x="7442200" y="635000"/>
+            <a:ext cx="3937000" cy="635000"/>
+          </a:xfrm>
+          <a:prstGeom prst="rect">
+            <a:avLst/>
+          </a:prstGeom>
+          <a:noFill/>
+        </p:spPr>
+        <p:txBody>
+          <a:bodyPr wrap="square" lIns="0" rIns="0" tIns="0" bIns="0" anchor="t">
+            <a:spAutoFit/>
+          </a:bodyPr>
+          <a:lstStyle/>
+          <a:p>
+            <a:r>
+              <a:rPr sz="1300" b="0" i="0">
+                <a:solidFill>
+                  <a:srgbClr val="5E5D56"/>
+                </a:solidFill>
+                <a:latin typeface="Arial"/>
+              </a:rPr>
+              <a:t>Идеи на вашем ассортименте. Каждая пишется отдельным модулем, если она вам нужна.</a:t>
+            </a:r>
+          </a:p>
+        </p:txBody>
+      </p:sp>
+      <p:sp>
+        <p:nvSpPr>
+          <p:cNvPr id="9" name="TextBox 8"/>
+          <p:cNvSpPr txBox="1"/>
+          <p:nvPr/>
+        </p:nvSpPr>
+        <p:spPr>
+          <a:xfrm>
+            <a:off x="812800" y="4984750"/>
+            <a:ext cx="2527300" cy="215900"/>
+          </a:xfrm>
+          <a:prstGeom prst="rect">
+            <a:avLst/>
+          </a:prstGeom>
+          <a:noFill/>
+        </p:spPr>
+        <p:txBody>
+          <a:bodyPr wrap="square" lIns="0" rIns="0" tIns="0" bIns="0" anchor="t">
+            <a:spAutoFit/>
+          </a:bodyPr>
+          <a:lstStyle/>
+          <a:p>
+            <a:r>
+              <a:rPr sz="1000" b="0" i="0">
+                <a:solidFill>
+                  <a:srgbClr val="5E5D56"/>
+                </a:solidFill>
+                <a:latin typeface="Arial"/>
+              </a:rPr>
+              <a:t>iPhone 15 · 393 px</a:t>
+            </a:r>
+          </a:p>
+        </p:txBody>
+      </p:sp>
+      <p:sp>
+        <p:nvSpPr>
+          <p:cNvPr id="10" name="TextBox 9"/>
+          <p:cNvSpPr txBox="1"/>
+          <p:nvPr/>
+        </p:nvSpPr>
+        <p:spPr>
+          <a:xfrm>
+            <a:off x="812800" y="5226050"/>
+            <a:ext cx="2527300" cy="317500"/>
+          </a:xfrm>
+          <a:prstGeom prst="rect">
+            <a:avLst/>
+          </a:prstGeom>
+          <a:noFill/>
+        </p:spPr>
+        <p:txBody>
+          <a:bodyPr wrap="square" lIns="0" rIns="0" tIns="0" bIns="0" anchor="t">
+            <a:spAutoFit/>
+          </a:bodyPr>
+          <a:lstStyle/>
+          <a:p>
+            <a:r>
+              <a:rPr sz="1400" b="1" i="0">
+                <a:solidFill>
+                  <a:srgbClr val="2A2A26"/>
+                </a:solidFill>
+                <a:latin typeface="Arial"/>
+              </a:rPr>
+              <a:t>Подарочная коробка</a:t>
+            </a:r>
+          </a:p>
+        </p:txBody>
+      </p:sp>
+      <p:sp>
+        <p:nvSpPr>
+          <p:cNvPr id="11" name="TextBox 10"/>
+          <p:cNvSpPr txBox="1"/>
+          <p:nvPr/>
+        </p:nvSpPr>
+        <p:spPr>
+          <a:xfrm>
+            <a:off x="812800" y="5543550"/>
+            <a:ext cx="2527300" cy="1524000"/>
+          </a:xfrm>
+          <a:prstGeom prst="rect">
+            <a:avLst/>
+          </a:prstGeom>
+          <a:noFill/>
+        </p:spPr>
+        <p:txBody>
+          <a:bodyPr wrap="square" lIns="0" rIns="0" tIns="0" bIns="0" anchor="t">
+            <a:spAutoFit/>
+          </a:bodyPr>
+          <a:lstStyle/>
+          <a:p>
+            <a:r>
+              <a:rPr sz="1100" b="0" i="0">
+                <a:solidFill>
+                  <a:srgbClr val="5E5D56"/>
+                </a:solidFill>
+                <a:latin typeface="Arial"/>
+              </a:rPr>
+              <a:t>Покупатель сам собирает набор из вкусов текущей партии и пишет открытку. Цена считается сразу.</a:t>
+            </a:r>
+          </a:p>
+        </p:txBody>
+      </p:sp>
+      <p:sp>
+        <p:nvSpPr>
+          <p:cNvPr id="12" name="TextBox 11"/>
+          <p:cNvSpPr txBox="1"/>
+          <p:nvPr/>
+        </p:nvSpPr>
+        <p:spPr>
+          <a:xfrm>
+            <a:off x="3530600" y="4984750"/>
+            <a:ext cx="2527300" cy="215900"/>
+          </a:xfrm>
+          <a:prstGeom prst="rect">
+            <a:avLst/>
+          </a:prstGeom>
+          <a:noFill/>
+        </p:spPr>
+        <p:txBody>
+          <a:bodyPr wrap="square" lIns="0" rIns="0" tIns="0" bIns="0" anchor="t">
+            <a:spAutoFit/>
+          </a:bodyPr>
+          <a:lstStyle/>
+          <a:p>
+            <a:r>
+              <a:rPr sz="1000" b="0" i="0">
+                <a:solidFill>
+                  <a:srgbClr val="5E5D56"/>
+                </a:solidFill>
+                <a:latin typeface="Arial"/>
+              </a:rPr>
+              <a:t>iPhone SE · 375 px</a:t>
+            </a:r>
+          </a:p>
+        </p:txBody>
+      </p:sp>
+      <p:sp>
+        <p:nvSpPr>
+          <p:cNvPr id="13" name="TextBox 12"/>
+          <p:cNvSpPr txBox="1"/>
+          <p:nvPr/>
+        </p:nvSpPr>
+        <p:spPr>
+          <a:xfrm>
+            <a:off x="3530600" y="5226050"/>
+            <a:ext cx="2527300" cy="317500"/>
+          </a:xfrm>
+          <a:prstGeom prst="rect">
+            <a:avLst/>
+          </a:prstGeom>
+          <a:noFill/>
+        </p:spPr>
+        <p:txBody>
+          <a:bodyPr wrap="square" lIns="0" rIns="0" tIns="0" bIns="0" anchor="t">
+            <a:spAutoFit/>
+          </a:bodyPr>
+          <a:lstStyle/>
+          <a:p>
+            <a:r>
+              <a:rPr sz="1400" b="1" i="0">
+                <a:solidFill>
+                  <a:srgbClr val="2A2A26"/>
+                </a:solidFill>
+                <a:latin typeface="Arial"/>
+              </a:rPr>
+              <a:t>Кабинет для опта</a:t>
+            </a:r>
+          </a:p>
+        </p:txBody>
+      </p:sp>
+      <p:sp>
+        <p:nvSpPr>
+          <p:cNvPr id="14" name="TextBox 13"/>
+          <p:cNvSpPr txBox="1"/>
+          <p:nvPr/>
+        </p:nvSpPr>
+        <p:spPr>
+          <a:xfrm>
+            <a:off x="3530600" y="5543550"/>
+            <a:ext cx="2527300" cy="1524000"/>
+          </a:xfrm>
+          <a:prstGeom prst="rect">
+            <a:avLst/>
+          </a:prstGeom>
+          <a:noFill/>
+        </p:spPr>
+        <p:txBody>
+          <a:bodyPr wrap="square" lIns="0" rIns="0" tIns="0" bIns="0" anchor="t">
+            <a:spAutoFit/>
+          </a:bodyPr>
+          <a:lstStyle/>
+          <a:p>
+            <a:r>
+              <a:rPr sz="1100" b="0" i="0">
+                <a:solidFill>
+                  <a:srgbClr val="5E5D56"/>
+                </a:solidFill>
+                <a:latin typeface="Arial"/>
+              </a:rPr>
+              <a:t>Раздел для зарегистрированных покупателей на сайте уже есть. Из него выйдет кабинет партнёров: своя цена и счёт для юрлица.</a:t>
+            </a:r>
+          </a:p>
+        </p:txBody>
+      </p:sp>
+      <p:sp>
+        <p:nvSpPr>
+          <p:cNvPr id="15" name="TextBox 14"/>
+          <p:cNvSpPr txBox="1"/>
+          <p:nvPr/>
+        </p:nvSpPr>
+        <p:spPr>
+          <a:xfrm>
+            <a:off x="6248400" y="4984750"/>
+            <a:ext cx="2527300" cy="215900"/>
+          </a:xfrm>
+          <a:prstGeom prst="rect">
+            <a:avLst/>
+          </a:prstGeom>
+          <a:noFill/>
+        </p:spPr>
+        <p:txBody>
+          <a:bodyPr wrap="square" lIns="0" rIns="0" tIns="0" bIns="0" anchor="t">
+            <a:spAutoFit/>
+          </a:bodyPr>
+          <a:lstStyle/>
+          <a:p>
+            <a:r>
+              <a:rPr sz="1000" b="0" i="0">
+                <a:solidFill>
+                  <a:srgbClr val="5E5D56"/>
+                </a:solidFill>
+                <a:latin typeface="Arial"/>
+              </a:rPr>
+              <a:t>Android · 360 px</a:t>
+            </a:r>
+          </a:p>
+        </p:txBody>
+      </p:sp>
+      <p:sp>
+        <p:nvSpPr>
+          <p:cNvPr id="16" name="TextBox 15"/>
+          <p:cNvSpPr txBox="1"/>
+          <p:nvPr/>
+        </p:nvSpPr>
+        <p:spPr>
+          <a:xfrm>
+            <a:off x="6248400" y="5226050"/>
+            <a:ext cx="2527300" cy="317500"/>
+          </a:xfrm>
+          <a:prstGeom prst="rect">
+            <a:avLst/>
+          </a:prstGeom>
+          <a:noFill/>
+        </p:spPr>
+        <p:txBody>
+          <a:bodyPr wrap="square" lIns="0" rIns="0" tIns="0" bIns="0" anchor="t">
+            <a:spAutoFit/>
+          </a:bodyPr>
+          <a:lstStyle/>
+          <a:p>
+            <a:r>
+              <a:rPr sz="1400" b="1" i="0">
+                <a:solidFill>
+                  <a:srgbClr val="2A2A26"/>
+                </a:solidFill>
+                <a:latin typeface="Arial"/>
+              </a:rPr>
+              <a:t>Подписка на партию</a:t>
+            </a:r>
+          </a:p>
+        </p:txBody>
+      </p:sp>
+      <p:sp>
+        <p:nvSpPr>
+          <p:cNvPr id="17" name="TextBox 16"/>
+          <p:cNvSpPr txBox="1"/>
+          <p:nvPr/>
+        </p:nvSpPr>
+        <p:spPr>
+          <a:xfrm>
+            <a:off x="6248400" y="5543550"/>
+            <a:ext cx="2527300" cy="1524000"/>
+          </a:xfrm>
+          <a:prstGeom prst="rect">
+            <a:avLst/>
+          </a:prstGeom>
+          <a:noFill/>
+        </p:spPr>
+        <p:txBody>
+          <a:bodyPr wrap="square" lIns="0" rIns="0" tIns="0" bIns="0" anchor="t">
+            <a:spAutoFit/>
+          </a:bodyPr>
+          <a:lstStyle/>
+          <a:p>
+            <a:r>
+              <a:rPr sz="1100" b="0" i="0">
+                <a:solidFill>
+                  <a:srgbClr val="5E5D56"/>
+                </a:solidFill>
+                <a:latin typeface="Arial"/>
+              </a:rPr>
+              <a:t>Постоянные покупатели бронируют место в каждой партии, вы заранее знаете объём.</a:t>
+            </a:r>
+          </a:p>
+        </p:txBody>
+      </p:sp>
+      <p:sp>
+        <p:nvSpPr>
+          <p:cNvPr id="18" name="TextBox 17"/>
+          <p:cNvSpPr txBox="1"/>
+          <p:nvPr/>
+        </p:nvSpPr>
+        <p:spPr>
+          <a:xfrm>
+            <a:off x="8966200" y="4984750"/>
+            <a:ext cx="2527300" cy="215900"/>
+          </a:xfrm>
+          <a:prstGeom prst="rect">
+            <a:avLst/>
+          </a:prstGeom>
+          <a:noFill/>
+        </p:spPr>
+        <p:txBody>
+          <a:bodyPr wrap="square" lIns="0" rIns="0" tIns="0" bIns="0" anchor="t">
+            <a:spAutoFit/>
+          </a:bodyPr>
+          <a:lstStyle/>
+          <a:p>
+            <a:r>
+              <a:rPr sz="1000" b="0" i="0">
+                <a:solidFill>
+                  <a:srgbClr val="5E5D56"/>
+                </a:solidFill>
+                <a:latin typeface="Arial"/>
+              </a:rPr>
+              <a:t>iPhone 15 Pro Max · 430 px</a:t>
+            </a:r>
+          </a:p>
+        </p:txBody>
+      </p:sp>
+      <p:sp>
+        <p:nvSpPr>
+          <p:cNvPr id="19" name="TextBox 18"/>
+          <p:cNvSpPr txBox="1"/>
+          <p:nvPr/>
+        </p:nvSpPr>
+        <p:spPr>
+          <a:xfrm>
+            <a:off x="8966200" y="5226050"/>
+            <a:ext cx="2527300" cy="317500"/>
+          </a:xfrm>
+          <a:prstGeom prst="rect">
+            <a:avLst/>
+          </a:prstGeom>
+          <a:noFill/>
+        </p:spPr>
+        <p:txBody>
+          <a:bodyPr wrap="square" lIns="0" rIns="0" tIns="0" bIns="0" anchor="t">
+            <a:spAutoFit/>
+          </a:bodyPr>
+          <a:lstStyle/>
+          <a:p>
+            <a:r>
+              <a:rPr sz="1400" b="1" i="0">
+                <a:solidFill>
+                  <a:srgbClr val="2A2A26"/>
+                </a:solidFill>
+                <a:latin typeface="Arial"/>
+              </a:rPr>
+              <a:t>Магазин и курсы</a:t>
+            </a:r>
+          </a:p>
+        </p:txBody>
+      </p:sp>
+      <p:sp>
+        <p:nvSpPr>
+          <p:cNvPr id="20" name="TextBox 19"/>
+          <p:cNvSpPr txBox="1"/>
+          <p:nvPr/>
+        </p:nvSpPr>
+        <p:spPr>
+          <a:xfrm>
+            <a:off x="8966200" y="5543550"/>
+            <a:ext cx="2527300" cy="1524000"/>
+          </a:xfrm>
+          <a:prstGeom prst="rect">
+            <a:avLst/>
+          </a:prstGeom>
+          <a:noFill/>
+        </p:spPr>
+        <p:txBody>
+          <a:bodyPr wrap="square" lIns="0" rIns="0" tIns="0" bIns="0" anchor="t">
+            <a:spAutoFit/>
+          </a:bodyPr>
+          <a:lstStyle/>
+          <a:p>
+            <a:r>
+              <a:rPr sz="1100" b="0" i="0">
+                <a:solidFill>
+                  <a:srgbClr val="5E5D56"/>
+                </a:solidFill>
+                <a:latin typeface="Arial"/>
+              </a:rPr>
+              <a:t>Связка lesnaya-yagodka.ru и zefirfly.com: общий профиль, покупатели находят и зефир, и курсы.</a:t>
+            </a:r>
+          </a:p>
+        </p:txBody>
+      </p:sp>
+    </p:spTree>
+  </p:cSld>
+  <p:clrMapOvr>
+    <a:masterClrMapping/>
+  </p:clrMapOvr>
+</p:sld>
+</file>
+
+<file path=ppt/slides/slide12.xml><?xml version="1.0" encoding="utf-8"?>
+<p:sld xmlns:a="http://schemas.openxmlformats.org/drawingml/2006/main" xmlns:r="http://schemas.openxmlformats.org/officeDocument/2006/relationships" xmlns:p="http://schemas.openxmlformats.org/presentationml/2006/main">
+  <p:cSld name="Slide 7">
+    <p:bg>
+      <p:bgPr>
+        <a:solidFill>
+          <a:srgbClr val="4A6B3A"/>
+        </a:solidFill>
+        <a:effectLst/>
+      </p:bgPr>
+    </p:bg>
+    <p:spTree>
+      <p:nvGrpSpPr>
+        <p:cNvPr id="1" name=""/>
+        <p:cNvGrpSpPr/>
+        <p:nvPr/>
+      </p:nvGrpSpPr>
+      <p:grpSpPr>
+        <a:xfrm>
+          <a:off x="0" y="0"/>
+          <a:ext cx="0" cy="0"/>
+          <a:chOff x="0" y="0"/>
+          <a:chExt cx="0" cy="0"/>
+        </a:xfrm>
+      </p:grpSpPr>
+      <p:sp>
+        <p:nvSpPr>
+          <p:cNvPr id="2" name="Text 0"/>
+          <p:cNvSpPr txBox="1"/>
+          <p:nvPr/>
+        </p:nvSpPr>
+        <p:spPr>
+          <a:xfrm>
+            <a:off x="731520" y="1463040"/>
+            <a:ext cx="10725912" cy="320040"/>
+          </a:xfrm>
+          <a:prstGeom prst="rect">
+            <a:avLst/>
+          </a:prstGeom>
+          <a:noFill/>
+          <a:ln/>
+        </p:spPr>
+        <p:txBody>
+          <a:bodyPr wrap="square" lIns="0" tIns="0" rIns="0" bIns="0" rtlCol="0" anchor="t"/>
+          <a:lstStyle/>
+          <a:p>
+            <a:pPr marL="0" indent="0">
+              <a:buNone/>
+            </a:pPr>
+            <a:r>
+              <a:rPr lang="en-US" sz="1200" kern="0" spc="300" dirty="0">
+                <a:solidFill>
+                  <a:srgbClr val="DCE3D0"/>
+                </a:solidFill>
+                <a:latin typeface="Arial" pitchFamily="34" charset="0"/>
+                <a:ea typeface="Arial" pitchFamily="34" charset="-122"/>
+                <a:cs typeface="Arial" pitchFamily="34" charset="-120"/>
+              </a:rPr>
+              <a:t>СТРАХОВКА</a:t>
+            </a:r>
+            <a:endParaRPr lang="en-US" sz="1200" dirty="0"/>
+          </a:p>
+        </p:txBody>
+      </p:sp>
+      <p:sp>
+        <p:nvSpPr>
+          <p:cNvPr id="3" name="Text 1"/>
+          <p:cNvSpPr txBox="1"/>
+          <p:nvPr/>
+        </p:nvSpPr>
+        <p:spPr>
+          <a:xfrm>
+            <a:off x="731520" y="1920240"/>
+            <a:ext cx="10058400" cy="1828800"/>
+          </a:xfrm>
+          <a:prstGeom prst="rect">
+            <a:avLst/>
+          </a:prstGeom>
+          <a:noFill/>
+          <a:ln/>
+        </p:spPr>
+        <p:txBody>
+          <a:bodyPr wrap="square" lIns="0" tIns="0" rIns="0" bIns="0" rtlCol="0" anchor="t"/>
+          <a:lstStyle/>
+          <a:p>
+            <a:pPr marL="0" indent="0">
+              <a:buNone/>
+            </a:pPr>
+            <a:r>
+              <a:rPr lang="en-US" sz="5400" dirty="0">
+                <a:solidFill>
+                  <a:srgbClr val="F6F3EE"/>
+                </a:solidFill>
+                <a:latin typeface="Georgia" pitchFamily="34" charset="0"/>
+                <a:ea typeface="Georgia" pitchFamily="34" charset="-122"/>
+                <a:cs typeface="Georgia" pitchFamily="34" charset="-120"/>
+              </a:rPr>
+              <a:t>Ваши покупатели должны быть </a:t>
+            </a:r>
+            <a:r>
+              <a:rPr lang="en-US" sz="5400" i="1" dirty="0">
+                <a:solidFill>
+                  <a:srgbClr val="F6F3EE"/>
+                </a:solidFill>
+                <a:latin typeface="Georgia" pitchFamily="34" charset="0"/>
+                <a:ea typeface="Georgia" pitchFamily="34" charset="-122"/>
+                <a:cs typeface="Georgia" pitchFamily="34" charset="-120"/>
+              </a:rPr>
+              <a:t>вашими</a:t>
+            </a:r>
+            <a:endParaRPr lang="en-US" sz="5400" dirty="0"/>
+          </a:p>
+        </p:txBody>
+      </p:sp>
+      <p:sp>
+        <p:nvSpPr>
+          <p:cNvPr id="4" name="Text 2"/>
+          <p:cNvSpPr txBox="1"/>
+          <p:nvPr/>
+        </p:nvSpPr>
+        <p:spPr>
+          <a:xfrm>
+            <a:off x="731520" y="4023360"/>
+            <a:ext cx="8686800" cy="1463040"/>
+          </a:xfrm>
+          <a:prstGeom prst="rect">
+            <a:avLst/>
+          </a:prstGeom>
+          <a:noFill/>
+          <a:ln/>
+        </p:spPr>
+        <p:txBody>
+          <a:bodyPr wrap="square" lIns="0" tIns="0" rIns="0" bIns="0" rtlCol="0" anchor="t"/>
+          <a:lstStyle/>
+          <a:p>
+            <a:pPr marL="0" indent="0">
+              <a:lnSpc>
+                <a:spcPct val="125000"/>
+              </a:lnSpc>
+              <a:buNone/>
+            </a:pPr>
+            <a:r>
+              <a:rPr lang="en-US" sz="1800" dirty="0">
+                <a:solidFill>
+                  <a:srgbClr val="E7ECDF"/>
+                </a:solidFill>
+                <a:latin typeface="Arial" pitchFamily="34" charset="0"/>
+                <a:ea typeface="Arial" pitchFamily="34" charset="-122"/>
+                <a:cs typeface="Arial" pitchFamily="34" charset="-120"/>
+              </a:rPr>
+              <a:t>Instagram в России заблокирован, Telegram замедляют. Сайт собирает свою базу: Telegram, email и телефоны. Что бы ни случилось с соцсетями, вы достучитесь до покупателей в любой момент.</a:t>
+            </a:r>
+            <a:endParaRPr lang="en-US" sz="1800" dirty="0"/>
+          </a:p>
+        </p:txBody>
+      </p:sp>
+    </p:spTree>
+  </p:cSld>
+  <p:clrMapOvr>
+    <a:masterClrMapping/>
+  </p:clrMapOvr>
+</p:sld>
+</file>
+
+<file path=ppt/slides/slide13.xml><?xml version="1.0" encoding="utf-8"?>
+<p:sld xmlns:a="http://schemas.openxmlformats.org/drawingml/2006/main" xmlns:r="http://schemas.openxmlformats.org/officeDocument/2006/relationships" xmlns:p="http://schemas.openxmlformats.org/presentationml/2006/main">
+  <p:cSld name="Slide 8">
+    <p:bg>
+      <p:bgPr>
+        <a:solidFill>
+          <a:srgbClr val="ECE7DF"/>
+        </a:solidFill>
+        <a:effectLst/>
+      </p:bgPr>
+    </p:bg>
+    <p:spTree>
+      <p:nvGrpSpPr>
+        <p:cNvPr id="1" name=""/>
+        <p:cNvGrpSpPr/>
+        <p:nvPr/>
+      </p:nvGrpSpPr>
+      <p:grpSpPr>
+        <a:xfrm>
+          <a:off x="0" y="0"/>
+          <a:ext cx="0" cy="0"/>
+          <a:chOff x="0" y="0"/>
+          <a:chExt cx="0" cy="0"/>
+        </a:xfrm>
+      </p:grpSpPr>
+      <p:sp>
+        <p:nvSpPr>
+          <p:cNvPr id="2" name="Text 0"/>
+          <p:cNvSpPr txBox="1"/>
+          <p:nvPr/>
+        </p:nvSpPr>
+        <p:spPr>
+          <a:xfrm>
+            <a:off x="731520" y="640080"/>
+            <a:ext cx="10725912" cy="320040"/>
+          </a:xfrm>
+          <a:prstGeom prst="rect">
+            <a:avLst/>
+          </a:prstGeom>
+          <a:noFill/>
+          <a:ln/>
+        </p:spPr>
+        <p:txBody>
+          <a:bodyPr wrap="square" lIns="0" tIns="0" rIns="0" bIns="0" rtlCol="0" anchor="t"/>
+          <a:lstStyle/>
+          <a:p>
+            <a:pPr marL="0" indent="0">
+              <a:buNone/>
+            </a:pPr>
+            <a:r>
+              <a:rPr lang="en-US" sz="1200" kern="0" spc="300" dirty="0">
+                <a:solidFill>
+                  <a:srgbClr val="4A6B3A"/>
+                </a:solidFill>
+                <a:latin typeface="Arial" pitchFamily="34" charset="0"/>
+                <a:ea typeface="Arial" pitchFamily="34" charset="-122"/>
+                <a:cs typeface="Arial" pitchFamily="34" charset="-120"/>
+              </a:rPr>
+              <a:t>ВАРИАНТЫ</a:t>
+            </a:r>
+            <a:endParaRPr lang="en-US" sz="1200" dirty="0"/>
+          </a:p>
+        </p:txBody>
+      </p:sp>
+      <p:sp>
+        <p:nvSpPr>
+          <p:cNvPr id="3" name="Text 1"/>
+          <p:cNvSpPr txBox="1"/>
+          <p:nvPr/>
+        </p:nvSpPr>
+        <p:spPr>
+          <a:xfrm>
+            <a:off x="731520" y="1005840"/>
+            <a:ext cx="10725912" cy="1280160"/>
+          </a:xfrm>
+          <a:prstGeom prst="rect">
+            <a:avLst/>
+          </a:prstGeom>
+          <a:noFill/>
+          <a:ln/>
+        </p:spPr>
+        <p:txBody>
+          <a:bodyPr wrap="square" lIns="0" tIns="0" rIns="0" bIns="0" rtlCol="0" anchor="t"/>
+          <a:lstStyle/>
+          <a:p>
+            <a:pPr marL="0" indent="0">
+              <a:buNone/>
+            </a:pPr>
+            <a:r>
+              <a:rPr lang="en-US" sz="4000" dirty="0">
+                <a:solidFill>
+                  <a:srgbClr val="2A2A26"/>
+                </a:solidFill>
+                <a:latin typeface="Georgia" pitchFamily="34" charset="0"/>
+                <a:ea typeface="Georgia" pitchFamily="34" charset="-122"/>
+                <a:cs typeface="Georgia" pitchFamily="34" charset="-120"/>
+              </a:rPr>
+              <a:t>Насколько </a:t>
+            </a:r>
+            <a:r>
+              <a:rPr lang="en-US" sz="4000" i="1" dirty="0">
+                <a:solidFill>
+                  <a:srgbClr val="4A6B3A"/>
+                </a:solidFill>
+                <a:latin typeface="Georgia" pitchFamily="34" charset="0"/>
+                <a:ea typeface="Georgia" pitchFamily="34" charset="-122"/>
+                <a:cs typeface="Georgia" pitchFamily="34" charset="-120"/>
+              </a:rPr>
+              <a:t>свободной</a:t>
+            </a:r>
+            <a:r>
+              <a:rPr lang="en-US" sz="4000" dirty="0">
+                <a:solidFill>
+                  <a:srgbClr val="2A2A26"/>
+                </a:solidFill>
+                <a:latin typeface="Georgia" pitchFamily="34" charset="0"/>
+                <a:ea typeface="Georgia" pitchFamily="34" charset="-122"/>
+                <a:cs typeface="Georgia" pitchFamily="34" charset="-120"/>
+              </a:rPr>
+              <a:t> быть</a:t>
+            </a:r>
+            <a:endParaRPr lang="en-US" sz="4000" dirty="0"/>
+          </a:p>
+        </p:txBody>
+      </p:sp>
+      <p:sp>
+        <p:nvSpPr>
+          <p:cNvPr id="4" name="Shape 2"/>
+          <p:cNvSpPr/>
+          <p:nvPr/>
+        </p:nvSpPr>
+        <p:spPr>
+          <a:xfrm>
+            <a:off x="685800" y="2194560"/>
+            <a:ext cx="3392424" cy="3931920"/>
+          </a:xfrm>
+          <a:prstGeom prst="rect">
+            <a:avLst/>
+          </a:prstGeom>
+          <a:solidFill>
+            <a:srgbClr val="F6F3EE"/>
+          </a:solidFill>
+          <a:ln w="9525">
+            <a:solidFill>
+              <a:srgbClr val="CFC8BC"/>
+            </a:solidFill>
+            <a:prstDash val="solid"/>
+          </a:ln>
+        </p:spPr>
+        <p:txBody>
+          <a:bodyPr/>
+          <a:p/>
+        </p:txBody>
+      </p:sp>
+      <p:sp>
+        <p:nvSpPr>
+          <p:cNvPr id="5" name="Text 3"/>
+          <p:cNvSpPr txBox="1"/>
+          <p:nvPr/>
+        </p:nvSpPr>
+        <p:spPr>
+          <a:xfrm>
+            <a:off x="1051560" y="2651760"/>
+            <a:ext cx="2752344" cy="777240"/>
+          </a:xfrm>
+          <a:prstGeom prst="rect">
+            <a:avLst/>
+          </a:prstGeom>
+          <a:noFill/>
+          <a:ln/>
+        </p:spPr>
+        <p:txBody>
+          <a:bodyPr wrap="square" lIns="0" tIns="0" rIns="0" bIns="0" rtlCol="0" anchor="t"/>
+          <a:lstStyle/>
+          <a:p>
+            <a:pPr marL="0" indent="0">
+              <a:buNone/>
+            </a:pPr>
+            <a:r>
+              <a:rPr lang="en-US" sz="2200" dirty="0">
+                <a:solidFill>
+                  <a:srgbClr val="2A2A26"/>
+                </a:solidFill>
+                <a:latin typeface="Georgia" pitchFamily="34" charset="0"/>
+                <a:ea typeface="Georgia" pitchFamily="34" charset="-122"/>
+                <a:cs typeface="Georgia" pitchFamily="34" charset="-120"/>
+              </a:rPr>
+              <a:t>Витрина</a:t>
+            </a:r>
+            <a:endParaRPr lang="en-US" sz="2200" dirty="0"/>
+          </a:p>
+        </p:txBody>
+      </p:sp>
+      <p:sp>
+        <p:nvSpPr>
+          <p:cNvPr id="6" name="Text 4"/>
+          <p:cNvSpPr txBox="1"/>
+          <p:nvPr/>
+        </p:nvSpPr>
+        <p:spPr>
+          <a:xfrm>
+            <a:off x="1051560" y="3258403"/>
+            <a:ext cx="2752344" cy="640080"/>
+          </a:xfrm>
+          <a:prstGeom prst="rect">
+            <a:avLst/>
+          </a:prstGeom>
+          <a:noFill/>
+          <a:ln/>
+        </p:spPr>
+        <p:txBody>
+          <a:bodyPr wrap="square" lIns="0" tIns="0" rIns="0" bIns="0" rtlCol="0" anchor="t"/>
+          <a:lstStyle/>
+          <a:p>
+            <a:pPr marL="0" indent="0">
+              <a:buNone/>
+            </a:pPr>
+            <a:r>
+              <a:rPr lang="ru-RU" sz="3200" dirty="0">
+                <a:solidFill>
+                  <a:srgbClr val="2A2A26"/>
+                </a:solidFill>
+                <a:latin typeface="Georgia" pitchFamily="34" charset="0"/>
+                <a:ea typeface="Georgia" pitchFamily="34" charset="-122"/>
+                <a:cs typeface="Georgia" pitchFamily="34" charset="-120"/>
+              </a:rPr>
+              <a:t>6</a:t>
+            </a:r>
+            <a:r>
+              <a:rPr lang="en-US" sz="3200" dirty="0">
+                <a:solidFill>
+                  <a:srgbClr val="2A2A26"/>
+                </a:solidFill>
+                <a:latin typeface="Georgia" pitchFamily="34" charset="0"/>
+                <a:ea typeface="Georgia" pitchFamily="34" charset="-122"/>
+                <a:cs typeface="Georgia" pitchFamily="34" charset="-120"/>
+              </a:rPr>
+              <a:t>0 000 ₽</a:t>
+            </a:r>
+            <a:endParaRPr lang="en-US" sz="3200" dirty="0"/>
+          </a:p>
+        </p:txBody>
+      </p:sp>
+      <p:sp>
+        <p:nvSpPr>
+          <p:cNvPr id="7" name="Text 5"/>
+          <p:cNvSpPr txBox="1"/>
+          <p:nvPr/>
+        </p:nvSpPr>
+        <p:spPr>
+          <a:xfrm>
+            <a:off x="942378" y="3974113"/>
+            <a:ext cx="2752344" cy="1645920"/>
+          </a:xfrm>
+          <a:prstGeom prst="rect">
+            <a:avLst/>
+          </a:prstGeom>
+          <a:noFill/>
+          <a:ln/>
+        </p:spPr>
+        <p:txBody>
+          <a:bodyPr wrap="square" lIns="0" tIns="0" rIns="0" bIns="0" rtlCol="0" anchor="t"/>
+          <a:lstStyle/>
+          <a:p>
+            <a:pPr marL="342900" indent="-342900">
+              <a:spcAft>
+                <a:spcPts val="400"/>
+              </a:spcAft>
+              <a:buSzPct val="100000"/>
+              <a:buChar char="•"/>
+            </a:pPr>
+            <a:r>
+              <a:rPr lang="en-US" sz="1400" dirty="0">
+                <a:solidFill>
+                  <a:srgbClr val="5E5D56"/>
+                </a:solidFill>
+                <a:latin typeface="Arial" pitchFamily="34" charset="0"/>
+                <a:ea typeface="Arial" pitchFamily="34" charset="-122"/>
+                <a:cs typeface="Arial" pitchFamily="34" charset="-120"/>
+              </a:rPr>
+              <a:t>Новый дизайн «Лесной»</a:t>
+            </a:r>
+            <a:endParaRPr lang="en-US" sz="1400" dirty="0"/>
+          </a:p>
+          <a:p>
+            <a:pPr marL="342900" indent="-342900">
+              <a:spcAft>
+                <a:spcPts val="400"/>
+              </a:spcAft>
+              <a:buSzPct val="100000"/>
+              <a:buChar char="•"/>
+            </a:pPr>
+            <a:r>
+              <a:rPr lang="en-US" sz="1400" dirty="0">
+                <a:solidFill>
+                  <a:srgbClr val="5E5D56"/>
+                </a:solidFill>
+                <a:latin typeface="Arial" pitchFamily="34" charset="0"/>
+                <a:ea typeface="Arial" pitchFamily="34" charset="-122"/>
+                <a:cs typeface="Arial" pitchFamily="34" charset="-120"/>
+              </a:rPr>
+              <a:t>Перенос каталога</a:t>
+            </a:r>
+            <a:endParaRPr lang="en-US" sz="1400" dirty="0"/>
+          </a:p>
+          <a:p>
+            <a:pPr marL="342900" indent="-342900">
+              <a:spcAft>
+                <a:spcPts val="400"/>
+              </a:spcAft>
+              <a:buSzPct val="100000"/>
+              <a:buChar char="•"/>
+            </a:pPr>
+            <a:r>
+              <a:rPr lang="en-US" sz="1400" dirty="0">
+                <a:solidFill>
+                  <a:srgbClr val="5E5D56"/>
+                </a:solidFill>
+                <a:latin typeface="Arial" pitchFamily="34" charset="0"/>
+                <a:ea typeface="Arial" pitchFamily="34" charset="-122"/>
+                <a:cs typeface="Arial" pitchFamily="34" charset="-120"/>
+              </a:rPr>
+              <a:t>Оплата, чеки, СДЭК</a:t>
+            </a:r>
+            <a:endParaRPr lang="en-US" sz="1400" dirty="0"/>
+          </a:p>
+          <a:p>
+            <a:pPr marL="342900" indent="-342900">
+              <a:spcAft>
+                <a:spcPts val="400"/>
+              </a:spcAft>
+              <a:buSzPct val="100000"/>
+              <a:buChar char="•"/>
+            </a:pPr>
+            <a:r>
+              <a:rPr lang="en-US" sz="1400" dirty="0">
+                <a:solidFill>
+                  <a:srgbClr val="5E5D56"/>
+                </a:solidFill>
+                <a:latin typeface="Arial" pitchFamily="34" charset="0"/>
+                <a:ea typeface="Arial" pitchFamily="34" charset="-122"/>
+                <a:cs typeface="Arial" pitchFamily="34" charset="-120"/>
+              </a:rPr>
+              <a:t>Согласия и cookies</a:t>
+            </a:r>
+            <a:endParaRPr lang="ru-RU" sz="1400" dirty="0">
+              <a:solidFill>
+                <a:srgbClr val="5E5D56"/>
+              </a:solidFill>
+              <a:latin typeface="Arial" pitchFamily="34" charset="0"/>
+              <a:ea typeface="Arial" pitchFamily="34" charset="-122"/>
+              <a:cs typeface="Arial" pitchFamily="34" charset="-120"/>
+            </a:endParaRPr>
+          </a:p>
+          <a:p>
+            <a:pPr marL="342900" indent="-342900">
+              <a:spcAft>
+                <a:spcPts val="400"/>
+              </a:spcAft>
+              <a:buSzPct val="100000"/>
+              <a:buChar char="•"/>
+            </a:pPr>
+            <a:r>
+              <a:rPr lang="ru-RU" sz="1400" dirty="0">
+                <a:solidFill>
+                  <a:srgbClr val="5E5D56"/>
+                </a:solidFill>
+                <a:latin typeface="Arial" pitchFamily="34" charset="0"/>
+                <a:cs typeface="Arial" pitchFamily="34" charset="-120"/>
+              </a:rPr>
+              <a:t>Месяц поддержки на критические </a:t>
+            </a:r>
+            <a:r>
+              <a:rPr lang="ru-RU" sz="1400" dirty="0" err="1">
+                <a:solidFill>
+                  <a:srgbClr val="5E5D56"/>
+                </a:solidFill>
+                <a:latin typeface="Arial" pitchFamily="34" charset="0"/>
+                <a:cs typeface="Arial" pitchFamily="34" charset="-120"/>
+              </a:rPr>
+              <a:t>неисправленности</a:t>
+            </a:r>
+            <a:endParaRPr lang="en-US" sz="1400" dirty="0"/>
+          </a:p>
+        </p:txBody>
+      </p:sp>
+      <p:sp>
+        <p:nvSpPr>
+          <p:cNvPr id="8" name="Shape 6"/>
+          <p:cNvSpPr/>
+          <p:nvPr/>
+        </p:nvSpPr>
+        <p:spPr>
+          <a:xfrm>
+            <a:off x="4398264" y="2148840"/>
+            <a:ext cx="3392424" cy="3931920"/>
+          </a:xfrm>
+          <a:prstGeom prst="rect">
+            <a:avLst/>
+          </a:prstGeom>
+          <a:solidFill>
+            <a:srgbClr val="F6F3EE"/>
+          </a:solidFill>
+          <a:ln w="28575">
+            <a:solidFill>
+              <a:srgbClr val="4A6B3A"/>
+            </a:solidFill>
+            <a:prstDash val="solid"/>
+          </a:ln>
+        </p:spPr>
+        <p:txBody>
+          <a:bodyPr/>
+          <a:p/>
+        </p:txBody>
+      </p:sp>
+      <p:sp>
+        <p:nvSpPr>
+          <p:cNvPr id="9" name="Text 7"/>
+          <p:cNvSpPr txBox="1"/>
+          <p:nvPr/>
+        </p:nvSpPr>
+        <p:spPr>
+          <a:xfrm>
+            <a:off x="4718304" y="2377440"/>
+            <a:ext cx="2752344" cy="274320"/>
+          </a:xfrm>
+          <a:prstGeom prst="rect">
+            <a:avLst/>
+          </a:prstGeom>
+          <a:noFill/>
+          <a:ln/>
+        </p:spPr>
+        <p:txBody>
+          <a:bodyPr wrap="square" lIns="0" tIns="0" rIns="0" bIns="0" rtlCol="0" anchor="t"/>
+          <a:lstStyle/>
+          <a:p>
+            <a:pPr marL="0" indent="0">
+              <a:buNone/>
+            </a:pPr>
+            <a:endParaRPr lang="en-US" sz="1100" dirty="0"/>
+          </a:p>
+        </p:txBody>
+      </p:sp>
+      <p:sp>
+        <p:nvSpPr>
+          <p:cNvPr id="10" name="Text 8"/>
+          <p:cNvSpPr txBox="1"/>
+          <p:nvPr/>
+        </p:nvSpPr>
+        <p:spPr>
+          <a:xfrm>
+            <a:off x="4718304" y="2697480"/>
+            <a:ext cx="2752344" cy="777240"/>
+          </a:xfrm>
+          <a:prstGeom prst="rect">
+            <a:avLst/>
+          </a:prstGeom>
+          <a:noFill/>
+          <a:ln/>
+        </p:spPr>
+        <p:txBody>
+          <a:bodyPr wrap="square" lIns="0" tIns="0" rIns="0" bIns="0" rtlCol="0" anchor="t"/>
+          <a:lstStyle/>
+          <a:p>
+            <a:pPr marL="0" indent="0">
+              <a:buNone/>
+            </a:pPr>
+            <a:r>
+              <a:rPr lang="en-US" sz="2200" dirty="0">
+                <a:solidFill>
+                  <a:srgbClr val="2A2A26"/>
+                </a:solidFill>
+                <a:latin typeface="Georgia" pitchFamily="34" charset="0"/>
+                <a:ea typeface="Georgia" pitchFamily="34" charset="-122"/>
+                <a:cs typeface="Georgia" pitchFamily="34" charset="-120"/>
+              </a:rPr>
+              <a:t>Лавка на автопилоте</a:t>
+            </a:r>
+            <a:endParaRPr lang="en-US" sz="2200" dirty="0"/>
+          </a:p>
+        </p:txBody>
+      </p:sp>
+      <p:sp>
+        <p:nvSpPr>
+          <p:cNvPr id="11" name="Text 9"/>
+          <p:cNvSpPr txBox="1"/>
+          <p:nvPr/>
+        </p:nvSpPr>
+        <p:spPr>
+          <a:xfrm>
+            <a:off x="4718304" y="3259085"/>
+            <a:ext cx="2752344" cy="640080"/>
+          </a:xfrm>
+          <a:prstGeom prst="rect">
+            <a:avLst/>
+          </a:prstGeom>
+          <a:noFill/>
+          <a:ln/>
+        </p:spPr>
+        <p:txBody>
+          <a:bodyPr wrap="square" lIns="0" tIns="0" rIns="0" bIns="0" rtlCol="0" anchor="t"/>
+          <a:lstStyle/>
+          <a:p>
+            <a:pPr marL="0" indent="0">
+              <a:buNone/>
+            </a:pPr>
+            <a:r>
+              <a:rPr lang="ru-RU" sz="3200" dirty="0">
+                <a:solidFill>
+                  <a:srgbClr val="2A2A26"/>
+                </a:solidFill>
+                <a:latin typeface="Georgia" pitchFamily="34" charset="0"/>
+                <a:ea typeface="Georgia" pitchFamily="34" charset="-122"/>
+                <a:cs typeface="Georgia" pitchFamily="34" charset="-120"/>
+              </a:rPr>
+              <a:t>1</a:t>
+            </a:r>
+            <a:r>
+              <a:rPr lang="en-US" sz="3200" dirty="0">
+                <a:solidFill>
+                  <a:srgbClr val="2A2A26"/>
+                </a:solidFill>
+                <a:latin typeface="Georgia" pitchFamily="34" charset="0"/>
+                <a:ea typeface="Georgia" pitchFamily="34" charset="-122"/>
+                <a:cs typeface="Georgia" pitchFamily="34" charset="-120"/>
+              </a:rPr>
+              <a:t>90 000 ₽</a:t>
+            </a:r>
+            <a:endParaRPr lang="en-US" sz="3200" dirty="0"/>
+          </a:p>
+        </p:txBody>
+      </p:sp>
+      <p:sp>
+        <p:nvSpPr>
+          <p:cNvPr id="12" name="Text 10"/>
+          <p:cNvSpPr txBox="1"/>
+          <p:nvPr/>
+        </p:nvSpPr>
+        <p:spPr>
+          <a:xfrm>
+            <a:off x="4663713" y="3866580"/>
+            <a:ext cx="2752344" cy="1645920"/>
+          </a:xfrm>
+          <a:prstGeom prst="rect">
+            <a:avLst/>
+          </a:prstGeom>
+          <a:noFill/>
+          <a:ln/>
+        </p:spPr>
+        <p:txBody>
+          <a:bodyPr wrap="square" lIns="0" tIns="0" rIns="0" bIns="0" rtlCol="0" anchor="t"/>
+          <a:lstStyle/>
+          <a:p>
+            <a:pPr marL="342900" indent="-342900">
+              <a:spcAft>
+                <a:spcPts val="400"/>
+              </a:spcAft>
+              <a:buSzPct val="100000"/>
+              <a:buChar char="•"/>
+            </a:pPr>
+            <a:r>
+              <a:rPr lang="en-US" sz="1400" dirty="0">
+                <a:solidFill>
+                  <a:srgbClr val="2A2A26"/>
+                </a:solidFill>
+                <a:latin typeface="Arial" pitchFamily="34" charset="0"/>
+                <a:ea typeface="Arial" pitchFamily="34" charset="-122"/>
+                <a:cs typeface="Arial" pitchFamily="34" charset="-120"/>
+              </a:rPr>
+              <a:t>Всё из «Витрины»</a:t>
+            </a:r>
+            <a:endParaRPr lang="en-US" sz="1400" dirty="0"/>
+          </a:p>
+          <a:p>
+            <a:pPr marL="342900" indent="-342900">
+              <a:spcAft>
+                <a:spcPts val="400"/>
+              </a:spcAft>
+              <a:buSzPct val="100000"/>
+              <a:buChar char="•"/>
+            </a:pPr>
+            <a:r>
+              <a:rPr lang="ru-RU" sz="1400" dirty="0">
+                <a:solidFill>
+                  <a:srgbClr val="2A2A26"/>
+                </a:solidFill>
+                <a:latin typeface="Arial" pitchFamily="34" charset="0"/>
+                <a:cs typeface="Arial" pitchFamily="34" charset="-120"/>
+              </a:rPr>
+              <a:t>Виды автоматизаций выставления наличия и других утвержденных</a:t>
+            </a:r>
+            <a:endParaRPr lang="en-US" sz="1400" dirty="0"/>
+          </a:p>
+          <a:p>
+            <a:pPr marL="342900" indent="-342900">
+              <a:spcAft>
+                <a:spcPts val="400"/>
+              </a:spcAft>
+              <a:buSzPct val="100000"/>
+              <a:buChar char="•"/>
+            </a:pPr>
+            <a:r>
+              <a:rPr lang="en-US" sz="1400" dirty="0">
+                <a:solidFill>
+                  <a:srgbClr val="2A2A26"/>
+                </a:solidFill>
+                <a:latin typeface="Arial" pitchFamily="34" charset="0"/>
+                <a:ea typeface="Arial" pitchFamily="34" charset="-122"/>
+                <a:cs typeface="Arial" pitchFamily="34" charset="-120"/>
+              </a:rPr>
+              <a:t>Цех, этикетки, СДЭК пачкой</a:t>
+            </a:r>
+            <a:endParaRPr lang="en-US" sz="1400" dirty="0"/>
+          </a:p>
+          <a:p>
+            <a:pPr marL="342900" indent="-342900">
+              <a:spcAft>
+                <a:spcPts val="400"/>
+              </a:spcAft>
+              <a:buSzPct val="100000"/>
+              <a:buChar char="•"/>
+            </a:pPr>
+            <a:r>
+              <a:rPr lang="en-US" sz="1400" dirty="0">
+                <a:solidFill>
+                  <a:srgbClr val="2A2A26"/>
+                </a:solidFill>
+                <a:latin typeface="Arial" pitchFamily="34" charset="0"/>
+                <a:ea typeface="Arial" pitchFamily="34" charset="-122"/>
+                <a:cs typeface="Arial" pitchFamily="34" charset="-120"/>
+              </a:rPr>
+              <a:t>Сообщения и Telegram сами</a:t>
+            </a:r>
+            <a:endParaRPr lang="en-US" sz="1400" dirty="0"/>
+          </a:p>
+          <a:p>
+            <a:pPr marL="342900" indent="-342900">
+              <a:spcAft>
+                <a:spcPts val="400"/>
+              </a:spcAft>
+              <a:buSzPct val="100000"/>
+              <a:buChar char="•"/>
+            </a:pPr>
+            <a:r>
+              <a:rPr lang="en-US" sz="1400" dirty="0">
+                <a:solidFill>
+                  <a:srgbClr val="2A2A26"/>
+                </a:solidFill>
+                <a:latin typeface="Arial" pitchFamily="34" charset="0"/>
+                <a:ea typeface="Arial" pitchFamily="34" charset="-122"/>
+                <a:cs typeface="Arial" pitchFamily="34" charset="-120"/>
+              </a:rPr>
+              <a:t>3 </a:t>
+            </a:r>
+            <a:r>
+              <a:rPr lang="en-US" sz="1400" dirty="0" err="1">
+                <a:solidFill>
+                  <a:srgbClr val="2A2A26"/>
+                </a:solidFill>
+                <a:latin typeface="Arial" pitchFamily="34" charset="0"/>
+                <a:ea typeface="Arial" pitchFamily="34" charset="-122"/>
+                <a:cs typeface="Arial" pitchFamily="34" charset="-120"/>
+              </a:rPr>
+              <a:t>месяца</a:t>
+            </a:r>
+            <a:r>
+              <a:rPr lang="en-US" sz="1400" dirty="0">
+                <a:solidFill>
+                  <a:srgbClr val="2A2A26"/>
+                </a:solidFill>
+                <a:latin typeface="Arial" pitchFamily="34" charset="0"/>
+                <a:ea typeface="Arial" pitchFamily="34" charset="-122"/>
+                <a:cs typeface="Arial" pitchFamily="34" charset="-120"/>
+              </a:rPr>
+              <a:t> </a:t>
+            </a:r>
+            <a:r>
+              <a:rPr lang="ru-RU" sz="1400" dirty="0">
+                <a:solidFill>
+                  <a:srgbClr val="5E5D56"/>
+                </a:solidFill>
+                <a:latin typeface="Arial" pitchFamily="34" charset="0"/>
+                <a:cs typeface="Arial" pitchFamily="34" charset="-120"/>
+              </a:rPr>
+              <a:t>поддержки на критические </a:t>
+            </a:r>
+            <a:r>
+              <a:rPr lang="ru-RU" sz="1400" dirty="0" err="1">
+                <a:solidFill>
+                  <a:srgbClr val="5E5D56"/>
+                </a:solidFill>
+                <a:latin typeface="Arial" pitchFamily="34" charset="0"/>
+                <a:cs typeface="Arial" pitchFamily="34" charset="-120"/>
+              </a:rPr>
+              <a:t>неисправленности</a:t>
+            </a:r>
+            <a:endParaRPr lang="en-US" sz="1400" dirty="0"/>
+          </a:p>
+        </p:txBody>
+      </p:sp>
+      <p:sp>
+        <p:nvSpPr>
+          <p:cNvPr id="13" name="Shape 11"/>
+          <p:cNvSpPr/>
+          <p:nvPr/>
+        </p:nvSpPr>
+        <p:spPr>
+          <a:xfrm>
+            <a:off x="8065008" y="2148840"/>
+            <a:ext cx="3392424" cy="3931920"/>
+          </a:xfrm>
+          <a:prstGeom prst="rect">
+            <a:avLst/>
+          </a:prstGeom>
+          <a:solidFill>
+            <a:srgbClr val="F6F3EE"/>
+          </a:solidFill>
+          <a:ln w="9525">
+            <a:solidFill>
+              <a:srgbClr val="CFC8BC"/>
+            </a:solidFill>
+            <a:prstDash val="solid"/>
+          </a:ln>
+        </p:spPr>
+        <p:txBody>
+          <a:bodyPr/>
+          <a:p/>
+        </p:txBody>
+      </p:sp>
+      <p:sp>
+        <p:nvSpPr>
+          <p:cNvPr id="14" name="Text 12"/>
+          <p:cNvSpPr txBox="1"/>
+          <p:nvPr/>
+        </p:nvSpPr>
+        <p:spPr>
+          <a:xfrm>
+            <a:off x="8385048" y="2697480"/>
+            <a:ext cx="2752344" cy="777240"/>
+          </a:xfrm>
+          <a:prstGeom prst="rect">
+            <a:avLst/>
+          </a:prstGeom>
+          <a:noFill/>
+          <a:ln/>
+        </p:spPr>
+        <p:txBody>
+          <a:bodyPr wrap="square" lIns="0" tIns="0" rIns="0" bIns="0" rtlCol="0" anchor="t"/>
+          <a:lstStyle/>
+          <a:p>
+            <a:pPr marL="0" indent="0">
+              <a:buNone/>
+            </a:pPr>
+            <a:r>
+              <a:rPr lang="en-US" sz="2200" dirty="0">
+                <a:solidFill>
+                  <a:srgbClr val="2A2A26"/>
+                </a:solidFill>
+                <a:latin typeface="Georgia" pitchFamily="34" charset="0"/>
+                <a:ea typeface="Georgia" pitchFamily="34" charset="-122"/>
+                <a:cs typeface="Georgia" pitchFamily="34" charset="-120"/>
+              </a:rPr>
+              <a:t>Лавка и деньги</a:t>
+            </a:r>
+            <a:endParaRPr lang="en-US" sz="2200" dirty="0"/>
+          </a:p>
+        </p:txBody>
+      </p:sp>
+      <p:sp>
+        <p:nvSpPr>
+          <p:cNvPr id="15" name="Text 13"/>
+          <p:cNvSpPr txBox="1"/>
+          <p:nvPr/>
+        </p:nvSpPr>
+        <p:spPr>
+          <a:xfrm>
+            <a:off x="8385048" y="3223260"/>
+            <a:ext cx="2752344" cy="640080"/>
+          </a:xfrm>
+          <a:prstGeom prst="rect">
+            <a:avLst/>
+          </a:prstGeom>
+          <a:noFill/>
+          <a:ln/>
+        </p:spPr>
+        <p:txBody>
+          <a:bodyPr wrap="square" lIns="0" tIns="0" rIns="0" bIns="0" rtlCol="0" anchor="t"/>
+          <a:lstStyle/>
+          <a:p>
+            <a:pPr marL="0" indent="0">
+              <a:buNone/>
+            </a:pPr>
+            <a:r>
+              <a:rPr lang="ru-RU" sz="3200" dirty="0">
+                <a:solidFill>
+                  <a:srgbClr val="2A2A26"/>
+                </a:solidFill>
+                <a:latin typeface="Georgia" pitchFamily="34" charset="0"/>
+                <a:ea typeface="Georgia" pitchFamily="34" charset="-122"/>
+                <a:cs typeface="Georgia" pitchFamily="34" charset="-120"/>
+              </a:rPr>
+              <a:t>23</a:t>
+            </a:r>
+            <a:r>
+              <a:rPr lang="en-US" sz="3200" dirty="0">
+                <a:solidFill>
+                  <a:srgbClr val="2A2A26"/>
+                </a:solidFill>
+                <a:latin typeface="Georgia" pitchFamily="34" charset="0"/>
+                <a:ea typeface="Georgia" pitchFamily="34" charset="-122"/>
+                <a:cs typeface="Georgia" pitchFamily="34" charset="-120"/>
+              </a:rPr>
+              <a:t>0 000 ₽</a:t>
+            </a:r>
+            <a:endParaRPr lang="en-US" sz="3200" dirty="0"/>
+          </a:p>
+        </p:txBody>
+      </p:sp>
+      <p:sp>
+        <p:nvSpPr>
+          <p:cNvPr id="16" name="Text 14"/>
+          <p:cNvSpPr txBox="1"/>
+          <p:nvPr/>
+        </p:nvSpPr>
+        <p:spPr>
+          <a:xfrm>
+            <a:off x="8330457" y="3822795"/>
+            <a:ext cx="2752344" cy="1645920"/>
+          </a:xfrm>
+          <a:prstGeom prst="rect">
+            <a:avLst/>
+          </a:prstGeom>
+          <a:noFill/>
+          <a:ln/>
+        </p:spPr>
+        <p:txBody>
+          <a:bodyPr wrap="square" lIns="0" tIns="0" rIns="0" bIns="0" rtlCol="0" anchor="t"/>
+          <a:lstStyle/>
+          <a:p>
+            <a:pPr marL="342900" indent="-342900">
+              <a:spcAft>
+                <a:spcPts val="400"/>
+              </a:spcAft>
+              <a:buSzPct val="100000"/>
+              <a:buChar char="•"/>
+            </a:pPr>
+            <a:r>
+              <a:rPr lang="en-US" sz="1400" dirty="0">
+                <a:solidFill>
+                  <a:srgbClr val="5E5D56"/>
+                </a:solidFill>
+                <a:latin typeface="Arial" pitchFamily="34" charset="0"/>
+                <a:ea typeface="Arial" pitchFamily="34" charset="-122"/>
+                <a:cs typeface="Arial" pitchFamily="34" charset="-120"/>
+              </a:rPr>
+              <a:t>Всё из «Лавки»</a:t>
+            </a:r>
+            <a:endParaRPr lang="en-US" sz="1400" dirty="0"/>
+          </a:p>
+          <a:p>
+            <a:pPr marL="342900" indent="-342900">
+              <a:spcAft>
+                <a:spcPts val="400"/>
+              </a:spcAft>
+              <a:buSzPct val="100000"/>
+              <a:buChar char="•"/>
+            </a:pPr>
+            <a:r>
+              <a:rPr lang="en-US" sz="1400" dirty="0">
+                <a:solidFill>
+                  <a:srgbClr val="5E5D56"/>
+                </a:solidFill>
+                <a:latin typeface="Arial" pitchFamily="34" charset="0"/>
+                <a:ea typeface="Arial" pitchFamily="34" charset="-122"/>
+                <a:cs typeface="Arial" pitchFamily="34" charset="-120"/>
+              </a:rPr>
+              <a:t>Раздел «Деньги»</a:t>
+            </a:r>
+            <a:endParaRPr lang="en-US" sz="1400" dirty="0"/>
+          </a:p>
+          <a:p>
+            <a:pPr marL="342900" indent="-342900">
+              <a:spcAft>
+                <a:spcPts val="400"/>
+              </a:spcAft>
+              <a:buSzPct val="100000"/>
+              <a:buChar char="•"/>
+            </a:pPr>
+            <a:r>
+              <a:rPr lang="ru-RU" sz="1400" dirty="0">
+                <a:solidFill>
+                  <a:srgbClr val="5E5D56"/>
+                </a:solidFill>
+                <a:latin typeface="Arial" pitchFamily="34" charset="0"/>
+                <a:cs typeface="Arial" pitchFamily="34" charset="-120"/>
+              </a:rPr>
+              <a:t>Подумаем как можно повысить выручку и прийти желанным 7 миллионам через автоматизацию и налаживание рутины чтобы</a:t>
+            </a:r>
+            <a:endParaRPr lang="en-US" sz="1400" dirty="0"/>
+          </a:p>
+          <a:p>
+            <a:pPr marL="342900" indent="-342900">
+              <a:spcAft>
+                <a:spcPts val="400"/>
+              </a:spcAft>
+              <a:buSzPct val="100000"/>
+              <a:buChar char="•"/>
+            </a:pPr>
+            <a:r>
+              <a:rPr lang="en-US" sz="1400" dirty="0">
+                <a:solidFill>
+                  <a:srgbClr val="5E5D56"/>
+                </a:solidFill>
+                <a:latin typeface="Arial" pitchFamily="34" charset="0"/>
+                <a:ea typeface="Arial" pitchFamily="34" charset="-122"/>
+                <a:cs typeface="Arial" pitchFamily="34" charset="-120"/>
+              </a:rPr>
+              <a:t>6 </a:t>
+            </a:r>
+            <a:r>
+              <a:rPr lang="en-US" sz="1400" dirty="0" err="1">
+                <a:solidFill>
+                  <a:srgbClr val="5E5D56"/>
+                </a:solidFill>
+                <a:latin typeface="Arial" pitchFamily="34" charset="0"/>
+                <a:ea typeface="Arial" pitchFamily="34" charset="-122"/>
+                <a:cs typeface="Arial" pitchFamily="34" charset="-120"/>
+              </a:rPr>
+              <a:t>месяцев</a:t>
+            </a:r>
+            <a:r>
+              <a:rPr lang="en-US" sz="1400" dirty="0">
+                <a:solidFill>
+                  <a:srgbClr val="5E5D56"/>
+                </a:solidFill>
+                <a:latin typeface="Arial" pitchFamily="34" charset="0"/>
+                <a:ea typeface="Arial" pitchFamily="34" charset="-122"/>
+                <a:cs typeface="Arial" pitchFamily="34" charset="-120"/>
+              </a:rPr>
+              <a:t> </a:t>
+            </a:r>
+            <a:r>
+              <a:rPr lang="ru-RU" sz="1400" dirty="0">
+                <a:solidFill>
+                  <a:srgbClr val="5E5D56"/>
+                </a:solidFill>
+                <a:latin typeface="Arial" pitchFamily="34" charset="0"/>
+                <a:cs typeface="Arial" pitchFamily="34" charset="-120"/>
+              </a:rPr>
+              <a:t>поддержки на критические </a:t>
+            </a:r>
+            <a:r>
+              <a:rPr lang="ru-RU" sz="1400" dirty="0" err="1">
+                <a:solidFill>
+                  <a:srgbClr val="5E5D56"/>
+                </a:solidFill>
+                <a:latin typeface="Arial" pitchFamily="34" charset="0"/>
+                <a:cs typeface="Arial" pitchFamily="34" charset="-120"/>
+              </a:rPr>
+              <a:t>неисправленности</a:t>
+            </a:r>
+            <a:endParaRPr lang="en-US" sz="1400" dirty="0"/>
+          </a:p>
+        </p:txBody>
+      </p:sp>
+      <p:sp>
+        <p:nvSpPr>
+          <p:cNvPr id="17" name="Text 15"/>
+          <p:cNvSpPr txBox="1"/>
+          <p:nvPr/>
+        </p:nvSpPr>
+        <p:spPr>
+          <a:xfrm>
+            <a:off x="895293" y="1857347"/>
+            <a:ext cx="9144000" cy="274320"/>
+          </a:xfrm>
+          <a:prstGeom prst="rect">
+            <a:avLst/>
+          </a:prstGeom>
+          <a:noFill/>
+          <a:ln/>
+        </p:spPr>
+        <p:txBody>
+          <a:bodyPr wrap="square" lIns="0" tIns="0" rIns="0" bIns="0" rtlCol="0" anchor="t"/>
+          <a:lstStyle/>
+          <a:p>
+            <a:pPr marL="0" indent="0">
+              <a:buNone/>
+            </a:pPr>
+            <a:r>
+              <a:rPr lang="en-US" sz="1100" dirty="0">
+                <a:solidFill>
+                  <a:srgbClr val="5E5D56"/>
+                </a:solidFill>
+                <a:latin typeface="Arial" pitchFamily="34" charset="0"/>
+                <a:ea typeface="Arial" pitchFamily="34" charset="-122"/>
+                <a:cs typeface="Arial" pitchFamily="34" charset="-120"/>
+              </a:rPr>
+              <a:t>Оплата частями: 40% </a:t>
+            </a:r>
+            <a:r>
+              <a:rPr lang="en-US" sz="1100" dirty="0" err="1">
+                <a:solidFill>
+                  <a:srgbClr val="5E5D56"/>
+                </a:solidFill>
+                <a:latin typeface="Arial" pitchFamily="34" charset="0"/>
+                <a:ea typeface="Arial" pitchFamily="34" charset="-122"/>
+                <a:cs typeface="Arial" pitchFamily="34" charset="-120"/>
+              </a:rPr>
+              <a:t>на</a:t>
+            </a:r>
+            <a:r>
+              <a:rPr lang="en-US" sz="1100" dirty="0">
+                <a:solidFill>
+                  <a:srgbClr val="5E5D56"/>
+                </a:solidFill>
+                <a:latin typeface="Arial" pitchFamily="34" charset="0"/>
+                <a:ea typeface="Arial" pitchFamily="34" charset="-122"/>
+                <a:cs typeface="Arial" pitchFamily="34" charset="-120"/>
+              </a:rPr>
+              <a:t> </a:t>
+            </a:r>
+            <a:r>
+              <a:rPr lang="en-US" sz="1100" dirty="0" err="1">
+                <a:solidFill>
+                  <a:srgbClr val="5E5D56"/>
+                </a:solidFill>
+                <a:latin typeface="Arial" pitchFamily="34" charset="0"/>
+                <a:ea typeface="Arial" pitchFamily="34" charset="-122"/>
+                <a:cs typeface="Arial" pitchFamily="34" charset="-120"/>
+              </a:rPr>
+              <a:t>старте</a:t>
+            </a:r>
+            <a:r>
+              <a:rPr lang="ru-RU" sz="1100" dirty="0">
+                <a:solidFill>
+                  <a:srgbClr val="5E5D56"/>
+                </a:solidFill>
+                <a:latin typeface="Arial" pitchFamily="34" charset="0"/>
+                <a:ea typeface="Arial" pitchFamily="34" charset="-122"/>
+                <a:cs typeface="Arial" pitchFamily="34" charset="-120"/>
+              </a:rPr>
+              <a:t> при подписании договора</a:t>
+            </a:r>
+            <a:r>
+              <a:rPr lang="en-US" sz="1100" dirty="0">
+                <a:solidFill>
+                  <a:srgbClr val="5E5D56"/>
+                </a:solidFill>
+                <a:latin typeface="Arial" pitchFamily="34" charset="0"/>
+                <a:ea typeface="Arial" pitchFamily="34" charset="-122"/>
+                <a:cs typeface="Arial" pitchFamily="34" charset="-120"/>
+              </a:rPr>
+              <a:t>, 30% </a:t>
+            </a:r>
+            <a:r>
+              <a:rPr lang="en-US" sz="1100" dirty="0" err="1">
+                <a:solidFill>
+                  <a:srgbClr val="5E5D56"/>
+                </a:solidFill>
+                <a:latin typeface="Arial" pitchFamily="34" charset="0"/>
+                <a:ea typeface="Arial" pitchFamily="34" charset="-122"/>
+                <a:cs typeface="Arial" pitchFamily="34" charset="-120"/>
+              </a:rPr>
+              <a:t>на</a:t>
+            </a:r>
+            <a:r>
+              <a:rPr lang="ru-RU" sz="1100" dirty="0">
+                <a:solidFill>
+                  <a:srgbClr val="5E5D56"/>
+                </a:solidFill>
+                <a:latin typeface="Arial" pitchFamily="34" charset="0"/>
+                <a:ea typeface="Arial" pitchFamily="34" charset="-122"/>
+                <a:cs typeface="Arial" pitchFamily="34" charset="-120"/>
+              </a:rPr>
+              <a:t> утверждении конечном</a:t>
+            </a:r>
+            <a:r>
+              <a:rPr lang="en-US" sz="1100" dirty="0">
+                <a:solidFill>
+                  <a:srgbClr val="5E5D56"/>
+                </a:solidFill>
+                <a:latin typeface="Arial" pitchFamily="34" charset="0"/>
+                <a:ea typeface="Arial" pitchFamily="34" charset="-122"/>
+                <a:cs typeface="Arial" pitchFamily="34" charset="-120"/>
+              </a:rPr>
+              <a:t> </a:t>
+            </a:r>
+            <a:r>
+              <a:rPr lang="en-US" sz="1100" dirty="0" err="1">
+                <a:solidFill>
+                  <a:srgbClr val="5E5D56"/>
+                </a:solidFill>
+                <a:latin typeface="Arial" pitchFamily="34" charset="0"/>
+                <a:ea typeface="Arial" pitchFamily="34" charset="-122"/>
+                <a:cs typeface="Arial" pitchFamily="34" charset="-120"/>
+              </a:rPr>
+              <a:t>макета</a:t>
+            </a:r>
+            <a:r>
+              <a:rPr lang="en-US" sz="1100" dirty="0">
+                <a:solidFill>
+                  <a:srgbClr val="5E5D56"/>
+                </a:solidFill>
+                <a:latin typeface="Arial" pitchFamily="34" charset="0"/>
+                <a:ea typeface="Arial" pitchFamily="34" charset="-122"/>
+                <a:cs typeface="Arial" pitchFamily="34" charset="-120"/>
+              </a:rPr>
+              <a:t>, 30% при запуске · Лесная ягодка · 13</a:t>
+            </a:r>
+            <a:br>
+              <a:rPr lang="ru-RU" sz="1100" dirty="0">
+                <a:solidFill>
+                  <a:srgbClr val="5E5D56"/>
+                </a:solidFill>
+                <a:latin typeface="Arial" pitchFamily="34" charset="0"/>
+                <a:ea typeface="Arial" pitchFamily="34" charset="-122"/>
+                <a:cs typeface="Arial" pitchFamily="34" charset="-120"/>
+              </a:rPr>
+            </a:br>
+            <a:br>
+              <a:rPr lang="ru-RU" sz="1100" dirty="0">
+                <a:solidFill>
+                  <a:srgbClr val="5E5D56"/>
+                </a:solidFill>
+                <a:latin typeface="Arial" pitchFamily="34" charset="0"/>
+                <a:ea typeface="Arial" pitchFamily="34" charset="-122"/>
+                <a:cs typeface="Arial" pitchFamily="34" charset="-120"/>
+              </a:rPr>
+            </a:br>
+            <a:endParaRPr lang="en-US" sz="1100" dirty="0"/>
+          </a:p>
+        </p:txBody>
+      </p:sp>
+      <p:sp>
+        <p:nvSpPr>
+          <p:cNvPr id="21" name="TextBox 20">
+            <a:extLst>
+              <a:ext uri="{FF2B5EF4-FFF2-40B4-BE49-F238E27FC236}">
+                <a16:creationId xmlns:a16="http://schemas.microsoft.com/office/drawing/2014/main" id="{31F208F7-B3A7-17CE-4B96-460A18DA4596}"/>
+              </a:ext>
+            </a:extLst>
+          </p:cNvPr>
+          <p:cNvSpPr txBox="1"/>
+          <p:nvPr/>
+        </p:nvSpPr>
+        <p:spPr>
+          <a:xfrm>
+            <a:off x="895293" y="6015420"/>
+            <a:ext cx="9499979" cy="600164"/>
+          </a:xfrm>
+          <a:prstGeom prst="rect">
+            <a:avLst/>
+          </a:prstGeom>
+          <a:noFill/>
+        </p:spPr>
+        <p:txBody>
+          <a:bodyPr wrap="square">
+            <a:spAutoFit/>
+          </a:bodyPr>
+          <a:lstStyle/>
+          <a:p>
+            <a:br>
+              <a:rPr lang="ru-RU" sz="1100" dirty="0">
+                <a:solidFill>
+                  <a:srgbClr val="5E5D56"/>
+                </a:solidFill>
+                <a:latin typeface="Arial" pitchFamily="34" charset="0"/>
+                <a:ea typeface="Arial" pitchFamily="34" charset="-122"/>
+                <a:cs typeface="Arial" pitchFamily="34" charset="-120"/>
+              </a:rPr>
+            </a:br>
+            <a:r>
+              <a:rPr lang="ru-RU" sz="1100" dirty="0">
+                <a:solidFill>
+                  <a:srgbClr val="5E5D56"/>
+                </a:solidFill>
+                <a:latin typeface="Arial" pitchFamily="34" charset="0"/>
+                <a:ea typeface="Arial" pitchFamily="34" charset="-122"/>
+                <a:cs typeface="Arial" pitchFamily="34" charset="-120"/>
+              </a:rPr>
+              <a:t>при желании можно собрать своего «трансформера» из штук которые вы хотите чтобы были на вашем сайте, а не просто тарифами, по цене проконсультирую отдельно</a:t>
+            </a:r>
+            <a:endParaRPr lang="en-AU" dirty="0"/>
+          </a:p>
+        </p:txBody>
+      </p:sp>
+    </p:spTree>
+  </p:cSld>
+  <p:clrMapOvr>
+    <a:masterClrMapping/>
+  </p:clrMapOvr>
+</p:sld>
+</file>
+
+<file path=ppt/slides/slide14.xml><?xml version="1.0" encoding="utf-8"?>
+<p:sld xmlns:a="http://schemas.openxmlformats.org/drawingml/2006/main" xmlns:r="http://schemas.openxmlformats.org/officeDocument/2006/relationships" xmlns:p="http://schemas.openxmlformats.org/presentationml/2006/main">
+  <p:cSld name="Slide 9">
+    <p:bg>
+      <p:bgPr>
+        <a:solidFill>
+          <a:srgbClr val="F6F3EE"/>
+        </a:solidFill>
+        <a:effectLst/>
+      </p:bgPr>
+    </p:bg>
+    <p:spTree>
+      <p:nvGrpSpPr>
+        <p:cNvPr id="1" name=""/>
+        <p:cNvGrpSpPr/>
+        <p:nvPr/>
+      </p:nvGrpSpPr>
+      <p:grpSpPr>
+        <a:xfrm>
+          <a:off x="0" y="0"/>
+          <a:ext cx="0" cy="0"/>
+          <a:chOff x="0" y="0"/>
+          <a:chExt cx="0" cy="0"/>
+        </a:xfrm>
+      </p:grpSpPr>
+      <p:sp>
+        <p:nvSpPr>
+          <p:cNvPr id="2" name="Text 0"/>
+          <p:cNvSpPr txBox="1"/>
+          <p:nvPr/>
+        </p:nvSpPr>
+        <p:spPr>
+          <a:xfrm>
+            <a:off x="731520" y="1188720"/>
+            <a:ext cx="10725912" cy="320040"/>
+          </a:xfrm>
+          <a:prstGeom prst="rect">
+            <a:avLst/>
+          </a:prstGeom>
+          <a:noFill/>
+          <a:ln/>
+        </p:spPr>
+        <p:txBody>
+          <a:bodyPr wrap="square" lIns="0" tIns="0" rIns="0" bIns="0" rtlCol="0" anchor="t"/>
+          <a:lstStyle/>
+          <a:p>
+            <a:pPr marL="0" indent="0">
+              <a:buNone/>
+            </a:pPr>
+            <a:r>
+              <a:rPr lang="en-US" sz="1200" kern="0" spc="300" dirty="0">
+                <a:solidFill>
+                  <a:srgbClr val="4A6B3A"/>
+                </a:solidFill>
+                <a:latin typeface="Arial" pitchFamily="34" charset="0"/>
+                <a:ea typeface="Arial" pitchFamily="34" charset="-122"/>
+                <a:cs typeface="Arial" pitchFamily="34" charset="-120"/>
+              </a:rPr>
+              <a:t>МОЖНО НАЧАТЬ С МАЛОГО</a:t>
+            </a:r>
+            <a:endParaRPr lang="en-US" sz="1200" dirty="0"/>
+          </a:p>
+        </p:txBody>
+      </p:sp>
+      <p:sp>
+        <p:nvSpPr>
+          <p:cNvPr id="3" name="Text 1"/>
+          <p:cNvSpPr txBox="1"/>
+          <p:nvPr/>
+        </p:nvSpPr>
+        <p:spPr>
+          <a:xfrm>
+            <a:off x="731520" y="1645920"/>
+            <a:ext cx="10058400" cy="1737360"/>
+          </a:xfrm>
+          <a:prstGeom prst="rect">
+            <a:avLst/>
+          </a:prstGeom>
+          <a:noFill/>
+          <a:ln/>
+        </p:spPr>
+        <p:txBody>
+          <a:bodyPr wrap="square" lIns="0" tIns="0" rIns="0" bIns="0" rtlCol="0" anchor="t"/>
+          <a:lstStyle/>
+          <a:p>
+            <a:pPr marL="0" indent="0">
+              <a:buNone/>
+            </a:pPr>
+            <a:r>
+              <a:rPr lang="en-US" sz="5000" dirty="0">
+                <a:solidFill>
+                  <a:srgbClr val="2A2A26"/>
+                </a:solidFill>
+                <a:latin typeface="Georgia" pitchFamily="34" charset="0"/>
+                <a:ea typeface="Georgia" pitchFamily="34" charset="-122"/>
+                <a:cs typeface="Georgia" pitchFamily="34" charset="-120"/>
+              </a:rPr>
+              <a:t>Старт: дизайн и прототип на </a:t>
+            </a:r>
+            <a:r>
+              <a:rPr lang="en-US" sz="5000" i="1" dirty="0">
+                <a:solidFill>
+                  <a:srgbClr val="4A6B3A"/>
+                </a:solidFill>
+                <a:latin typeface="Georgia" pitchFamily="34" charset="0"/>
+                <a:ea typeface="Georgia" pitchFamily="34" charset="-122"/>
+                <a:cs typeface="Georgia" pitchFamily="34" charset="-120"/>
+              </a:rPr>
+              <a:t>вашем</a:t>
+            </a:r>
+            <a:r>
+              <a:rPr lang="en-US" sz="5000" dirty="0">
+                <a:solidFill>
+                  <a:srgbClr val="2A2A26"/>
+                </a:solidFill>
+                <a:latin typeface="Georgia" pitchFamily="34" charset="0"/>
+                <a:ea typeface="Georgia" pitchFamily="34" charset="-122"/>
+                <a:cs typeface="Georgia" pitchFamily="34" charset="-120"/>
+              </a:rPr>
+              <a:t> каталоге</a:t>
+            </a:r>
+            <a:endParaRPr lang="en-US" sz="5000" dirty="0"/>
+          </a:p>
+        </p:txBody>
+      </p:sp>
+      <p:sp>
+        <p:nvSpPr>
+          <p:cNvPr id="4" name="Text 2"/>
+          <p:cNvSpPr txBox="1"/>
+          <p:nvPr/>
+        </p:nvSpPr>
+        <p:spPr>
+          <a:xfrm>
+            <a:off x="731520" y="3749040"/>
+            <a:ext cx="3840480" cy="1097280"/>
+          </a:xfrm>
+          <a:prstGeom prst="rect">
+            <a:avLst/>
+          </a:prstGeom>
+          <a:noFill/>
+          <a:ln/>
+        </p:spPr>
+        <p:txBody>
+          <a:bodyPr wrap="square" lIns="0" tIns="0" rIns="0" bIns="0" rtlCol="0" anchor="t"/>
+          <a:lstStyle/>
+          <a:p>
+            <a:pPr marL="0" indent="0">
+              <a:buNone/>
+            </a:pPr>
+            <a:r>
+              <a:rPr lang="en-US" sz="6000" dirty="0">
+                <a:solidFill>
+                  <a:srgbClr val="4A6B3A"/>
+                </a:solidFill>
+                <a:latin typeface="Georgia" pitchFamily="34" charset="0"/>
+                <a:ea typeface="Georgia" pitchFamily="34" charset="-122"/>
+                <a:cs typeface="Georgia" pitchFamily="34" charset="-120"/>
+              </a:rPr>
+              <a:t>60 000 ₽</a:t>
+            </a:r>
+            <a:endParaRPr lang="en-US" sz="6000" dirty="0"/>
+          </a:p>
+        </p:txBody>
+      </p:sp>
+      <p:sp>
+        <p:nvSpPr>
+          <p:cNvPr id="5" name="Text 3"/>
+          <p:cNvSpPr txBox="1"/>
+          <p:nvPr/>
+        </p:nvSpPr>
+        <p:spPr>
+          <a:xfrm>
+            <a:off x="4846320" y="3840480"/>
+            <a:ext cx="6583680" cy="1188720"/>
+          </a:xfrm>
+          <a:prstGeom prst="rect">
+            <a:avLst/>
+          </a:prstGeom>
+          <a:noFill/>
+          <a:ln/>
+        </p:spPr>
+        <p:txBody>
+          <a:bodyPr wrap="square" lIns="0" tIns="0" rIns="0" bIns="0" rtlCol="0" anchor="t"/>
+          <a:lstStyle/>
+          <a:p>
+            <a:pPr marL="0" indent="0">
+              <a:lnSpc>
+                <a:spcPct val="120000"/>
+              </a:lnSpc>
+              <a:buNone/>
+            </a:pPr>
+            <a:r>
+              <a:rPr lang="en-US" sz="1700" dirty="0">
+                <a:solidFill>
+                  <a:srgbClr val="2A2A26"/>
+                </a:solidFill>
+                <a:latin typeface="Arial" pitchFamily="34" charset="0"/>
+                <a:ea typeface="Arial" pitchFamily="34" charset="-122"/>
+                <a:cs typeface="Arial" pitchFamily="34" charset="-120"/>
+              </a:rPr>
+              <a:t>За 2 недели: макеты главной, каталога и карточки, тексты вашим голосом. Идём дальше — сумма засчитывается в проект. Нет — макеты остаются у вас.</a:t>
+            </a:r>
+            <a:endParaRPr lang="en-US" sz="1700" dirty="0"/>
+          </a:p>
+        </p:txBody>
+      </p:sp>
+      <p:sp>
+        <p:nvSpPr>
+          <p:cNvPr id="6" name="Text 4"/>
+          <p:cNvSpPr txBox="1"/>
+          <p:nvPr/>
+        </p:nvSpPr>
+        <p:spPr>
+          <a:xfrm>
+            <a:off x="731520" y="6263640"/>
+            <a:ext cx="3657600" cy="274320"/>
+          </a:xfrm>
+          <a:prstGeom prst="rect">
+            <a:avLst/>
+          </a:prstGeom>
+          <a:noFill/>
+          <a:ln/>
+        </p:spPr>
+        <p:txBody>
+          <a:bodyPr wrap="square" lIns="0" tIns="0" rIns="0" bIns="0" rtlCol="0" anchor="t"/>
+          <a:lstStyle/>
+          <a:p>
+            <a:pPr marL="0" indent="0">
+              <a:buNone/>
+            </a:pPr>
+            <a:r>
+              <a:rPr lang="en-US" sz="1100" dirty="0">
+                <a:solidFill>
+                  <a:srgbClr val="5E5D56"/>
+                </a:solidFill>
+                <a:latin typeface="Arial" pitchFamily="34" charset="0"/>
+                <a:ea typeface="Arial" pitchFamily="34" charset="-122"/>
+                <a:cs typeface="Arial" pitchFamily="34" charset="-120"/>
+              </a:rPr>
+              <a:t>Лесная ягодка · 14</a:t>
+            </a:r>
+            <a:endParaRPr lang="en-US" sz="1100" dirty="0"/>
+          </a:p>
+        </p:txBody>
+      </p:sp>
+    </p:spTree>
+  </p:cSld>
+  <p:clrMapOvr>
+    <a:masterClrMapping/>
+  </p:clrMapOvr>
+</p:sld>
+</file>
+
+<file path=ppt/slides/slide15.xml><?xml version="1.0" encoding="utf-8"?>
+<p:sld xmlns:a="http://schemas.openxmlformats.org/drawingml/2006/main" xmlns:r="http://schemas.openxmlformats.org/officeDocument/2006/relationships" xmlns:p="http://schemas.openxmlformats.org/presentationml/2006/main">
   <p:cSld name="Slide 10">
     <p:bg>
       <p:bgPr>
@@ -2633,7 +5407,7 @@
 </p:sld>
 </file>
 
-<file path=ppt/slides/slide11.xml><?xml version="1.0" encoding="utf-8"?>
+<file path=ppt/slides/slide16.xml><?xml version="1.0" encoding="utf-8"?>
 <p:sld xmlns:a="http://schemas.openxmlformats.org/drawingml/2006/main" xmlns:r="http://schemas.openxmlformats.org/officeDocument/2006/relationships" xmlns:p="http://schemas.openxmlformats.org/presentationml/2006/main">
   <p:cSld name="Slide 11">
     <p:bg>
@@ -3481,7 +6255,7 @@
 </p:sld>
 </file>
 
-<file path=ppt/slides/slide12.xml><?xml version="1.0" encoding="utf-8"?>
+<file path=ppt/slides/slide17.xml><?xml version="1.0" encoding="utf-8"?>
 <p:sld xmlns:a="http://schemas.openxmlformats.org/drawingml/2006/main" xmlns:r="http://schemas.openxmlformats.org/officeDocument/2006/relationships" xmlns:p="http://schemas.openxmlformats.org/presentationml/2006/main">
   <p:cSld name="Slide 12">
     <p:bg>
@@ -3786,2700 +6560,6 @@
               <a:t>Василиса</a:t>
             </a:r>
             <a:endParaRPr lang="en-US" sz="2400" dirty="0"/>
-          </a:p>
-        </p:txBody>
-      </p:sp>
-    </p:spTree>
-  </p:cSld>
-  <p:clrMapOvr>
-    <a:masterClrMapping/>
-  </p:clrMapOvr>
-</p:sld>
-</file>
-
-<file path=ppt/slides/slide13.xml><?xml version="1.0" encoding="utf-8"?>
-<p:sld xmlns:a="http://schemas.openxmlformats.org/drawingml/2006/main" xmlns:p="http://schemas.openxmlformats.org/presentationml/2006/main" xmlns:r="http://schemas.openxmlformats.org/officeDocument/2006/relationships">
-  <p:cSld>
-    <p:bg>
-      <p:bgPr>
-        <a:solidFill>
-          <a:srgbClr val="ECE7DF"/>
-        </a:solidFill>
-        <a:effectLst/>
-      </p:bgPr>
-    </p:bg>
-    <p:spTree>
-      <p:nvGrpSpPr>
-        <p:cNvPr id="1" name=""/>
-        <p:cNvGrpSpPr/>
-        <p:nvPr/>
-      </p:nvGrpSpPr>
-      <p:grpSpPr/>
-      <p:pic>
-        <p:nvPicPr>
-          <p:cNvPr id="2" name="Picture 1" descr="image.png"/>
-          <p:cNvPicPr>
-            <a:picLocks noChangeAspect="1"/>
-          </p:cNvPicPr>
-          <p:nvPr/>
-        </p:nvPicPr>
-        <p:blipFill>
-          <a:blip r:embed="rId2"/>
-          <a:stretch>
-            <a:fillRect/>
-          </a:stretch>
-        </p:blipFill>
-        <p:spPr>
-          <a:xfrm>
-            <a:off x="812800" y="2000250"/>
-            <a:ext cx="1365250" cy="2857500"/>
-          </a:xfrm>
-          <a:prstGeom prst="rect">
-            <a:avLst/>
-          </a:prstGeom>
-        </p:spPr>
-      </p:pic>
-      <p:pic>
-        <p:nvPicPr>
-          <p:cNvPr id="3" name="Picture 2" descr="image.png"/>
-          <p:cNvPicPr>
-            <a:picLocks noChangeAspect="1"/>
-          </p:cNvPicPr>
-          <p:nvPr/>
-        </p:nvPicPr>
-        <p:blipFill>
-          <a:blip r:embed="rId3"/>
-          <a:stretch>
-            <a:fillRect/>
-          </a:stretch>
-        </p:blipFill>
-        <p:spPr>
-          <a:xfrm>
-            <a:off x="3530600" y="2400300"/>
-            <a:ext cx="1416050" cy="2457450"/>
-          </a:xfrm>
-          <a:prstGeom prst="rect">
-            <a:avLst/>
-          </a:prstGeom>
-        </p:spPr>
-      </p:pic>
-      <p:pic>
-        <p:nvPicPr>
-          <p:cNvPr id="4" name="Picture 3" descr="image.png"/>
-          <p:cNvPicPr>
-            <a:picLocks noChangeAspect="1"/>
-          </p:cNvPicPr>
-          <p:nvPr/>
-        </p:nvPicPr>
-        <p:blipFill>
-          <a:blip r:embed="rId4"/>
-          <a:stretch>
-            <a:fillRect/>
-          </a:stretch>
-        </p:blipFill>
-        <p:spPr>
-          <a:xfrm>
-            <a:off x="6248400" y="1739900"/>
-            <a:ext cx="1485900" cy="3117850"/>
-          </a:xfrm>
-          <a:prstGeom prst="rect">
-            <a:avLst/>
-          </a:prstGeom>
-        </p:spPr>
-      </p:pic>
-      <p:pic>
-        <p:nvPicPr>
-          <p:cNvPr id="5" name="Picture 4" descr="image.png"/>
-          <p:cNvPicPr>
-            <a:picLocks noChangeAspect="1"/>
-          </p:cNvPicPr>
-          <p:nvPr/>
-        </p:nvPicPr>
-        <p:blipFill>
-          <a:blip r:embed="rId5"/>
-          <a:stretch>
-            <a:fillRect/>
-          </a:stretch>
-        </p:blipFill>
-        <p:spPr>
-          <a:xfrm>
-            <a:off x="8966200" y="1460500"/>
-            <a:ext cx="1612900" cy="3397250"/>
-          </a:xfrm>
-          <a:prstGeom prst="rect">
-            <a:avLst/>
-          </a:prstGeom>
-        </p:spPr>
-      </p:pic>
-      <p:sp>
-        <p:nvSpPr>
-          <p:cNvPr id="6" name="TextBox 5"/>
-          <p:cNvSpPr txBox="1"/>
-          <p:nvPr/>
-        </p:nvSpPr>
-        <p:spPr>
-          <a:xfrm>
-            <a:off x="812800" y="457200"/>
-            <a:ext cx="5715000" cy="254000"/>
-          </a:xfrm>
-          <a:prstGeom prst="rect">
-            <a:avLst/>
-          </a:prstGeom>
-          <a:noFill/>
-        </p:spPr>
-        <p:txBody>
-          <a:bodyPr wrap="square" lIns="0" rIns="0" tIns="0" bIns="0" anchor="t">
-            <a:spAutoFit/>
-          </a:bodyPr>
-          <a:lstStyle/>
-          <a:p>
-            <a:r>
-              <a:rPr sz="1200" b="0" i="0" spc="300">
-                <a:solidFill>
-                  <a:srgbClr val="4A6B3A"/>
-                </a:solidFill>
-                <a:latin typeface="Arial"/>
-              </a:rPr>
-              <a:t>НА ТЕЛЕФОНАХ · ПОКУПАТЕЛЬ</a:t>
-            </a:r>
-          </a:p>
-        </p:txBody>
-      </p:sp>
-      <p:sp>
-        <p:nvSpPr>
-          <p:cNvPr id="7" name="TextBox 6"/>
-          <p:cNvSpPr txBox="1"/>
-          <p:nvPr/>
-        </p:nvSpPr>
-        <p:spPr>
-          <a:xfrm>
-            <a:off x="812800" y="736600"/>
-            <a:ext cx="6350000" cy="731520"/>
-          </a:xfrm>
-          <a:prstGeom prst="rect">
-            <a:avLst/>
-          </a:prstGeom>
-          <a:noFill/>
-        </p:spPr>
-        <p:txBody>
-          <a:bodyPr wrap="square" lIns="0" rIns="0" tIns="0" bIns="0" anchor="t">
-            <a:spAutoFit/>
-          </a:bodyPr>
-          <a:lstStyle/>
-          <a:p>
-            <a:r>
-              <a:rPr sz="3200" b="0" i="0">
-                <a:solidFill>
-                  <a:srgbClr val="2A2A26"/>
-                </a:solidFill>
-                <a:latin typeface="Georgia"/>
-              </a:rPr>
-              <a:t>Что увидит покупатель</a:t>
-            </a:r>
-          </a:p>
-        </p:txBody>
-      </p:sp>
-      <p:sp>
-        <p:nvSpPr>
-          <p:cNvPr id="8" name="TextBox 7"/>
-          <p:cNvSpPr txBox="1"/>
-          <p:nvPr/>
-        </p:nvSpPr>
-        <p:spPr>
-          <a:xfrm>
-            <a:off x="7442200" y="635000"/>
-            <a:ext cx="3937000" cy="635000"/>
-          </a:xfrm>
-          <a:prstGeom prst="rect">
-            <a:avLst/>
-          </a:prstGeom>
-          <a:noFill/>
-        </p:spPr>
-        <p:txBody>
-          <a:bodyPr wrap="square" lIns="0" rIns="0" tIns="0" bIns="0" anchor="t">
-            <a:spAutoFit/>
-          </a:bodyPr>
-          <a:lstStyle/>
-          <a:p>
-            <a:r>
-              <a:rPr sz="1300" b="0" i="0">
-                <a:solidFill>
-                  <a:srgbClr val="5E5D56"/>
-                </a:solidFill>
-                <a:latin typeface="Arial"/>
-              </a:rPr>
-              <a:t>Товары, цены, вес, состав и срок годности с вашего сайта. Количества и заказы для примера.</a:t>
-            </a:r>
-          </a:p>
-        </p:txBody>
-      </p:sp>
-      <p:sp>
-        <p:nvSpPr>
-          <p:cNvPr id="9" name="TextBox 8"/>
-          <p:cNvSpPr txBox="1"/>
-          <p:nvPr/>
-        </p:nvSpPr>
-        <p:spPr>
-          <a:xfrm>
-            <a:off x="812800" y="4984750"/>
-            <a:ext cx="2527300" cy="215900"/>
-          </a:xfrm>
-          <a:prstGeom prst="rect">
-            <a:avLst/>
-          </a:prstGeom>
-          <a:noFill/>
-        </p:spPr>
-        <p:txBody>
-          <a:bodyPr wrap="square" lIns="0" rIns="0" tIns="0" bIns="0" anchor="t">
-            <a:spAutoFit/>
-          </a:bodyPr>
-          <a:lstStyle/>
-          <a:p>
-            <a:r>
-              <a:rPr sz="1000" b="0" i="0">
-                <a:solidFill>
-                  <a:srgbClr val="5E5D56"/>
-                </a:solidFill>
-                <a:latin typeface="Arial"/>
-              </a:rPr>
-              <a:t>Android · 360 px</a:t>
-            </a:r>
-          </a:p>
-        </p:txBody>
-      </p:sp>
-      <p:sp>
-        <p:nvSpPr>
-          <p:cNvPr id="10" name="TextBox 9"/>
-          <p:cNvSpPr txBox="1"/>
-          <p:nvPr/>
-        </p:nvSpPr>
-        <p:spPr>
-          <a:xfrm>
-            <a:off x="812800" y="5226050"/>
-            <a:ext cx="2527300" cy="317500"/>
-          </a:xfrm>
-          <a:prstGeom prst="rect">
-            <a:avLst/>
-          </a:prstGeom>
-          <a:noFill/>
-        </p:spPr>
-        <p:txBody>
-          <a:bodyPr wrap="square" lIns="0" rIns="0" tIns="0" bIns="0" anchor="t">
-            <a:spAutoFit/>
-          </a:bodyPr>
-          <a:lstStyle/>
-          <a:p>
-            <a:r>
-              <a:rPr sz="1400" b="1" i="0">
-                <a:solidFill>
-                  <a:srgbClr val="2A2A26"/>
-                </a:solidFill>
-                <a:latin typeface="Arial"/>
-              </a:rPr>
-              <a:t>Главная в день партии</a:t>
-            </a:r>
-          </a:p>
-        </p:txBody>
-      </p:sp>
-      <p:sp>
-        <p:nvSpPr>
-          <p:cNvPr id="11" name="TextBox 10"/>
-          <p:cNvSpPr txBox="1"/>
-          <p:nvPr/>
-        </p:nvSpPr>
-        <p:spPr>
-          <a:xfrm>
-            <a:off x="812800" y="5543550"/>
-            <a:ext cx="2527300" cy="1524000"/>
-          </a:xfrm>
-          <a:prstGeom prst="rect">
-            <a:avLst/>
-          </a:prstGeom>
-          <a:noFill/>
-        </p:spPr>
-        <p:txBody>
-          <a:bodyPr wrap="square" lIns="0" rIns="0" tIns="0" bIns="0" anchor="t">
-            <a:spAutoFit/>
-          </a:bodyPr>
-          <a:lstStyle/>
-          <a:p>
-            <a:r>
-              <a:rPr sz="1100" b="0" i="0">
-                <a:solidFill>
-                  <a:srgbClr val="5E5D56"/>
-                </a:solidFill>
-                <a:latin typeface="Arial"/>
-              </a:rPr>
-              <a:t>Видно, сколько осталось. Партия закончилась, продажа закрылась сама.</a:t>
-            </a:r>
-          </a:p>
-        </p:txBody>
-      </p:sp>
-      <p:sp>
-        <p:nvSpPr>
-          <p:cNvPr id="12" name="TextBox 11"/>
-          <p:cNvSpPr txBox="1"/>
-          <p:nvPr/>
-        </p:nvSpPr>
-        <p:spPr>
-          <a:xfrm>
-            <a:off x="3530600" y="4984750"/>
-            <a:ext cx="2527300" cy="215900"/>
-          </a:xfrm>
-          <a:prstGeom prst="rect">
-            <a:avLst/>
-          </a:prstGeom>
-          <a:noFill/>
-        </p:spPr>
-        <p:txBody>
-          <a:bodyPr wrap="square" lIns="0" rIns="0" tIns="0" bIns="0" anchor="t">
-            <a:spAutoFit/>
-          </a:bodyPr>
-          <a:lstStyle/>
-          <a:p>
-            <a:r>
-              <a:rPr sz="1000" b="0" i="0">
-                <a:solidFill>
-                  <a:srgbClr val="5E5D56"/>
-                </a:solidFill>
-                <a:latin typeface="Arial"/>
-              </a:rPr>
-              <a:t>iPhone SE · 375 px</a:t>
-            </a:r>
-          </a:p>
-        </p:txBody>
-      </p:sp>
-      <p:sp>
-        <p:nvSpPr>
-          <p:cNvPr id="13" name="TextBox 12"/>
-          <p:cNvSpPr txBox="1"/>
-          <p:nvPr/>
-        </p:nvSpPr>
-        <p:spPr>
-          <a:xfrm>
-            <a:off x="3530600" y="5226050"/>
-            <a:ext cx="2527300" cy="317500"/>
-          </a:xfrm>
-          <a:prstGeom prst="rect">
-            <a:avLst/>
-          </a:prstGeom>
-          <a:noFill/>
-        </p:spPr>
-        <p:txBody>
-          <a:bodyPr wrap="square" lIns="0" rIns="0" tIns="0" bIns="0" anchor="t">
-            <a:spAutoFit/>
-          </a:bodyPr>
-          <a:lstStyle/>
-          <a:p>
-            <a:r>
-              <a:rPr sz="1400" b="1" i="0">
-                <a:solidFill>
-                  <a:srgbClr val="2A2A26"/>
-                </a:solidFill>
-                <a:latin typeface="Arial"/>
-              </a:rPr>
-              <a:t>Карточка товара</a:t>
-            </a:r>
-          </a:p>
-        </p:txBody>
-      </p:sp>
-      <p:sp>
-        <p:nvSpPr>
-          <p:cNvPr id="14" name="TextBox 13"/>
-          <p:cNvSpPr txBox="1"/>
-          <p:nvPr/>
-        </p:nvSpPr>
-        <p:spPr>
-          <a:xfrm>
-            <a:off x="3530600" y="5543550"/>
-            <a:ext cx="2527300" cy="1524000"/>
-          </a:xfrm>
-          <a:prstGeom prst="rect">
-            <a:avLst/>
-          </a:prstGeom>
-          <a:noFill/>
-        </p:spPr>
-        <p:txBody>
-          <a:bodyPr wrap="square" lIns="0" rIns="0" tIns="0" bIns="0" anchor="t">
-            <a:spAutoFit/>
-          </a:bodyPr>
-          <a:lstStyle/>
-          <a:p>
-            <a:r>
-              <a:rPr sz="1100" b="0" i="0">
-                <a:solidFill>
-                  <a:srgbClr val="5E5D56"/>
-                </a:solidFill>
-                <a:latin typeface="Arial"/>
-              </a:rPr>
-              <a:t>Все сведения о продукте по закону. Без них товар не опубликуется.</a:t>
-            </a:r>
-          </a:p>
-        </p:txBody>
-      </p:sp>
-      <p:sp>
-        <p:nvSpPr>
-          <p:cNvPr id="15" name="TextBox 14"/>
-          <p:cNvSpPr txBox="1"/>
-          <p:nvPr/>
-        </p:nvSpPr>
-        <p:spPr>
-          <a:xfrm>
-            <a:off x="6248400" y="4984750"/>
-            <a:ext cx="2527300" cy="215900"/>
-          </a:xfrm>
-          <a:prstGeom prst="rect">
-            <a:avLst/>
-          </a:prstGeom>
-          <a:noFill/>
-        </p:spPr>
-        <p:txBody>
-          <a:bodyPr wrap="square" lIns="0" rIns="0" tIns="0" bIns="0" anchor="t">
-            <a:spAutoFit/>
-          </a:bodyPr>
-          <a:lstStyle/>
-          <a:p>
-            <a:r>
-              <a:rPr sz="1000" b="0" i="0">
-                <a:solidFill>
-                  <a:srgbClr val="5E5D56"/>
-                </a:solidFill>
-                <a:latin typeface="Arial"/>
-              </a:rPr>
-              <a:t>iPhone 15 · 393 px</a:t>
-            </a:r>
-          </a:p>
-        </p:txBody>
-      </p:sp>
-      <p:sp>
-        <p:nvSpPr>
-          <p:cNvPr id="16" name="TextBox 15"/>
-          <p:cNvSpPr txBox="1"/>
-          <p:nvPr/>
-        </p:nvSpPr>
-        <p:spPr>
-          <a:xfrm>
-            <a:off x="6248400" y="5226050"/>
-            <a:ext cx="2527300" cy="317500"/>
-          </a:xfrm>
-          <a:prstGeom prst="rect">
-            <a:avLst/>
-          </a:prstGeom>
-          <a:noFill/>
-        </p:spPr>
-        <p:txBody>
-          <a:bodyPr wrap="square" lIns="0" rIns="0" tIns="0" bIns="0" anchor="t">
-            <a:spAutoFit/>
-          </a:bodyPr>
-          <a:lstStyle/>
-          <a:p>
-            <a:r>
-              <a:rPr sz="1400" b="1" i="0">
-                <a:solidFill>
-                  <a:srgbClr val="2A2A26"/>
-                </a:solidFill>
-                <a:latin typeface="Arial"/>
-              </a:rPr>
-              <a:t>Оформление</a:t>
-            </a:r>
-          </a:p>
-        </p:txBody>
-      </p:sp>
-      <p:sp>
-        <p:nvSpPr>
-          <p:cNvPr id="17" name="TextBox 16"/>
-          <p:cNvSpPr txBox="1"/>
-          <p:nvPr/>
-        </p:nvSpPr>
-        <p:spPr>
-          <a:xfrm>
-            <a:off x="6248400" y="5543550"/>
-            <a:ext cx="2527300" cy="1524000"/>
-          </a:xfrm>
-          <a:prstGeom prst="rect">
-            <a:avLst/>
-          </a:prstGeom>
-          <a:noFill/>
-        </p:spPr>
-        <p:txBody>
-          <a:bodyPr wrap="square" lIns="0" rIns="0" tIns="0" bIns="0" anchor="t">
-            <a:spAutoFit/>
-          </a:bodyPr>
-          <a:lstStyle/>
-          <a:p>
-            <a:r>
-              <a:rPr sz="1100" b="0" i="0">
-                <a:solidFill>
-                  <a:srgbClr val="5E5D56"/>
-                </a:solidFill>
-                <a:latin typeface="Arial"/>
-              </a:rPr>
-              <a:t>Отдельное согласие без отметки заранее, СДЭК на карте, чек на почту.</a:t>
-            </a:r>
-          </a:p>
-        </p:txBody>
-      </p:sp>
-      <p:sp>
-        <p:nvSpPr>
-          <p:cNvPr id="18" name="TextBox 17"/>
-          <p:cNvSpPr txBox="1"/>
-          <p:nvPr/>
-        </p:nvSpPr>
-        <p:spPr>
-          <a:xfrm>
-            <a:off x="8966200" y="4984750"/>
-            <a:ext cx="2527300" cy="215900"/>
-          </a:xfrm>
-          <a:prstGeom prst="rect">
-            <a:avLst/>
-          </a:prstGeom>
-          <a:noFill/>
-        </p:spPr>
-        <p:txBody>
-          <a:bodyPr wrap="square" lIns="0" rIns="0" tIns="0" bIns="0" anchor="t">
-            <a:spAutoFit/>
-          </a:bodyPr>
-          <a:lstStyle/>
-          <a:p>
-            <a:r>
-              <a:rPr sz="1000" b="0" i="0">
-                <a:solidFill>
-                  <a:srgbClr val="5E5D56"/>
-                </a:solidFill>
-                <a:latin typeface="Arial"/>
-              </a:rPr>
-              <a:t>iPhone 15 Pro Max · 430 px</a:t>
-            </a:r>
-          </a:p>
-        </p:txBody>
-      </p:sp>
-      <p:sp>
-        <p:nvSpPr>
-          <p:cNvPr id="19" name="TextBox 18"/>
-          <p:cNvSpPr txBox="1"/>
-          <p:nvPr/>
-        </p:nvSpPr>
-        <p:spPr>
-          <a:xfrm>
-            <a:off x="8966200" y="5226050"/>
-            <a:ext cx="2527300" cy="317500"/>
-          </a:xfrm>
-          <a:prstGeom prst="rect">
-            <a:avLst/>
-          </a:prstGeom>
-          <a:noFill/>
-        </p:spPr>
-        <p:txBody>
-          <a:bodyPr wrap="square" lIns="0" rIns="0" tIns="0" bIns="0" anchor="t">
-            <a:spAutoFit/>
-          </a:bodyPr>
-          <a:lstStyle/>
-          <a:p>
-            <a:r>
-              <a:rPr sz="1400" b="1" i="0">
-                <a:solidFill>
-                  <a:srgbClr val="2A2A26"/>
-                </a:solidFill>
-                <a:latin typeface="Arial"/>
-              </a:rPr>
-              <a:t>Партия разобрана</a:t>
-            </a:r>
-          </a:p>
-        </p:txBody>
-      </p:sp>
-      <p:sp>
-        <p:nvSpPr>
-          <p:cNvPr id="20" name="TextBox 19"/>
-          <p:cNvSpPr txBox="1"/>
-          <p:nvPr/>
-        </p:nvSpPr>
-        <p:spPr>
-          <a:xfrm>
-            <a:off x="8966200" y="5543550"/>
-            <a:ext cx="2527300" cy="1524000"/>
-          </a:xfrm>
-          <a:prstGeom prst="rect">
-            <a:avLst/>
-          </a:prstGeom>
-          <a:noFill/>
-        </p:spPr>
-        <p:txBody>
-          <a:bodyPr wrap="square" lIns="0" rIns="0" tIns="0" bIns="0" anchor="t">
-            <a:spAutoFit/>
-          </a:bodyPr>
-          <a:lstStyle/>
-          <a:p>
-            <a:r>
-              <a:rPr sz="1100" b="0" i="0">
-                <a:solidFill>
-                  <a:srgbClr val="5E5D56"/>
-                </a:solidFill>
-                <a:latin typeface="Arial"/>
-              </a:rPr>
-              <a:t>Вместо «нет в наличии» очередь и одно сообщение об открытии.</a:t>
-            </a:r>
-          </a:p>
-        </p:txBody>
-      </p:sp>
-    </p:spTree>
-  </p:cSld>
-  <p:clrMapOvr>
-    <a:masterClrMapping/>
-  </p:clrMapOvr>
-</p:sld>
-</file>
-
-<file path=ppt/slides/slide14.xml><?xml version="1.0" encoding="utf-8"?>
-<p:sld xmlns:a="http://schemas.openxmlformats.org/drawingml/2006/main" xmlns:p="http://schemas.openxmlformats.org/presentationml/2006/main" xmlns:r="http://schemas.openxmlformats.org/officeDocument/2006/relationships">
-  <p:cSld>
-    <p:bg>
-      <p:bgPr>
-        <a:solidFill>
-          <a:srgbClr val="F6F3EE"/>
-        </a:solidFill>
-        <a:effectLst/>
-      </p:bgPr>
-    </p:bg>
-    <p:spTree>
-      <p:nvGrpSpPr>
-        <p:cNvPr id="1" name=""/>
-        <p:cNvGrpSpPr/>
-        <p:nvPr/>
-      </p:nvGrpSpPr>
-      <p:grpSpPr/>
-      <p:pic>
-        <p:nvPicPr>
-          <p:cNvPr id="2" name="Picture 1" descr="image.png"/>
-          <p:cNvPicPr>
-            <a:picLocks noChangeAspect="1"/>
-          </p:cNvPicPr>
-          <p:nvPr/>
-        </p:nvPicPr>
-        <p:blipFill>
-          <a:blip r:embed="rId2"/>
-          <a:stretch>
-            <a:fillRect/>
-          </a:stretch>
-        </p:blipFill>
-        <p:spPr>
-          <a:xfrm>
-            <a:off x="812800" y="1524000"/>
-            <a:ext cx="1587500" cy="3340100"/>
-          </a:xfrm>
-          <a:prstGeom prst="rect">
-            <a:avLst/>
-          </a:prstGeom>
-        </p:spPr>
-      </p:pic>
-      <p:pic>
-        <p:nvPicPr>
-          <p:cNvPr id="3" name="Picture 2" descr="image.png"/>
-          <p:cNvPicPr>
-            <a:picLocks noChangeAspect="1"/>
-          </p:cNvPicPr>
-          <p:nvPr/>
-        </p:nvPicPr>
-        <p:blipFill>
-          <a:blip r:embed="rId3"/>
-          <a:stretch>
-            <a:fillRect/>
-          </a:stretch>
-        </p:blipFill>
-        <p:spPr>
-          <a:xfrm>
-            <a:off x="2571750" y="1524000"/>
-            <a:ext cx="1587500" cy="3340100"/>
-          </a:xfrm>
-          <a:prstGeom prst="rect">
-            <a:avLst/>
-          </a:prstGeom>
-        </p:spPr>
-      </p:pic>
-      <p:pic>
-        <p:nvPicPr>
-          <p:cNvPr id="4" name="Picture 3" descr="image.png"/>
-          <p:cNvPicPr>
-            <a:picLocks noChangeAspect="1"/>
-          </p:cNvPicPr>
-          <p:nvPr/>
-        </p:nvPicPr>
-        <p:blipFill>
-          <a:blip r:embed="rId4"/>
-          <a:stretch>
-            <a:fillRect/>
-          </a:stretch>
-        </p:blipFill>
-        <p:spPr>
-          <a:xfrm>
-            <a:off x="4330700" y="1524000"/>
-            <a:ext cx="1587500" cy="3340100"/>
-          </a:xfrm>
-          <a:prstGeom prst="rect">
-            <a:avLst/>
-          </a:prstGeom>
-        </p:spPr>
-      </p:pic>
-      <p:pic>
-        <p:nvPicPr>
-          <p:cNvPr id="5" name="Picture 4" descr="image.png"/>
-          <p:cNvPicPr>
-            <a:picLocks noChangeAspect="1"/>
-          </p:cNvPicPr>
-          <p:nvPr/>
-        </p:nvPicPr>
-        <p:blipFill>
-          <a:blip r:embed="rId5"/>
-          <a:stretch>
-            <a:fillRect/>
-          </a:stretch>
-        </p:blipFill>
-        <p:spPr>
-          <a:xfrm>
-            <a:off x="6089650" y="1524000"/>
-            <a:ext cx="1587500" cy="3340100"/>
-          </a:xfrm>
-          <a:prstGeom prst="rect">
-            <a:avLst/>
-          </a:prstGeom>
-        </p:spPr>
-      </p:pic>
-      <p:pic>
-        <p:nvPicPr>
-          <p:cNvPr id="6" name="Picture 5" descr="image.png"/>
-          <p:cNvPicPr>
-            <a:picLocks noChangeAspect="1"/>
-          </p:cNvPicPr>
-          <p:nvPr/>
-        </p:nvPicPr>
-        <p:blipFill>
-          <a:blip r:embed="rId6"/>
-          <a:stretch>
-            <a:fillRect/>
-          </a:stretch>
-        </p:blipFill>
-        <p:spPr>
-          <a:xfrm>
-            <a:off x="7848600" y="1524000"/>
-            <a:ext cx="1587500" cy="3340100"/>
-          </a:xfrm>
-          <a:prstGeom prst="rect">
-            <a:avLst/>
-          </a:prstGeom>
-        </p:spPr>
-      </p:pic>
-      <p:pic>
-        <p:nvPicPr>
-          <p:cNvPr id="7" name="Picture 6" descr="image.png"/>
-          <p:cNvPicPr>
-            <a:picLocks noChangeAspect="1"/>
-          </p:cNvPicPr>
-          <p:nvPr/>
-        </p:nvPicPr>
-        <p:blipFill>
-          <a:blip r:embed="rId7"/>
-          <a:stretch>
-            <a:fillRect/>
-          </a:stretch>
-        </p:blipFill>
-        <p:spPr>
-          <a:xfrm>
-            <a:off x="9607550" y="1524000"/>
-            <a:ext cx="1587500" cy="3340100"/>
-          </a:xfrm>
-          <a:prstGeom prst="rect">
-            <a:avLst/>
-          </a:prstGeom>
-        </p:spPr>
-      </p:pic>
-      <p:sp>
-        <p:nvSpPr>
-          <p:cNvPr id="8" name="TextBox 7"/>
-          <p:cNvSpPr txBox="1"/>
-          <p:nvPr/>
-        </p:nvSpPr>
-        <p:spPr>
-          <a:xfrm>
-            <a:off x="812800" y="457200"/>
-            <a:ext cx="5715000" cy="254000"/>
-          </a:xfrm>
-          <a:prstGeom prst="rect">
-            <a:avLst/>
-          </a:prstGeom>
-          <a:noFill/>
-        </p:spPr>
-        <p:txBody>
-          <a:bodyPr wrap="square" lIns="0" rIns="0" tIns="0" bIns="0" anchor="t">
-            <a:spAutoFit/>
-          </a:bodyPr>
-          <a:lstStyle/>
-          <a:p>
-            <a:r>
-              <a:rPr sz="1200" b="0" i="0" spc="300">
-                <a:solidFill>
-                  <a:srgbClr val="4A6B3A"/>
-                </a:solidFill>
-                <a:latin typeface="Arial"/>
-              </a:rPr>
-              <a:t>ОФОРМЛЕНИЕ</a:t>
-            </a:r>
-          </a:p>
-        </p:txBody>
-      </p:sp>
-      <p:sp>
-        <p:nvSpPr>
-          <p:cNvPr id="9" name="TextBox 8"/>
-          <p:cNvSpPr txBox="1"/>
-          <p:nvPr/>
-        </p:nvSpPr>
-        <p:spPr>
-          <a:xfrm>
-            <a:off x="812800" y="736600"/>
-            <a:ext cx="6350000" cy="731520"/>
-          </a:xfrm>
-          <a:prstGeom prst="rect">
-            <a:avLst/>
-          </a:prstGeom>
-          <a:noFill/>
-        </p:spPr>
-        <p:txBody>
-          <a:bodyPr wrap="square" lIns="0" rIns="0" tIns="0" bIns="0" anchor="t">
-            <a:spAutoFit/>
-          </a:bodyPr>
-          <a:lstStyle/>
-          <a:p>
-            <a:r>
-              <a:rPr sz="3200" b="0" i="0">
-                <a:solidFill>
-                  <a:srgbClr val="2A2A26"/>
-                </a:solidFill>
-                <a:latin typeface="Georgia"/>
-              </a:rPr>
-              <a:t>Оформление может быть любым</a:t>
-            </a:r>
-          </a:p>
-        </p:txBody>
-      </p:sp>
-      <p:sp>
-        <p:nvSpPr>
-          <p:cNvPr id="10" name="TextBox 9"/>
-          <p:cNvSpPr txBox="1"/>
-          <p:nvPr/>
-        </p:nvSpPr>
-        <p:spPr>
-          <a:xfrm>
-            <a:off x="7442200" y="609600"/>
-            <a:ext cx="3937000" cy="825500"/>
-          </a:xfrm>
-          <a:prstGeom prst="rect">
-            <a:avLst/>
-          </a:prstGeom>
-          <a:noFill/>
-        </p:spPr>
-        <p:txBody>
-          <a:bodyPr wrap="square" lIns="0" rIns="0" tIns="0" bIns="0" anchor="t">
-            <a:spAutoFit/>
-          </a:bodyPr>
-          <a:lstStyle/>
-          <a:p>
-            <a:r>
-              <a:rPr sz="1300" b="0" i="0">
-                <a:solidFill>
-                  <a:srgbClr val="5E5D56"/>
-                </a:solidFill>
-                <a:latin typeface="Arial"/>
-              </a:rPr>
-              <a:t>Один и тот же экран с вашими товарами и ценами в шести стилях. Выбираете вы, я довожу стиль до каждой страницы и админки.</a:t>
-            </a:r>
-          </a:p>
-        </p:txBody>
-      </p:sp>
-      <p:sp>
-        <p:nvSpPr>
-          <p:cNvPr id="11" name="TextBox 10"/>
-          <p:cNvSpPr txBox="1"/>
-          <p:nvPr/>
-        </p:nvSpPr>
-        <p:spPr>
-          <a:xfrm>
-            <a:off x="812800" y="4991100"/>
-            <a:ext cx="1568450" cy="317500"/>
-          </a:xfrm>
-          <a:prstGeom prst="rect">
-            <a:avLst/>
-          </a:prstGeom>
-          <a:noFill/>
-        </p:spPr>
-        <p:txBody>
-          <a:bodyPr wrap="square" lIns="0" rIns="0" tIns="0" bIns="0" anchor="t">
-            <a:spAutoFit/>
-          </a:bodyPr>
-          <a:lstStyle/>
-          <a:p>
-            <a:r>
-              <a:rPr sz="1400" b="1" i="0">
-                <a:solidFill>
-                  <a:srgbClr val="2A2A26"/>
-                </a:solidFill>
-                <a:latin typeface="Arial"/>
-              </a:rPr>
-              <a:t>Лесной</a:t>
-            </a:r>
-          </a:p>
-        </p:txBody>
-      </p:sp>
-      <p:sp>
-        <p:nvSpPr>
-          <p:cNvPr id="12" name="TextBox 11"/>
-          <p:cNvSpPr txBox="1"/>
-          <p:nvPr/>
-        </p:nvSpPr>
-        <p:spPr>
-          <a:xfrm>
-            <a:off x="812800" y="5308600"/>
-            <a:ext cx="1568450" cy="762000"/>
-          </a:xfrm>
-          <a:prstGeom prst="rect">
-            <a:avLst/>
-          </a:prstGeom>
-          <a:noFill/>
-        </p:spPr>
-        <p:txBody>
-          <a:bodyPr wrap="square" lIns="0" rIns="0" tIns="0" bIns="0" anchor="t">
-            <a:spAutoFit/>
-          </a:bodyPr>
-          <a:lstStyle/>
-          <a:p>
-            <a:r>
-              <a:rPr sz="1100" b="0" i="0">
-                <a:solidFill>
-                  <a:srgbClr val="5E5D56"/>
-                </a:solidFill>
-                <a:latin typeface="Arial"/>
-              </a:rPr>
-              <a:t>Лён, мох, антиква. Спокойно, как журнал о еде</a:t>
-            </a:r>
-          </a:p>
-        </p:txBody>
-      </p:sp>
-      <p:sp>
-        <p:nvSpPr>
-          <p:cNvPr id="13" name="TextBox 12"/>
-          <p:cNvSpPr txBox="1"/>
-          <p:nvPr/>
-        </p:nvSpPr>
-        <p:spPr>
-          <a:xfrm>
-            <a:off x="2571750" y="4991100"/>
-            <a:ext cx="1568450" cy="317500"/>
-          </a:xfrm>
-          <a:prstGeom prst="rect">
-            <a:avLst/>
-          </a:prstGeom>
-          <a:noFill/>
-        </p:spPr>
-        <p:txBody>
-          <a:bodyPr wrap="square" lIns="0" rIns="0" tIns="0" bIns="0" anchor="t">
-            <a:spAutoFit/>
-          </a:bodyPr>
-          <a:lstStyle/>
-          <a:p>
-            <a:r>
-              <a:rPr sz="1400" b="1" i="0">
-                <a:solidFill>
-                  <a:srgbClr val="2A2A26"/>
-                </a:solidFill>
-                <a:latin typeface="Arial"/>
-              </a:rPr>
-              <a:t>Ягодный</a:t>
-            </a:r>
-          </a:p>
-        </p:txBody>
-      </p:sp>
-      <p:sp>
-        <p:nvSpPr>
-          <p:cNvPr id="14" name="TextBox 13"/>
-          <p:cNvSpPr txBox="1"/>
-          <p:nvPr/>
-        </p:nvSpPr>
-        <p:spPr>
-          <a:xfrm>
-            <a:off x="2571750" y="5308600"/>
-            <a:ext cx="1568450" cy="762000"/>
-          </a:xfrm>
-          <a:prstGeom prst="rect">
-            <a:avLst/>
-          </a:prstGeom>
-          <a:noFill/>
-        </p:spPr>
-        <p:txBody>
-          <a:bodyPr wrap="square" lIns="0" rIns="0" tIns="0" bIns="0" anchor="t">
-            <a:spAutoFit/>
-          </a:bodyPr>
-          <a:lstStyle/>
-          <a:p>
-            <a:r>
-              <a:rPr sz="1100" b="0" i="0">
-                <a:solidFill>
-                  <a:srgbClr val="5E5D56"/>
-                </a:solidFill>
-                <a:latin typeface="Arial"/>
-              </a:rPr>
-              <a:t>Тёплый цвет, мягкие карточки, сочные фото</a:t>
-            </a:r>
-          </a:p>
-        </p:txBody>
-      </p:sp>
-      <p:sp>
-        <p:nvSpPr>
-          <p:cNvPr id="15" name="TextBox 14"/>
-          <p:cNvSpPr txBox="1"/>
-          <p:nvPr/>
-        </p:nvSpPr>
-        <p:spPr>
-          <a:xfrm>
-            <a:off x="4330700" y="4991100"/>
-            <a:ext cx="1568450" cy="317500"/>
-          </a:xfrm>
-          <a:prstGeom prst="rect">
-            <a:avLst/>
-          </a:prstGeom>
-          <a:noFill/>
-        </p:spPr>
-        <p:txBody>
-          <a:bodyPr wrap="square" lIns="0" rIns="0" tIns="0" bIns="0" anchor="t">
-            <a:spAutoFit/>
-          </a:bodyPr>
-          <a:lstStyle/>
-          <a:p>
-            <a:r>
-              <a:rPr sz="1400" b="1" i="0">
-                <a:solidFill>
-                  <a:srgbClr val="2A2A26"/>
-                </a:solidFill>
-                <a:latin typeface="Arial"/>
-              </a:rPr>
-              <a:t>Журнальный</a:t>
-            </a:r>
-          </a:p>
-        </p:txBody>
-      </p:sp>
-      <p:sp>
-        <p:nvSpPr>
-          <p:cNvPr id="16" name="TextBox 15"/>
-          <p:cNvSpPr txBox="1"/>
-          <p:nvPr/>
-        </p:nvSpPr>
-        <p:spPr>
-          <a:xfrm>
-            <a:off x="4330700" y="5308600"/>
-            <a:ext cx="1568450" cy="762000"/>
-          </a:xfrm>
-          <a:prstGeom prst="rect">
-            <a:avLst/>
-          </a:prstGeom>
-          <a:noFill/>
-        </p:spPr>
-        <p:txBody>
-          <a:bodyPr wrap="square" lIns="0" rIns="0" tIns="0" bIns="0" anchor="t">
-            <a:spAutoFit/>
-          </a:bodyPr>
-          <a:lstStyle/>
-          <a:p>
-            <a:r>
-              <a:rPr sz="1100" b="0" i="0">
-                <a:solidFill>
-                  <a:srgbClr val="5E5D56"/>
-                </a:solidFill>
-                <a:latin typeface="Arial"/>
-              </a:rPr>
-              <a:t>Чёрно-белый, как меню: цифры и линейки</a:t>
-            </a:r>
-          </a:p>
-        </p:txBody>
-      </p:sp>
-      <p:sp>
-        <p:nvSpPr>
-          <p:cNvPr id="17" name="TextBox 16"/>
-          <p:cNvSpPr txBox="1"/>
-          <p:nvPr/>
-        </p:nvSpPr>
-        <p:spPr>
-          <a:xfrm>
-            <a:off x="6089650" y="4991100"/>
-            <a:ext cx="1568450" cy="317500"/>
-          </a:xfrm>
-          <a:prstGeom prst="rect">
-            <a:avLst/>
-          </a:prstGeom>
-          <a:noFill/>
-        </p:spPr>
-        <p:txBody>
-          <a:bodyPr wrap="square" lIns="0" rIns="0" tIns="0" bIns="0" anchor="t">
-            <a:spAutoFit/>
-          </a:bodyPr>
-          <a:lstStyle/>
-          <a:p>
-            <a:r>
-              <a:rPr sz="1400" b="1" i="0">
-                <a:solidFill>
-                  <a:srgbClr val="2A2A26"/>
-                </a:solidFill>
-                <a:latin typeface="Arial"/>
-              </a:rPr>
-              <a:t>Фермерский</a:t>
-            </a:r>
-          </a:p>
-        </p:txBody>
-      </p:sp>
-      <p:sp>
-        <p:nvSpPr>
-          <p:cNvPr id="18" name="TextBox 17"/>
-          <p:cNvSpPr txBox="1"/>
-          <p:nvPr/>
-        </p:nvSpPr>
-        <p:spPr>
-          <a:xfrm>
-            <a:off x="6089650" y="5308600"/>
-            <a:ext cx="1568450" cy="762000"/>
-          </a:xfrm>
-          <a:prstGeom prst="rect">
-            <a:avLst/>
-          </a:prstGeom>
-          <a:noFill/>
-        </p:spPr>
-        <p:txBody>
-          <a:bodyPr wrap="square" lIns="0" rIns="0" tIns="0" bIns="0" anchor="t">
-            <a:spAutoFit/>
-          </a:bodyPr>
-          <a:lstStyle/>
-          <a:p>
-            <a:r>
-              <a:rPr sz="1100" b="0" i="0">
-                <a:solidFill>
-                  <a:srgbClr val="5E5D56"/>
-                </a:solidFill>
-                <a:latin typeface="Arial"/>
-              </a:rPr>
-              <a:t>Крафт и рукописный шрифт, как лавка в деревне</a:t>
-            </a:r>
-          </a:p>
-        </p:txBody>
-      </p:sp>
-      <p:sp>
-        <p:nvSpPr>
-          <p:cNvPr id="19" name="TextBox 18"/>
-          <p:cNvSpPr txBox="1"/>
-          <p:nvPr/>
-        </p:nvSpPr>
-        <p:spPr>
-          <a:xfrm>
-            <a:off x="7848600" y="4991100"/>
-            <a:ext cx="1568450" cy="317500"/>
-          </a:xfrm>
-          <a:prstGeom prst="rect">
-            <a:avLst/>
-          </a:prstGeom>
-          <a:noFill/>
-        </p:spPr>
-        <p:txBody>
-          <a:bodyPr wrap="square" lIns="0" rIns="0" tIns="0" bIns="0" anchor="t">
-            <a:spAutoFit/>
-          </a:bodyPr>
-          <a:lstStyle/>
-          <a:p>
-            <a:r>
-              <a:rPr sz="1400" b="1" i="0">
-                <a:solidFill>
-                  <a:srgbClr val="2A2A26"/>
-                </a:solidFill>
-                <a:latin typeface="Arial"/>
-              </a:rPr>
-              <a:t>Вечерний</a:t>
-            </a:r>
-          </a:p>
-        </p:txBody>
-      </p:sp>
-      <p:sp>
-        <p:nvSpPr>
-          <p:cNvPr id="20" name="TextBox 19"/>
-          <p:cNvSpPr txBox="1"/>
-          <p:nvPr/>
-        </p:nvSpPr>
-        <p:spPr>
-          <a:xfrm>
-            <a:off x="7848600" y="5308600"/>
-            <a:ext cx="1568450" cy="762000"/>
-          </a:xfrm>
-          <a:prstGeom prst="rect">
-            <a:avLst/>
-          </a:prstGeom>
-          <a:noFill/>
-        </p:spPr>
-        <p:txBody>
-          <a:bodyPr wrap="square" lIns="0" rIns="0" tIns="0" bIns="0" anchor="t">
-            <a:spAutoFit/>
-          </a:bodyPr>
-          <a:lstStyle/>
-          <a:p>
-            <a:r>
-              <a:rPr sz="1100" b="0" i="0">
-                <a:solidFill>
-                  <a:srgbClr val="5E5D56"/>
-                </a:solidFill>
-                <a:latin typeface="Arial"/>
-              </a:rPr>
-              <a:t>Тёмная тема и золото для подарков</a:t>
-            </a:r>
-          </a:p>
-        </p:txBody>
-      </p:sp>
-      <p:sp>
-        <p:nvSpPr>
-          <p:cNvPr id="21" name="TextBox 20"/>
-          <p:cNvSpPr txBox="1"/>
-          <p:nvPr/>
-        </p:nvSpPr>
-        <p:spPr>
-          <a:xfrm>
-            <a:off x="9607550" y="4991100"/>
-            <a:ext cx="1568450" cy="317500"/>
-          </a:xfrm>
-          <a:prstGeom prst="rect">
-            <a:avLst/>
-          </a:prstGeom>
-          <a:noFill/>
-        </p:spPr>
-        <p:txBody>
-          <a:bodyPr wrap="square" lIns="0" rIns="0" tIns="0" bIns="0" anchor="t">
-            <a:spAutoFit/>
-          </a:bodyPr>
-          <a:lstStyle/>
-          <a:p>
-            <a:r>
-              <a:rPr sz="1400" b="1" i="0">
-                <a:solidFill>
-                  <a:srgbClr val="2A2A26"/>
-                </a:solidFill>
-                <a:latin typeface="Arial"/>
-              </a:rPr>
-              <a:t>Яркий</a:t>
-            </a:r>
-          </a:p>
-        </p:txBody>
-      </p:sp>
-      <p:sp>
-        <p:nvSpPr>
-          <p:cNvPr id="22" name="TextBox 21"/>
-          <p:cNvSpPr txBox="1"/>
-          <p:nvPr/>
-        </p:nvSpPr>
-        <p:spPr>
-          <a:xfrm>
-            <a:off x="9607550" y="5308600"/>
-            <a:ext cx="1568450" cy="762000"/>
-          </a:xfrm>
-          <a:prstGeom prst="rect">
-            <a:avLst/>
-          </a:prstGeom>
-          <a:noFill/>
-        </p:spPr>
-        <p:txBody>
-          <a:bodyPr wrap="square" lIns="0" rIns="0" tIns="0" bIns="0" anchor="t">
-            <a:spAutoFit/>
-          </a:bodyPr>
-          <a:lstStyle/>
-          <a:p>
-            <a:r>
-              <a:rPr sz="1100" b="0" i="0">
-                <a:solidFill>
-                  <a:srgbClr val="5E5D56"/>
-                </a:solidFill>
-                <a:latin typeface="Arial"/>
-              </a:rPr>
-              <a:t>Крупный гротеск и цветные блоки</a:t>
-            </a:r>
-          </a:p>
-        </p:txBody>
-      </p:sp>
-    </p:spTree>
-  </p:cSld>
-  <p:clrMapOvr>
-    <a:masterClrMapping/>
-  </p:clrMapOvr>
-</p:sld>
-</file>
-
-<file path=ppt/slides/slide15.xml><?xml version="1.0" encoding="utf-8"?>
-<p:sld xmlns:a="http://schemas.openxmlformats.org/drawingml/2006/main" xmlns:p="http://schemas.openxmlformats.org/presentationml/2006/main" xmlns:r="http://schemas.openxmlformats.org/officeDocument/2006/relationships">
-  <p:cSld>
-    <p:bg>
-      <p:bgPr>
-        <a:solidFill>
-          <a:srgbClr val="ECE7DF"/>
-        </a:solidFill>
-        <a:effectLst/>
-      </p:bgPr>
-    </p:bg>
-    <p:spTree>
-      <p:nvGrpSpPr>
-        <p:cNvPr id="1" name=""/>
-        <p:cNvGrpSpPr/>
-        <p:nvPr/>
-      </p:nvGrpSpPr>
-      <p:grpSpPr/>
-      <p:pic>
-        <p:nvPicPr>
-          <p:cNvPr id="2" name="Picture 1" descr="image.png"/>
-          <p:cNvPicPr>
-            <a:picLocks noChangeAspect="1"/>
-          </p:cNvPicPr>
-          <p:nvPr/>
-        </p:nvPicPr>
-        <p:blipFill>
-          <a:blip r:embed="rId2"/>
-          <a:stretch>
-            <a:fillRect/>
-          </a:stretch>
-        </p:blipFill>
-        <p:spPr>
-          <a:xfrm>
-            <a:off x="812800" y="1739900"/>
-            <a:ext cx="1485900" cy="3117850"/>
-          </a:xfrm>
-          <a:prstGeom prst="rect">
-            <a:avLst/>
-          </a:prstGeom>
-        </p:spPr>
-      </p:pic>
-      <p:pic>
-        <p:nvPicPr>
-          <p:cNvPr id="3" name="Picture 2" descr="image.png"/>
-          <p:cNvPicPr>
-            <a:picLocks noChangeAspect="1"/>
-          </p:cNvPicPr>
-          <p:nvPr/>
-        </p:nvPicPr>
-        <p:blipFill>
-          <a:blip r:embed="rId3"/>
-          <a:stretch>
-            <a:fillRect/>
-          </a:stretch>
-        </p:blipFill>
-        <p:spPr>
-          <a:xfrm>
-            <a:off x="3530600" y="2000250"/>
-            <a:ext cx="1365250" cy="2857500"/>
-          </a:xfrm>
-          <a:prstGeom prst="rect">
-            <a:avLst/>
-          </a:prstGeom>
-        </p:spPr>
-      </p:pic>
-      <p:pic>
-        <p:nvPicPr>
-          <p:cNvPr id="4" name="Picture 3" descr="image.png"/>
-          <p:cNvPicPr>
-            <a:picLocks noChangeAspect="1"/>
-          </p:cNvPicPr>
-          <p:nvPr/>
-        </p:nvPicPr>
-        <p:blipFill>
-          <a:blip r:embed="rId4"/>
-          <a:stretch>
-            <a:fillRect/>
-          </a:stretch>
-        </p:blipFill>
-        <p:spPr>
-          <a:xfrm>
-            <a:off x="6248400" y="2400300"/>
-            <a:ext cx="1416050" cy="2457450"/>
-          </a:xfrm>
-          <a:prstGeom prst="rect">
-            <a:avLst/>
-          </a:prstGeom>
-        </p:spPr>
-      </p:pic>
-      <p:pic>
-        <p:nvPicPr>
-          <p:cNvPr id="5" name="Picture 4" descr="image.png"/>
-          <p:cNvPicPr>
-            <a:picLocks noChangeAspect="1"/>
-          </p:cNvPicPr>
-          <p:nvPr/>
-        </p:nvPicPr>
-        <p:blipFill>
-          <a:blip r:embed="rId5"/>
-          <a:stretch>
-            <a:fillRect/>
-          </a:stretch>
-        </p:blipFill>
-        <p:spPr>
-          <a:xfrm>
-            <a:off x="8966200" y="1460500"/>
-            <a:ext cx="1612900" cy="3397250"/>
-          </a:xfrm>
-          <a:prstGeom prst="rect">
-            <a:avLst/>
-          </a:prstGeom>
-        </p:spPr>
-      </p:pic>
-      <p:sp>
-        <p:nvSpPr>
-          <p:cNvPr id="6" name="TextBox 5"/>
-          <p:cNvSpPr txBox="1"/>
-          <p:nvPr/>
-        </p:nvSpPr>
-        <p:spPr>
-          <a:xfrm>
-            <a:off x="812800" y="457200"/>
-            <a:ext cx="5715000" cy="254000"/>
-          </a:xfrm>
-          <a:prstGeom prst="rect">
-            <a:avLst/>
-          </a:prstGeom>
-          <a:noFill/>
-        </p:spPr>
-        <p:txBody>
-          <a:bodyPr wrap="square" lIns="0" rIns="0" tIns="0" bIns="0" anchor="t">
-            <a:spAutoFit/>
-          </a:bodyPr>
-          <a:lstStyle/>
-          <a:p>
-            <a:r>
-              <a:rPr sz="1200" b="0" i="0" spc="300">
-                <a:solidFill>
-                  <a:srgbClr val="4A6B3A"/>
-                </a:solidFill>
-                <a:latin typeface="Arial"/>
-              </a:rPr>
-              <a:t>НА ТЕЛЕФОНАХ · ВЫ И КОМАНДА</a:t>
-            </a:r>
-          </a:p>
-        </p:txBody>
-      </p:sp>
-      <p:sp>
-        <p:nvSpPr>
-          <p:cNvPr id="7" name="TextBox 6"/>
-          <p:cNvSpPr txBox="1"/>
-          <p:nvPr/>
-        </p:nvSpPr>
-        <p:spPr>
-          <a:xfrm>
-            <a:off x="812800" y="736600"/>
-            <a:ext cx="6350000" cy="731520"/>
-          </a:xfrm>
-          <a:prstGeom prst="rect">
-            <a:avLst/>
-          </a:prstGeom>
-          <a:noFill/>
-        </p:spPr>
-        <p:txBody>
-          <a:bodyPr wrap="square" lIns="0" rIns="0" tIns="0" bIns="0" anchor="t">
-            <a:spAutoFit/>
-          </a:bodyPr>
-          <a:lstStyle/>
-          <a:p>
-            <a:r>
-              <a:rPr sz="3200" b="0" i="0">
-                <a:solidFill>
-                  <a:srgbClr val="2A2A26"/>
-                </a:solidFill>
-                <a:latin typeface="Georgia"/>
-              </a:rPr>
-              <a:t>Что увидите вы и команда</a:t>
-            </a:r>
-          </a:p>
-        </p:txBody>
-      </p:sp>
-      <p:sp>
-        <p:nvSpPr>
-          <p:cNvPr id="8" name="TextBox 7"/>
-          <p:cNvSpPr txBox="1"/>
-          <p:nvPr/>
-        </p:nvSpPr>
-        <p:spPr>
-          <a:xfrm>
-            <a:off x="7442200" y="635000"/>
-            <a:ext cx="3937000" cy="635000"/>
-          </a:xfrm>
-          <a:prstGeom prst="rect">
-            <a:avLst/>
-          </a:prstGeom>
-          <a:noFill/>
-        </p:spPr>
-        <p:txBody>
-          <a:bodyPr wrap="square" lIns="0" rIns="0" tIns="0" bIns="0" anchor="t">
-            <a:spAutoFit/>
-          </a:bodyPr>
-          <a:lstStyle/>
-          <a:p>
-            <a:r>
-              <a:rPr sz="1300" b="0" i="0">
-                <a:solidFill>
-                  <a:srgbClr val="5E5D56"/>
-                </a:solidFill>
-                <a:latin typeface="Arial"/>
-              </a:rPr>
-              <a:t>Экраны админки тоже для телефона: партию можно открыть прямо из цеха.</a:t>
-            </a:r>
-          </a:p>
-        </p:txBody>
-      </p:sp>
-      <p:sp>
-        <p:nvSpPr>
-          <p:cNvPr id="9" name="TextBox 8"/>
-          <p:cNvSpPr txBox="1"/>
-          <p:nvPr/>
-        </p:nvSpPr>
-        <p:spPr>
-          <a:xfrm>
-            <a:off x="812800" y="4984750"/>
-            <a:ext cx="2527300" cy="215900"/>
-          </a:xfrm>
-          <a:prstGeom prst="rect">
-            <a:avLst/>
-          </a:prstGeom>
-          <a:noFill/>
-        </p:spPr>
-        <p:txBody>
-          <a:bodyPr wrap="square" lIns="0" rIns="0" tIns="0" bIns="0" anchor="t">
-            <a:spAutoFit/>
-          </a:bodyPr>
-          <a:lstStyle/>
-          <a:p>
-            <a:r>
-              <a:rPr sz="1000" b="0" i="0">
-                <a:solidFill>
-                  <a:srgbClr val="5E5D56"/>
-                </a:solidFill>
-                <a:latin typeface="Arial"/>
-              </a:rPr>
-              <a:t>iPhone 15 · 393 px</a:t>
-            </a:r>
-          </a:p>
-        </p:txBody>
-      </p:sp>
-      <p:sp>
-        <p:nvSpPr>
-          <p:cNvPr id="10" name="TextBox 9"/>
-          <p:cNvSpPr txBox="1"/>
-          <p:nvPr/>
-        </p:nvSpPr>
-        <p:spPr>
-          <a:xfrm>
-            <a:off x="812800" y="5226050"/>
-            <a:ext cx="2527300" cy="317500"/>
-          </a:xfrm>
-          <a:prstGeom prst="rect">
-            <a:avLst/>
-          </a:prstGeom>
-          <a:noFill/>
-        </p:spPr>
-        <p:txBody>
-          <a:bodyPr wrap="square" lIns="0" rIns="0" tIns="0" bIns="0" anchor="t">
-            <a:spAutoFit/>
-          </a:bodyPr>
-          <a:lstStyle/>
-          <a:p>
-            <a:r>
-              <a:rPr sz="1400" b="1" i="0">
-                <a:solidFill>
-                  <a:srgbClr val="2A2A26"/>
-                </a:solidFill>
-                <a:latin typeface="Arial"/>
-              </a:rPr>
-              <a:t>Партия с телефона</a:t>
-            </a:r>
-          </a:p>
-        </p:txBody>
-      </p:sp>
-      <p:sp>
-        <p:nvSpPr>
-          <p:cNvPr id="11" name="TextBox 10"/>
-          <p:cNvSpPr txBox="1"/>
-          <p:nvPr/>
-        </p:nvSpPr>
-        <p:spPr>
-          <a:xfrm>
-            <a:off x="812800" y="5543550"/>
-            <a:ext cx="2527300" cy="1524000"/>
-          </a:xfrm>
-          <a:prstGeom prst="rect">
-            <a:avLst/>
-          </a:prstGeom>
-          <a:noFill/>
-        </p:spPr>
-        <p:txBody>
-          <a:bodyPr wrap="square" lIns="0" rIns="0" tIns="0" bIns="0" anchor="t">
-            <a:spAutoFit/>
-          </a:bodyPr>
-          <a:lstStyle/>
-          <a:p>
-            <a:r>
-              <a:rPr sz="1100" b="0" i="0">
-                <a:solidFill>
-                  <a:srgbClr val="5E5D56"/>
-                </a:solidFill>
-                <a:latin typeface="Arial"/>
-              </a:rPr>
-              <a:t>Один раз указали мощность цеха и время, дальше сайт всё делает сам.</a:t>
-            </a:r>
-          </a:p>
-        </p:txBody>
-      </p:sp>
-      <p:sp>
-        <p:nvSpPr>
-          <p:cNvPr id="12" name="TextBox 11"/>
-          <p:cNvSpPr txBox="1"/>
-          <p:nvPr/>
-        </p:nvSpPr>
-        <p:spPr>
-          <a:xfrm>
-            <a:off x="3530600" y="4984750"/>
-            <a:ext cx="2527300" cy="215900"/>
-          </a:xfrm>
-          <a:prstGeom prst="rect">
-            <a:avLst/>
-          </a:prstGeom>
-          <a:noFill/>
-        </p:spPr>
-        <p:txBody>
-          <a:bodyPr wrap="square" lIns="0" rIns="0" tIns="0" bIns="0" anchor="t">
-            <a:spAutoFit/>
-          </a:bodyPr>
-          <a:lstStyle/>
-          <a:p>
-            <a:r>
-              <a:rPr sz="1000" b="0" i="0">
-                <a:solidFill>
-                  <a:srgbClr val="5E5D56"/>
-                </a:solidFill>
-                <a:latin typeface="Arial"/>
-              </a:rPr>
-              <a:t>Android · 360 px</a:t>
-            </a:r>
-          </a:p>
-        </p:txBody>
-      </p:sp>
-      <p:sp>
-        <p:nvSpPr>
-          <p:cNvPr id="13" name="TextBox 12"/>
-          <p:cNvSpPr txBox="1"/>
-          <p:nvPr/>
-        </p:nvSpPr>
-        <p:spPr>
-          <a:xfrm>
-            <a:off x="3530600" y="5226050"/>
-            <a:ext cx="2527300" cy="317500"/>
-          </a:xfrm>
-          <a:prstGeom prst="rect">
-            <a:avLst/>
-          </a:prstGeom>
-          <a:noFill/>
-        </p:spPr>
-        <p:txBody>
-          <a:bodyPr wrap="square" lIns="0" rIns="0" tIns="0" bIns="0" anchor="t">
-            <a:spAutoFit/>
-          </a:bodyPr>
-          <a:lstStyle/>
-          <a:p>
-            <a:r>
-              <a:rPr sz="1400" b="1" i="0">
-                <a:solidFill>
-                  <a:srgbClr val="2A2A26"/>
-                </a:solidFill>
-                <a:latin typeface="Arial"/>
-              </a:rPr>
-              <a:t>Экран упаковщика</a:t>
-            </a:r>
-          </a:p>
-        </p:txBody>
-      </p:sp>
-      <p:sp>
-        <p:nvSpPr>
-          <p:cNvPr id="14" name="TextBox 13"/>
-          <p:cNvSpPr txBox="1"/>
-          <p:nvPr/>
-        </p:nvSpPr>
-        <p:spPr>
-          <a:xfrm>
-            <a:off x="3530600" y="5543550"/>
-            <a:ext cx="2527300" cy="1524000"/>
-          </a:xfrm>
-          <a:prstGeom prst="rect">
-            <a:avLst/>
-          </a:prstGeom>
-          <a:noFill/>
-        </p:spPr>
-        <p:txBody>
-          <a:bodyPr wrap="square" lIns="0" rIns="0" tIns="0" bIns="0" anchor="t">
-            <a:spAutoFit/>
-          </a:bodyPr>
-          <a:lstStyle/>
-          <a:p>
-            <a:r>
-              <a:rPr sz="1100" b="0" i="0">
-                <a:solidFill>
-                  <a:srgbClr val="5E5D56"/>
-                </a:solidFill>
-                <a:latin typeface="Arial"/>
-              </a:rPr>
-              <a:t>Только свои заказы, накладная СДЭК готова, наклейки с датой кнопкой.</a:t>
-            </a:r>
-          </a:p>
-        </p:txBody>
-      </p:sp>
-      <p:sp>
-        <p:nvSpPr>
-          <p:cNvPr id="15" name="TextBox 14"/>
-          <p:cNvSpPr txBox="1"/>
-          <p:nvPr/>
-        </p:nvSpPr>
-        <p:spPr>
-          <a:xfrm>
-            <a:off x="6248400" y="4984750"/>
-            <a:ext cx="2527300" cy="215900"/>
-          </a:xfrm>
-          <a:prstGeom prst="rect">
-            <a:avLst/>
-          </a:prstGeom>
-          <a:noFill/>
-        </p:spPr>
-        <p:txBody>
-          <a:bodyPr wrap="square" lIns="0" rIns="0" tIns="0" bIns="0" anchor="t">
-            <a:spAutoFit/>
-          </a:bodyPr>
-          <a:lstStyle/>
-          <a:p>
-            <a:r>
-              <a:rPr sz="1000" b="0" i="0">
-                <a:solidFill>
-                  <a:srgbClr val="5E5D56"/>
-                </a:solidFill>
-                <a:latin typeface="Arial"/>
-              </a:rPr>
-              <a:t>iPhone SE · 375 px</a:t>
-            </a:r>
-          </a:p>
-        </p:txBody>
-      </p:sp>
-      <p:sp>
-        <p:nvSpPr>
-          <p:cNvPr id="16" name="TextBox 15"/>
-          <p:cNvSpPr txBox="1"/>
-          <p:nvPr/>
-        </p:nvSpPr>
-        <p:spPr>
-          <a:xfrm>
-            <a:off x="6248400" y="5226050"/>
-            <a:ext cx="2527300" cy="317500"/>
-          </a:xfrm>
-          <a:prstGeom prst="rect">
-            <a:avLst/>
-          </a:prstGeom>
-          <a:noFill/>
-        </p:spPr>
-        <p:txBody>
-          <a:bodyPr wrap="square" lIns="0" rIns="0" tIns="0" bIns="0" anchor="t">
-            <a:spAutoFit/>
-          </a:bodyPr>
-          <a:lstStyle/>
-          <a:p>
-            <a:r>
-              <a:rPr sz="1400" b="1" i="0">
-                <a:solidFill>
-                  <a:srgbClr val="2A2A26"/>
-                </a:solidFill>
-                <a:latin typeface="Arial"/>
-              </a:rPr>
-              <a:t>Сводка в Telegram</a:t>
-            </a:r>
-          </a:p>
-        </p:txBody>
-      </p:sp>
-      <p:sp>
-        <p:nvSpPr>
-          <p:cNvPr id="17" name="TextBox 16"/>
-          <p:cNvSpPr txBox="1"/>
-          <p:nvPr/>
-        </p:nvSpPr>
-        <p:spPr>
-          <a:xfrm>
-            <a:off x="6248400" y="5543550"/>
-            <a:ext cx="2527300" cy="1524000"/>
-          </a:xfrm>
-          <a:prstGeom prst="rect">
-            <a:avLst/>
-          </a:prstGeom>
-          <a:noFill/>
-        </p:spPr>
-        <p:txBody>
-          <a:bodyPr wrap="square" lIns="0" rIns="0" tIns="0" bIns="0" anchor="t">
-            <a:spAutoFit/>
-          </a:bodyPr>
-          <a:lstStyle/>
-          <a:p>
-            <a:r>
-              <a:rPr sz="1100" b="0" i="0">
-                <a:solidFill>
-                  <a:srgbClr val="5E5D56"/>
-                </a:solidFill>
-                <a:latin typeface="Arial"/>
-              </a:rPr>
-              <a:t>Одно сообщение в конце дня вместо сотни уведомлений.</a:t>
-            </a:r>
-          </a:p>
-        </p:txBody>
-      </p:sp>
-      <p:sp>
-        <p:nvSpPr>
-          <p:cNvPr id="18" name="TextBox 17"/>
-          <p:cNvSpPr txBox="1"/>
-          <p:nvPr/>
-        </p:nvSpPr>
-        <p:spPr>
-          <a:xfrm>
-            <a:off x="8966200" y="4984750"/>
-            <a:ext cx="2527300" cy="215900"/>
-          </a:xfrm>
-          <a:prstGeom prst="rect">
-            <a:avLst/>
-          </a:prstGeom>
-          <a:noFill/>
-        </p:spPr>
-        <p:txBody>
-          <a:bodyPr wrap="square" lIns="0" rIns="0" tIns="0" bIns="0" anchor="t">
-            <a:spAutoFit/>
-          </a:bodyPr>
-          <a:lstStyle/>
-          <a:p>
-            <a:r>
-              <a:rPr sz="1000" b="0" i="0">
-                <a:solidFill>
-                  <a:srgbClr val="5E5D56"/>
-                </a:solidFill>
-                <a:latin typeface="Arial"/>
-              </a:rPr>
-              <a:t>iPhone 15 Pro Max · 430 px</a:t>
-            </a:r>
-          </a:p>
-        </p:txBody>
-      </p:sp>
-      <p:sp>
-        <p:nvSpPr>
-          <p:cNvPr id="19" name="TextBox 18"/>
-          <p:cNvSpPr txBox="1"/>
-          <p:nvPr/>
-        </p:nvSpPr>
-        <p:spPr>
-          <a:xfrm>
-            <a:off x="8966200" y="5226050"/>
-            <a:ext cx="2527300" cy="317500"/>
-          </a:xfrm>
-          <a:prstGeom prst="rect">
-            <a:avLst/>
-          </a:prstGeom>
-          <a:noFill/>
-        </p:spPr>
-        <p:txBody>
-          <a:bodyPr wrap="square" lIns="0" rIns="0" tIns="0" bIns="0" anchor="t">
-            <a:spAutoFit/>
-          </a:bodyPr>
-          <a:lstStyle/>
-          <a:p>
-            <a:r>
-              <a:rPr sz="1400" b="1" i="0">
-                <a:solidFill>
-                  <a:srgbClr val="2A2A26"/>
-                </a:solidFill>
-                <a:latin typeface="Arial"/>
-              </a:rPr>
-              <a:t>Финансы, по желанию</a:t>
-            </a:r>
-          </a:p>
-        </p:txBody>
-      </p:sp>
-      <p:sp>
-        <p:nvSpPr>
-          <p:cNvPr id="20" name="TextBox 19"/>
-          <p:cNvSpPr txBox="1"/>
-          <p:nvPr/>
-        </p:nvSpPr>
-        <p:spPr>
-          <a:xfrm>
-            <a:off x="8966200" y="5543550"/>
-            <a:ext cx="2527300" cy="1524000"/>
-          </a:xfrm>
-          <a:prstGeom prst="rect">
-            <a:avLst/>
-          </a:prstGeom>
-          <a:noFill/>
-        </p:spPr>
-        <p:txBody>
-          <a:bodyPr wrap="square" lIns="0" rIns="0" tIns="0" bIns="0" anchor="t">
-            <a:spAutoFit/>
-          </a:bodyPr>
-          <a:lstStyle/>
-          <a:p>
-            <a:r>
-              <a:rPr sz="1100" b="0" i="0">
-                <a:solidFill>
-                  <a:srgbClr val="5E5D56"/>
-                </a:solidFill>
-                <a:latin typeface="Arial"/>
-              </a:rPr>
-              <a:t>Выручка из оплат сама, себестоимость из закупок. Отдельный модуль.</a:t>
-            </a:r>
-          </a:p>
-        </p:txBody>
-      </p:sp>
-    </p:spTree>
-  </p:cSld>
-  <p:clrMapOvr>
-    <a:masterClrMapping/>
-  </p:clrMapOvr>
-</p:sld>
-</file>
-
-<file path=ppt/slides/slide16.xml><?xml version="1.0" encoding="utf-8"?>
-<p:sld xmlns:a="http://schemas.openxmlformats.org/drawingml/2006/main" xmlns:p="http://schemas.openxmlformats.org/presentationml/2006/main" xmlns:r="http://schemas.openxmlformats.org/officeDocument/2006/relationships">
-  <p:cSld>
-    <p:bg>
-      <p:bgPr>
-        <a:solidFill>
-          <a:srgbClr val="F6F3EE"/>
-        </a:solidFill>
-        <a:effectLst/>
-      </p:bgPr>
-    </p:bg>
-    <p:spTree>
-      <p:nvGrpSpPr>
-        <p:cNvPr id="1" name=""/>
-        <p:cNvGrpSpPr/>
-        <p:nvPr/>
-      </p:nvGrpSpPr>
-      <p:grpSpPr/>
-      <p:pic>
-        <p:nvPicPr>
-          <p:cNvPr id="2" name="Picture 1" descr="image.jpg"/>
-          <p:cNvPicPr>
-            <a:picLocks noChangeAspect="1"/>
-          </p:cNvPicPr>
-          <p:nvPr/>
-        </p:nvPicPr>
-        <p:blipFill>
-          <a:blip r:embed="rId2"/>
-          <a:stretch>
-            <a:fillRect/>
-          </a:stretch>
-        </p:blipFill>
-        <p:spPr>
-          <a:xfrm>
-            <a:off x="2781300" y="1524000"/>
-            <a:ext cx="6635750" cy="4699000"/>
-          </a:xfrm>
-          <a:prstGeom prst="rect">
-            <a:avLst/>
-          </a:prstGeom>
-        </p:spPr>
-      </p:pic>
-      <p:sp>
-        <p:nvSpPr>
-          <p:cNvPr id="3" name="TextBox 2"/>
-          <p:cNvSpPr txBox="1"/>
-          <p:nvPr/>
-        </p:nvSpPr>
-        <p:spPr>
-          <a:xfrm>
-            <a:off x="812800" y="558800"/>
-            <a:ext cx="10566400" cy="254000"/>
-          </a:xfrm>
-          <a:prstGeom prst="rect">
-            <a:avLst/>
-          </a:prstGeom>
-          <a:noFill/>
-        </p:spPr>
-        <p:txBody>
-          <a:bodyPr wrap="square" lIns="0" rIns="0" tIns="0" bIns="0" anchor="t">
-            <a:spAutoFit/>
-          </a:bodyPr>
-          <a:lstStyle/>
-          <a:p>
-            <a:r>
-              <a:rPr sz="1200" b="0" i="0" spc="300">
-                <a:solidFill>
-                  <a:srgbClr val="4A6B3A"/>
-                </a:solidFill>
-                <a:latin typeface="Arial"/>
-              </a:rPr>
-              <a:t>АДМИНКА НА КОМПЬЮТЕРЕ</a:t>
-            </a:r>
-          </a:p>
-        </p:txBody>
-      </p:sp>
-      <p:sp>
-        <p:nvSpPr>
-          <p:cNvPr id="4" name="TextBox 3"/>
-          <p:cNvSpPr txBox="1"/>
-          <p:nvPr/>
-        </p:nvSpPr>
-        <p:spPr>
-          <a:xfrm>
-            <a:off x="812800" y="850900"/>
-            <a:ext cx="10566400" cy="731520"/>
-          </a:xfrm>
-          <a:prstGeom prst="rect">
-            <a:avLst/>
-          </a:prstGeom>
-          <a:noFill/>
-        </p:spPr>
-        <p:txBody>
-          <a:bodyPr wrap="square" lIns="0" rIns="0" tIns="0" bIns="0" anchor="t">
-            <a:spAutoFit/>
-          </a:bodyPr>
-          <a:lstStyle/>
-          <a:p>
-            <a:r>
-              <a:rPr sz="3200" b="0" i="0">
-                <a:solidFill>
-                  <a:srgbClr val="2A2A26"/>
-                </a:solidFill>
-                <a:latin typeface="Georgia"/>
-              </a:rPr>
-              <a:t>Экран «Сегодня»: всё, что нужно знать за день</a:t>
-            </a:r>
-          </a:p>
-        </p:txBody>
-      </p:sp>
-    </p:spTree>
-  </p:cSld>
-  <p:clrMapOvr>
-    <a:masterClrMapping/>
-  </p:clrMapOvr>
-</p:sld>
-</file>
-
-<file path=ppt/slides/slide17.xml><?xml version="1.0" encoding="utf-8"?>
-<p:sld xmlns:a="http://schemas.openxmlformats.org/drawingml/2006/main" xmlns:p="http://schemas.openxmlformats.org/presentationml/2006/main" xmlns:r="http://schemas.openxmlformats.org/officeDocument/2006/relationships">
-  <p:cSld>
-    <p:bg>
-      <p:bgPr>
-        <a:solidFill>
-          <a:srgbClr val="ECE7DF"/>
-        </a:solidFill>
-        <a:effectLst/>
-      </p:bgPr>
-    </p:bg>
-    <p:spTree>
-      <p:nvGrpSpPr>
-        <p:cNvPr id="1" name=""/>
-        <p:cNvGrpSpPr/>
-        <p:nvPr/>
-      </p:nvGrpSpPr>
-      <p:grpSpPr/>
-      <p:pic>
-        <p:nvPicPr>
-          <p:cNvPr id="2" name="Picture 1" descr="image.png"/>
-          <p:cNvPicPr>
-            <a:picLocks noChangeAspect="1"/>
-          </p:cNvPicPr>
-          <p:nvPr/>
-        </p:nvPicPr>
-        <p:blipFill>
-          <a:blip r:embed="rId2"/>
-          <a:stretch>
-            <a:fillRect/>
-          </a:stretch>
-        </p:blipFill>
-        <p:spPr>
-          <a:xfrm>
-            <a:off x="812800" y="1739900"/>
-            <a:ext cx="1485900" cy="3117850"/>
-          </a:xfrm>
-          <a:prstGeom prst="rect">
-            <a:avLst/>
-          </a:prstGeom>
-        </p:spPr>
-      </p:pic>
-      <p:pic>
-        <p:nvPicPr>
-          <p:cNvPr id="3" name="Picture 2" descr="image.png"/>
-          <p:cNvPicPr>
-            <a:picLocks noChangeAspect="1"/>
-          </p:cNvPicPr>
-          <p:nvPr/>
-        </p:nvPicPr>
-        <p:blipFill>
-          <a:blip r:embed="rId3"/>
-          <a:stretch>
-            <a:fillRect/>
-          </a:stretch>
-        </p:blipFill>
-        <p:spPr>
-          <a:xfrm>
-            <a:off x="3530600" y="2400300"/>
-            <a:ext cx="1416050" cy="2457450"/>
-          </a:xfrm>
-          <a:prstGeom prst="rect">
-            <a:avLst/>
-          </a:prstGeom>
-        </p:spPr>
-      </p:pic>
-      <p:pic>
-        <p:nvPicPr>
-          <p:cNvPr id="4" name="Picture 3" descr="image.png"/>
-          <p:cNvPicPr>
-            <a:picLocks noChangeAspect="1"/>
-          </p:cNvPicPr>
-          <p:nvPr/>
-        </p:nvPicPr>
-        <p:blipFill>
-          <a:blip r:embed="rId4"/>
-          <a:stretch>
-            <a:fillRect/>
-          </a:stretch>
-        </p:blipFill>
-        <p:spPr>
-          <a:xfrm>
-            <a:off x="6248400" y="2000250"/>
-            <a:ext cx="1365250" cy="2857500"/>
-          </a:xfrm>
-          <a:prstGeom prst="rect">
-            <a:avLst/>
-          </a:prstGeom>
-        </p:spPr>
-      </p:pic>
-      <p:pic>
-        <p:nvPicPr>
-          <p:cNvPr id="5" name="Picture 4" descr="image.png"/>
-          <p:cNvPicPr>
-            <a:picLocks noChangeAspect="1"/>
-          </p:cNvPicPr>
-          <p:nvPr/>
-        </p:nvPicPr>
-        <p:blipFill>
-          <a:blip r:embed="rId5"/>
-          <a:stretch>
-            <a:fillRect/>
-          </a:stretch>
-        </p:blipFill>
-        <p:spPr>
-          <a:xfrm>
-            <a:off x="8966200" y="1460500"/>
-            <a:ext cx="1612900" cy="3397250"/>
-          </a:xfrm>
-          <a:prstGeom prst="rect">
-            <a:avLst/>
-          </a:prstGeom>
-        </p:spPr>
-      </p:pic>
-      <p:sp>
-        <p:nvSpPr>
-          <p:cNvPr id="6" name="TextBox 5"/>
-          <p:cNvSpPr txBox="1"/>
-          <p:nvPr/>
-        </p:nvSpPr>
-        <p:spPr>
-          <a:xfrm>
-            <a:off x="812800" y="457200"/>
-            <a:ext cx="5715000" cy="254000"/>
-          </a:xfrm>
-          <a:prstGeom prst="rect">
-            <a:avLst/>
-          </a:prstGeom>
-          <a:noFill/>
-        </p:spPr>
-        <p:txBody>
-          <a:bodyPr wrap="square" lIns="0" rIns="0" tIns="0" bIns="0" anchor="t">
-            <a:spAutoFit/>
-          </a:bodyPr>
-          <a:lstStyle/>
-          <a:p>
-            <a:r>
-              <a:rPr sz="1200" b="0" i="0" spc="300">
-                <a:solidFill>
-                  <a:srgbClr val="4A6B3A"/>
-                </a:solidFill>
-                <a:latin typeface="Arial"/>
-              </a:rPr>
-              <a:t>ПРИМЕРЫ</a:t>
-            </a:r>
-          </a:p>
-        </p:txBody>
-      </p:sp>
-      <p:sp>
-        <p:nvSpPr>
-          <p:cNvPr id="7" name="TextBox 6"/>
-          <p:cNvSpPr txBox="1"/>
-          <p:nvPr/>
-        </p:nvSpPr>
-        <p:spPr>
-          <a:xfrm>
-            <a:off x="812800" y="736600"/>
-            <a:ext cx="6350000" cy="731520"/>
-          </a:xfrm>
-          <a:prstGeom prst="rect">
-            <a:avLst/>
-          </a:prstGeom>
-          <a:noFill/>
-        </p:spPr>
-        <p:txBody>
-          <a:bodyPr wrap="square" lIns="0" rIns="0" tIns="0" bIns="0" anchor="t">
-            <a:spAutoFit/>
-          </a:bodyPr>
-          <a:lstStyle/>
-          <a:p>
-            <a:r>
-              <a:rPr sz="3200" b="0" i="0">
-                <a:solidFill>
-                  <a:srgbClr val="2A2A26"/>
-                </a:solidFill>
-                <a:latin typeface="Georgia"/>
-              </a:rPr>
-              <a:t>Что ещё можно сделать</a:t>
-            </a:r>
-          </a:p>
-        </p:txBody>
-      </p:sp>
-      <p:sp>
-        <p:nvSpPr>
-          <p:cNvPr id="8" name="TextBox 7"/>
-          <p:cNvSpPr txBox="1"/>
-          <p:nvPr/>
-        </p:nvSpPr>
-        <p:spPr>
-          <a:xfrm>
-            <a:off x="7442200" y="635000"/>
-            <a:ext cx="3937000" cy="635000"/>
-          </a:xfrm>
-          <a:prstGeom prst="rect">
-            <a:avLst/>
-          </a:prstGeom>
-          <a:noFill/>
-        </p:spPr>
-        <p:txBody>
-          <a:bodyPr wrap="square" lIns="0" rIns="0" tIns="0" bIns="0" anchor="t">
-            <a:spAutoFit/>
-          </a:bodyPr>
-          <a:lstStyle/>
-          <a:p>
-            <a:r>
-              <a:rPr sz="1300" b="0" i="0">
-                <a:solidFill>
-                  <a:srgbClr val="5E5D56"/>
-                </a:solidFill>
-                <a:latin typeface="Arial"/>
-              </a:rPr>
-              <a:t>Идеи на вашем ассортименте. Каждая пишется отдельным модулем, если она вам нужна.</a:t>
-            </a:r>
-          </a:p>
-        </p:txBody>
-      </p:sp>
-      <p:sp>
-        <p:nvSpPr>
-          <p:cNvPr id="9" name="TextBox 8"/>
-          <p:cNvSpPr txBox="1"/>
-          <p:nvPr/>
-        </p:nvSpPr>
-        <p:spPr>
-          <a:xfrm>
-            <a:off x="812800" y="4984750"/>
-            <a:ext cx="2527300" cy="215900"/>
-          </a:xfrm>
-          <a:prstGeom prst="rect">
-            <a:avLst/>
-          </a:prstGeom>
-          <a:noFill/>
-        </p:spPr>
-        <p:txBody>
-          <a:bodyPr wrap="square" lIns="0" rIns="0" tIns="0" bIns="0" anchor="t">
-            <a:spAutoFit/>
-          </a:bodyPr>
-          <a:lstStyle/>
-          <a:p>
-            <a:r>
-              <a:rPr sz="1000" b="0" i="0">
-                <a:solidFill>
-                  <a:srgbClr val="5E5D56"/>
-                </a:solidFill>
-                <a:latin typeface="Arial"/>
-              </a:rPr>
-              <a:t>iPhone 15 · 393 px</a:t>
-            </a:r>
-          </a:p>
-        </p:txBody>
-      </p:sp>
-      <p:sp>
-        <p:nvSpPr>
-          <p:cNvPr id="10" name="TextBox 9"/>
-          <p:cNvSpPr txBox="1"/>
-          <p:nvPr/>
-        </p:nvSpPr>
-        <p:spPr>
-          <a:xfrm>
-            <a:off x="812800" y="5226050"/>
-            <a:ext cx="2527300" cy="317500"/>
-          </a:xfrm>
-          <a:prstGeom prst="rect">
-            <a:avLst/>
-          </a:prstGeom>
-          <a:noFill/>
-        </p:spPr>
-        <p:txBody>
-          <a:bodyPr wrap="square" lIns="0" rIns="0" tIns="0" bIns="0" anchor="t">
-            <a:spAutoFit/>
-          </a:bodyPr>
-          <a:lstStyle/>
-          <a:p>
-            <a:r>
-              <a:rPr sz="1400" b="1" i="0">
-                <a:solidFill>
-                  <a:srgbClr val="2A2A26"/>
-                </a:solidFill>
-                <a:latin typeface="Arial"/>
-              </a:rPr>
-              <a:t>Подарочная коробка</a:t>
-            </a:r>
-          </a:p>
-        </p:txBody>
-      </p:sp>
-      <p:sp>
-        <p:nvSpPr>
-          <p:cNvPr id="11" name="TextBox 10"/>
-          <p:cNvSpPr txBox="1"/>
-          <p:nvPr/>
-        </p:nvSpPr>
-        <p:spPr>
-          <a:xfrm>
-            <a:off x="812800" y="5543550"/>
-            <a:ext cx="2527300" cy="1524000"/>
-          </a:xfrm>
-          <a:prstGeom prst="rect">
-            <a:avLst/>
-          </a:prstGeom>
-          <a:noFill/>
-        </p:spPr>
-        <p:txBody>
-          <a:bodyPr wrap="square" lIns="0" rIns="0" tIns="0" bIns="0" anchor="t">
-            <a:spAutoFit/>
-          </a:bodyPr>
-          <a:lstStyle/>
-          <a:p>
-            <a:r>
-              <a:rPr sz="1100" b="0" i="0">
-                <a:solidFill>
-                  <a:srgbClr val="5E5D56"/>
-                </a:solidFill>
-                <a:latin typeface="Arial"/>
-              </a:rPr>
-              <a:t>Покупатель сам собирает набор из вкусов текущей партии и пишет открытку. Цена считается сразу.</a:t>
-            </a:r>
-          </a:p>
-        </p:txBody>
-      </p:sp>
-      <p:sp>
-        <p:nvSpPr>
-          <p:cNvPr id="12" name="TextBox 11"/>
-          <p:cNvSpPr txBox="1"/>
-          <p:nvPr/>
-        </p:nvSpPr>
-        <p:spPr>
-          <a:xfrm>
-            <a:off x="3530600" y="4984750"/>
-            <a:ext cx="2527300" cy="215900"/>
-          </a:xfrm>
-          <a:prstGeom prst="rect">
-            <a:avLst/>
-          </a:prstGeom>
-          <a:noFill/>
-        </p:spPr>
-        <p:txBody>
-          <a:bodyPr wrap="square" lIns="0" rIns="0" tIns="0" bIns="0" anchor="t">
-            <a:spAutoFit/>
-          </a:bodyPr>
-          <a:lstStyle/>
-          <a:p>
-            <a:r>
-              <a:rPr sz="1000" b="0" i="0">
-                <a:solidFill>
-                  <a:srgbClr val="5E5D56"/>
-                </a:solidFill>
-                <a:latin typeface="Arial"/>
-              </a:rPr>
-              <a:t>iPhone SE · 375 px</a:t>
-            </a:r>
-          </a:p>
-        </p:txBody>
-      </p:sp>
-      <p:sp>
-        <p:nvSpPr>
-          <p:cNvPr id="13" name="TextBox 12"/>
-          <p:cNvSpPr txBox="1"/>
-          <p:nvPr/>
-        </p:nvSpPr>
-        <p:spPr>
-          <a:xfrm>
-            <a:off x="3530600" y="5226050"/>
-            <a:ext cx="2527300" cy="317500"/>
-          </a:xfrm>
-          <a:prstGeom prst="rect">
-            <a:avLst/>
-          </a:prstGeom>
-          <a:noFill/>
-        </p:spPr>
-        <p:txBody>
-          <a:bodyPr wrap="square" lIns="0" rIns="0" tIns="0" bIns="0" anchor="t">
-            <a:spAutoFit/>
-          </a:bodyPr>
-          <a:lstStyle/>
-          <a:p>
-            <a:r>
-              <a:rPr sz="1400" b="1" i="0">
-                <a:solidFill>
-                  <a:srgbClr val="2A2A26"/>
-                </a:solidFill>
-                <a:latin typeface="Arial"/>
-              </a:rPr>
-              <a:t>Кабинет для опта</a:t>
-            </a:r>
-          </a:p>
-        </p:txBody>
-      </p:sp>
-      <p:sp>
-        <p:nvSpPr>
-          <p:cNvPr id="14" name="TextBox 13"/>
-          <p:cNvSpPr txBox="1"/>
-          <p:nvPr/>
-        </p:nvSpPr>
-        <p:spPr>
-          <a:xfrm>
-            <a:off x="3530600" y="5543550"/>
-            <a:ext cx="2527300" cy="1524000"/>
-          </a:xfrm>
-          <a:prstGeom prst="rect">
-            <a:avLst/>
-          </a:prstGeom>
-          <a:noFill/>
-        </p:spPr>
-        <p:txBody>
-          <a:bodyPr wrap="square" lIns="0" rIns="0" tIns="0" bIns="0" anchor="t">
-            <a:spAutoFit/>
-          </a:bodyPr>
-          <a:lstStyle/>
-          <a:p>
-            <a:r>
-              <a:rPr sz="1100" b="0" i="0">
-                <a:solidFill>
-                  <a:srgbClr val="5E5D56"/>
-                </a:solidFill>
-                <a:latin typeface="Arial"/>
-              </a:rPr>
-              <a:t>Раздел для зарегистрированных покупателей на сайте уже есть. Из него выйдет кабинет партнёров: своя цена и счёт для юрлица.</a:t>
-            </a:r>
-          </a:p>
-        </p:txBody>
-      </p:sp>
-      <p:sp>
-        <p:nvSpPr>
-          <p:cNvPr id="15" name="TextBox 14"/>
-          <p:cNvSpPr txBox="1"/>
-          <p:nvPr/>
-        </p:nvSpPr>
-        <p:spPr>
-          <a:xfrm>
-            <a:off x="6248400" y="4984750"/>
-            <a:ext cx="2527300" cy="215900"/>
-          </a:xfrm>
-          <a:prstGeom prst="rect">
-            <a:avLst/>
-          </a:prstGeom>
-          <a:noFill/>
-        </p:spPr>
-        <p:txBody>
-          <a:bodyPr wrap="square" lIns="0" rIns="0" tIns="0" bIns="0" anchor="t">
-            <a:spAutoFit/>
-          </a:bodyPr>
-          <a:lstStyle/>
-          <a:p>
-            <a:r>
-              <a:rPr sz="1000" b="0" i="0">
-                <a:solidFill>
-                  <a:srgbClr val="5E5D56"/>
-                </a:solidFill>
-                <a:latin typeface="Arial"/>
-              </a:rPr>
-              <a:t>Android · 360 px</a:t>
-            </a:r>
-          </a:p>
-        </p:txBody>
-      </p:sp>
-      <p:sp>
-        <p:nvSpPr>
-          <p:cNvPr id="16" name="TextBox 15"/>
-          <p:cNvSpPr txBox="1"/>
-          <p:nvPr/>
-        </p:nvSpPr>
-        <p:spPr>
-          <a:xfrm>
-            <a:off x="6248400" y="5226050"/>
-            <a:ext cx="2527300" cy="317500"/>
-          </a:xfrm>
-          <a:prstGeom prst="rect">
-            <a:avLst/>
-          </a:prstGeom>
-          <a:noFill/>
-        </p:spPr>
-        <p:txBody>
-          <a:bodyPr wrap="square" lIns="0" rIns="0" tIns="0" bIns="0" anchor="t">
-            <a:spAutoFit/>
-          </a:bodyPr>
-          <a:lstStyle/>
-          <a:p>
-            <a:r>
-              <a:rPr sz="1400" b="1" i="0">
-                <a:solidFill>
-                  <a:srgbClr val="2A2A26"/>
-                </a:solidFill>
-                <a:latin typeface="Arial"/>
-              </a:rPr>
-              <a:t>Подписка на партию</a:t>
-            </a:r>
-          </a:p>
-        </p:txBody>
-      </p:sp>
-      <p:sp>
-        <p:nvSpPr>
-          <p:cNvPr id="17" name="TextBox 16"/>
-          <p:cNvSpPr txBox="1"/>
-          <p:nvPr/>
-        </p:nvSpPr>
-        <p:spPr>
-          <a:xfrm>
-            <a:off x="6248400" y="5543550"/>
-            <a:ext cx="2527300" cy="1524000"/>
-          </a:xfrm>
-          <a:prstGeom prst="rect">
-            <a:avLst/>
-          </a:prstGeom>
-          <a:noFill/>
-        </p:spPr>
-        <p:txBody>
-          <a:bodyPr wrap="square" lIns="0" rIns="0" tIns="0" bIns="0" anchor="t">
-            <a:spAutoFit/>
-          </a:bodyPr>
-          <a:lstStyle/>
-          <a:p>
-            <a:r>
-              <a:rPr sz="1100" b="0" i="0">
-                <a:solidFill>
-                  <a:srgbClr val="5E5D56"/>
-                </a:solidFill>
-                <a:latin typeface="Arial"/>
-              </a:rPr>
-              <a:t>Постоянные покупатели бронируют место в каждой партии, вы заранее знаете объём.</a:t>
-            </a:r>
-          </a:p>
-        </p:txBody>
-      </p:sp>
-      <p:sp>
-        <p:nvSpPr>
-          <p:cNvPr id="18" name="TextBox 17"/>
-          <p:cNvSpPr txBox="1"/>
-          <p:nvPr/>
-        </p:nvSpPr>
-        <p:spPr>
-          <a:xfrm>
-            <a:off x="8966200" y="4984750"/>
-            <a:ext cx="2527300" cy="215900"/>
-          </a:xfrm>
-          <a:prstGeom prst="rect">
-            <a:avLst/>
-          </a:prstGeom>
-          <a:noFill/>
-        </p:spPr>
-        <p:txBody>
-          <a:bodyPr wrap="square" lIns="0" rIns="0" tIns="0" bIns="0" anchor="t">
-            <a:spAutoFit/>
-          </a:bodyPr>
-          <a:lstStyle/>
-          <a:p>
-            <a:r>
-              <a:rPr sz="1000" b="0" i="0">
-                <a:solidFill>
-                  <a:srgbClr val="5E5D56"/>
-                </a:solidFill>
-                <a:latin typeface="Arial"/>
-              </a:rPr>
-              <a:t>iPhone 15 Pro Max · 430 px</a:t>
-            </a:r>
-          </a:p>
-        </p:txBody>
-      </p:sp>
-      <p:sp>
-        <p:nvSpPr>
-          <p:cNvPr id="19" name="TextBox 18"/>
-          <p:cNvSpPr txBox="1"/>
-          <p:nvPr/>
-        </p:nvSpPr>
-        <p:spPr>
-          <a:xfrm>
-            <a:off x="8966200" y="5226050"/>
-            <a:ext cx="2527300" cy="317500"/>
-          </a:xfrm>
-          <a:prstGeom prst="rect">
-            <a:avLst/>
-          </a:prstGeom>
-          <a:noFill/>
-        </p:spPr>
-        <p:txBody>
-          <a:bodyPr wrap="square" lIns="0" rIns="0" tIns="0" bIns="0" anchor="t">
-            <a:spAutoFit/>
-          </a:bodyPr>
-          <a:lstStyle/>
-          <a:p>
-            <a:r>
-              <a:rPr sz="1400" b="1" i="0">
-                <a:solidFill>
-                  <a:srgbClr val="2A2A26"/>
-                </a:solidFill>
-                <a:latin typeface="Arial"/>
-              </a:rPr>
-              <a:t>Магазин и курсы</a:t>
-            </a:r>
-          </a:p>
-        </p:txBody>
-      </p:sp>
-      <p:sp>
-        <p:nvSpPr>
-          <p:cNvPr id="20" name="TextBox 19"/>
-          <p:cNvSpPr txBox="1"/>
-          <p:nvPr/>
-        </p:nvSpPr>
-        <p:spPr>
-          <a:xfrm>
-            <a:off x="8966200" y="5543550"/>
-            <a:ext cx="2527300" cy="1524000"/>
-          </a:xfrm>
-          <a:prstGeom prst="rect">
-            <a:avLst/>
-          </a:prstGeom>
-          <a:noFill/>
-        </p:spPr>
-        <p:txBody>
-          <a:bodyPr wrap="square" lIns="0" rIns="0" tIns="0" bIns="0" anchor="t">
-            <a:spAutoFit/>
-          </a:bodyPr>
-          <a:lstStyle/>
-          <a:p>
-            <a:r>
-              <a:rPr sz="1100" b="0" i="0">
-                <a:solidFill>
-                  <a:srgbClr val="5E5D56"/>
-                </a:solidFill>
-                <a:latin typeface="Arial"/>
-              </a:rPr>
-              <a:t>Связка lesnaya-yagodka.ru и zefirfly.com: общий профиль, покупатели находят и зефир, и курсы.</a:t>
-            </a:r>
           </a:p>
         </p:txBody>
       </p:sp>
@@ -6773,7 +6853,7 @@
                 <a:ea typeface="Arial" pitchFamily="34" charset="-122"/>
                 <a:cs typeface="Arial" pitchFamily="34" charset="-120"/>
               </a:rPr>
-              <a:t>Товары без фото</a:t>
+              <a:t>Нет ссылок на Telegram и соцсети</a:t>
             </a:r>
             <a:endParaRPr lang="en-US" sz="1800" dirty="0"/>
           </a:p>
@@ -6815,7 +6895,7 @@
                 <a:ea typeface="Arial" pitchFamily="34" charset="-122"/>
                 <a:cs typeface="Arial" pitchFamily="34" charset="-120"/>
               </a:rPr>
-              <a:t>Покупатель не видит, что заказывает, и идёт спрашивать в директ.</a:t>
+              <a:t>На главной их нет. Кому не хватило партии, тому негде подписаться, чтобы узнать о следующей.</a:t>
             </a:r>
             <a:endParaRPr lang="en-US" sz="1500" dirty="0"/>
           </a:p>
@@ -8662,6 +8742,1318 @@
 </file>
 
 <file path=ppt/slides/slide5.xml><?xml version="1.0" encoding="utf-8"?>
+<p:sld xmlns:a="http://schemas.openxmlformats.org/drawingml/2006/main" xmlns:p="http://schemas.openxmlformats.org/presentationml/2006/main" xmlns:r="http://schemas.openxmlformats.org/officeDocument/2006/relationships">
+  <p:cSld>
+    <p:bg>
+      <p:bgPr>
+        <a:solidFill>
+          <a:srgbClr val="ECE7DF"/>
+        </a:solidFill>
+        <a:effectLst/>
+      </p:bgPr>
+    </p:bg>
+    <p:spTree>
+      <p:nvGrpSpPr>
+        <p:cNvPr id="1" name=""/>
+        <p:cNvGrpSpPr/>
+        <p:nvPr/>
+      </p:nvGrpSpPr>
+      <p:grpSpPr/>
+      <p:pic>
+        <p:nvPicPr>
+          <p:cNvPr id="2" name="Picture 1" descr="image.png"/>
+          <p:cNvPicPr>
+            <a:picLocks noChangeAspect="1"/>
+          </p:cNvPicPr>
+          <p:nvPr/>
+        </p:nvPicPr>
+        <p:blipFill>
+          <a:blip r:embed="rId2"/>
+          <a:stretch>
+            <a:fillRect/>
+          </a:stretch>
+        </p:blipFill>
+        <p:spPr>
+          <a:xfrm>
+            <a:off x="812800" y="2000250"/>
+            <a:ext cx="1365250" cy="2857500"/>
+          </a:xfrm>
+          <a:prstGeom prst="rect">
+            <a:avLst/>
+          </a:prstGeom>
+        </p:spPr>
+      </p:pic>
+      <p:pic>
+        <p:nvPicPr>
+          <p:cNvPr id="3" name="Picture 2" descr="image.png"/>
+          <p:cNvPicPr>
+            <a:picLocks noChangeAspect="1"/>
+          </p:cNvPicPr>
+          <p:nvPr/>
+        </p:nvPicPr>
+        <p:blipFill>
+          <a:blip r:embed="rId3"/>
+          <a:stretch>
+            <a:fillRect/>
+          </a:stretch>
+        </p:blipFill>
+        <p:spPr>
+          <a:xfrm>
+            <a:off x="3530600" y="2400300"/>
+            <a:ext cx="1416050" cy="2457450"/>
+          </a:xfrm>
+          <a:prstGeom prst="rect">
+            <a:avLst/>
+          </a:prstGeom>
+        </p:spPr>
+      </p:pic>
+      <p:pic>
+        <p:nvPicPr>
+          <p:cNvPr id="4" name="Picture 3" descr="image.png"/>
+          <p:cNvPicPr>
+            <a:picLocks noChangeAspect="1"/>
+          </p:cNvPicPr>
+          <p:nvPr/>
+        </p:nvPicPr>
+        <p:blipFill>
+          <a:blip r:embed="rId4"/>
+          <a:stretch>
+            <a:fillRect/>
+          </a:stretch>
+        </p:blipFill>
+        <p:spPr>
+          <a:xfrm>
+            <a:off x="6248400" y="1739900"/>
+            <a:ext cx="1485900" cy="3117850"/>
+          </a:xfrm>
+          <a:prstGeom prst="rect">
+            <a:avLst/>
+          </a:prstGeom>
+        </p:spPr>
+      </p:pic>
+      <p:pic>
+        <p:nvPicPr>
+          <p:cNvPr id="5" name="Picture 4" descr="image.png"/>
+          <p:cNvPicPr>
+            <a:picLocks noChangeAspect="1"/>
+          </p:cNvPicPr>
+          <p:nvPr/>
+        </p:nvPicPr>
+        <p:blipFill>
+          <a:blip r:embed="rId5"/>
+          <a:stretch>
+            <a:fillRect/>
+          </a:stretch>
+        </p:blipFill>
+        <p:spPr>
+          <a:xfrm>
+            <a:off x="8966200" y="1460500"/>
+            <a:ext cx="1612900" cy="3397250"/>
+          </a:xfrm>
+          <a:prstGeom prst="rect">
+            <a:avLst/>
+          </a:prstGeom>
+        </p:spPr>
+      </p:pic>
+      <p:sp>
+        <p:nvSpPr>
+          <p:cNvPr id="6" name="TextBox 5"/>
+          <p:cNvSpPr txBox="1"/>
+          <p:nvPr/>
+        </p:nvSpPr>
+        <p:spPr>
+          <a:xfrm>
+            <a:off x="812800" y="457200"/>
+            <a:ext cx="5715000" cy="254000"/>
+          </a:xfrm>
+          <a:prstGeom prst="rect">
+            <a:avLst/>
+          </a:prstGeom>
+          <a:noFill/>
+        </p:spPr>
+        <p:txBody>
+          <a:bodyPr wrap="square" lIns="0" rIns="0" tIns="0" bIns="0" anchor="t">
+            <a:spAutoFit/>
+          </a:bodyPr>
+          <a:lstStyle/>
+          <a:p>
+            <a:r>
+              <a:rPr sz="1200" b="0" i="0" spc="300">
+                <a:solidFill>
+                  <a:srgbClr val="4A6B3A"/>
+                </a:solidFill>
+                <a:latin typeface="Arial"/>
+              </a:rPr>
+              <a:t>НА ТЕЛЕФОНАХ · ПОКУПАТЕЛЬ</a:t>
+            </a:r>
+          </a:p>
+        </p:txBody>
+      </p:sp>
+      <p:sp>
+        <p:nvSpPr>
+          <p:cNvPr id="7" name="TextBox 6"/>
+          <p:cNvSpPr txBox="1"/>
+          <p:nvPr/>
+        </p:nvSpPr>
+        <p:spPr>
+          <a:xfrm>
+            <a:off x="812800" y="736600"/>
+            <a:ext cx="6350000" cy="731520"/>
+          </a:xfrm>
+          <a:prstGeom prst="rect">
+            <a:avLst/>
+          </a:prstGeom>
+          <a:noFill/>
+        </p:spPr>
+        <p:txBody>
+          <a:bodyPr wrap="square" lIns="0" rIns="0" tIns="0" bIns="0" anchor="t">
+            <a:spAutoFit/>
+          </a:bodyPr>
+          <a:lstStyle/>
+          <a:p>
+            <a:r>
+              <a:rPr sz="3200" b="0" i="0">
+                <a:solidFill>
+                  <a:srgbClr val="2A2A26"/>
+                </a:solidFill>
+                <a:latin typeface="Georgia"/>
+              </a:rPr>
+              <a:t>Что увидит покупатель</a:t>
+            </a:r>
+          </a:p>
+        </p:txBody>
+      </p:sp>
+      <p:sp>
+        <p:nvSpPr>
+          <p:cNvPr id="8" name="TextBox 7"/>
+          <p:cNvSpPr txBox="1"/>
+          <p:nvPr/>
+        </p:nvSpPr>
+        <p:spPr>
+          <a:xfrm>
+            <a:off x="7442200" y="635000"/>
+            <a:ext cx="3937000" cy="635000"/>
+          </a:xfrm>
+          <a:prstGeom prst="rect">
+            <a:avLst/>
+          </a:prstGeom>
+          <a:noFill/>
+        </p:spPr>
+        <p:txBody>
+          <a:bodyPr wrap="square" lIns="0" rIns="0" tIns="0" bIns="0" anchor="t">
+            <a:spAutoFit/>
+          </a:bodyPr>
+          <a:lstStyle/>
+          <a:p>
+            <a:r>
+              <a:rPr sz="1300" b="0" i="0">
+                <a:solidFill>
+                  <a:srgbClr val="5E5D56"/>
+                </a:solidFill>
+                <a:latin typeface="Arial"/>
+              </a:rPr>
+              <a:t>Товары, цены, вес, состав и срок годности с вашего сайта. Количества и заказы для примера.</a:t>
+            </a:r>
+          </a:p>
+        </p:txBody>
+      </p:sp>
+      <p:sp>
+        <p:nvSpPr>
+          <p:cNvPr id="9" name="TextBox 8"/>
+          <p:cNvSpPr txBox="1"/>
+          <p:nvPr/>
+        </p:nvSpPr>
+        <p:spPr>
+          <a:xfrm>
+            <a:off x="812800" y="4984750"/>
+            <a:ext cx="2527300" cy="215900"/>
+          </a:xfrm>
+          <a:prstGeom prst="rect">
+            <a:avLst/>
+          </a:prstGeom>
+          <a:noFill/>
+        </p:spPr>
+        <p:txBody>
+          <a:bodyPr wrap="square" lIns="0" rIns="0" tIns="0" bIns="0" anchor="t">
+            <a:spAutoFit/>
+          </a:bodyPr>
+          <a:lstStyle/>
+          <a:p>
+            <a:r>
+              <a:rPr sz="1000" b="0" i="0">
+                <a:solidFill>
+                  <a:srgbClr val="5E5D56"/>
+                </a:solidFill>
+                <a:latin typeface="Arial"/>
+              </a:rPr>
+              <a:t>Android · 360 px</a:t>
+            </a:r>
+          </a:p>
+        </p:txBody>
+      </p:sp>
+      <p:sp>
+        <p:nvSpPr>
+          <p:cNvPr id="10" name="TextBox 9"/>
+          <p:cNvSpPr txBox="1"/>
+          <p:nvPr/>
+        </p:nvSpPr>
+        <p:spPr>
+          <a:xfrm>
+            <a:off x="812800" y="5226050"/>
+            <a:ext cx="2527300" cy="317500"/>
+          </a:xfrm>
+          <a:prstGeom prst="rect">
+            <a:avLst/>
+          </a:prstGeom>
+          <a:noFill/>
+        </p:spPr>
+        <p:txBody>
+          <a:bodyPr wrap="square" lIns="0" rIns="0" tIns="0" bIns="0" anchor="t">
+            <a:spAutoFit/>
+          </a:bodyPr>
+          <a:lstStyle/>
+          <a:p>
+            <a:r>
+              <a:rPr sz="1400" b="1" i="0">
+                <a:solidFill>
+                  <a:srgbClr val="2A2A26"/>
+                </a:solidFill>
+                <a:latin typeface="Arial"/>
+              </a:rPr>
+              <a:t>Главная в день партии</a:t>
+            </a:r>
+          </a:p>
+        </p:txBody>
+      </p:sp>
+      <p:sp>
+        <p:nvSpPr>
+          <p:cNvPr id="11" name="TextBox 10"/>
+          <p:cNvSpPr txBox="1"/>
+          <p:nvPr/>
+        </p:nvSpPr>
+        <p:spPr>
+          <a:xfrm>
+            <a:off x="812800" y="5543550"/>
+            <a:ext cx="2527300" cy="1524000"/>
+          </a:xfrm>
+          <a:prstGeom prst="rect">
+            <a:avLst/>
+          </a:prstGeom>
+          <a:noFill/>
+        </p:spPr>
+        <p:txBody>
+          <a:bodyPr wrap="square" lIns="0" rIns="0" tIns="0" bIns="0" anchor="t">
+            <a:spAutoFit/>
+          </a:bodyPr>
+          <a:lstStyle/>
+          <a:p>
+            <a:r>
+              <a:rPr sz="1100" b="0" i="0">
+                <a:solidFill>
+                  <a:srgbClr val="5E5D56"/>
+                </a:solidFill>
+                <a:latin typeface="Arial"/>
+              </a:rPr>
+              <a:t>Видно, сколько осталось. Партия закончилась, продажа закрылась сама.</a:t>
+            </a:r>
+          </a:p>
+        </p:txBody>
+      </p:sp>
+      <p:sp>
+        <p:nvSpPr>
+          <p:cNvPr id="12" name="TextBox 11"/>
+          <p:cNvSpPr txBox="1"/>
+          <p:nvPr/>
+        </p:nvSpPr>
+        <p:spPr>
+          <a:xfrm>
+            <a:off x="3530600" y="4984750"/>
+            <a:ext cx="2527300" cy="215900"/>
+          </a:xfrm>
+          <a:prstGeom prst="rect">
+            <a:avLst/>
+          </a:prstGeom>
+          <a:noFill/>
+        </p:spPr>
+        <p:txBody>
+          <a:bodyPr wrap="square" lIns="0" rIns="0" tIns="0" bIns="0" anchor="t">
+            <a:spAutoFit/>
+          </a:bodyPr>
+          <a:lstStyle/>
+          <a:p>
+            <a:r>
+              <a:rPr sz="1000" b="0" i="0">
+                <a:solidFill>
+                  <a:srgbClr val="5E5D56"/>
+                </a:solidFill>
+                <a:latin typeface="Arial"/>
+              </a:rPr>
+              <a:t>iPhone SE · 375 px</a:t>
+            </a:r>
+          </a:p>
+        </p:txBody>
+      </p:sp>
+      <p:sp>
+        <p:nvSpPr>
+          <p:cNvPr id="13" name="TextBox 12"/>
+          <p:cNvSpPr txBox="1"/>
+          <p:nvPr/>
+        </p:nvSpPr>
+        <p:spPr>
+          <a:xfrm>
+            <a:off x="3530600" y="5226050"/>
+            <a:ext cx="2527300" cy="317500"/>
+          </a:xfrm>
+          <a:prstGeom prst="rect">
+            <a:avLst/>
+          </a:prstGeom>
+          <a:noFill/>
+        </p:spPr>
+        <p:txBody>
+          <a:bodyPr wrap="square" lIns="0" rIns="0" tIns="0" bIns="0" anchor="t">
+            <a:spAutoFit/>
+          </a:bodyPr>
+          <a:lstStyle/>
+          <a:p>
+            <a:r>
+              <a:rPr sz="1400" b="1" i="0">
+                <a:solidFill>
+                  <a:srgbClr val="2A2A26"/>
+                </a:solidFill>
+                <a:latin typeface="Arial"/>
+              </a:rPr>
+              <a:t>Карточка товара</a:t>
+            </a:r>
+          </a:p>
+        </p:txBody>
+      </p:sp>
+      <p:sp>
+        <p:nvSpPr>
+          <p:cNvPr id="14" name="TextBox 13"/>
+          <p:cNvSpPr txBox="1"/>
+          <p:nvPr/>
+        </p:nvSpPr>
+        <p:spPr>
+          <a:xfrm>
+            <a:off x="3530600" y="5543550"/>
+            <a:ext cx="2527300" cy="1524000"/>
+          </a:xfrm>
+          <a:prstGeom prst="rect">
+            <a:avLst/>
+          </a:prstGeom>
+          <a:noFill/>
+        </p:spPr>
+        <p:txBody>
+          <a:bodyPr wrap="square" lIns="0" rIns="0" tIns="0" bIns="0" anchor="t">
+            <a:spAutoFit/>
+          </a:bodyPr>
+          <a:lstStyle/>
+          <a:p>
+            <a:r>
+              <a:rPr sz="1100" b="0" i="0">
+                <a:solidFill>
+                  <a:srgbClr val="5E5D56"/>
+                </a:solidFill>
+                <a:latin typeface="Arial"/>
+              </a:rPr>
+              <a:t>Все сведения о продукте по закону. Без них товар не опубликуется.</a:t>
+            </a:r>
+          </a:p>
+        </p:txBody>
+      </p:sp>
+      <p:sp>
+        <p:nvSpPr>
+          <p:cNvPr id="15" name="TextBox 14"/>
+          <p:cNvSpPr txBox="1"/>
+          <p:nvPr/>
+        </p:nvSpPr>
+        <p:spPr>
+          <a:xfrm>
+            <a:off x="6248400" y="4984750"/>
+            <a:ext cx="2527300" cy="215900"/>
+          </a:xfrm>
+          <a:prstGeom prst="rect">
+            <a:avLst/>
+          </a:prstGeom>
+          <a:noFill/>
+        </p:spPr>
+        <p:txBody>
+          <a:bodyPr wrap="square" lIns="0" rIns="0" tIns="0" bIns="0" anchor="t">
+            <a:spAutoFit/>
+          </a:bodyPr>
+          <a:lstStyle/>
+          <a:p>
+            <a:r>
+              <a:rPr sz="1000" b="0" i="0">
+                <a:solidFill>
+                  <a:srgbClr val="5E5D56"/>
+                </a:solidFill>
+                <a:latin typeface="Arial"/>
+              </a:rPr>
+              <a:t>iPhone 15 · 393 px</a:t>
+            </a:r>
+          </a:p>
+        </p:txBody>
+      </p:sp>
+      <p:sp>
+        <p:nvSpPr>
+          <p:cNvPr id="16" name="TextBox 15"/>
+          <p:cNvSpPr txBox="1"/>
+          <p:nvPr/>
+        </p:nvSpPr>
+        <p:spPr>
+          <a:xfrm>
+            <a:off x="6248400" y="5226050"/>
+            <a:ext cx="2527300" cy="317500"/>
+          </a:xfrm>
+          <a:prstGeom prst="rect">
+            <a:avLst/>
+          </a:prstGeom>
+          <a:noFill/>
+        </p:spPr>
+        <p:txBody>
+          <a:bodyPr wrap="square" lIns="0" rIns="0" tIns="0" bIns="0" anchor="t">
+            <a:spAutoFit/>
+          </a:bodyPr>
+          <a:lstStyle/>
+          <a:p>
+            <a:r>
+              <a:rPr sz="1400" b="1" i="0">
+                <a:solidFill>
+                  <a:srgbClr val="2A2A26"/>
+                </a:solidFill>
+                <a:latin typeface="Arial"/>
+              </a:rPr>
+              <a:t>Оформление</a:t>
+            </a:r>
+          </a:p>
+        </p:txBody>
+      </p:sp>
+      <p:sp>
+        <p:nvSpPr>
+          <p:cNvPr id="17" name="TextBox 16"/>
+          <p:cNvSpPr txBox="1"/>
+          <p:nvPr/>
+        </p:nvSpPr>
+        <p:spPr>
+          <a:xfrm>
+            <a:off x="6248400" y="5543550"/>
+            <a:ext cx="2527300" cy="1524000"/>
+          </a:xfrm>
+          <a:prstGeom prst="rect">
+            <a:avLst/>
+          </a:prstGeom>
+          <a:noFill/>
+        </p:spPr>
+        <p:txBody>
+          <a:bodyPr wrap="square" lIns="0" rIns="0" tIns="0" bIns="0" anchor="t">
+            <a:spAutoFit/>
+          </a:bodyPr>
+          <a:lstStyle/>
+          <a:p>
+            <a:r>
+              <a:rPr sz="1100" b="0" i="0">
+                <a:solidFill>
+                  <a:srgbClr val="5E5D56"/>
+                </a:solidFill>
+                <a:latin typeface="Arial"/>
+              </a:rPr>
+              <a:t>Отдельное согласие без отметки заранее, СДЭК на карте, чек на почту.</a:t>
+            </a:r>
+          </a:p>
+        </p:txBody>
+      </p:sp>
+      <p:sp>
+        <p:nvSpPr>
+          <p:cNvPr id="18" name="TextBox 17"/>
+          <p:cNvSpPr txBox="1"/>
+          <p:nvPr/>
+        </p:nvSpPr>
+        <p:spPr>
+          <a:xfrm>
+            <a:off x="8966200" y="4984750"/>
+            <a:ext cx="2527300" cy="215900"/>
+          </a:xfrm>
+          <a:prstGeom prst="rect">
+            <a:avLst/>
+          </a:prstGeom>
+          <a:noFill/>
+        </p:spPr>
+        <p:txBody>
+          <a:bodyPr wrap="square" lIns="0" rIns="0" tIns="0" bIns="0" anchor="t">
+            <a:spAutoFit/>
+          </a:bodyPr>
+          <a:lstStyle/>
+          <a:p>
+            <a:r>
+              <a:rPr sz="1000" b="0" i="0">
+                <a:solidFill>
+                  <a:srgbClr val="5E5D56"/>
+                </a:solidFill>
+                <a:latin typeface="Arial"/>
+              </a:rPr>
+              <a:t>iPhone 15 Pro Max · 430 px</a:t>
+            </a:r>
+          </a:p>
+        </p:txBody>
+      </p:sp>
+      <p:sp>
+        <p:nvSpPr>
+          <p:cNvPr id="19" name="TextBox 18"/>
+          <p:cNvSpPr txBox="1"/>
+          <p:nvPr/>
+        </p:nvSpPr>
+        <p:spPr>
+          <a:xfrm>
+            <a:off x="8966200" y="5226050"/>
+            <a:ext cx="2527300" cy="317500"/>
+          </a:xfrm>
+          <a:prstGeom prst="rect">
+            <a:avLst/>
+          </a:prstGeom>
+          <a:noFill/>
+        </p:spPr>
+        <p:txBody>
+          <a:bodyPr wrap="square" lIns="0" rIns="0" tIns="0" bIns="0" anchor="t">
+            <a:spAutoFit/>
+          </a:bodyPr>
+          <a:lstStyle/>
+          <a:p>
+            <a:r>
+              <a:rPr sz="1400" b="1" i="0">
+                <a:solidFill>
+                  <a:srgbClr val="2A2A26"/>
+                </a:solidFill>
+                <a:latin typeface="Arial"/>
+              </a:rPr>
+              <a:t>Партия разобрана</a:t>
+            </a:r>
+          </a:p>
+        </p:txBody>
+      </p:sp>
+      <p:sp>
+        <p:nvSpPr>
+          <p:cNvPr id="20" name="TextBox 19"/>
+          <p:cNvSpPr txBox="1"/>
+          <p:nvPr/>
+        </p:nvSpPr>
+        <p:spPr>
+          <a:xfrm>
+            <a:off x="8966200" y="5543550"/>
+            <a:ext cx="2527300" cy="1524000"/>
+          </a:xfrm>
+          <a:prstGeom prst="rect">
+            <a:avLst/>
+          </a:prstGeom>
+          <a:noFill/>
+        </p:spPr>
+        <p:txBody>
+          <a:bodyPr wrap="square" lIns="0" rIns="0" tIns="0" bIns="0" anchor="t">
+            <a:spAutoFit/>
+          </a:bodyPr>
+          <a:lstStyle/>
+          <a:p>
+            <a:r>
+              <a:rPr sz="1100" b="0" i="0">
+                <a:solidFill>
+                  <a:srgbClr val="5E5D56"/>
+                </a:solidFill>
+                <a:latin typeface="Arial"/>
+              </a:rPr>
+              <a:t>Вместо «нет в наличии» очередь и одно сообщение об открытии.</a:t>
+            </a:r>
+          </a:p>
+        </p:txBody>
+      </p:sp>
+    </p:spTree>
+  </p:cSld>
+  <p:clrMapOvr>
+    <a:masterClrMapping/>
+  </p:clrMapOvr>
+</p:sld>
+</file>
+
+<file path=ppt/slides/slide6.xml><?xml version="1.0" encoding="utf-8"?>
+<p:sld xmlns:a="http://schemas.openxmlformats.org/drawingml/2006/main" xmlns:p="http://schemas.openxmlformats.org/presentationml/2006/main" xmlns:r="http://schemas.openxmlformats.org/officeDocument/2006/relationships">
+  <p:cSld>
+    <p:bg>
+      <p:bgPr>
+        <a:solidFill>
+          <a:srgbClr val="F6F3EE"/>
+        </a:solidFill>
+        <a:effectLst/>
+      </p:bgPr>
+    </p:bg>
+    <p:spTree>
+      <p:nvGrpSpPr>
+        <p:cNvPr id="1" name=""/>
+        <p:cNvGrpSpPr/>
+        <p:nvPr/>
+      </p:nvGrpSpPr>
+      <p:grpSpPr/>
+      <p:pic>
+        <p:nvPicPr>
+          <p:cNvPr id="2" name="Picture 1" descr="image.png"/>
+          <p:cNvPicPr>
+            <a:picLocks noChangeAspect="1"/>
+          </p:cNvPicPr>
+          <p:nvPr/>
+        </p:nvPicPr>
+        <p:blipFill>
+          <a:blip r:embed="rId2"/>
+          <a:stretch>
+            <a:fillRect/>
+          </a:stretch>
+        </p:blipFill>
+        <p:spPr>
+          <a:xfrm>
+            <a:off x="812800" y="1524000"/>
+            <a:ext cx="1587500" cy="3340100"/>
+          </a:xfrm>
+          <a:prstGeom prst="rect">
+            <a:avLst/>
+          </a:prstGeom>
+        </p:spPr>
+      </p:pic>
+      <p:pic>
+        <p:nvPicPr>
+          <p:cNvPr id="3" name="Picture 2" descr="image.png"/>
+          <p:cNvPicPr>
+            <a:picLocks noChangeAspect="1"/>
+          </p:cNvPicPr>
+          <p:nvPr/>
+        </p:nvPicPr>
+        <p:blipFill>
+          <a:blip r:embed="rId3"/>
+          <a:stretch>
+            <a:fillRect/>
+          </a:stretch>
+        </p:blipFill>
+        <p:spPr>
+          <a:xfrm>
+            <a:off x="2571750" y="1524000"/>
+            <a:ext cx="1587500" cy="3340100"/>
+          </a:xfrm>
+          <a:prstGeom prst="rect">
+            <a:avLst/>
+          </a:prstGeom>
+        </p:spPr>
+      </p:pic>
+      <p:pic>
+        <p:nvPicPr>
+          <p:cNvPr id="4" name="Picture 3" descr="image.png"/>
+          <p:cNvPicPr>
+            <a:picLocks noChangeAspect="1"/>
+          </p:cNvPicPr>
+          <p:nvPr/>
+        </p:nvPicPr>
+        <p:blipFill>
+          <a:blip r:embed="rId4"/>
+          <a:stretch>
+            <a:fillRect/>
+          </a:stretch>
+        </p:blipFill>
+        <p:spPr>
+          <a:xfrm>
+            <a:off x="4330700" y="1524000"/>
+            <a:ext cx="1587500" cy="3340100"/>
+          </a:xfrm>
+          <a:prstGeom prst="rect">
+            <a:avLst/>
+          </a:prstGeom>
+        </p:spPr>
+      </p:pic>
+      <p:pic>
+        <p:nvPicPr>
+          <p:cNvPr id="5" name="Picture 4" descr="image.png"/>
+          <p:cNvPicPr>
+            <a:picLocks noChangeAspect="1"/>
+          </p:cNvPicPr>
+          <p:nvPr/>
+        </p:nvPicPr>
+        <p:blipFill>
+          <a:blip r:embed="rId5"/>
+          <a:stretch>
+            <a:fillRect/>
+          </a:stretch>
+        </p:blipFill>
+        <p:spPr>
+          <a:xfrm>
+            <a:off x="6089650" y="1524000"/>
+            <a:ext cx="1587500" cy="3340100"/>
+          </a:xfrm>
+          <a:prstGeom prst="rect">
+            <a:avLst/>
+          </a:prstGeom>
+        </p:spPr>
+      </p:pic>
+      <p:pic>
+        <p:nvPicPr>
+          <p:cNvPr id="6" name="Picture 5" descr="image.png"/>
+          <p:cNvPicPr>
+            <a:picLocks noChangeAspect="1"/>
+          </p:cNvPicPr>
+          <p:nvPr/>
+        </p:nvPicPr>
+        <p:blipFill>
+          <a:blip r:embed="rId6"/>
+          <a:stretch>
+            <a:fillRect/>
+          </a:stretch>
+        </p:blipFill>
+        <p:spPr>
+          <a:xfrm>
+            <a:off x="7848600" y="1524000"/>
+            <a:ext cx="1587500" cy="3340100"/>
+          </a:xfrm>
+          <a:prstGeom prst="rect">
+            <a:avLst/>
+          </a:prstGeom>
+        </p:spPr>
+      </p:pic>
+      <p:pic>
+        <p:nvPicPr>
+          <p:cNvPr id="7" name="Picture 6" descr="image.png"/>
+          <p:cNvPicPr>
+            <a:picLocks noChangeAspect="1"/>
+          </p:cNvPicPr>
+          <p:nvPr/>
+        </p:nvPicPr>
+        <p:blipFill>
+          <a:blip r:embed="rId7"/>
+          <a:stretch>
+            <a:fillRect/>
+          </a:stretch>
+        </p:blipFill>
+        <p:spPr>
+          <a:xfrm>
+            <a:off x="9607550" y="1524000"/>
+            <a:ext cx="1587500" cy="3340100"/>
+          </a:xfrm>
+          <a:prstGeom prst="rect">
+            <a:avLst/>
+          </a:prstGeom>
+        </p:spPr>
+      </p:pic>
+      <p:sp>
+        <p:nvSpPr>
+          <p:cNvPr id="8" name="TextBox 7"/>
+          <p:cNvSpPr txBox="1"/>
+          <p:nvPr/>
+        </p:nvSpPr>
+        <p:spPr>
+          <a:xfrm>
+            <a:off x="812800" y="457200"/>
+            <a:ext cx="5715000" cy="254000"/>
+          </a:xfrm>
+          <a:prstGeom prst="rect">
+            <a:avLst/>
+          </a:prstGeom>
+          <a:noFill/>
+        </p:spPr>
+        <p:txBody>
+          <a:bodyPr wrap="square" lIns="0" rIns="0" tIns="0" bIns="0" anchor="t">
+            <a:spAutoFit/>
+          </a:bodyPr>
+          <a:lstStyle/>
+          <a:p>
+            <a:r>
+              <a:rPr sz="1200" b="0" i="0" spc="300">
+                <a:solidFill>
+                  <a:srgbClr val="4A6B3A"/>
+                </a:solidFill>
+                <a:latin typeface="Arial"/>
+              </a:rPr>
+              <a:t>ОФОРМЛЕНИЕ</a:t>
+            </a:r>
+          </a:p>
+        </p:txBody>
+      </p:sp>
+      <p:sp>
+        <p:nvSpPr>
+          <p:cNvPr id="9" name="TextBox 8"/>
+          <p:cNvSpPr txBox="1"/>
+          <p:nvPr/>
+        </p:nvSpPr>
+        <p:spPr>
+          <a:xfrm>
+            <a:off x="812800" y="736600"/>
+            <a:ext cx="6350000" cy="731520"/>
+          </a:xfrm>
+          <a:prstGeom prst="rect">
+            <a:avLst/>
+          </a:prstGeom>
+          <a:noFill/>
+        </p:spPr>
+        <p:txBody>
+          <a:bodyPr wrap="square" lIns="0" rIns="0" tIns="0" bIns="0" anchor="t">
+            <a:spAutoFit/>
+          </a:bodyPr>
+          <a:lstStyle/>
+          <a:p>
+            <a:r>
+              <a:rPr sz="3200" b="0" i="0">
+                <a:solidFill>
+                  <a:srgbClr val="2A2A26"/>
+                </a:solidFill>
+                <a:latin typeface="Georgia"/>
+              </a:rPr>
+              <a:t>Оформление может быть любым</a:t>
+            </a:r>
+          </a:p>
+        </p:txBody>
+      </p:sp>
+      <p:sp>
+        <p:nvSpPr>
+          <p:cNvPr id="10" name="TextBox 9"/>
+          <p:cNvSpPr txBox="1"/>
+          <p:nvPr/>
+        </p:nvSpPr>
+        <p:spPr>
+          <a:xfrm>
+            <a:off x="7442200" y="609600"/>
+            <a:ext cx="3937000" cy="825500"/>
+          </a:xfrm>
+          <a:prstGeom prst="rect">
+            <a:avLst/>
+          </a:prstGeom>
+          <a:noFill/>
+        </p:spPr>
+        <p:txBody>
+          <a:bodyPr wrap="square" lIns="0" rIns="0" tIns="0" bIns="0" anchor="t">
+            <a:spAutoFit/>
+          </a:bodyPr>
+          <a:lstStyle/>
+          <a:p>
+            <a:r>
+              <a:rPr sz="1300" b="0" i="0">
+                <a:solidFill>
+                  <a:srgbClr val="5E5D56"/>
+                </a:solidFill>
+                <a:latin typeface="Arial"/>
+              </a:rPr>
+              <a:t>Ваш экран с товарами и ценами в десяти стилях: здесь шесть, все десять — в отдельном файле. Выбираете вы, я довожу стиль до всего сайта.</a:t>
+            </a:r>
+          </a:p>
+        </p:txBody>
+      </p:sp>
+      <p:sp>
+        <p:nvSpPr>
+          <p:cNvPr id="11" name="TextBox 10"/>
+          <p:cNvSpPr txBox="1"/>
+          <p:nvPr/>
+        </p:nvSpPr>
+        <p:spPr>
+          <a:xfrm>
+            <a:off x="812800" y="4991100"/>
+            <a:ext cx="1568450" cy="317500"/>
+          </a:xfrm>
+          <a:prstGeom prst="rect">
+            <a:avLst/>
+          </a:prstGeom>
+          <a:noFill/>
+        </p:spPr>
+        <p:txBody>
+          <a:bodyPr wrap="square" lIns="0" rIns="0" tIns="0" bIns="0" anchor="t">
+            <a:spAutoFit/>
+          </a:bodyPr>
+          <a:lstStyle/>
+          <a:p>
+            <a:r>
+              <a:rPr sz="1400" b="1" i="0">
+                <a:solidFill>
+                  <a:srgbClr val="2A2A26"/>
+                </a:solidFill>
+                <a:latin typeface="Arial"/>
+              </a:rPr>
+              <a:t>Лесной</a:t>
+            </a:r>
+          </a:p>
+        </p:txBody>
+      </p:sp>
+      <p:sp>
+        <p:nvSpPr>
+          <p:cNvPr id="12" name="TextBox 11"/>
+          <p:cNvSpPr txBox="1"/>
+          <p:nvPr/>
+        </p:nvSpPr>
+        <p:spPr>
+          <a:xfrm>
+            <a:off x="812800" y="5308600"/>
+            <a:ext cx="1568450" cy="762000"/>
+          </a:xfrm>
+          <a:prstGeom prst="rect">
+            <a:avLst/>
+          </a:prstGeom>
+          <a:noFill/>
+        </p:spPr>
+        <p:txBody>
+          <a:bodyPr wrap="square" lIns="0" rIns="0" tIns="0" bIns="0" anchor="t">
+            <a:spAutoFit/>
+          </a:bodyPr>
+          <a:lstStyle/>
+          <a:p>
+            <a:r>
+              <a:rPr sz="1100" b="0" i="0">
+                <a:solidFill>
+                  <a:srgbClr val="5E5D56"/>
+                </a:solidFill>
+                <a:latin typeface="Arial"/>
+              </a:rPr>
+              <a:t>Лён, мох, антиква. Спокойно, как журнал о еде</a:t>
+            </a:r>
+          </a:p>
+        </p:txBody>
+      </p:sp>
+      <p:sp>
+        <p:nvSpPr>
+          <p:cNvPr id="13" name="TextBox 12"/>
+          <p:cNvSpPr txBox="1"/>
+          <p:nvPr/>
+        </p:nvSpPr>
+        <p:spPr>
+          <a:xfrm>
+            <a:off x="2571750" y="4991100"/>
+            <a:ext cx="1568450" cy="317500"/>
+          </a:xfrm>
+          <a:prstGeom prst="rect">
+            <a:avLst/>
+          </a:prstGeom>
+          <a:noFill/>
+        </p:spPr>
+        <p:txBody>
+          <a:bodyPr wrap="square" lIns="0" rIns="0" tIns="0" bIns="0" anchor="t">
+            <a:spAutoFit/>
+          </a:bodyPr>
+          <a:lstStyle/>
+          <a:p>
+            <a:r>
+              <a:rPr sz="1400" b="1" i="0">
+                <a:solidFill>
+                  <a:srgbClr val="2A2A26"/>
+                </a:solidFill>
+                <a:latin typeface="Arial"/>
+              </a:rPr>
+              <a:t>Ягодный</a:t>
+            </a:r>
+          </a:p>
+        </p:txBody>
+      </p:sp>
+      <p:sp>
+        <p:nvSpPr>
+          <p:cNvPr id="14" name="TextBox 13"/>
+          <p:cNvSpPr txBox="1"/>
+          <p:nvPr/>
+        </p:nvSpPr>
+        <p:spPr>
+          <a:xfrm>
+            <a:off x="2571750" y="5308600"/>
+            <a:ext cx="1568450" cy="762000"/>
+          </a:xfrm>
+          <a:prstGeom prst="rect">
+            <a:avLst/>
+          </a:prstGeom>
+          <a:noFill/>
+        </p:spPr>
+        <p:txBody>
+          <a:bodyPr wrap="square" lIns="0" rIns="0" tIns="0" bIns="0" anchor="t">
+            <a:spAutoFit/>
+          </a:bodyPr>
+          <a:lstStyle/>
+          <a:p>
+            <a:r>
+              <a:rPr sz="1100" b="0" i="0">
+                <a:solidFill>
+                  <a:srgbClr val="5E5D56"/>
+                </a:solidFill>
+                <a:latin typeface="Arial"/>
+              </a:rPr>
+              <a:t>Тёплый цвет, мягкие карточки, сочные фото</a:t>
+            </a:r>
+          </a:p>
+        </p:txBody>
+      </p:sp>
+      <p:sp>
+        <p:nvSpPr>
+          <p:cNvPr id="15" name="TextBox 14"/>
+          <p:cNvSpPr txBox="1"/>
+          <p:nvPr/>
+        </p:nvSpPr>
+        <p:spPr>
+          <a:xfrm>
+            <a:off x="4330700" y="4991100"/>
+            <a:ext cx="1568450" cy="317500"/>
+          </a:xfrm>
+          <a:prstGeom prst="rect">
+            <a:avLst/>
+          </a:prstGeom>
+          <a:noFill/>
+        </p:spPr>
+        <p:txBody>
+          <a:bodyPr wrap="square" lIns="0" rIns="0" tIns="0" bIns="0" anchor="t">
+            <a:spAutoFit/>
+          </a:bodyPr>
+          <a:lstStyle/>
+          <a:p>
+            <a:r>
+              <a:rPr sz="1400" b="1" i="0">
+                <a:solidFill>
+                  <a:srgbClr val="2A2A26"/>
+                </a:solidFill>
+                <a:latin typeface="Arial"/>
+              </a:rPr>
+              <a:t>Журнальный</a:t>
+            </a:r>
+          </a:p>
+        </p:txBody>
+      </p:sp>
+      <p:sp>
+        <p:nvSpPr>
+          <p:cNvPr id="16" name="TextBox 15"/>
+          <p:cNvSpPr txBox="1"/>
+          <p:nvPr/>
+        </p:nvSpPr>
+        <p:spPr>
+          <a:xfrm>
+            <a:off x="4330700" y="5308600"/>
+            <a:ext cx="1568450" cy="762000"/>
+          </a:xfrm>
+          <a:prstGeom prst="rect">
+            <a:avLst/>
+          </a:prstGeom>
+          <a:noFill/>
+        </p:spPr>
+        <p:txBody>
+          <a:bodyPr wrap="square" lIns="0" rIns="0" tIns="0" bIns="0" anchor="t">
+            <a:spAutoFit/>
+          </a:bodyPr>
+          <a:lstStyle/>
+          <a:p>
+            <a:r>
+              <a:rPr sz="1100" b="0" i="0">
+                <a:solidFill>
+                  <a:srgbClr val="5E5D56"/>
+                </a:solidFill>
+                <a:latin typeface="Arial"/>
+              </a:rPr>
+              <a:t>Чёрно-белый, как меню: цифры и линейки</a:t>
+            </a:r>
+          </a:p>
+        </p:txBody>
+      </p:sp>
+      <p:sp>
+        <p:nvSpPr>
+          <p:cNvPr id="17" name="TextBox 16"/>
+          <p:cNvSpPr txBox="1"/>
+          <p:nvPr/>
+        </p:nvSpPr>
+        <p:spPr>
+          <a:xfrm>
+            <a:off x="6089650" y="4991100"/>
+            <a:ext cx="1568450" cy="317500"/>
+          </a:xfrm>
+          <a:prstGeom prst="rect">
+            <a:avLst/>
+          </a:prstGeom>
+          <a:noFill/>
+        </p:spPr>
+        <p:txBody>
+          <a:bodyPr wrap="square" lIns="0" rIns="0" tIns="0" bIns="0" anchor="t">
+            <a:spAutoFit/>
+          </a:bodyPr>
+          <a:lstStyle/>
+          <a:p>
+            <a:r>
+              <a:rPr sz="1400" b="1" i="0">
+                <a:solidFill>
+                  <a:srgbClr val="2A2A26"/>
+                </a:solidFill>
+                <a:latin typeface="Arial"/>
+              </a:rPr>
+              <a:t>Фермерский</a:t>
+            </a:r>
+          </a:p>
+        </p:txBody>
+      </p:sp>
+      <p:sp>
+        <p:nvSpPr>
+          <p:cNvPr id="18" name="TextBox 17"/>
+          <p:cNvSpPr txBox="1"/>
+          <p:nvPr/>
+        </p:nvSpPr>
+        <p:spPr>
+          <a:xfrm>
+            <a:off x="6089650" y="5308600"/>
+            <a:ext cx="1568450" cy="762000"/>
+          </a:xfrm>
+          <a:prstGeom prst="rect">
+            <a:avLst/>
+          </a:prstGeom>
+          <a:noFill/>
+        </p:spPr>
+        <p:txBody>
+          <a:bodyPr wrap="square" lIns="0" rIns="0" tIns="0" bIns="0" anchor="t">
+            <a:spAutoFit/>
+          </a:bodyPr>
+          <a:lstStyle/>
+          <a:p>
+            <a:r>
+              <a:rPr sz="1100" b="0" i="0">
+                <a:solidFill>
+                  <a:srgbClr val="5E5D56"/>
+                </a:solidFill>
+                <a:latin typeface="Arial"/>
+              </a:rPr>
+              <a:t>Крафт и рукописный шрифт, как лавка в деревне</a:t>
+            </a:r>
+          </a:p>
+        </p:txBody>
+      </p:sp>
+      <p:sp>
+        <p:nvSpPr>
+          <p:cNvPr id="19" name="TextBox 18"/>
+          <p:cNvSpPr txBox="1"/>
+          <p:nvPr/>
+        </p:nvSpPr>
+        <p:spPr>
+          <a:xfrm>
+            <a:off x="7848600" y="4991100"/>
+            <a:ext cx="1568450" cy="317500"/>
+          </a:xfrm>
+          <a:prstGeom prst="rect">
+            <a:avLst/>
+          </a:prstGeom>
+          <a:noFill/>
+        </p:spPr>
+        <p:txBody>
+          <a:bodyPr wrap="square" lIns="0" rIns="0" tIns="0" bIns="0" anchor="t">
+            <a:spAutoFit/>
+          </a:bodyPr>
+          <a:lstStyle/>
+          <a:p>
+            <a:r>
+              <a:rPr sz="1400" b="1" i="0">
+                <a:solidFill>
+                  <a:srgbClr val="2A2A26"/>
+                </a:solidFill>
+                <a:latin typeface="Arial"/>
+              </a:rPr>
+              <a:t>Вечерний</a:t>
+            </a:r>
+          </a:p>
+        </p:txBody>
+      </p:sp>
+      <p:sp>
+        <p:nvSpPr>
+          <p:cNvPr id="20" name="TextBox 19"/>
+          <p:cNvSpPr txBox="1"/>
+          <p:nvPr/>
+        </p:nvSpPr>
+        <p:spPr>
+          <a:xfrm>
+            <a:off x="7848600" y="5308600"/>
+            <a:ext cx="1568450" cy="762000"/>
+          </a:xfrm>
+          <a:prstGeom prst="rect">
+            <a:avLst/>
+          </a:prstGeom>
+          <a:noFill/>
+        </p:spPr>
+        <p:txBody>
+          <a:bodyPr wrap="square" lIns="0" rIns="0" tIns="0" bIns="0" anchor="t">
+            <a:spAutoFit/>
+          </a:bodyPr>
+          <a:lstStyle/>
+          <a:p>
+            <a:r>
+              <a:rPr sz="1100" b="0" i="0">
+                <a:solidFill>
+                  <a:srgbClr val="5E5D56"/>
+                </a:solidFill>
+                <a:latin typeface="Arial"/>
+              </a:rPr>
+              <a:t>Тёмная тема и золото для подарков</a:t>
+            </a:r>
+          </a:p>
+        </p:txBody>
+      </p:sp>
+      <p:sp>
+        <p:nvSpPr>
+          <p:cNvPr id="21" name="TextBox 20"/>
+          <p:cNvSpPr txBox="1"/>
+          <p:nvPr/>
+        </p:nvSpPr>
+        <p:spPr>
+          <a:xfrm>
+            <a:off x="9607550" y="4991100"/>
+            <a:ext cx="1568450" cy="317500"/>
+          </a:xfrm>
+          <a:prstGeom prst="rect">
+            <a:avLst/>
+          </a:prstGeom>
+          <a:noFill/>
+        </p:spPr>
+        <p:txBody>
+          <a:bodyPr wrap="square" lIns="0" rIns="0" tIns="0" bIns="0" anchor="t">
+            <a:spAutoFit/>
+          </a:bodyPr>
+          <a:lstStyle/>
+          <a:p>
+            <a:r>
+              <a:rPr sz="1400" b="1" i="0">
+                <a:solidFill>
+                  <a:srgbClr val="2A2A26"/>
+                </a:solidFill>
+                <a:latin typeface="Arial"/>
+              </a:rPr>
+              <a:t>Яркий</a:t>
+            </a:r>
+          </a:p>
+        </p:txBody>
+      </p:sp>
+      <p:sp>
+        <p:nvSpPr>
+          <p:cNvPr id="22" name="TextBox 21"/>
+          <p:cNvSpPr txBox="1"/>
+          <p:nvPr/>
+        </p:nvSpPr>
+        <p:spPr>
+          <a:xfrm>
+            <a:off x="9607550" y="5308600"/>
+            <a:ext cx="1568450" cy="762000"/>
+          </a:xfrm>
+          <a:prstGeom prst="rect">
+            <a:avLst/>
+          </a:prstGeom>
+          <a:noFill/>
+        </p:spPr>
+        <p:txBody>
+          <a:bodyPr wrap="square" lIns="0" rIns="0" tIns="0" bIns="0" anchor="t">
+            <a:spAutoFit/>
+          </a:bodyPr>
+          <a:lstStyle/>
+          <a:p>
+            <a:r>
+              <a:rPr sz="1100" b="0" i="0">
+                <a:solidFill>
+                  <a:srgbClr val="5E5D56"/>
+                </a:solidFill>
+                <a:latin typeface="Arial"/>
+              </a:rPr>
+              <a:t>Крупный гротеск и цветные блоки</a:t>
+            </a:r>
+          </a:p>
+        </p:txBody>
+      </p:sp>
+    </p:spTree>
+  </p:cSld>
+  <p:clrMapOvr>
+    <a:masterClrMapping/>
+  </p:clrMapOvr>
+</p:sld>
+</file>
+
+<file path=ppt/slides/slide7.xml><?xml version="1.0" encoding="utf-8"?>
 <p:sld xmlns:a="http://schemas.openxmlformats.org/drawingml/2006/main" xmlns:r="http://schemas.openxmlformats.org/officeDocument/2006/relationships" xmlns:p="http://schemas.openxmlformats.org/presentationml/2006/main">
   <p:cSld name="Slide 5">
     <p:bg>
@@ -10083,9 +11475,9 @@
 </p:sld>
 </file>
 
-<file path=ppt/slides/slide6.xml><?xml version="1.0" encoding="utf-8"?>
-<p:sld xmlns:a="http://schemas.openxmlformats.org/drawingml/2006/main" xmlns:r="http://schemas.openxmlformats.org/officeDocument/2006/relationships" xmlns:p="http://schemas.openxmlformats.org/presentationml/2006/main">
-  <p:cSld name="Slide 6">
+<file path=ppt/slides/slide8.xml><?xml version="1.0" encoding="utf-8"?>
+<p:sld xmlns:a="http://schemas.openxmlformats.org/drawingml/2006/main" xmlns:p="http://schemas.openxmlformats.org/presentationml/2006/main" xmlns:r="http://schemas.openxmlformats.org/officeDocument/2006/relationships">
+  <p:cSld>
     <p:bg>
       <p:bgPr>
         <a:solidFill>
@@ -10100,1867 +11492,610 @@
         <p:cNvGrpSpPr/>
         <p:nvPr/>
       </p:nvGrpSpPr>
-      <p:grpSpPr>
-        <a:xfrm>
-          <a:off x="0" y="0"/>
-          <a:ext cx="0" cy="0"/>
-          <a:chOff x="0" y="0"/>
-          <a:chExt cx="0" cy="0"/>
-        </a:xfrm>
-      </p:grpSpPr>
-      <p:sp>
-        <p:nvSpPr>
-          <p:cNvPr id="2" name="Text 0"/>
-          <p:cNvSpPr txBox="1"/>
-          <p:nvPr/>
-        </p:nvSpPr>
-        <p:spPr>
-          <a:xfrm>
-            <a:off x="731520" y="640080"/>
-            <a:ext cx="10725912" cy="320040"/>
-          </a:xfrm>
-          <a:prstGeom prst="rect">
-            <a:avLst/>
-          </a:prstGeom>
-          <a:noFill/>
-          <a:ln/>
-        </p:spPr>
-        <p:txBody>
-          <a:bodyPr wrap="square" lIns="0" tIns="0" rIns="0" bIns="0" rtlCol="0" anchor="t"/>
-          <a:lstStyle/>
-          <a:p>
-            <a:pPr marL="0" indent="0">
-              <a:buNone/>
-            </a:pPr>
-            <a:r>
-              <a:rPr lang="en-US" sz="1200" kern="0" spc="300" dirty="0">
-                <a:solidFill>
-                  <a:srgbClr val="4A6B3A"/>
-                </a:solidFill>
-                <a:latin typeface="Arial" pitchFamily="34" charset="0"/>
-                <a:ea typeface="Arial" pitchFamily="34" charset="-122"/>
-                <a:cs typeface="Arial" pitchFamily="34" charset="-120"/>
-              </a:rPr>
-              <a:t>РАЗДЕЛ «ДЕНЬГИ»</a:t>
-            </a:r>
-            <a:endParaRPr lang="en-US" sz="1200" dirty="0"/>
-          </a:p>
-        </p:txBody>
-      </p:sp>
-      <p:sp>
-        <p:nvSpPr>
-          <p:cNvPr id="3" name="Text 1"/>
-          <p:cNvSpPr txBox="1"/>
-          <p:nvPr/>
-        </p:nvSpPr>
-        <p:spPr>
-          <a:xfrm>
-            <a:off x="731520" y="1005840"/>
-            <a:ext cx="10058400" cy="1280160"/>
-          </a:xfrm>
-          <a:prstGeom prst="rect">
-            <a:avLst/>
-          </a:prstGeom>
-          <a:noFill/>
-          <a:ln/>
-        </p:spPr>
-        <p:txBody>
-          <a:bodyPr wrap="square" lIns="0" tIns="0" rIns="0" bIns="0" rtlCol="0" anchor="t"/>
-          <a:lstStyle/>
-          <a:p>
-            <a:pPr marL="0" indent="0">
-              <a:buNone/>
-            </a:pPr>
-            <a:r>
-              <a:rPr lang="en-US" sz="4000" dirty="0">
-                <a:solidFill>
-                  <a:srgbClr val="2A2A26"/>
-                </a:solidFill>
-                <a:latin typeface="Georgia" pitchFamily="34" charset="0"/>
-                <a:ea typeface="Georgia" pitchFamily="34" charset="-122"/>
-                <a:cs typeface="Georgia" pitchFamily="34" charset="-120"/>
-              </a:rPr>
-              <a:t>Впервые видно, сколько зарабатывает </a:t>
-            </a:r>
-            <a:r>
-              <a:rPr lang="en-US" sz="4000" i="1" dirty="0">
-                <a:solidFill>
-                  <a:srgbClr val="4A6B3A"/>
-                </a:solidFill>
-                <a:latin typeface="Georgia" pitchFamily="34" charset="0"/>
-                <a:ea typeface="Georgia" pitchFamily="34" charset="-122"/>
-                <a:cs typeface="Georgia" pitchFamily="34" charset="-120"/>
-              </a:rPr>
-              <a:t>каждый вкус</a:t>
-            </a:r>
-            <a:endParaRPr lang="en-US" sz="4000" dirty="0"/>
-          </a:p>
-        </p:txBody>
-      </p:sp>
-      <p:sp>
-        <p:nvSpPr>
-          <p:cNvPr id="4" name="Shape 2"/>
-          <p:cNvSpPr/>
-          <p:nvPr/>
-        </p:nvSpPr>
-        <p:spPr>
-          <a:xfrm>
-            <a:off x="731520" y="2651760"/>
-            <a:ext cx="3331464" cy="2194560"/>
-          </a:xfrm>
-          <a:prstGeom prst="rect">
-            <a:avLst/>
-          </a:prstGeom>
-          <a:solidFill>
-            <a:srgbClr val="F6F3EE"/>
-          </a:solidFill>
-          <a:ln w="12700">
-            <a:solidFill>
-              <a:srgbClr val="F6F3EE"/>
-            </a:solidFill>
-            <a:prstDash val="solid"/>
-          </a:ln>
-        </p:spPr>
-        <p:txBody>
-          <a:bodyPr/>
-          <a:p/>
-        </p:txBody>
-      </p:sp>
-      <p:sp>
-        <p:nvSpPr>
-          <p:cNvPr id="5" name="Text 3"/>
-          <p:cNvSpPr txBox="1"/>
-          <p:nvPr/>
-        </p:nvSpPr>
-        <p:spPr>
-          <a:xfrm>
-            <a:off x="1051560" y="2926080"/>
-            <a:ext cx="2691384" cy="411480"/>
-          </a:xfrm>
-          <a:prstGeom prst="rect">
-            <a:avLst/>
-          </a:prstGeom>
-          <a:noFill/>
-          <a:ln/>
-        </p:spPr>
-        <p:txBody>
-          <a:bodyPr wrap="square" lIns="0" tIns="0" rIns="0" bIns="0" rtlCol="0" anchor="t"/>
-          <a:lstStyle/>
-          <a:p>
-            <a:pPr marL="0" indent="0">
-              <a:buNone/>
-            </a:pPr>
-            <a:r>
-              <a:rPr lang="en-US" sz="1800" b="1" dirty="0">
-                <a:solidFill>
-                  <a:srgbClr val="2A2A26"/>
-                </a:solidFill>
-                <a:latin typeface="Arial" pitchFamily="34" charset="0"/>
-                <a:ea typeface="Arial" pitchFamily="34" charset="-122"/>
-                <a:cs typeface="Arial" pitchFamily="34" charset="-120"/>
-              </a:rPr>
-              <a:t>Себестоимость</a:t>
-            </a:r>
-            <a:endParaRPr lang="en-US" sz="1800" dirty="0"/>
-          </a:p>
-        </p:txBody>
-      </p:sp>
-      <p:sp>
-        <p:nvSpPr>
-          <p:cNvPr id="6" name="Text 4"/>
-          <p:cNvSpPr txBox="1"/>
-          <p:nvPr/>
-        </p:nvSpPr>
-        <p:spPr>
-          <a:xfrm>
-            <a:off x="1051560" y="3474720"/>
-            <a:ext cx="2691384" cy="1280160"/>
-          </a:xfrm>
-          <a:prstGeom prst="rect">
-            <a:avLst/>
-          </a:prstGeom>
-          <a:noFill/>
-          <a:ln/>
-        </p:spPr>
-        <p:txBody>
-          <a:bodyPr wrap="square" lIns="0" tIns="0" rIns="0" bIns="0" rtlCol="0" anchor="t"/>
-          <a:lstStyle/>
-          <a:p>
-            <a:pPr marL="0" indent="0">
-              <a:lnSpc>
-                <a:spcPct val="120000"/>
-              </a:lnSpc>
-              <a:buNone/>
-            </a:pPr>
-            <a:r>
-              <a:rPr lang="en-US" sz="1500" dirty="0">
-                <a:solidFill>
-                  <a:srgbClr val="5E5D56"/>
-                </a:solidFill>
-                <a:latin typeface="Arial" pitchFamily="34" charset="0"/>
-                <a:ea typeface="Arial" pitchFamily="34" charset="-122"/>
-                <a:cs typeface="Arial" pitchFamily="34" charset="-120"/>
-              </a:rPr>
-              <a:t>По техкарте: ягода, пюре, агар, упаковка, работа. Считается сама на каждую коробку.</a:t>
-            </a:r>
-            <a:endParaRPr lang="en-US" sz="1500" dirty="0"/>
-          </a:p>
-        </p:txBody>
-      </p:sp>
-      <p:sp>
-        <p:nvSpPr>
-          <p:cNvPr id="7" name="Shape 5"/>
-          <p:cNvSpPr/>
-          <p:nvPr/>
-        </p:nvSpPr>
-        <p:spPr>
-          <a:xfrm>
-            <a:off x="4428744" y="2651760"/>
-            <a:ext cx="3331464" cy="2194560"/>
-          </a:xfrm>
-          <a:prstGeom prst="rect">
-            <a:avLst/>
-          </a:prstGeom>
-          <a:solidFill>
-            <a:srgbClr val="F6F3EE"/>
-          </a:solidFill>
-          <a:ln w="12700">
-            <a:solidFill>
-              <a:srgbClr val="F6F3EE"/>
-            </a:solidFill>
-            <a:prstDash val="solid"/>
-          </a:ln>
-        </p:spPr>
-        <p:txBody>
-          <a:bodyPr/>
-          <a:p/>
-        </p:txBody>
-      </p:sp>
-      <p:sp>
-        <p:nvSpPr>
-          <p:cNvPr id="8" name="Text 6"/>
-          <p:cNvSpPr txBox="1"/>
-          <p:nvPr/>
-        </p:nvSpPr>
-        <p:spPr>
-          <a:xfrm>
-            <a:off x="4748784" y="2926080"/>
-            <a:ext cx="2691384" cy="411480"/>
-          </a:xfrm>
-          <a:prstGeom prst="rect">
-            <a:avLst/>
-          </a:prstGeom>
-          <a:noFill/>
-          <a:ln/>
-        </p:spPr>
-        <p:txBody>
-          <a:bodyPr wrap="square" lIns="0" tIns="0" rIns="0" bIns="0" rtlCol="0" anchor="t"/>
-          <a:lstStyle/>
-          <a:p>
-            <a:pPr marL="0" indent="0">
-              <a:buNone/>
-            </a:pPr>
-            <a:r>
-              <a:rPr lang="en-US" sz="1800" b="1" dirty="0">
-                <a:solidFill>
-                  <a:srgbClr val="2A2A26"/>
-                </a:solidFill>
-                <a:latin typeface="Arial" pitchFamily="34" charset="0"/>
-                <a:ea typeface="Arial" pitchFamily="34" charset="-122"/>
-                <a:cs typeface="Arial" pitchFamily="34" charset="-120"/>
-              </a:rPr>
-              <a:t>Прибыль</a:t>
-            </a:r>
-            <a:endParaRPr lang="en-US" sz="1800" dirty="0"/>
-          </a:p>
-        </p:txBody>
-      </p:sp>
-      <p:sp>
-        <p:nvSpPr>
-          <p:cNvPr id="9" name="Text 7"/>
-          <p:cNvSpPr txBox="1"/>
-          <p:nvPr/>
-        </p:nvSpPr>
-        <p:spPr>
-          <a:xfrm>
-            <a:off x="4748784" y="3474720"/>
-            <a:ext cx="2691384" cy="1280160"/>
-          </a:xfrm>
-          <a:prstGeom prst="rect">
-            <a:avLst/>
-          </a:prstGeom>
-          <a:noFill/>
-          <a:ln/>
-        </p:spPr>
-        <p:txBody>
-          <a:bodyPr wrap="square" lIns="0" tIns="0" rIns="0" bIns="0" rtlCol="0" anchor="t"/>
-          <a:lstStyle/>
-          <a:p>
-            <a:pPr marL="0" indent="0">
-              <a:lnSpc>
-                <a:spcPct val="120000"/>
-              </a:lnSpc>
-              <a:buNone/>
-            </a:pPr>
-            <a:r>
-              <a:rPr lang="en-US" sz="1500" dirty="0">
-                <a:solidFill>
-                  <a:srgbClr val="5E5D56"/>
-                </a:solidFill>
-                <a:latin typeface="Arial" pitchFamily="34" charset="0"/>
-                <a:ea typeface="Arial" pitchFamily="34" charset="-122"/>
-                <a:cs typeface="Arial" pitchFamily="34" charset="-120"/>
-              </a:rPr>
-              <a:t>По вкусу, партии и месяцу. Минус доставка и эквайринг.</a:t>
-            </a:r>
-            <a:endParaRPr lang="en-US" sz="1500" dirty="0"/>
-          </a:p>
-        </p:txBody>
-      </p:sp>
-      <p:sp>
-        <p:nvSpPr>
-          <p:cNvPr id="10" name="Shape 8"/>
-          <p:cNvSpPr/>
-          <p:nvPr/>
-        </p:nvSpPr>
-        <p:spPr>
-          <a:xfrm>
-            <a:off x="8125968" y="2651760"/>
-            <a:ext cx="3331464" cy="2194560"/>
-          </a:xfrm>
-          <a:prstGeom prst="rect">
-            <a:avLst/>
-          </a:prstGeom>
-          <a:solidFill>
-            <a:srgbClr val="F6F3EE"/>
-          </a:solidFill>
-          <a:ln w="12700">
-            <a:solidFill>
-              <a:srgbClr val="F6F3EE"/>
-            </a:solidFill>
-            <a:prstDash val="solid"/>
-          </a:ln>
-        </p:spPr>
-        <p:txBody>
-          <a:bodyPr/>
-          <a:p/>
-        </p:txBody>
-      </p:sp>
-      <p:sp>
-        <p:nvSpPr>
-          <p:cNvPr id="11" name="Text 9"/>
-          <p:cNvSpPr txBox="1"/>
-          <p:nvPr/>
-        </p:nvSpPr>
-        <p:spPr>
-          <a:xfrm>
-            <a:off x="8446008" y="2926080"/>
-            <a:ext cx="2691384" cy="411480"/>
-          </a:xfrm>
-          <a:prstGeom prst="rect">
-            <a:avLst/>
-          </a:prstGeom>
-          <a:noFill/>
-          <a:ln/>
-        </p:spPr>
-        <p:txBody>
-          <a:bodyPr wrap="square" lIns="0" tIns="0" rIns="0" bIns="0" rtlCol="0" anchor="t"/>
-          <a:lstStyle/>
-          <a:p>
-            <a:pPr marL="0" indent="0">
-              <a:buNone/>
-            </a:pPr>
-            <a:r>
-              <a:rPr lang="en-US" sz="1800" b="1" dirty="0">
-                <a:solidFill>
-                  <a:srgbClr val="2A2A26"/>
-                </a:solidFill>
-                <a:latin typeface="Arial" pitchFamily="34" charset="0"/>
-                <a:ea typeface="Arial" pitchFamily="34" charset="-122"/>
-                <a:cs typeface="Arial" pitchFamily="34" charset="-120"/>
-              </a:rPr>
-              <a:t>Для бухгалтера</a:t>
-            </a:r>
-            <a:endParaRPr lang="en-US" sz="1800" dirty="0"/>
-          </a:p>
-        </p:txBody>
-      </p:sp>
-      <p:sp>
-        <p:nvSpPr>
-          <p:cNvPr id="12" name="Text 10"/>
-          <p:cNvSpPr txBox="1"/>
-          <p:nvPr/>
-        </p:nvSpPr>
-        <p:spPr>
-          <a:xfrm>
-            <a:off x="8446008" y="3474720"/>
-            <a:ext cx="2691384" cy="1280160"/>
-          </a:xfrm>
-          <a:prstGeom prst="rect">
-            <a:avLst/>
-          </a:prstGeom>
-          <a:noFill/>
-          <a:ln/>
-        </p:spPr>
-        <p:txBody>
-          <a:bodyPr wrap="square" lIns="0" tIns="0" rIns="0" bIns="0" rtlCol="0" anchor="t"/>
-          <a:lstStyle/>
-          <a:p>
-            <a:pPr marL="0" indent="0">
-              <a:lnSpc>
-                <a:spcPct val="120000"/>
-              </a:lnSpc>
-              <a:buNone/>
-            </a:pPr>
-            <a:r>
-              <a:rPr lang="en-US" sz="1500" dirty="0">
-                <a:solidFill>
-                  <a:srgbClr val="5E5D56"/>
-                </a:solidFill>
-                <a:latin typeface="Arial" pitchFamily="34" charset="0"/>
-                <a:ea typeface="Arial" pitchFamily="34" charset="-122"/>
-                <a:cs typeface="Arial" pitchFamily="34" charset="-120"/>
-              </a:rPr>
-              <a:t>Расходы, оценка налога, сверка оплат и выгрузка одним файлом.</a:t>
-            </a:r>
-            <a:endParaRPr lang="en-US" sz="1500" dirty="0"/>
-          </a:p>
-        </p:txBody>
-      </p:sp>
-      <p:sp>
-        <p:nvSpPr>
-          <p:cNvPr id="13" name="Text 11"/>
-          <p:cNvSpPr txBox="1"/>
-          <p:nvPr/>
-        </p:nvSpPr>
-        <p:spPr>
-          <a:xfrm>
-            <a:off x="731520" y="5212080"/>
-            <a:ext cx="10725912" cy="457200"/>
-          </a:xfrm>
-          <a:prstGeom prst="rect">
-            <a:avLst/>
-          </a:prstGeom>
-          <a:noFill/>
-          <a:ln/>
-        </p:spPr>
-        <p:txBody>
-          <a:bodyPr wrap="square" lIns="0" tIns="0" rIns="0" bIns="0" rtlCol="0" anchor="t"/>
-          <a:lstStyle/>
-          <a:p>
-            <a:pPr marL="0" indent="0">
-              <a:buNone/>
-            </a:pPr>
-            <a:r>
-              <a:rPr lang="en-US" sz="1500" dirty="0">
-                <a:solidFill>
-                  <a:srgbClr val="5E5D56"/>
-                </a:solidFill>
-                <a:latin typeface="Arial" pitchFamily="34" charset="0"/>
-                <a:ea typeface="Arial" pitchFamily="34" charset="-122"/>
-                <a:cs typeface="Arial" pitchFamily="34" charset="-120"/>
-              </a:rPr>
-              <a:t>Это управленческий учёт: бухгалтер остаётся, но получает готовые данные.</a:t>
-            </a:r>
-            <a:endParaRPr lang="en-US" sz="1500" dirty="0"/>
-          </a:p>
-        </p:txBody>
-      </p:sp>
-      <p:sp>
-        <p:nvSpPr>
-          <p:cNvPr id="14" name="Text 12"/>
-          <p:cNvSpPr txBox="1"/>
-          <p:nvPr/>
-        </p:nvSpPr>
-        <p:spPr>
-          <a:xfrm>
-            <a:off x="731520" y="6263640"/>
-            <a:ext cx="3657600" cy="274320"/>
-          </a:xfrm>
-          <a:prstGeom prst="rect">
-            <a:avLst/>
-          </a:prstGeom>
-          <a:noFill/>
-          <a:ln/>
-        </p:spPr>
-        <p:txBody>
-          <a:bodyPr wrap="square" lIns="0" tIns="0" rIns="0" bIns="0" rtlCol="0" anchor="t"/>
-          <a:lstStyle/>
-          <a:p>
-            <a:pPr marL="0" indent="0">
-              <a:buNone/>
-            </a:pPr>
-            <a:r>
-              <a:rPr lang="en-US" sz="1100" dirty="0">
-                <a:solidFill>
-                  <a:srgbClr val="5E5D56"/>
-                </a:solidFill>
-                <a:latin typeface="Arial" pitchFamily="34" charset="0"/>
-                <a:ea typeface="Arial" pitchFamily="34" charset="-122"/>
-                <a:cs typeface="Arial" pitchFamily="34" charset="-120"/>
-              </a:rPr>
-              <a:t>Лесная ягодка · 10</a:t>
-            </a:r>
-            <a:endParaRPr lang="en-US" sz="1100" dirty="0"/>
-          </a:p>
-        </p:txBody>
-      </p:sp>
-    </p:spTree>
-  </p:cSld>
-  <p:clrMapOvr>
-    <a:masterClrMapping/>
-  </p:clrMapOvr>
-</p:sld>
-</file>
-
-<file path=ppt/slides/slide7.xml><?xml version="1.0" encoding="utf-8"?>
-<p:sld xmlns:a="http://schemas.openxmlformats.org/drawingml/2006/main" xmlns:r="http://schemas.openxmlformats.org/officeDocument/2006/relationships" xmlns:p="http://schemas.openxmlformats.org/presentationml/2006/main">
-  <p:cSld name="Slide 7">
-    <p:bg>
-      <p:bgPr>
-        <a:solidFill>
-          <a:srgbClr val="4A6B3A"/>
-        </a:solidFill>
-        <a:effectLst/>
-      </p:bgPr>
-    </p:bg>
-    <p:spTree>
-      <p:nvGrpSpPr>
-        <p:cNvPr id="1" name=""/>
-        <p:cNvGrpSpPr/>
-        <p:nvPr/>
-      </p:nvGrpSpPr>
-      <p:grpSpPr>
-        <a:xfrm>
-          <a:off x="0" y="0"/>
-          <a:ext cx="0" cy="0"/>
-          <a:chOff x="0" y="0"/>
-          <a:chExt cx="0" cy="0"/>
-        </a:xfrm>
-      </p:grpSpPr>
-      <p:sp>
-        <p:nvSpPr>
-          <p:cNvPr id="2" name="Text 0"/>
-          <p:cNvSpPr txBox="1"/>
-          <p:nvPr/>
-        </p:nvSpPr>
-        <p:spPr>
-          <a:xfrm>
-            <a:off x="731520" y="1463040"/>
-            <a:ext cx="10725912" cy="320040"/>
-          </a:xfrm>
-          <a:prstGeom prst="rect">
-            <a:avLst/>
-          </a:prstGeom>
-          <a:noFill/>
-          <a:ln/>
-        </p:spPr>
-        <p:txBody>
-          <a:bodyPr wrap="square" lIns="0" tIns="0" rIns="0" bIns="0" rtlCol="0" anchor="t"/>
-          <a:lstStyle/>
-          <a:p>
-            <a:pPr marL="0" indent="0">
-              <a:buNone/>
-            </a:pPr>
-            <a:r>
-              <a:rPr lang="en-US" sz="1200" kern="0" spc="300" dirty="0">
-                <a:solidFill>
-                  <a:srgbClr val="DCE3D0"/>
-                </a:solidFill>
-                <a:latin typeface="Arial" pitchFamily="34" charset="0"/>
-                <a:ea typeface="Arial" pitchFamily="34" charset="-122"/>
-                <a:cs typeface="Arial" pitchFamily="34" charset="-120"/>
-              </a:rPr>
-              <a:t>СТРАХОВКА</a:t>
-            </a:r>
-            <a:endParaRPr lang="en-US" sz="1200" dirty="0"/>
-          </a:p>
-        </p:txBody>
-      </p:sp>
-      <p:sp>
-        <p:nvSpPr>
-          <p:cNvPr id="3" name="Text 1"/>
-          <p:cNvSpPr txBox="1"/>
-          <p:nvPr/>
-        </p:nvSpPr>
-        <p:spPr>
-          <a:xfrm>
-            <a:off x="731520" y="1920240"/>
-            <a:ext cx="10058400" cy="1828800"/>
-          </a:xfrm>
-          <a:prstGeom prst="rect">
-            <a:avLst/>
-          </a:prstGeom>
-          <a:noFill/>
-          <a:ln/>
-        </p:spPr>
-        <p:txBody>
-          <a:bodyPr wrap="square" lIns="0" tIns="0" rIns="0" bIns="0" rtlCol="0" anchor="t"/>
-          <a:lstStyle/>
-          <a:p>
-            <a:pPr marL="0" indent="0">
-              <a:buNone/>
-            </a:pPr>
-            <a:r>
-              <a:rPr lang="en-US" sz="5400" dirty="0">
-                <a:solidFill>
-                  <a:srgbClr val="F6F3EE"/>
-                </a:solidFill>
-                <a:latin typeface="Georgia" pitchFamily="34" charset="0"/>
-                <a:ea typeface="Georgia" pitchFamily="34" charset="-122"/>
-                <a:cs typeface="Georgia" pitchFamily="34" charset="-120"/>
-              </a:rPr>
-              <a:t>Ваши покупатели должны быть </a:t>
-            </a:r>
-            <a:r>
-              <a:rPr lang="en-US" sz="5400" i="1" dirty="0">
-                <a:solidFill>
-                  <a:srgbClr val="F6F3EE"/>
-                </a:solidFill>
-                <a:latin typeface="Georgia" pitchFamily="34" charset="0"/>
-                <a:ea typeface="Georgia" pitchFamily="34" charset="-122"/>
-                <a:cs typeface="Georgia" pitchFamily="34" charset="-120"/>
-              </a:rPr>
-              <a:t>вашими</a:t>
-            </a:r>
-            <a:endParaRPr lang="en-US" sz="5400" dirty="0"/>
-          </a:p>
-        </p:txBody>
-      </p:sp>
-      <p:sp>
-        <p:nvSpPr>
-          <p:cNvPr id="4" name="Text 2"/>
-          <p:cNvSpPr txBox="1"/>
-          <p:nvPr/>
-        </p:nvSpPr>
-        <p:spPr>
-          <a:xfrm>
-            <a:off x="731520" y="4023360"/>
-            <a:ext cx="8686800" cy="1463040"/>
-          </a:xfrm>
-          <a:prstGeom prst="rect">
-            <a:avLst/>
-          </a:prstGeom>
-          <a:noFill/>
-          <a:ln/>
-        </p:spPr>
-        <p:txBody>
-          <a:bodyPr wrap="square" lIns="0" tIns="0" rIns="0" bIns="0" rtlCol="0" anchor="t"/>
-          <a:lstStyle/>
-          <a:p>
-            <a:pPr marL="0" indent="0">
-              <a:lnSpc>
-                <a:spcPct val="125000"/>
-              </a:lnSpc>
-              <a:buNone/>
-            </a:pPr>
-            <a:r>
-              <a:rPr lang="en-US" sz="1800" dirty="0">
-                <a:solidFill>
-                  <a:srgbClr val="E7ECDF"/>
-                </a:solidFill>
-                <a:latin typeface="Arial" pitchFamily="34" charset="0"/>
-                <a:ea typeface="Arial" pitchFamily="34" charset="-122"/>
-                <a:cs typeface="Arial" pitchFamily="34" charset="-120"/>
-              </a:rPr>
-              <a:t>Instagram в России заблокирован, Telegram замедляют. Сайт собирает свою базу: Telegram, email и телефоны. Что бы ни случилось с соцсетями, вы достучитесь до покупателей в любой момент.</a:t>
-            </a:r>
-            <a:endParaRPr lang="en-US" sz="1800" dirty="0"/>
-          </a:p>
-        </p:txBody>
-      </p:sp>
-    </p:spTree>
-  </p:cSld>
-  <p:clrMapOvr>
-    <a:masterClrMapping/>
-  </p:clrMapOvr>
-</p:sld>
-</file>
-
-<file path=ppt/slides/slide8.xml><?xml version="1.0" encoding="utf-8"?>
-<p:sld xmlns:a="http://schemas.openxmlformats.org/drawingml/2006/main" xmlns:r="http://schemas.openxmlformats.org/officeDocument/2006/relationships" xmlns:p="http://schemas.openxmlformats.org/presentationml/2006/main">
-  <p:cSld name="Slide 8">
-    <p:bg>
-      <p:bgPr>
-        <a:solidFill>
-          <a:srgbClr val="ECE7DF"/>
-        </a:solidFill>
-        <a:effectLst/>
-      </p:bgPr>
-    </p:bg>
-    <p:spTree>
-      <p:nvGrpSpPr>
-        <p:cNvPr id="1" name=""/>
-        <p:cNvGrpSpPr/>
-        <p:nvPr/>
-      </p:nvGrpSpPr>
-      <p:grpSpPr>
-        <a:xfrm>
-          <a:off x="0" y="0"/>
-          <a:ext cx="0" cy="0"/>
-          <a:chOff x="0" y="0"/>
-          <a:chExt cx="0" cy="0"/>
-        </a:xfrm>
-      </p:grpSpPr>
-      <p:sp>
-        <p:nvSpPr>
-          <p:cNvPr id="2" name="Text 0"/>
-          <p:cNvSpPr txBox="1"/>
-          <p:nvPr/>
-        </p:nvSpPr>
-        <p:spPr>
-          <a:xfrm>
-            <a:off x="731520" y="640080"/>
-            <a:ext cx="10725912" cy="320040"/>
-          </a:xfrm>
-          <a:prstGeom prst="rect">
-            <a:avLst/>
-          </a:prstGeom>
-          <a:noFill/>
-          <a:ln/>
-        </p:spPr>
-        <p:txBody>
-          <a:bodyPr wrap="square" lIns="0" tIns="0" rIns="0" bIns="0" rtlCol="0" anchor="t"/>
-          <a:lstStyle/>
-          <a:p>
-            <a:pPr marL="0" indent="0">
-              <a:buNone/>
-            </a:pPr>
-            <a:r>
-              <a:rPr lang="en-US" sz="1200" kern="0" spc="300" dirty="0">
-                <a:solidFill>
-                  <a:srgbClr val="4A6B3A"/>
-                </a:solidFill>
-                <a:latin typeface="Arial" pitchFamily="34" charset="0"/>
-                <a:ea typeface="Arial" pitchFamily="34" charset="-122"/>
-                <a:cs typeface="Arial" pitchFamily="34" charset="-120"/>
-              </a:rPr>
-              <a:t>ВАРИАНТЫ</a:t>
-            </a:r>
-            <a:endParaRPr lang="en-US" sz="1200" dirty="0"/>
-          </a:p>
-        </p:txBody>
-      </p:sp>
-      <p:sp>
-        <p:nvSpPr>
-          <p:cNvPr id="3" name="Text 1"/>
-          <p:cNvSpPr txBox="1"/>
-          <p:nvPr/>
-        </p:nvSpPr>
-        <p:spPr>
-          <a:xfrm>
-            <a:off x="731520" y="1005840"/>
-            <a:ext cx="10725912" cy="1280160"/>
-          </a:xfrm>
-          <a:prstGeom prst="rect">
-            <a:avLst/>
-          </a:prstGeom>
-          <a:noFill/>
-          <a:ln/>
-        </p:spPr>
-        <p:txBody>
-          <a:bodyPr wrap="square" lIns="0" tIns="0" rIns="0" bIns="0" rtlCol="0" anchor="t"/>
-          <a:lstStyle/>
-          <a:p>
-            <a:pPr marL="0" indent="0">
-              <a:buNone/>
-            </a:pPr>
-            <a:r>
-              <a:rPr lang="en-US" sz="4000" dirty="0">
-                <a:solidFill>
-                  <a:srgbClr val="2A2A26"/>
-                </a:solidFill>
-                <a:latin typeface="Georgia" pitchFamily="34" charset="0"/>
-                <a:ea typeface="Georgia" pitchFamily="34" charset="-122"/>
-                <a:cs typeface="Georgia" pitchFamily="34" charset="-120"/>
-              </a:rPr>
-              <a:t>Насколько </a:t>
-            </a:r>
-            <a:r>
-              <a:rPr lang="en-US" sz="4000" i="1" dirty="0">
-                <a:solidFill>
-                  <a:srgbClr val="4A6B3A"/>
-                </a:solidFill>
-                <a:latin typeface="Georgia" pitchFamily="34" charset="0"/>
-                <a:ea typeface="Georgia" pitchFamily="34" charset="-122"/>
-                <a:cs typeface="Georgia" pitchFamily="34" charset="-120"/>
-              </a:rPr>
-              <a:t>свободной</a:t>
-            </a:r>
-            <a:r>
-              <a:rPr lang="en-US" sz="4000" dirty="0">
-                <a:solidFill>
-                  <a:srgbClr val="2A2A26"/>
-                </a:solidFill>
-                <a:latin typeface="Georgia" pitchFamily="34" charset="0"/>
-                <a:ea typeface="Georgia" pitchFamily="34" charset="-122"/>
-                <a:cs typeface="Georgia" pitchFamily="34" charset="-120"/>
-              </a:rPr>
-              <a:t> быть</a:t>
-            </a:r>
-            <a:endParaRPr lang="en-US" sz="4000" dirty="0"/>
-          </a:p>
-        </p:txBody>
-      </p:sp>
-      <p:sp>
-        <p:nvSpPr>
-          <p:cNvPr id="4" name="Shape 2"/>
-          <p:cNvSpPr/>
-          <p:nvPr/>
-        </p:nvSpPr>
-        <p:spPr>
-          <a:xfrm>
-            <a:off x="685800" y="2194560"/>
-            <a:ext cx="3392424" cy="3931920"/>
-          </a:xfrm>
-          <a:prstGeom prst="rect">
-            <a:avLst/>
-          </a:prstGeom>
-          <a:solidFill>
-            <a:srgbClr val="F6F3EE"/>
-          </a:solidFill>
-          <a:ln w="9525">
-            <a:solidFill>
-              <a:srgbClr val="CFC8BC"/>
-            </a:solidFill>
-            <a:prstDash val="solid"/>
-          </a:ln>
-        </p:spPr>
-        <p:txBody>
-          <a:bodyPr/>
-          <a:p/>
-        </p:txBody>
-      </p:sp>
-      <p:sp>
-        <p:nvSpPr>
-          <p:cNvPr id="5" name="Text 3"/>
-          <p:cNvSpPr txBox="1"/>
-          <p:nvPr/>
-        </p:nvSpPr>
-        <p:spPr>
-          <a:xfrm>
-            <a:off x="1051560" y="2651760"/>
-            <a:ext cx="2752344" cy="777240"/>
-          </a:xfrm>
-          <a:prstGeom prst="rect">
-            <a:avLst/>
-          </a:prstGeom>
-          <a:noFill/>
-          <a:ln/>
-        </p:spPr>
-        <p:txBody>
-          <a:bodyPr wrap="square" lIns="0" tIns="0" rIns="0" bIns="0" rtlCol="0" anchor="t"/>
-          <a:lstStyle/>
-          <a:p>
-            <a:pPr marL="0" indent="0">
-              <a:buNone/>
-            </a:pPr>
-            <a:r>
-              <a:rPr lang="en-US" sz="2200" dirty="0">
-                <a:solidFill>
-                  <a:srgbClr val="2A2A26"/>
-                </a:solidFill>
-                <a:latin typeface="Georgia" pitchFamily="34" charset="0"/>
-                <a:ea typeface="Georgia" pitchFamily="34" charset="-122"/>
-                <a:cs typeface="Georgia" pitchFamily="34" charset="-120"/>
-              </a:rPr>
-              <a:t>Витрина</a:t>
-            </a:r>
-            <a:endParaRPr lang="en-US" sz="2200" dirty="0"/>
-          </a:p>
-        </p:txBody>
-      </p:sp>
-      <p:sp>
-        <p:nvSpPr>
-          <p:cNvPr id="6" name="Text 4"/>
-          <p:cNvSpPr txBox="1"/>
-          <p:nvPr/>
-        </p:nvSpPr>
-        <p:spPr>
-          <a:xfrm>
-            <a:off x="1051560" y="3258403"/>
-            <a:ext cx="2752344" cy="640080"/>
-          </a:xfrm>
-          <a:prstGeom prst="rect">
-            <a:avLst/>
-          </a:prstGeom>
-          <a:noFill/>
-          <a:ln/>
-        </p:spPr>
-        <p:txBody>
-          <a:bodyPr wrap="square" lIns="0" tIns="0" rIns="0" bIns="0" rtlCol="0" anchor="t"/>
-          <a:lstStyle/>
-          <a:p>
-            <a:pPr marL="0" indent="0">
-              <a:buNone/>
-            </a:pPr>
-            <a:r>
-              <a:rPr lang="ru-RU" sz="3200" dirty="0">
-                <a:solidFill>
-                  <a:srgbClr val="2A2A26"/>
-                </a:solidFill>
-                <a:latin typeface="Georgia" pitchFamily="34" charset="0"/>
-                <a:ea typeface="Georgia" pitchFamily="34" charset="-122"/>
-                <a:cs typeface="Georgia" pitchFamily="34" charset="-120"/>
-              </a:rPr>
-              <a:t>6</a:t>
-            </a:r>
-            <a:r>
-              <a:rPr lang="en-US" sz="3200" dirty="0">
-                <a:solidFill>
-                  <a:srgbClr val="2A2A26"/>
-                </a:solidFill>
-                <a:latin typeface="Georgia" pitchFamily="34" charset="0"/>
-                <a:ea typeface="Georgia" pitchFamily="34" charset="-122"/>
-                <a:cs typeface="Georgia" pitchFamily="34" charset="-120"/>
-              </a:rPr>
-              <a:t>0 000 ₽</a:t>
-            </a:r>
-            <a:endParaRPr lang="en-US" sz="3200" dirty="0"/>
-          </a:p>
-        </p:txBody>
-      </p:sp>
-      <p:sp>
-        <p:nvSpPr>
-          <p:cNvPr id="7" name="Text 5"/>
-          <p:cNvSpPr txBox="1"/>
-          <p:nvPr/>
-        </p:nvSpPr>
-        <p:spPr>
-          <a:xfrm>
-            <a:off x="942378" y="3974113"/>
-            <a:ext cx="2752344" cy="1645920"/>
-          </a:xfrm>
-          <a:prstGeom prst="rect">
-            <a:avLst/>
-          </a:prstGeom>
-          <a:noFill/>
-          <a:ln/>
-        </p:spPr>
-        <p:txBody>
-          <a:bodyPr wrap="square" lIns="0" tIns="0" rIns="0" bIns="0" rtlCol="0" anchor="t"/>
-          <a:lstStyle/>
-          <a:p>
-            <a:pPr marL="342900" indent="-342900">
-              <a:spcAft>
-                <a:spcPts val="400"/>
-              </a:spcAft>
-              <a:buSzPct val="100000"/>
-              <a:buChar char="•"/>
-            </a:pPr>
-            <a:r>
-              <a:rPr lang="en-US" sz="1400" dirty="0">
-                <a:solidFill>
-                  <a:srgbClr val="5E5D56"/>
-                </a:solidFill>
-                <a:latin typeface="Arial" pitchFamily="34" charset="0"/>
-                <a:ea typeface="Arial" pitchFamily="34" charset="-122"/>
-                <a:cs typeface="Arial" pitchFamily="34" charset="-120"/>
-              </a:rPr>
-              <a:t>Новый дизайн «Лесной»</a:t>
-            </a:r>
-            <a:endParaRPr lang="en-US" sz="1400" dirty="0"/>
-          </a:p>
-          <a:p>
-            <a:pPr marL="342900" indent="-342900">
-              <a:spcAft>
-                <a:spcPts val="400"/>
-              </a:spcAft>
-              <a:buSzPct val="100000"/>
-              <a:buChar char="•"/>
-            </a:pPr>
-            <a:r>
-              <a:rPr lang="en-US" sz="1400" dirty="0">
-                <a:solidFill>
-                  <a:srgbClr val="5E5D56"/>
-                </a:solidFill>
-                <a:latin typeface="Arial" pitchFamily="34" charset="0"/>
-                <a:ea typeface="Arial" pitchFamily="34" charset="-122"/>
-                <a:cs typeface="Arial" pitchFamily="34" charset="-120"/>
-              </a:rPr>
-              <a:t>Перенос каталога</a:t>
-            </a:r>
-            <a:endParaRPr lang="en-US" sz="1400" dirty="0"/>
-          </a:p>
-          <a:p>
-            <a:pPr marL="342900" indent="-342900">
-              <a:spcAft>
-                <a:spcPts val="400"/>
-              </a:spcAft>
-              <a:buSzPct val="100000"/>
-              <a:buChar char="•"/>
-            </a:pPr>
-            <a:r>
-              <a:rPr lang="en-US" sz="1400" dirty="0">
-                <a:solidFill>
-                  <a:srgbClr val="5E5D56"/>
-                </a:solidFill>
-                <a:latin typeface="Arial" pitchFamily="34" charset="0"/>
-                <a:ea typeface="Arial" pitchFamily="34" charset="-122"/>
-                <a:cs typeface="Arial" pitchFamily="34" charset="-120"/>
-              </a:rPr>
-              <a:t>Оплата, чеки, СДЭК</a:t>
-            </a:r>
-            <a:endParaRPr lang="en-US" sz="1400" dirty="0"/>
-          </a:p>
-          <a:p>
-            <a:pPr marL="342900" indent="-342900">
-              <a:spcAft>
-                <a:spcPts val="400"/>
-              </a:spcAft>
-              <a:buSzPct val="100000"/>
-              <a:buChar char="•"/>
-            </a:pPr>
-            <a:r>
-              <a:rPr lang="en-US" sz="1400" dirty="0">
-                <a:solidFill>
-                  <a:srgbClr val="5E5D56"/>
-                </a:solidFill>
-                <a:latin typeface="Arial" pitchFamily="34" charset="0"/>
-                <a:ea typeface="Arial" pitchFamily="34" charset="-122"/>
-                <a:cs typeface="Arial" pitchFamily="34" charset="-120"/>
-              </a:rPr>
-              <a:t>Согласия и cookies</a:t>
-            </a:r>
-            <a:endParaRPr lang="ru-RU" sz="1400" dirty="0">
-              <a:solidFill>
-                <a:srgbClr val="5E5D56"/>
-              </a:solidFill>
-              <a:latin typeface="Arial" pitchFamily="34" charset="0"/>
-              <a:ea typeface="Arial" pitchFamily="34" charset="-122"/>
-              <a:cs typeface="Arial" pitchFamily="34" charset="-120"/>
-            </a:endParaRPr>
-          </a:p>
-          <a:p>
-            <a:pPr marL="342900" indent="-342900">
-              <a:spcAft>
-                <a:spcPts val="400"/>
-              </a:spcAft>
-              <a:buSzPct val="100000"/>
-              <a:buChar char="•"/>
-            </a:pPr>
-            <a:r>
-              <a:rPr lang="ru-RU" sz="1400" dirty="0">
-                <a:solidFill>
-                  <a:srgbClr val="5E5D56"/>
-                </a:solidFill>
-                <a:latin typeface="Arial" pitchFamily="34" charset="0"/>
-                <a:cs typeface="Arial" pitchFamily="34" charset="-120"/>
-              </a:rPr>
-              <a:t>Месяц поддержки на критические </a:t>
-            </a:r>
-            <a:r>
-              <a:rPr lang="ru-RU" sz="1400" dirty="0" err="1">
-                <a:solidFill>
-                  <a:srgbClr val="5E5D56"/>
-                </a:solidFill>
-                <a:latin typeface="Arial" pitchFamily="34" charset="0"/>
-                <a:cs typeface="Arial" pitchFamily="34" charset="-120"/>
-              </a:rPr>
-              <a:t>неисправленности</a:t>
-            </a:r>
-            <a:endParaRPr lang="en-US" sz="1400" dirty="0"/>
-          </a:p>
-        </p:txBody>
-      </p:sp>
-      <p:sp>
-        <p:nvSpPr>
-          <p:cNvPr id="8" name="Shape 6"/>
-          <p:cNvSpPr/>
-          <p:nvPr/>
-        </p:nvSpPr>
-        <p:spPr>
-          <a:xfrm>
-            <a:off x="4398264" y="2148840"/>
-            <a:ext cx="3392424" cy="3931920"/>
-          </a:xfrm>
-          <a:prstGeom prst="rect">
-            <a:avLst/>
-          </a:prstGeom>
-          <a:solidFill>
-            <a:srgbClr val="F6F3EE"/>
-          </a:solidFill>
-          <a:ln w="28575">
-            <a:solidFill>
-              <a:srgbClr val="4A6B3A"/>
-            </a:solidFill>
-            <a:prstDash val="solid"/>
-          </a:ln>
-        </p:spPr>
-        <p:txBody>
-          <a:bodyPr/>
-          <a:p/>
-        </p:txBody>
-      </p:sp>
-      <p:sp>
-        <p:nvSpPr>
-          <p:cNvPr id="9" name="Text 7"/>
-          <p:cNvSpPr txBox="1"/>
-          <p:nvPr/>
-        </p:nvSpPr>
-        <p:spPr>
-          <a:xfrm>
-            <a:off x="4718304" y="2377440"/>
-            <a:ext cx="2752344" cy="274320"/>
-          </a:xfrm>
-          <a:prstGeom prst="rect">
-            <a:avLst/>
-          </a:prstGeom>
-          <a:noFill/>
-          <a:ln/>
-        </p:spPr>
-        <p:txBody>
-          <a:bodyPr wrap="square" lIns="0" tIns="0" rIns="0" bIns="0" rtlCol="0" anchor="t"/>
-          <a:lstStyle/>
-          <a:p>
-            <a:pPr marL="0" indent="0">
-              <a:buNone/>
-            </a:pPr>
-            <a:endParaRPr lang="en-US" sz="1100" dirty="0"/>
-          </a:p>
-        </p:txBody>
-      </p:sp>
-      <p:sp>
-        <p:nvSpPr>
-          <p:cNvPr id="10" name="Text 8"/>
-          <p:cNvSpPr txBox="1"/>
-          <p:nvPr/>
-        </p:nvSpPr>
-        <p:spPr>
-          <a:xfrm>
-            <a:off x="4718304" y="2697480"/>
-            <a:ext cx="2752344" cy="777240"/>
-          </a:xfrm>
-          <a:prstGeom prst="rect">
-            <a:avLst/>
-          </a:prstGeom>
-          <a:noFill/>
-          <a:ln/>
-        </p:spPr>
-        <p:txBody>
-          <a:bodyPr wrap="square" lIns="0" tIns="0" rIns="0" bIns="0" rtlCol="0" anchor="t"/>
-          <a:lstStyle/>
-          <a:p>
-            <a:pPr marL="0" indent="0">
-              <a:buNone/>
-            </a:pPr>
-            <a:r>
-              <a:rPr lang="en-US" sz="2200" dirty="0">
-                <a:solidFill>
-                  <a:srgbClr val="2A2A26"/>
-                </a:solidFill>
-                <a:latin typeface="Georgia" pitchFamily="34" charset="0"/>
-                <a:ea typeface="Georgia" pitchFamily="34" charset="-122"/>
-                <a:cs typeface="Georgia" pitchFamily="34" charset="-120"/>
-              </a:rPr>
-              <a:t>Лавка на автопилоте</a:t>
-            </a:r>
-            <a:endParaRPr lang="en-US" sz="2200" dirty="0"/>
-          </a:p>
-        </p:txBody>
-      </p:sp>
-      <p:sp>
-        <p:nvSpPr>
-          <p:cNvPr id="11" name="Text 9"/>
-          <p:cNvSpPr txBox="1"/>
-          <p:nvPr/>
-        </p:nvSpPr>
-        <p:spPr>
-          <a:xfrm>
-            <a:off x="4718304" y="3259085"/>
-            <a:ext cx="2752344" cy="640080"/>
-          </a:xfrm>
-          <a:prstGeom prst="rect">
-            <a:avLst/>
-          </a:prstGeom>
-          <a:noFill/>
-          <a:ln/>
-        </p:spPr>
-        <p:txBody>
-          <a:bodyPr wrap="square" lIns="0" tIns="0" rIns="0" bIns="0" rtlCol="0" anchor="t"/>
-          <a:lstStyle/>
-          <a:p>
-            <a:pPr marL="0" indent="0">
-              <a:buNone/>
-            </a:pPr>
-            <a:r>
-              <a:rPr lang="ru-RU" sz="3200" dirty="0">
-                <a:solidFill>
-                  <a:srgbClr val="2A2A26"/>
-                </a:solidFill>
-                <a:latin typeface="Georgia" pitchFamily="34" charset="0"/>
-                <a:ea typeface="Georgia" pitchFamily="34" charset="-122"/>
-                <a:cs typeface="Georgia" pitchFamily="34" charset="-120"/>
-              </a:rPr>
-              <a:t>1</a:t>
-            </a:r>
-            <a:r>
-              <a:rPr lang="en-US" sz="3200" dirty="0">
-                <a:solidFill>
-                  <a:srgbClr val="2A2A26"/>
-                </a:solidFill>
-                <a:latin typeface="Georgia" pitchFamily="34" charset="0"/>
-                <a:ea typeface="Georgia" pitchFamily="34" charset="-122"/>
-                <a:cs typeface="Georgia" pitchFamily="34" charset="-120"/>
-              </a:rPr>
-              <a:t>90 000 ₽</a:t>
-            </a:r>
-            <a:endParaRPr lang="en-US" sz="3200" dirty="0"/>
-          </a:p>
-        </p:txBody>
-      </p:sp>
-      <p:sp>
-        <p:nvSpPr>
-          <p:cNvPr id="12" name="Text 10"/>
-          <p:cNvSpPr txBox="1"/>
-          <p:nvPr/>
-        </p:nvSpPr>
-        <p:spPr>
-          <a:xfrm>
-            <a:off x="4663713" y="3866580"/>
-            <a:ext cx="2752344" cy="1645920"/>
-          </a:xfrm>
-          <a:prstGeom prst="rect">
-            <a:avLst/>
-          </a:prstGeom>
-          <a:noFill/>
-          <a:ln/>
-        </p:spPr>
-        <p:txBody>
-          <a:bodyPr wrap="square" lIns="0" tIns="0" rIns="0" bIns="0" rtlCol="0" anchor="t"/>
-          <a:lstStyle/>
-          <a:p>
-            <a:pPr marL="342900" indent="-342900">
-              <a:spcAft>
-                <a:spcPts val="400"/>
-              </a:spcAft>
-              <a:buSzPct val="100000"/>
-              <a:buChar char="•"/>
-            </a:pPr>
-            <a:r>
-              <a:rPr lang="en-US" sz="1400" dirty="0">
-                <a:solidFill>
-                  <a:srgbClr val="2A2A26"/>
-                </a:solidFill>
-                <a:latin typeface="Arial" pitchFamily="34" charset="0"/>
-                <a:ea typeface="Arial" pitchFamily="34" charset="-122"/>
-                <a:cs typeface="Arial" pitchFamily="34" charset="-120"/>
-              </a:rPr>
-              <a:t>Всё из «Витрины»</a:t>
-            </a:r>
-            <a:endParaRPr lang="en-US" sz="1400" dirty="0"/>
-          </a:p>
-          <a:p>
-            <a:pPr marL="342900" indent="-342900">
-              <a:spcAft>
-                <a:spcPts val="400"/>
-              </a:spcAft>
-              <a:buSzPct val="100000"/>
-              <a:buChar char="•"/>
-            </a:pPr>
-            <a:r>
-              <a:rPr lang="ru-RU" sz="1400" dirty="0">
-                <a:solidFill>
-                  <a:srgbClr val="2A2A26"/>
-                </a:solidFill>
-                <a:latin typeface="Arial" pitchFamily="34" charset="0"/>
-                <a:cs typeface="Arial" pitchFamily="34" charset="-120"/>
-              </a:rPr>
-              <a:t>Виды автоматизаций выставления наличия и других утвержденных</a:t>
-            </a:r>
-            <a:endParaRPr lang="en-US" sz="1400" dirty="0"/>
-          </a:p>
-          <a:p>
-            <a:pPr marL="342900" indent="-342900">
-              <a:spcAft>
-                <a:spcPts val="400"/>
-              </a:spcAft>
-              <a:buSzPct val="100000"/>
-              <a:buChar char="•"/>
-            </a:pPr>
-            <a:r>
-              <a:rPr lang="en-US" sz="1400" dirty="0">
-                <a:solidFill>
-                  <a:srgbClr val="2A2A26"/>
-                </a:solidFill>
-                <a:latin typeface="Arial" pitchFamily="34" charset="0"/>
-                <a:ea typeface="Arial" pitchFamily="34" charset="-122"/>
-                <a:cs typeface="Arial" pitchFamily="34" charset="-120"/>
-              </a:rPr>
-              <a:t>Цех, этикетки, СДЭК пачкой</a:t>
-            </a:r>
-            <a:endParaRPr lang="en-US" sz="1400" dirty="0"/>
-          </a:p>
-          <a:p>
-            <a:pPr marL="342900" indent="-342900">
-              <a:spcAft>
-                <a:spcPts val="400"/>
-              </a:spcAft>
-              <a:buSzPct val="100000"/>
-              <a:buChar char="•"/>
-            </a:pPr>
-            <a:r>
-              <a:rPr lang="en-US" sz="1400" dirty="0">
-                <a:solidFill>
-                  <a:srgbClr val="2A2A26"/>
-                </a:solidFill>
-                <a:latin typeface="Arial" pitchFamily="34" charset="0"/>
-                <a:ea typeface="Arial" pitchFamily="34" charset="-122"/>
-                <a:cs typeface="Arial" pitchFamily="34" charset="-120"/>
-              </a:rPr>
-              <a:t>Сообщения и Telegram сами</a:t>
-            </a:r>
-            <a:endParaRPr lang="en-US" sz="1400" dirty="0"/>
-          </a:p>
-          <a:p>
-            <a:pPr marL="342900" indent="-342900">
-              <a:spcAft>
-                <a:spcPts val="400"/>
-              </a:spcAft>
-              <a:buSzPct val="100000"/>
-              <a:buChar char="•"/>
-            </a:pPr>
-            <a:r>
-              <a:rPr lang="en-US" sz="1400" dirty="0">
-                <a:solidFill>
-                  <a:srgbClr val="2A2A26"/>
-                </a:solidFill>
-                <a:latin typeface="Arial" pitchFamily="34" charset="0"/>
-                <a:ea typeface="Arial" pitchFamily="34" charset="-122"/>
-                <a:cs typeface="Arial" pitchFamily="34" charset="-120"/>
-              </a:rPr>
-              <a:t>3 </a:t>
-            </a:r>
-            <a:r>
-              <a:rPr lang="en-US" sz="1400" dirty="0" err="1">
-                <a:solidFill>
-                  <a:srgbClr val="2A2A26"/>
-                </a:solidFill>
-                <a:latin typeface="Arial" pitchFamily="34" charset="0"/>
-                <a:ea typeface="Arial" pitchFamily="34" charset="-122"/>
-                <a:cs typeface="Arial" pitchFamily="34" charset="-120"/>
-              </a:rPr>
-              <a:t>месяца</a:t>
-            </a:r>
-            <a:r>
-              <a:rPr lang="en-US" sz="1400" dirty="0">
-                <a:solidFill>
-                  <a:srgbClr val="2A2A26"/>
-                </a:solidFill>
-                <a:latin typeface="Arial" pitchFamily="34" charset="0"/>
-                <a:ea typeface="Arial" pitchFamily="34" charset="-122"/>
-                <a:cs typeface="Arial" pitchFamily="34" charset="-120"/>
-              </a:rPr>
-              <a:t> </a:t>
-            </a:r>
-            <a:r>
-              <a:rPr lang="ru-RU" sz="1400" dirty="0">
-                <a:solidFill>
-                  <a:srgbClr val="5E5D56"/>
-                </a:solidFill>
-                <a:latin typeface="Arial" pitchFamily="34" charset="0"/>
-                <a:cs typeface="Arial" pitchFamily="34" charset="-120"/>
-              </a:rPr>
-              <a:t>поддержки на критические </a:t>
-            </a:r>
-            <a:r>
-              <a:rPr lang="ru-RU" sz="1400" dirty="0" err="1">
-                <a:solidFill>
-                  <a:srgbClr val="5E5D56"/>
-                </a:solidFill>
-                <a:latin typeface="Arial" pitchFamily="34" charset="0"/>
-                <a:cs typeface="Arial" pitchFamily="34" charset="-120"/>
-              </a:rPr>
-              <a:t>неисправленности</a:t>
-            </a:r>
-            <a:endParaRPr lang="en-US" sz="1400" dirty="0"/>
-          </a:p>
-        </p:txBody>
-      </p:sp>
-      <p:sp>
-        <p:nvSpPr>
-          <p:cNvPr id="13" name="Shape 11"/>
-          <p:cNvSpPr/>
-          <p:nvPr/>
-        </p:nvSpPr>
-        <p:spPr>
-          <a:xfrm>
-            <a:off x="8065008" y="2148840"/>
-            <a:ext cx="3392424" cy="3931920"/>
-          </a:xfrm>
-          <a:prstGeom prst="rect">
-            <a:avLst/>
-          </a:prstGeom>
-          <a:solidFill>
-            <a:srgbClr val="F6F3EE"/>
-          </a:solidFill>
-          <a:ln w="9525">
-            <a:solidFill>
-              <a:srgbClr val="CFC8BC"/>
-            </a:solidFill>
-            <a:prstDash val="solid"/>
-          </a:ln>
-        </p:spPr>
-        <p:txBody>
-          <a:bodyPr/>
-          <a:p/>
-        </p:txBody>
-      </p:sp>
-      <p:sp>
-        <p:nvSpPr>
-          <p:cNvPr id="14" name="Text 12"/>
-          <p:cNvSpPr txBox="1"/>
-          <p:nvPr/>
-        </p:nvSpPr>
-        <p:spPr>
-          <a:xfrm>
-            <a:off x="8385048" y="2697480"/>
-            <a:ext cx="2752344" cy="777240"/>
-          </a:xfrm>
-          <a:prstGeom prst="rect">
-            <a:avLst/>
-          </a:prstGeom>
-          <a:noFill/>
-          <a:ln/>
-        </p:spPr>
-        <p:txBody>
-          <a:bodyPr wrap="square" lIns="0" tIns="0" rIns="0" bIns="0" rtlCol="0" anchor="t"/>
-          <a:lstStyle/>
-          <a:p>
-            <a:pPr marL="0" indent="0">
-              <a:buNone/>
-            </a:pPr>
-            <a:r>
-              <a:rPr lang="en-US" sz="2200" dirty="0">
-                <a:solidFill>
-                  <a:srgbClr val="2A2A26"/>
-                </a:solidFill>
-                <a:latin typeface="Georgia" pitchFamily="34" charset="0"/>
-                <a:ea typeface="Georgia" pitchFamily="34" charset="-122"/>
-                <a:cs typeface="Georgia" pitchFamily="34" charset="-120"/>
-              </a:rPr>
-              <a:t>Лавка и деньги</a:t>
-            </a:r>
-            <a:endParaRPr lang="en-US" sz="2200" dirty="0"/>
-          </a:p>
-        </p:txBody>
-      </p:sp>
-      <p:sp>
-        <p:nvSpPr>
-          <p:cNvPr id="15" name="Text 13"/>
-          <p:cNvSpPr txBox="1"/>
-          <p:nvPr/>
-        </p:nvSpPr>
-        <p:spPr>
-          <a:xfrm>
-            <a:off x="8385048" y="3223260"/>
-            <a:ext cx="2752344" cy="640080"/>
-          </a:xfrm>
-          <a:prstGeom prst="rect">
-            <a:avLst/>
-          </a:prstGeom>
-          <a:noFill/>
-          <a:ln/>
-        </p:spPr>
-        <p:txBody>
-          <a:bodyPr wrap="square" lIns="0" tIns="0" rIns="0" bIns="0" rtlCol="0" anchor="t"/>
-          <a:lstStyle/>
-          <a:p>
-            <a:pPr marL="0" indent="0">
-              <a:buNone/>
-            </a:pPr>
-            <a:r>
-              <a:rPr lang="ru-RU" sz="3200" dirty="0">
-                <a:solidFill>
-                  <a:srgbClr val="2A2A26"/>
-                </a:solidFill>
-                <a:latin typeface="Georgia" pitchFamily="34" charset="0"/>
-                <a:ea typeface="Georgia" pitchFamily="34" charset="-122"/>
-                <a:cs typeface="Georgia" pitchFamily="34" charset="-120"/>
-              </a:rPr>
-              <a:t>23</a:t>
-            </a:r>
-            <a:r>
-              <a:rPr lang="en-US" sz="3200" dirty="0">
-                <a:solidFill>
-                  <a:srgbClr val="2A2A26"/>
-                </a:solidFill>
-                <a:latin typeface="Georgia" pitchFamily="34" charset="0"/>
-                <a:ea typeface="Georgia" pitchFamily="34" charset="-122"/>
-                <a:cs typeface="Georgia" pitchFamily="34" charset="-120"/>
-              </a:rPr>
-              <a:t>0 000 ₽</a:t>
-            </a:r>
-            <a:endParaRPr lang="en-US" sz="3200" dirty="0"/>
-          </a:p>
-        </p:txBody>
-      </p:sp>
-      <p:sp>
-        <p:nvSpPr>
-          <p:cNvPr id="16" name="Text 14"/>
-          <p:cNvSpPr txBox="1"/>
-          <p:nvPr/>
-        </p:nvSpPr>
-        <p:spPr>
-          <a:xfrm>
-            <a:off x="8330457" y="3822795"/>
-            <a:ext cx="2752344" cy="1645920"/>
-          </a:xfrm>
-          <a:prstGeom prst="rect">
-            <a:avLst/>
-          </a:prstGeom>
-          <a:noFill/>
-          <a:ln/>
-        </p:spPr>
-        <p:txBody>
-          <a:bodyPr wrap="square" lIns="0" tIns="0" rIns="0" bIns="0" rtlCol="0" anchor="t"/>
-          <a:lstStyle/>
-          <a:p>
-            <a:pPr marL="342900" indent="-342900">
-              <a:spcAft>
-                <a:spcPts val="400"/>
-              </a:spcAft>
-              <a:buSzPct val="100000"/>
-              <a:buChar char="•"/>
-            </a:pPr>
-            <a:r>
-              <a:rPr lang="en-US" sz="1400" dirty="0">
-                <a:solidFill>
-                  <a:srgbClr val="5E5D56"/>
-                </a:solidFill>
-                <a:latin typeface="Arial" pitchFamily="34" charset="0"/>
-                <a:ea typeface="Arial" pitchFamily="34" charset="-122"/>
-                <a:cs typeface="Arial" pitchFamily="34" charset="-120"/>
-              </a:rPr>
-              <a:t>Всё из «Лавки»</a:t>
-            </a:r>
-            <a:endParaRPr lang="en-US" sz="1400" dirty="0"/>
-          </a:p>
-          <a:p>
-            <a:pPr marL="342900" indent="-342900">
-              <a:spcAft>
-                <a:spcPts val="400"/>
-              </a:spcAft>
-              <a:buSzPct val="100000"/>
-              <a:buChar char="•"/>
-            </a:pPr>
-            <a:r>
-              <a:rPr lang="en-US" sz="1400" dirty="0">
-                <a:solidFill>
-                  <a:srgbClr val="5E5D56"/>
-                </a:solidFill>
-                <a:latin typeface="Arial" pitchFamily="34" charset="0"/>
-                <a:ea typeface="Arial" pitchFamily="34" charset="-122"/>
-                <a:cs typeface="Arial" pitchFamily="34" charset="-120"/>
-              </a:rPr>
-              <a:t>Раздел «Деньги»</a:t>
-            </a:r>
-            <a:endParaRPr lang="en-US" sz="1400" dirty="0"/>
-          </a:p>
-          <a:p>
-            <a:pPr marL="342900" indent="-342900">
-              <a:spcAft>
-                <a:spcPts val="400"/>
-              </a:spcAft>
-              <a:buSzPct val="100000"/>
-              <a:buChar char="•"/>
-            </a:pPr>
-            <a:r>
-              <a:rPr lang="ru-RU" sz="1400" dirty="0">
-                <a:solidFill>
-                  <a:srgbClr val="5E5D56"/>
-                </a:solidFill>
-                <a:latin typeface="Arial" pitchFamily="34" charset="0"/>
-                <a:cs typeface="Arial" pitchFamily="34" charset="-120"/>
-              </a:rPr>
-              <a:t>Подумаем как можно повысить выручку и прийти желанным 7 миллионам через автоматизацию и налаживание рутины чтобы</a:t>
-            </a:r>
-            <a:endParaRPr lang="en-US" sz="1400" dirty="0"/>
-          </a:p>
-          <a:p>
-            <a:pPr marL="342900" indent="-342900">
-              <a:spcAft>
-                <a:spcPts val="400"/>
-              </a:spcAft>
-              <a:buSzPct val="100000"/>
-              <a:buChar char="•"/>
-            </a:pPr>
-            <a:r>
-              <a:rPr lang="en-US" sz="1400" dirty="0">
-                <a:solidFill>
-                  <a:srgbClr val="5E5D56"/>
-                </a:solidFill>
-                <a:latin typeface="Arial" pitchFamily="34" charset="0"/>
-                <a:ea typeface="Arial" pitchFamily="34" charset="-122"/>
-                <a:cs typeface="Arial" pitchFamily="34" charset="-120"/>
-              </a:rPr>
-              <a:t>6 </a:t>
-            </a:r>
-            <a:r>
-              <a:rPr lang="en-US" sz="1400" dirty="0" err="1">
-                <a:solidFill>
-                  <a:srgbClr val="5E5D56"/>
-                </a:solidFill>
-                <a:latin typeface="Arial" pitchFamily="34" charset="0"/>
-                <a:ea typeface="Arial" pitchFamily="34" charset="-122"/>
-                <a:cs typeface="Arial" pitchFamily="34" charset="-120"/>
-              </a:rPr>
-              <a:t>месяцев</a:t>
-            </a:r>
-            <a:r>
-              <a:rPr lang="en-US" sz="1400" dirty="0">
-                <a:solidFill>
-                  <a:srgbClr val="5E5D56"/>
-                </a:solidFill>
-                <a:latin typeface="Arial" pitchFamily="34" charset="0"/>
-                <a:ea typeface="Arial" pitchFamily="34" charset="-122"/>
-                <a:cs typeface="Arial" pitchFamily="34" charset="-120"/>
-              </a:rPr>
-              <a:t> </a:t>
-            </a:r>
-            <a:r>
-              <a:rPr lang="ru-RU" sz="1400" dirty="0">
-                <a:solidFill>
-                  <a:srgbClr val="5E5D56"/>
-                </a:solidFill>
-                <a:latin typeface="Arial" pitchFamily="34" charset="0"/>
-                <a:cs typeface="Arial" pitchFamily="34" charset="-120"/>
-              </a:rPr>
-              <a:t>поддержки на критические </a:t>
-            </a:r>
-            <a:r>
-              <a:rPr lang="ru-RU" sz="1400" dirty="0" err="1">
-                <a:solidFill>
-                  <a:srgbClr val="5E5D56"/>
-                </a:solidFill>
-                <a:latin typeface="Arial" pitchFamily="34" charset="0"/>
-                <a:cs typeface="Arial" pitchFamily="34" charset="-120"/>
-              </a:rPr>
-              <a:t>неисправленности</a:t>
-            </a:r>
-            <a:endParaRPr lang="en-US" sz="1400" dirty="0"/>
-          </a:p>
-        </p:txBody>
-      </p:sp>
-      <p:sp>
-        <p:nvSpPr>
-          <p:cNvPr id="17" name="Text 15"/>
-          <p:cNvSpPr txBox="1"/>
-          <p:nvPr/>
-        </p:nvSpPr>
-        <p:spPr>
-          <a:xfrm>
-            <a:off x="895293" y="1857347"/>
-            <a:ext cx="9144000" cy="274320"/>
-          </a:xfrm>
-          <a:prstGeom prst="rect">
-            <a:avLst/>
-          </a:prstGeom>
-          <a:noFill/>
-          <a:ln/>
-        </p:spPr>
-        <p:txBody>
-          <a:bodyPr wrap="square" lIns="0" tIns="0" rIns="0" bIns="0" rtlCol="0" anchor="t"/>
-          <a:lstStyle/>
-          <a:p>
-            <a:pPr marL="0" indent="0">
-              <a:buNone/>
-            </a:pPr>
-            <a:r>
-              <a:rPr lang="en-US" sz="1100" dirty="0">
-                <a:solidFill>
-                  <a:srgbClr val="5E5D56"/>
-                </a:solidFill>
-                <a:latin typeface="Arial" pitchFamily="34" charset="0"/>
-                <a:ea typeface="Arial" pitchFamily="34" charset="-122"/>
-                <a:cs typeface="Arial" pitchFamily="34" charset="-120"/>
-              </a:rPr>
-              <a:t>Оплата частями: 40% </a:t>
-            </a:r>
-            <a:r>
-              <a:rPr lang="en-US" sz="1100" dirty="0" err="1">
-                <a:solidFill>
-                  <a:srgbClr val="5E5D56"/>
-                </a:solidFill>
-                <a:latin typeface="Arial" pitchFamily="34" charset="0"/>
-                <a:ea typeface="Arial" pitchFamily="34" charset="-122"/>
-                <a:cs typeface="Arial" pitchFamily="34" charset="-120"/>
-              </a:rPr>
-              <a:t>на</a:t>
-            </a:r>
-            <a:r>
-              <a:rPr lang="en-US" sz="1100" dirty="0">
-                <a:solidFill>
-                  <a:srgbClr val="5E5D56"/>
-                </a:solidFill>
-                <a:latin typeface="Arial" pitchFamily="34" charset="0"/>
-                <a:ea typeface="Arial" pitchFamily="34" charset="-122"/>
-                <a:cs typeface="Arial" pitchFamily="34" charset="-120"/>
-              </a:rPr>
-              <a:t> </a:t>
-            </a:r>
-            <a:r>
-              <a:rPr lang="en-US" sz="1100" dirty="0" err="1">
-                <a:solidFill>
-                  <a:srgbClr val="5E5D56"/>
-                </a:solidFill>
-                <a:latin typeface="Arial" pitchFamily="34" charset="0"/>
-                <a:ea typeface="Arial" pitchFamily="34" charset="-122"/>
-                <a:cs typeface="Arial" pitchFamily="34" charset="-120"/>
-              </a:rPr>
-              <a:t>старте</a:t>
-            </a:r>
-            <a:r>
-              <a:rPr lang="ru-RU" sz="1100" dirty="0">
-                <a:solidFill>
-                  <a:srgbClr val="5E5D56"/>
-                </a:solidFill>
-                <a:latin typeface="Arial" pitchFamily="34" charset="0"/>
-                <a:ea typeface="Arial" pitchFamily="34" charset="-122"/>
-                <a:cs typeface="Arial" pitchFamily="34" charset="-120"/>
-              </a:rPr>
-              <a:t> при подписании договора</a:t>
-            </a:r>
-            <a:r>
-              <a:rPr lang="en-US" sz="1100" dirty="0">
-                <a:solidFill>
-                  <a:srgbClr val="5E5D56"/>
-                </a:solidFill>
-                <a:latin typeface="Arial" pitchFamily="34" charset="0"/>
-                <a:ea typeface="Arial" pitchFamily="34" charset="-122"/>
-                <a:cs typeface="Arial" pitchFamily="34" charset="-120"/>
-              </a:rPr>
-              <a:t>, 30% </a:t>
-            </a:r>
-            <a:r>
-              <a:rPr lang="en-US" sz="1100" dirty="0" err="1">
-                <a:solidFill>
-                  <a:srgbClr val="5E5D56"/>
-                </a:solidFill>
-                <a:latin typeface="Arial" pitchFamily="34" charset="0"/>
-                <a:ea typeface="Arial" pitchFamily="34" charset="-122"/>
-                <a:cs typeface="Arial" pitchFamily="34" charset="-120"/>
-              </a:rPr>
-              <a:t>на</a:t>
-            </a:r>
-            <a:r>
-              <a:rPr lang="ru-RU" sz="1100" dirty="0">
-                <a:solidFill>
-                  <a:srgbClr val="5E5D56"/>
-                </a:solidFill>
-                <a:latin typeface="Arial" pitchFamily="34" charset="0"/>
-                <a:ea typeface="Arial" pitchFamily="34" charset="-122"/>
-                <a:cs typeface="Arial" pitchFamily="34" charset="-120"/>
-              </a:rPr>
-              <a:t> утверждении конечном</a:t>
-            </a:r>
-            <a:r>
-              <a:rPr lang="en-US" sz="1100" dirty="0">
-                <a:solidFill>
-                  <a:srgbClr val="5E5D56"/>
-                </a:solidFill>
-                <a:latin typeface="Arial" pitchFamily="34" charset="0"/>
-                <a:ea typeface="Arial" pitchFamily="34" charset="-122"/>
-                <a:cs typeface="Arial" pitchFamily="34" charset="-120"/>
-              </a:rPr>
-              <a:t> </a:t>
-            </a:r>
-            <a:r>
-              <a:rPr lang="en-US" sz="1100" dirty="0" err="1">
-                <a:solidFill>
-                  <a:srgbClr val="5E5D56"/>
-                </a:solidFill>
-                <a:latin typeface="Arial" pitchFamily="34" charset="0"/>
-                <a:ea typeface="Arial" pitchFamily="34" charset="-122"/>
-                <a:cs typeface="Arial" pitchFamily="34" charset="-120"/>
-              </a:rPr>
-              <a:t>макета</a:t>
-            </a:r>
-            <a:r>
-              <a:rPr lang="en-US" sz="1100" dirty="0">
-                <a:solidFill>
-                  <a:srgbClr val="5E5D56"/>
-                </a:solidFill>
-                <a:latin typeface="Arial" pitchFamily="34" charset="0"/>
-                <a:ea typeface="Arial" pitchFamily="34" charset="-122"/>
-                <a:cs typeface="Arial" pitchFamily="34" charset="-120"/>
-              </a:rPr>
-              <a:t>, 30% при запуске · Лесная ягодка · 13</a:t>
-            </a:r>
-            <a:br>
-              <a:rPr lang="ru-RU" sz="1100" dirty="0">
-                <a:solidFill>
-                  <a:srgbClr val="5E5D56"/>
-                </a:solidFill>
-                <a:latin typeface="Arial" pitchFamily="34" charset="0"/>
-                <a:ea typeface="Arial" pitchFamily="34" charset="-122"/>
-                <a:cs typeface="Arial" pitchFamily="34" charset="-120"/>
-              </a:rPr>
-            </a:br>
-            <a:br>
-              <a:rPr lang="ru-RU" sz="1100" dirty="0">
-                <a:solidFill>
-                  <a:srgbClr val="5E5D56"/>
-                </a:solidFill>
-                <a:latin typeface="Arial" pitchFamily="34" charset="0"/>
-                <a:ea typeface="Arial" pitchFamily="34" charset="-122"/>
-                <a:cs typeface="Arial" pitchFamily="34" charset="-120"/>
-              </a:rPr>
-            </a:br>
-            <a:endParaRPr lang="en-US" sz="1100" dirty="0"/>
-          </a:p>
-        </p:txBody>
-      </p:sp>
-      <p:sp>
-        <p:nvSpPr>
-          <p:cNvPr id="21" name="TextBox 20">
-            <a:extLst>
-              <a:ext uri="{FF2B5EF4-FFF2-40B4-BE49-F238E27FC236}">
-                <a16:creationId xmlns:a16="http://schemas.microsoft.com/office/drawing/2014/main" id="{31F208F7-B3A7-17CE-4B96-460A18DA4596}"/>
-              </a:ext>
-            </a:extLst>
-          </p:cNvPr>
-          <p:cNvSpPr txBox="1"/>
-          <p:nvPr/>
-        </p:nvSpPr>
-        <p:spPr>
-          <a:xfrm>
-            <a:off x="895293" y="6015420"/>
-            <a:ext cx="9499979" cy="600164"/>
-          </a:xfrm>
-          <a:prstGeom prst="rect">
-            <a:avLst/>
-          </a:prstGeom>
-          <a:noFill/>
-        </p:spPr>
-        <p:txBody>
-          <a:bodyPr wrap="square">
+      <p:grpSpPr/>
+      <p:pic>
+        <p:nvPicPr>
+          <p:cNvPr id="2" name="Picture 1" descr="image.png"/>
+          <p:cNvPicPr>
+            <a:picLocks noChangeAspect="1"/>
+          </p:cNvPicPr>
+          <p:nvPr/>
+        </p:nvPicPr>
+        <p:blipFill>
+          <a:blip r:embed="rId2"/>
+          <a:stretch>
+            <a:fillRect/>
+          </a:stretch>
+        </p:blipFill>
+        <p:spPr>
+          <a:xfrm>
+            <a:off x="812800" y="1739900"/>
+            <a:ext cx="1485900" cy="3117850"/>
+          </a:xfrm>
+          <a:prstGeom prst="rect">
+            <a:avLst/>
+          </a:prstGeom>
+        </p:spPr>
+      </p:pic>
+      <p:pic>
+        <p:nvPicPr>
+          <p:cNvPr id="3" name="Picture 2" descr="image.png"/>
+          <p:cNvPicPr>
+            <a:picLocks noChangeAspect="1"/>
+          </p:cNvPicPr>
+          <p:nvPr/>
+        </p:nvPicPr>
+        <p:blipFill>
+          <a:blip r:embed="rId3"/>
+          <a:stretch>
+            <a:fillRect/>
+          </a:stretch>
+        </p:blipFill>
+        <p:spPr>
+          <a:xfrm>
+            <a:off x="3530600" y="2000250"/>
+            <a:ext cx="1365250" cy="2857500"/>
+          </a:xfrm>
+          <a:prstGeom prst="rect">
+            <a:avLst/>
+          </a:prstGeom>
+        </p:spPr>
+      </p:pic>
+      <p:pic>
+        <p:nvPicPr>
+          <p:cNvPr id="4" name="Picture 3" descr="image.png"/>
+          <p:cNvPicPr>
+            <a:picLocks noChangeAspect="1"/>
+          </p:cNvPicPr>
+          <p:nvPr/>
+        </p:nvPicPr>
+        <p:blipFill>
+          <a:blip r:embed="rId4"/>
+          <a:stretch>
+            <a:fillRect/>
+          </a:stretch>
+        </p:blipFill>
+        <p:spPr>
+          <a:xfrm>
+            <a:off x="6248400" y="2400300"/>
+            <a:ext cx="1416050" cy="2457450"/>
+          </a:xfrm>
+          <a:prstGeom prst="rect">
+            <a:avLst/>
+          </a:prstGeom>
+        </p:spPr>
+      </p:pic>
+      <p:pic>
+        <p:nvPicPr>
+          <p:cNvPr id="5" name="Picture 4" descr="image.png"/>
+          <p:cNvPicPr>
+            <a:picLocks noChangeAspect="1"/>
+          </p:cNvPicPr>
+          <p:nvPr/>
+        </p:nvPicPr>
+        <p:blipFill>
+          <a:blip r:embed="rId5"/>
+          <a:stretch>
+            <a:fillRect/>
+          </a:stretch>
+        </p:blipFill>
+        <p:spPr>
+          <a:xfrm>
+            <a:off x="8966200" y="1460500"/>
+            <a:ext cx="1612900" cy="3397250"/>
+          </a:xfrm>
+          <a:prstGeom prst="rect">
+            <a:avLst/>
+          </a:prstGeom>
+        </p:spPr>
+      </p:pic>
+      <p:sp>
+        <p:nvSpPr>
+          <p:cNvPr id="6" name="TextBox 5"/>
+          <p:cNvSpPr txBox="1"/>
+          <p:nvPr/>
+        </p:nvSpPr>
+        <p:spPr>
+          <a:xfrm>
+            <a:off x="812800" y="457200"/>
+            <a:ext cx="5715000" cy="254000"/>
+          </a:xfrm>
+          <a:prstGeom prst="rect">
+            <a:avLst/>
+          </a:prstGeom>
+          <a:noFill/>
+        </p:spPr>
+        <p:txBody>
+          <a:bodyPr wrap="square" lIns="0" rIns="0" tIns="0" bIns="0" anchor="t">
             <a:spAutoFit/>
           </a:bodyPr>
           <a:lstStyle/>
           <a:p>
-            <a:br>
-              <a:rPr lang="ru-RU" sz="1100" dirty="0">
+            <a:r>
+              <a:rPr sz="1200" b="0" i="0" spc="300">
+                <a:solidFill>
+                  <a:srgbClr val="4A6B3A"/>
+                </a:solidFill>
+                <a:latin typeface="Arial"/>
+              </a:rPr>
+              <a:t>НА ТЕЛЕФОНАХ · ВЫ И КОМАНДА</a:t>
+            </a:r>
+          </a:p>
+        </p:txBody>
+      </p:sp>
+      <p:sp>
+        <p:nvSpPr>
+          <p:cNvPr id="7" name="TextBox 6"/>
+          <p:cNvSpPr txBox="1"/>
+          <p:nvPr/>
+        </p:nvSpPr>
+        <p:spPr>
+          <a:xfrm>
+            <a:off x="812800" y="736600"/>
+            <a:ext cx="6350000" cy="731520"/>
+          </a:xfrm>
+          <a:prstGeom prst="rect">
+            <a:avLst/>
+          </a:prstGeom>
+          <a:noFill/>
+        </p:spPr>
+        <p:txBody>
+          <a:bodyPr wrap="square" lIns="0" rIns="0" tIns="0" bIns="0" anchor="t">
+            <a:spAutoFit/>
+          </a:bodyPr>
+          <a:lstStyle/>
+          <a:p>
+            <a:r>
+              <a:rPr sz="3200" b="0" i="0">
+                <a:solidFill>
+                  <a:srgbClr val="2A2A26"/>
+                </a:solidFill>
+                <a:latin typeface="Georgia"/>
+              </a:rPr>
+              <a:t>Что увидите вы и команда</a:t>
+            </a:r>
+          </a:p>
+        </p:txBody>
+      </p:sp>
+      <p:sp>
+        <p:nvSpPr>
+          <p:cNvPr id="8" name="TextBox 7"/>
+          <p:cNvSpPr txBox="1"/>
+          <p:nvPr/>
+        </p:nvSpPr>
+        <p:spPr>
+          <a:xfrm>
+            <a:off x="7442200" y="635000"/>
+            <a:ext cx="3937000" cy="635000"/>
+          </a:xfrm>
+          <a:prstGeom prst="rect">
+            <a:avLst/>
+          </a:prstGeom>
+          <a:noFill/>
+        </p:spPr>
+        <p:txBody>
+          <a:bodyPr wrap="square" lIns="0" rIns="0" tIns="0" bIns="0" anchor="t">
+            <a:spAutoFit/>
+          </a:bodyPr>
+          <a:lstStyle/>
+          <a:p>
+            <a:r>
+              <a:rPr sz="1300" b="0" i="0">
                 <a:solidFill>
                   <a:srgbClr val="5E5D56"/>
                 </a:solidFill>
-                <a:latin typeface="Arial" pitchFamily="34" charset="0"/>
-                <a:ea typeface="Arial" pitchFamily="34" charset="-122"/>
-                <a:cs typeface="Arial" pitchFamily="34" charset="-120"/>
-              </a:rPr>
-            </a:br>
-            <a:r>
-              <a:rPr lang="ru-RU" sz="1100" dirty="0">
+                <a:latin typeface="Arial"/>
+              </a:rPr>
+              <a:t>Экраны админки тоже для телефона: партию можно открыть прямо из цеха.</a:t>
+            </a:r>
+          </a:p>
+        </p:txBody>
+      </p:sp>
+      <p:sp>
+        <p:nvSpPr>
+          <p:cNvPr id="9" name="TextBox 8"/>
+          <p:cNvSpPr txBox="1"/>
+          <p:nvPr/>
+        </p:nvSpPr>
+        <p:spPr>
+          <a:xfrm>
+            <a:off x="812800" y="4984750"/>
+            <a:ext cx="2527300" cy="215900"/>
+          </a:xfrm>
+          <a:prstGeom prst="rect">
+            <a:avLst/>
+          </a:prstGeom>
+          <a:noFill/>
+        </p:spPr>
+        <p:txBody>
+          <a:bodyPr wrap="square" lIns="0" rIns="0" tIns="0" bIns="0" anchor="t">
+            <a:spAutoFit/>
+          </a:bodyPr>
+          <a:lstStyle/>
+          <a:p>
+            <a:r>
+              <a:rPr sz="1000" b="0" i="0">
                 <a:solidFill>
                   <a:srgbClr val="5E5D56"/>
                 </a:solidFill>
-                <a:latin typeface="Arial" pitchFamily="34" charset="0"/>
-                <a:ea typeface="Arial" pitchFamily="34" charset="-122"/>
-                <a:cs typeface="Arial" pitchFamily="34" charset="-120"/>
-              </a:rPr>
-              <a:t>при желании можно собрать своего «трансформера» из штук которые вы хотите чтобы были на вашем сайте, а не просто тарифами, по цене проконсультирую отдельно</a:t>
-            </a:r>
-            <a:endParaRPr lang="en-AU" dirty="0"/>
+                <a:latin typeface="Arial"/>
+              </a:rPr>
+              <a:t>iPhone 15 · 393 px</a:t>
+            </a:r>
+          </a:p>
+        </p:txBody>
+      </p:sp>
+      <p:sp>
+        <p:nvSpPr>
+          <p:cNvPr id="10" name="TextBox 9"/>
+          <p:cNvSpPr txBox="1"/>
+          <p:nvPr/>
+        </p:nvSpPr>
+        <p:spPr>
+          <a:xfrm>
+            <a:off x="812800" y="5226050"/>
+            <a:ext cx="2527300" cy="317500"/>
+          </a:xfrm>
+          <a:prstGeom prst="rect">
+            <a:avLst/>
+          </a:prstGeom>
+          <a:noFill/>
+        </p:spPr>
+        <p:txBody>
+          <a:bodyPr wrap="square" lIns="0" rIns="0" tIns="0" bIns="0" anchor="t">
+            <a:spAutoFit/>
+          </a:bodyPr>
+          <a:lstStyle/>
+          <a:p>
+            <a:r>
+              <a:rPr sz="1400" b="1" i="0">
+                <a:solidFill>
+                  <a:srgbClr val="2A2A26"/>
+                </a:solidFill>
+                <a:latin typeface="Arial"/>
+              </a:rPr>
+              <a:t>Партия с телефона</a:t>
+            </a:r>
+          </a:p>
+        </p:txBody>
+      </p:sp>
+      <p:sp>
+        <p:nvSpPr>
+          <p:cNvPr id="11" name="TextBox 10"/>
+          <p:cNvSpPr txBox="1"/>
+          <p:nvPr/>
+        </p:nvSpPr>
+        <p:spPr>
+          <a:xfrm>
+            <a:off x="812800" y="5543550"/>
+            <a:ext cx="2527300" cy="1524000"/>
+          </a:xfrm>
+          <a:prstGeom prst="rect">
+            <a:avLst/>
+          </a:prstGeom>
+          <a:noFill/>
+        </p:spPr>
+        <p:txBody>
+          <a:bodyPr wrap="square" lIns="0" rIns="0" tIns="0" bIns="0" anchor="t">
+            <a:spAutoFit/>
+          </a:bodyPr>
+          <a:lstStyle/>
+          <a:p>
+            <a:r>
+              <a:rPr sz="1100" b="0" i="0">
+                <a:solidFill>
+                  <a:srgbClr val="5E5D56"/>
+                </a:solidFill>
+                <a:latin typeface="Arial"/>
+              </a:rPr>
+              <a:t>Один раз указали мощность цеха и время, дальше сайт всё делает сам.</a:t>
+            </a:r>
+          </a:p>
+        </p:txBody>
+      </p:sp>
+      <p:sp>
+        <p:nvSpPr>
+          <p:cNvPr id="12" name="TextBox 11"/>
+          <p:cNvSpPr txBox="1"/>
+          <p:nvPr/>
+        </p:nvSpPr>
+        <p:spPr>
+          <a:xfrm>
+            <a:off x="3530600" y="4984750"/>
+            <a:ext cx="2527300" cy="215900"/>
+          </a:xfrm>
+          <a:prstGeom prst="rect">
+            <a:avLst/>
+          </a:prstGeom>
+          <a:noFill/>
+        </p:spPr>
+        <p:txBody>
+          <a:bodyPr wrap="square" lIns="0" rIns="0" tIns="0" bIns="0" anchor="t">
+            <a:spAutoFit/>
+          </a:bodyPr>
+          <a:lstStyle/>
+          <a:p>
+            <a:r>
+              <a:rPr sz="1000" b="0" i="0">
+                <a:solidFill>
+                  <a:srgbClr val="5E5D56"/>
+                </a:solidFill>
+                <a:latin typeface="Arial"/>
+              </a:rPr>
+              <a:t>Android · 360 px</a:t>
+            </a:r>
+          </a:p>
+        </p:txBody>
+      </p:sp>
+      <p:sp>
+        <p:nvSpPr>
+          <p:cNvPr id="13" name="TextBox 12"/>
+          <p:cNvSpPr txBox="1"/>
+          <p:nvPr/>
+        </p:nvSpPr>
+        <p:spPr>
+          <a:xfrm>
+            <a:off x="3530600" y="5226050"/>
+            <a:ext cx="2527300" cy="317500"/>
+          </a:xfrm>
+          <a:prstGeom prst="rect">
+            <a:avLst/>
+          </a:prstGeom>
+          <a:noFill/>
+        </p:spPr>
+        <p:txBody>
+          <a:bodyPr wrap="square" lIns="0" rIns="0" tIns="0" bIns="0" anchor="t">
+            <a:spAutoFit/>
+          </a:bodyPr>
+          <a:lstStyle/>
+          <a:p>
+            <a:r>
+              <a:rPr sz="1400" b="1" i="0">
+                <a:solidFill>
+                  <a:srgbClr val="2A2A26"/>
+                </a:solidFill>
+                <a:latin typeface="Arial"/>
+              </a:rPr>
+              <a:t>Экран упаковщика</a:t>
+            </a:r>
+          </a:p>
+        </p:txBody>
+      </p:sp>
+      <p:sp>
+        <p:nvSpPr>
+          <p:cNvPr id="14" name="TextBox 13"/>
+          <p:cNvSpPr txBox="1"/>
+          <p:nvPr/>
+        </p:nvSpPr>
+        <p:spPr>
+          <a:xfrm>
+            <a:off x="3530600" y="5543550"/>
+            <a:ext cx="2527300" cy="1524000"/>
+          </a:xfrm>
+          <a:prstGeom prst="rect">
+            <a:avLst/>
+          </a:prstGeom>
+          <a:noFill/>
+        </p:spPr>
+        <p:txBody>
+          <a:bodyPr wrap="square" lIns="0" rIns="0" tIns="0" bIns="0" anchor="t">
+            <a:spAutoFit/>
+          </a:bodyPr>
+          <a:lstStyle/>
+          <a:p>
+            <a:r>
+              <a:rPr sz="1100" b="0" i="0">
+                <a:solidFill>
+                  <a:srgbClr val="5E5D56"/>
+                </a:solidFill>
+                <a:latin typeface="Arial"/>
+              </a:rPr>
+              <a:t>Только свои заказы, накладная СДЭК готова, наклейки с датой кнопкой.</a:t>
+            </a:r>
+          </a:p>
+        </p:txBody>
+      </p:sp>
+      <p:sp>
+        <p:nvSpPr>
+          <p:cNvPr id="15" name="TextBox 14"/>
+          <p:cNvSpPr txBox="1"/>
+          <p:nvPr/>
+        </p:nvSpPr>
+        <p:spPr>
+          <a:xfrm>
+            <a:off x="6248400" y="4984750"/>
+            <a:ext cx="2527300" cy="215900"/>
+          </a:xfrm>
+          <a:prstGeom prst="rect">
+            <a:avLst/>
+          </a:prstGeom>
+          <a:noFill/>
+        </p:spPr>
+        <p:txBody>
+          <a:bodyPr wrap="square" lIns="0" rIns="0" tIns="0" bIns="0" anchor="t">
+            <a:spAutoFit/>
+          </a:bodyPr>
+          <a:lstStyle/>
+          <a:p>
+            <a:r>
+              <a:rPr sz="1000" b="0" i="0">
+                <a:solidFill>
+                  <a:srgbClr val="5E5D56"/>
+                </a:solidFill>
+                <a:latin typeface="Arial"/>
+              </a:rPr>
+              <a:t>iPhone SE · 375 px</a:t>
+            </a:r>
+          </a:p>
+        </p:txBody>
+      </p:sp>
+      <p:sp>
+        <p:nvSpPr>
+          <p:cNvPr id="16" name="TextBox 15"/>
+          <p:cNvSpPr txBox="1"/>
+          <p:nvPr/>
+        </p:nvSpPr>
+        <p:spPr>
+          <a:xfrm>
+            <a:off x="6248400" y="5226050"/>
+            <a:ext cx="2527300" cy="317500"/>
+          </a:xfrm>
+          <a:prstGeom prst="rect">
+            <a:avLst/>
+          </a:prstGeom>
+          <a:noFill/>
+        </p:spPr>
+        <p:txBody>
+          <a:bodyPr wrap="square" lIns="0" rIns="0" tIns="0" bIns="0" anchor="t">
+            <a:spAutoFit/>
+          </a:bodyPr>
+          <a:lstStyle/>
+          <a:p>
+            <a:r>
+              <a:rPr sz="1400" b="1" i="0">
+                <a:solidFill>
+                  <a:srgbClr val="2A2A26"/>
+                </a:solidFill>
+                <a:latin typeface="Arial"/>
+              </a:rPr>
+              <a:t>Сводка в Telegram</a:t>
+            </a:r>
+          </a:p>
+        </p:txBody>
+      </p:sp>
+      <p:sp>
+        <p:nvSpPr>
+          <p:cNvPr id="17" name="TextBox 16"/>
+          <p:cNvSpPr txBox="1"/>
+          <p:nvPr/>
+        </p:nvSpPr>
+        <p:spPr>
+          <a:xfrm>
+            <a:off x="6248400" y="5543550"/>
+            <a:ext cx="2527300" cy="1524000"/>
+          </a:xfrm>
+          <a:prstGeom prst="rect">
+            <a:avLst/>
+          </a:prstGeom>
+          <a:noFill/>
+        </p:spPr>
+        <p:txBody>
+          <a:bodyPr wrap="square" lIns="0" rIns="0" tIns="0" bIns="0" anchor="t">
+            <a:spAutoFit/>
+          </a:bodyPr>
+          <a:lstStyle/>
+          <a:p>
+            <a:r>
+              <a:rPr sz="1100" b="0" i="0">
+                <a:solidFill>
+                  <a:srgbClr val="5E5D56"/>
+                </a:solidFill>
+                <a:latin typeface="Arial"/>
+              </a:rPr>
+              <a:t>Одно сообщение в конце дня вместо сотни уведомлений.</a:t>
+            </a:r>
+          </a:p>
+        </p:txBody>
+      </p:sp>
+      <p:sp>
+        <p:nvSpPr>
+          <p:cNvPr id="18" name="TextBox 17"/>
+          <p:cNvSpPr txBox="1"/>
+          <p:nvPr/>
+        </p:nvSpPr>
+        <p:spPr>
+          <a:xfrm>
+            <a:off x="8966200" y="4984750"/>
+            <a:ext cx="2527300" cy="215900"/>
+          </a:xfrm>
+          <a:prstGeom prst="rect">
+            <a:avLst/>
+          </a:prstGeom>
+          <a:noFill/>
+        </p:spPr>
+        <p:txBody>
+          <a:bodyPr wrap="square" lIns="0" rIns="0" tIns="0" bIns="0" anchor="t">
+            <a:spAutoFit/>
+          </a:bodyPr>
+          <a:lstStyle/>
+          <a:p>
+            <a:r>
+              <a:rPr sz="1000" b="0" i="0">
+                <a:solidFill>
+                  <a:srgbClr val="5E5D56"/>
+                </a:solidFill>
+                <a:latin typeface="Arial"/>
+              </a:rPr>
+              <a:t>iPhone 15 Pro Max · 430 px</a:t>
+            </a:r>
+          </a:p>
+        </p:txBody>
+      </p:sp>
+      <p:sp>
+        <p:nvSpPr>
+          <p:cNvPr id="19" name="TextBox 18"/>
+          <p:cNvSpPr txBox="1"/>
+          <p:nvPr/>
+        </p:nvSpPr>
+        <p:spPr>
+          <a:xfrm>
+            <a:off x="8966200" y="5226050"/>
+            <a:ext cx="2527300" cy="317500"/>
+          </a:xfrm>
+          <a:prstGeom prst="rect">
+            <a:avLst/>
+          </a:prstGeom>
+          <a:noFill/>
+        </p:spPr>
+        <p:txBody>
+          <a:bodyPr wrap="square" lIns="0" rIns="0" tIns="0" bIns="0" anchor="t">
+            <a:spAutoFit/>
+          </a:bodyPr>
+          <a:lstStyle/>
+          <a:p>
+            <a:r>
+              <a:rPr sz="1400" b="1" i="0">
+                <a:solidFill>
+                  <a:srgbClr val="2A2A26"/>
+                </a:solidFill>
+                <a:latin typeface="Arial"/>
+              </a:rPr>
+              <a:t>Финансы, по желанию</a:t>
+            </a:r>
+          </a:p>
+        </p:txBody>
+      </p:sp>
+      <p:sp>
+        <p:nvSpPr>
+          <p:cNvPr id="20" name="TextBox 19"/>
+          <p:cNvSpPr txBox="1"/>
+          <p:nvPr/>
+        </p:nvSpPr>
+        <p:spPr>
+          <a:xfrm>
+            <a:off x="8966200" y="5543550"/>
+            <a:ext cx="2527300" cy="1524000"/>
+          </a:xfrm>
+          <a:prstGeom prst="rect">
+            <a:avLst/>
+          </a:prstGeom>
+          <a:noFill/>
+        </p:spPr>
+        <p:txBody>
+          <a:bodyPr wrap="square" lIns="0" rIns="0" tIns="0" bIns="0" anchor="t">
+            <a:spAutoFit/>
+          </a:bodyPr>
+          <a:lstStyle/>
+          <a:p>
+            <a:r>
+              <a:rPr sz="1100" b="0" i="0">
+                <a:solidFill>
+                  <a:srgbClr val="5E5D56"/>
+                </a:solidFill>
+                <a:latin typeface="Arial"/>
+              </a:rPr>
+              <a:t>Выручка из оплат сама, себестоимость из закупок. Отдельный модуль.</a:t>
+            </a:r>
           </a:p>
         </p:txBody>
       </p:sp>
@@ -11973,8 +12108,8 @@
 </file>
 
 <file path=ppt/slides/slide9.xml><?xml version="1.0" encoding="utf-8"?>
-<p:sld xmlns:a="http://schemas.openxmlformats.org/drawingml/2006/main" xmlns:r="http://schemas.openxmlformats.org/officeDocument/2006/relationships" xmlns:p="http://schemas.openxmlformats.org/presentationml/2006/main">
-  <p:cSld name="Slide 9">
+<p:sld xmlns:a="http://schemas.openxmlformats.org/drawingml/2006/main" xmlns:p="http://schemas.openxmlformats.org/presentationml/2006/main" xmlns:r="http://schemas.openxmlformats.org/officeDocument/2006/relationships">
+  <p:cSld>
     <p:bg>
       <p:bgPr>
         <a:solidFill>
@@ -11989,231 +12124,96 @@
         <p:cNvGrpSpPr/>
         <p:nvPr/>
       </p:nvGrpSpPr>
-      <p:grpSpPr>
-        <a:xfrm>
-          <a:off x="0" y="0"/>
-          <a:ext cx="0" cy="0"/>
-          <a:chOff x="0" y="0"/>
-          <a:chExt cx="0" cy="0"/>
-        </a:xfrm>
-      </p:grpSpPr>
-      <p:sp>
-        <p:nvSpPr>
-          <p:cNvPr id="2" name="Text 0"/>
-          <p:cNvSpPr txBox="1"/>
-          <p:nvPr/>
-        </p:nvSpPr>
-        <p:spPr>
-          <a:xfrm>
-            <a:off x="731520" y="1188720"/>
-            <a:ext cx="10725912" cy="320040"/>
-          </a:xfrm>
-          <a:prstGeom prst="rect">
-            <a:avLst/>
-          </a:prstGeom>
-          <a:noFill/>
-          <a:ln/>
-        </p:spPr>
-        <p:txBody>
-          <a:bodyPr wrap="square" lIns="0" tIns="0" rIns="0" bIns="0" rtlCol="0" anchor="t"/>
-          <a:lstStyle/>
-          <a:p>
-            <a:pPr marL="0" indent="0">
-              <a:buNone/>
-            </a:pPr>
-            <a:r>
-              <a:rPr lang="en-US" sz="1200" kern="0" spc="300" dirty="0">
+      <p:grpSpPr/>
+      <p:pic>
+        <p:nvPicPr>
+          <p:cNvPr id="2" name="Picture 1" descr="image.jpg"/>
+          <p:cNvPicPr>
+            <a:picLocks noChangeAspect="1"/>
+          </p:cNvPicPr>
+          <p:nvPr/>
+        </p:nvPicPr>
+        <p:blipFill>
+          <a:blip r:embed="rId2"/>
+          <a:stretch>
+            <a:fillRect/>
+          </a:stretch>
+        </p:blipFill>
+        <p:spPr>
+          <a:xfrm>
+            <a:off x="2781300" y="1524000"/>
+            <a:ext cx="6635750" cy="4699000"/>
+          </a:xfrm>
+          <a:prstGeom prst="rect">
+            <a:avLst/>
+          </a:prstGeom>
+        </p:spPr>
+      </p:pic>
+      <p:sp>
+        <p:nvSpPr>
+          <p:cNvPr id="3" name="TextBox 2"/>
+          <p:cNvSpPr txBox="1"/>
+          <p:nvPr/>
+        </p:nvSpPr>
+        <p:spPr>
+          <a:xfrm>
+            <a:off x="812800" y="558800"/>
+            <a:ext cx="10566400" cy="254000"/>
+          </a:xfrm>
+          <a:prstGeom prst="rect">
+            <a:avLst/>
+          </a:prstGeom>
+          <a:noFill/>
+        </p:spPr>
+        <p:txBody>
+          <a:bodyPr wrap="square" lIns="0" rIns="0" tIns="0" bIns="0" anchor="t">
+            <a:spAutoFit/>
+          </a:bodyPr>
+          <a:lstStyle/>
+          <a:p>
+            <a:r>
+              <a:rPr sz="1200" b="0" i="0" spc="300">
                 <a:solidFill>
                   <a:srgbClr val="4A6B3A"/>
                 </a:solidFill>
-                <a:latin typeface="Arial" pitchFamily="34" charset="0"/>
-                <a:ea typeface="Arial" pitchFamily="34" charset="-122"/>
-                <a:cs typeface="Arial" pitchFamily="34" charset="-120"/>
-              </a:rPr>
-              <a:t>МОЖНО НАЧАТЬ С МАЛОГО</a:t>
-            </a:r>
-            <a:endParaRPr lang="en-US" sz="1200" dirty="0"/>
-          </a:p>
-        </p:txBody>
-      </p:sp>
-      <p:sp>
-        <p:nvSpPr>
-          <p:cNvPr id="3" name="Text 1"/>
-          <p:cNvSpPr txBox="1"/>
-          <p:nvPr/>
-        </p:nvSpPr>
-        <p:spPr>
-          <a:xfrm>
-            <a:off x="731520" y="1645920"/>
-            <a:ext cx="10058400" cy="1737360"/>
-          </a:xfrm>
-          <a:prstGeom prst="rect">
-            <a:avLst/>
-          </a:prstGeom>
-          <a:noFill/>
-          <a:ln/>
-        </p:spPr>
-        <p:txBody>
-          <a:bodyPr wrap="square" lIns="0" tIns="0" rIns="0" bIns="0" rtlCol="0" anchor="t"/>
-          <a:lstStyle/>
-          <a:p>
-            <a:pPr marL="0" indent="0">
-              <a:buNone/>
-            </a:pPr>
-            <a:r>
-              <a:rPr lang="en-US" sz="5000" dirty="0">
+                <a:latin typeface="Arial"/>
+              </a:rPr>
+              <a:t>АДМИНКА НА КОМПЬЮТЕРЕ</a:t>
+            </a:r>
+          </a:p>
+        </p:txBody>
+      </p:sp>
+      <p:sp>
+        <p:nvSpPr>
+          <p:cNvPr id="4" name="TextBox 3"/>
+          <p:cNvSpPr txBox="1"/>
+          <p:nvPr/>
+        </p:nvSpPr>
+        <p:spPr>
+          <a:xfrm>
+            <a:off x="812800" y="850900"/>
+            <a:ext cx="10566400" cy="731520"/>
+          </a:xfrm>
+          <a:prstGeom prst="rect">
+            <a:avLst/>
+          </a:prstGeom>
+          <a:noFill/>
+        </p:spPr>
+        <p:txBody>
+          <a:bodyPr wrap="square" lIns="0" rIns="0" tIns="0" bIns="0" anchor="t">
+            <a:spAutoFit/>
+          </a:bodyPr>
+          <a:lstStyle/>
+          <a:p>
+            <a:r>
+              <a:rPr sz="3200" b="0" i="0">
                 <a:solidFill>
                   <a:srgbClr val="2A2A26"/>
                 </a:solidFill>
-                <a:latin typeface="Georgia" pitchFamily="34" charset="0"/>
-                <a:ea typeface="Georgia" pitchFamily="34" charset="-122"/>
-                <a:cs typeface="Georgia" pitchFamily="34" charset="-120"/>
-              </a:rPr>
-              <a:t>Старт: дизайн и прототип на </a:t>
-            </a:r>
-            <a:r>
-              <a:rPr lang="en-US" sz="5000" i="1" dirty="0">
-                <a:solidFill>
-                  <a:srgbClr val="4A6B3A"/>
-                </a:solidFill>
-                <a:latin typeface="Georgia" pitchFamily="34" charset="0"/>
-                <a:ea typeface="Georgia" pitchFamily="34" charset="-122"/>
-                <a:cs typeface="Georgia" pitchFamily="34" charset="-120"/>
-              </a:rPr>
-              <a:t>вашем</a:t>
-            </a:r>
-            <a:r>
-              <a:rPr lang="en-US" sz="5000" dirty="0">
-                <a:solidFill>
-                  <a:srgbClr val="2A2A26"/>
-                </a:solidFill>
-                <a:latin typeface="Georgia" pitchFamily="34" charset="0"/>
-                <a:ea typeface="Georgia" pitchFamily="34" charset="-122"/>
-                <a:cs typeface="Georgia" pitchFamily="34" charset="-120"/>
-              </a:rPr>
-              <a:t> каталоге</a:t>
-            </a:r>
-            <a:endParaRPr lang="en-US" sz="5000" dirty="0"/>
-          </a:p>
-        </p:txBody>
-      </p:sp>
-      <p:sp>
-        <p:nvSpPr>
-          <p:cNvPr id="4" name="Text 2"/>
-          <p:cNvSpPr txBox="1"/>
-          <p:nvPr/>
-        </p:nvSpPr>
-        <p:spPr>
-          <a:xfrm>
-            <a:off x="731520" y="3749040"/>
-            <a:ext cx="3840480" cy="1097280"/>
-          </a:xfrm>
-          <a:prstGeom prst="rect">
-            <a:avLst/>
-          </a:prstGeom>
-          <a:noFill/>
-          <a:ln/>
-        </p:spPr>
-        <p:txBody>
-          <a:bodyPr wrap="square" lIns="0" tIns="0" rIns="0" bIns="0" rtlCol="0" anchor="t"/>
-          <a:lstStyle/>
-          <a:p>
-            <a:pPr marL="0" indent="0">
-              <a:buNone/>
-            </a:pPr>
-            <a:r>
-              <a:rPr lang="en-US" sz="6000" dirty="0">
-                <a:solidFill>
-                  <a:srgbClr val="4A6B3A"/>
-                </a:solidFill>
-                <a:latin typeface="Georgia" pitchFamily="34" charset="0"/>
-                <a:ea typeface="Georgia" pitchFamily="34" charset="-122"/>
-                <a:cs typeface="Georgia" pitchFamily="34" charset="-120"/>
-              </a:rPr>
-              <a:t>60 000 ₽</a:t>
-            </a:r>
-            <a:endParaRPr lang="en-US" sz="6000" dirty="0"/>
-          </a:p>
-        </p:txBody>
-      </p:sp>
-      <p:sp>
-        <p:nvSpPr>
-          <p:cNvPr id="5" name="Text 3"/>
-          <p:cNvSpPr txBox="1"/>
-          <p:nvPr/>
-        </p:nvSpPr>
-        <p:spPr>
-          <a:xfrm>
-            <a:off x="4846320" y="3840480"/>
-            <a:ext cx="6583680" cy="1188720"/>
-          </a:xfrm>
-          <a:prstGeom prst="rect">
-            <a:avLst/>
-          </a:prstGeom>
-          <a:noFill/>
-          <a:ln/>
-        </p:spPr>
-        <p:txBody>
-          <a:bodyPr wrap="square" lIns="0" tIns="0" rIns="0" bIns="0" rtlCol="0" anchor="t"/>
-          <a:lstStyle/>
-          <a:p>
-            <a:pPr marL="0" indent="0">
-              <a:lnSpc>
-                <a:spcPct val="120000"/>
-              </a:lnSpc>
-              <a:buNone/>
-            </a:pPr>
-            <a:r>
-              <a:rPr lang="en-US" sz="1700" dirty="0">
-                <a:solidFill>
-                  <a:srgbClr val="2A2A26"/>
-                </a:solidFill>
-                <a:latin typeface="Arial" pitchFamily="34" charset="0"/>
-                <a:ea typeface="Arial" pitchFamily="34" charset="-122"/>
-                <a:cs typeface="Arial" pitchFamily="34" charset="-120"/>
-              </a:rPr>
-              <a:t>За 2 недели: макеты главной, каталога и карточки, тексты вашим голосом. Идём дальше — сумма засчитывается в проект. Нет — макеты остаются у вас.</a:t>
-            </a:r>
-            <a:endParaRPr lang="en-US" sz="1700" dirty="0"/>
-          </a:p>
-        </p:txBody>
-      </p:sp>
-      <p:sp>
-        <p:nvSpPr>
-          <p:cNvPr id="6" name="Text 4"/>
-          <p:cNvSpPr txBox="1"/>
-          <p:nvPr/>
-        </p:nvSpPr>
-        <p:spPr>
-          <a:xfrm>
-            <a:off x="731520" y="6263640"/>
-            <a:ext cx="3657600" cy="274320"/>
-          </a:xfrm>
-          <a:prstGeom prst="rect">
-            <a:avLst/>
-          </a:prstGeom>
-          <a:noFill/>
-          <a:ln/>
-        </p:spPr>
-        <p:txBody>
-          <a:bodyPr wrap="square" lIns="0" tIns="0" rIns="0" bIns="0" rtlCol="0" anchor="t"/>
-          <a:lstStyle/>
-          <a:p>
-            <a:pPr marL="0" indent="0">
-              <a:buNone/>
-            </a:pPr>
-            <a:r>
-              <a:rPr lang="en-US" sz="1100" dirty="0">
-                <a:solidFill>
-                  <a:srgbClr val="5E5D56"/>
-                </a:solidFill>
-                <a:latin typeface="Arial" pitchFamily="34" charset="0"/>
-                <a:ea typeface="Arial" pitchFamily="34" charset="-122"/>
-                <a:cs typeface="Arial" pitchFamily="34" charset="-120"/>
-              </a:rPr>
-              <a:t>Лесная ягодка · 14</a:t>
-            </a:r>
-            <a:endParaRPr lang="en-US" sz="1100" dirty="0"/>
+                <a:latin typeface="Georgia"/>
+              </a:rPr>
+              <a:t>Экран «Сегодня»: всё, что нужно знать за день</a:t>
+            </a:r>
           </a:p>
         </p:txBody>
       </p:sp>

--- a/docs/preview/lesnaya-yagodka-predlozhenie.pptx
+++ b/docs/preview/lesnaya-yagodka-predlozhenie.pptx
@@ -10,6 +10,7 @@
   <p:sldIdLst>
     <p:sldId id="256" r:id="rId2"/>
     <p:sldId id="257" r:id="rId3"/>
+    <p:sldId id="273" r:id="rId24"/>
     <p:sldId id="258" r:id="rId4"/>
     <p:sldId id="259" r:id="rId5"/>
     <p:sldId id="268" r:id="rId19"/>
@@ -2383,7 +2384,7 @@
                 <a:ea typeface="Arial" pitchFamily="34" charset="-122"/>
                 <a:cs typeface="Arial" pitchFamily="34" charset="-120"/>
               </a:rPr>
-              <a:t>Лесная ягодка · 10</a:t>
+              <a:t>Лесная ягодка · 11</a:t>
             </a:r>
             <a:endParaRPr lang="en-US" sz="1100" dirty="0"/>
           </a:p>
@@ -4301,7 +4302,7 @@
                 <a:ea typeface="Arial" pitchFamily="34" charset="-122"/>
                 <a:cs typeface="Arial" pitchFamily="34" charset="-120"/>
               </a:rPr>
-              <a:t>, 30% при запуске · Лесная ягодка · 13</a:t>
+              <a:t>, 30% при запуске · Лесная ягодка · 14</a:t>
             </a:r>
             <a:br>
               <a:rPr lang="ru-RU" sz="1100" dirty="0">
@@ -4627,7 +4628,7 @@
                 <a:ea typeface="Arial" pitchFamily="34" charset="-122"/>
                 <a:cs typeface="Arial" pitchFamily="34" charset="-120"/>
               </a:rPr>
-              <a:t>Лесная ягодка · 14</a:t>
+              <a:t>Лесная ягодка · 15</a:t>
             </a:r>
             <a:endParaRPr lang="en-US" sz="1100" dirty="0"/>
           </a:p>
@@ -5393,7 +5394,7 @@
                 <a:ea typeface="Arial" pitchFamily="34" charset="-122"/>
                 <a:cs typeface="Arial" pitchFamily="34" charset="-120"/>
               </a:rPr>
-              <a:t>Лесная ягодка · 15</a:t>
+              <a:t>Лесная ягодка · 16</a:t>
             </a:r>
             <a:endParaRPr lang="en-US" sz="1100" dirty="0"/>
           </a:p>
@@ -6241,7 +6242,7 @@
                 <a:ea typeface="Arial" pitchFamily="34" charset="-122"/>
                 <a:cs typeface="Arial" pitchFamily="34" charset="-120"/>
               </a:rPr>
-              <a:t>Лесная ягодка · 16</a:t>
+              <a:t>Лесная ягодка · 17</a:t>
             </a:r>
             <a:endParaRPr lang="en-US" sz="1100" dirty="0"/>
           </a:p>
@@ -6571,6 +6572,1052 @@
 </p:sld>
 </file>
 
+<file path=ppt/slides/slide18.xml><?xml version="1.0" encoding="utf-8"?>
+<p:sld xmlns:a="http://schemas.openxmlformats.org/drawingml/2006/main" xmlns:p="http://schemas.openxmlformats.org/presentationml/2006/main" xmlns:r="http://schemas.openxmlformats.org/officeDocument/2006/relationships">
+  <p:cSld>
+    <p:bg>
+      <p:bgPr>
+        <a:solidFill>
+          <a:srgbClr val="ECE7DF"/>
+        </a:solidFill>
+        <a:effectLst/>
+      </p:bgPr>
+    </p:bg>
+    <p:spTree>
+      <p:nvGrpSpPr>
+        <p:cNvPr id="1" name=""/>
+        <p:cNvGrpSpPr/>
+        <p:nvPr/>
+      </p:nvGrpSpPr>
+      <p:grpSpPr/>
+      <p:sp>
+        <p:nvSpPr>
+          <p:cNvPr id="2" name="Text 0"/>
+          <p:cNvSpPr txBox="1"/>
+          <p:nvPr/>
+        </p:nvSpPr>
+        <p:spPr>
+          <a:xfrm>
+            <a:off x="731520" y="640080"/>
+            <a:ext cx="10725912" cy="320040"/>
+          </a:xfrm>
+          <a:prstGeom prst="rect">
+            <a:avLst/>
+          </a:prstGeom>
+          <a:noFill/>
+          <a:ln/>
+        </p:spPr>
+        <p:txBody>
+          <a:bodyPr wrap="square" lIns="0" tIns="0" rIns="0" bIns="0" rtlCol="0" anchor="t"/>
+          <a:lstStyle/>
+          <a:p>
+            <a:pPr marL="0" indent="0">
+              <a:buNone/>
+            </a:pPr>
+            <a:r>
+              <a:rPr lang="en-US" sz="1200" kern="0" spc="300" dirty="0">
+                <a:solidFill>
+                  <a:srgbClr val="4A6B3A"/>
+                </a:solidFill>
+                <a:latin typeface="Arial" pitchFamily="34" charset="0"/>
+                <a:ea typeface="Arial" pitchFamily="34" charset="-122"/>
+                <a:cs typeface="Arial" pitchFamily="34" charset="-120"/>
+              </a:rPr>
+              <a:t>ЗАКОН · ЧТО НА САЙТЕ СЕЙЧАС</a:t>
+            </a:r>
+            <a:endParaRPr lang="en-US" sz="1200" dirty="0"/>
+          </a:p>
+        </p:txBody>
+      </p:sp>
+      <p:sp>
+        <p:nvSpPr>
+          <p:cNvPr id="3" name="Text 1"/>
+          <p:cNvSpPr txBox="1"/>
+          <p:nvPr/>
+        </p:nvSpPr>
+        <p:spPr>
+          <a:xfrm>
+            <a:off x="731520" y="1005840"/>
+            <a:ext cx="10725912" cy="1280160"/>
+          </a:xfrm>
+          <a:prstGeom prst="rect">
+            <a:avLst/>
+          </a:prstGeom>
+          <a:noFill/>
+          <a:ln/>
+        </p:spPr>
+        <p:txBody>
+          <a:bodyPr wrap="square" lIns="0" tIns="0" rIns="0" bIns="0" rtlCol="0" anchor="t"/>
+          <a:lstStyle/>
+          <a:p>
+            <a:pPr marL="0" indent="0">
+              <a:buNone/>
+            </a:pPr>
+            <a:r>
+              <a:rPr lang="en-US" sz="4000" dirty="0">
+                <a:solidFill>
+                  <a:srgbClr val="2A2A26"/>
+                </a:solidFill>
+                <a:latin typeface="Georgia" pitchFamily="34" charset="0"/>
+                <a:ea typeface="Georgia" pitchFamily="34" charset="-122"/>
+                <a:cs typeface="Georgia" pitchFamily="34" charset="-120"/>
+              </a:rPr>
+              <a:t>Юридические риски подробно</a:t>
+            </a:r>
+            <a:endParaRPr lang="en-US" sz="4000" dirty="0"/>
+          </a:p>
+        </p:txBody>
+      </p:sp>
+      <p:sp>
+        <p:nvSpPr>
+          <p:cNvPr id="16" name="Text 14"/>
+          <p:cNvSpPr txBox="1"/>
+          <p:nvPr/>
+        </p:nvSpPr>
+        <p:spPr>
+          <a:xfrm>
+            <a:off x="731520" y="6263640"/>
+            <a:ext cx="3657600" cy="274320"/>
+          </a:xfrm>
+          <a:prstGeom prst="rect">
+            <a:avLst/>
+          </a:prstGeom>
+          <a:noFill/>
+          <a:ln/>
+        </p:spPr>
+        <p:txBody>
+          <a:bodyPr wrap="square" lIns="0" tIns="0" rIns="0" bIns="0" rtlCol="0" anchor="t"/>
+          <a:lstStyle/>
+          <a:p>
+            <a:pPr marL="0" indent="0">
+              <a:buNone/>
+            </a:pPr>
+            <a:r>
+              <a:rPr lang="en-US" sz="1100" dirty="0">
+                <a:solidFill>
+                  <a:srgbClr val="5E5D56"/>
+                </a:solidFill>
+                <a:latin typeface="Arial" pitchFamily="34" charset="0"/>
+                <a:ea typeface="Arial" pitchFamily="34" charset="-122"/>
+                <a:cs typeface="Arial" pitchFamily="34" charset="-120"/>
+              </a:rPr>
+              <a:t>Лесная ягодка · 3</a:t>
+            </a:r>
+            <a:endParaRPr lang="en-US" sz="1100" dirty="0"/>
+          </a:p>
+        </p:txBody>
+      </p:sp>
+      <p:sp>
+        <p:nvSpPr>
+          <p:cNvPr id="101" name="Legal 0-0"/>
+          <p:cNvSpPr/>
+          <p:nvPr/>
+        </p:nvSpPr>
+        <p:spPr>
+          <a:xfrm>
+            <a:off x="731520" y="2011680"/>
+            <a:ext cx="5088636" cy="0"/>
+          </a:xfrm>
+          <a:prstGeom prst="line">
+            <a:avLst/>
+          </a:prstGeom>
+          <a:noFill/>
+          <a:ln w="9525">
+            <a:solidFill>
+              <a:srgbClr val="B9B3A8"/>
+            </a:solidFill>
+            <a:prstDash val="solid"/>
+          </a:ln>
+        </p:spPr>
+        <p:txBody>
+          <a:bodyPr/>
+          <a:p/>
+        </p:txBody>
+      </p:sp>
+      <p:sp>
+        <p:nvSpPr>
+          <p:cNvPr id="102" name="Legal 0-109728"/>
+          <p:cNvSpPr txBox="1"/>
+          <p:nvPr/>
+        </p:nvSpPr>
+        <p:spPr>
+          <a:xfrm>
+            <a:off x="731520" y="2121408"/>
+            <a:ext cx="5088636" cy="411480"/>
+          </a:xfrm>
+          <a:prstGeom prst="rect">
+            <a:avLst/>
+          </a:prstGeom>
+          <a:noFill/>
+          <a:ln/>
+        </p:spPr>
+        <p:txBody>
+          <a:bodyPr wrap="square" lIns="0" tIns="0" rIns="0" bIns="0" rtlCol="0" anchor="t"/>
+          <a:lstStyle/>
+          <a:p>
+            <a:pPr marL="0" indent="0">
+              <a:buNone/>
+            </a:pPr>
+            <a:r>
+              <a:rPr lang="en-US" sz="1400" b="1" dirty="0">
+                <a:solidFill>
+                  <a:srgbClr val="2A2A26"/>
+                </a:solidFill>
+                <a:latin typeface="Arial" pitchFamily="34" charset="0"/>
+                <a:ea typeface="Arial" pitchFamily="34" charset="-122"/>
+                <a:cs typeface="Arial" pitchFamily="34" charset="-120"/>
+              </a:rPr>
+              <a:t>Согласие не отдельным документом</a:t>
+            </a:r>
+            <a:endParaRPr lang="en-US" sz="1800" dirty="0"/>
+          </a:p>
+        </p:txBody>
+      </p:sp>
+      <p:sp>
+        <p:nvSpPr>
+          <p:cNvPr id="103" name="Legal 0-402336"/>
+          <p:cNvSpPr txBox="1"/>
+          <p:nvPr/>
+        </p:nvSpPr>
+        <p:spPr>
+          <a:xfrm>
+            <a:off x="731520" y="2414016"/>
+            <a:ext cx="5088636" cy="583272"/>
+          </a:xfrm>
+          <a:prstGeom prst="rect">
+            <a:avLst/>
+          </a:prstGeom>
+          <a:noFill/>
+          <a:ln/>
+        </p:spPr>
+        <p:txBody>
+          <a:bodyPr wrap="square" lIns="0" tIns="0" rIns="0" bIns="0" rtlCol="0" anchor="t"/>
+          <a:lstStyle/>
+          <a:p>
+            <a:pPr marL="0" indent="0">
+              <a:lnSpc>
+                <a:spcPct val="120000"/>
+              </a:lnSpc>
+              <a:buNone/>
+            </a:pPr>
+            <a:r>
+              <a:rPr lang="en-US" sz="1200" dirty="0">
+                <a:solidFill>
+                  <a:srgbClr val="5E5D56"/>
+                </a:solidFill>
+                <a:latin typeface="Arial" pitchFamily="34" charset="0"/>
+                <a:ea typeface="Arial" pitchFamily="34" charset="-122"/>
+                <a:cs typeface="Arial" pitchFamily="34" charset="-120"/>
+              </a:rPr>
+              <a:t>Галочка в корзине ведёт на оферту и политику. С 1.09.2025 согласие — отдельный текст. Штраф 300–700 тыс. ₽.</a:t>
+            </a:r>
+            <a:endParaRPr lang="en-US" sz="1500" dirty="0"/>
+          </a:p>
+        </p:txBody>
+      </p:sp>
+      <p:sp>
+        <p:nvSpPr>
+          <p:cNvPr id="104" name="Legal 1-0"/>
+          <p:cNvSpPr/>
+          <p:nvPr/>
+        </p:nvSpPr>
+        <p:spPr>
+          <a:xfrm>
+            <a:off x="731520" y="3044952"/>
+            <a:ext cx="5088636" cy="0"/>
+          </a:xfrm>
+          <a:prstGeom prst="line">
+            <a:avLst/>
+          </a:prstGeom>
+          <a:noFill/>
+          <a:ln w="9525">
+            <a:solidFill>
+              <a:srgbClr val="B9B3A8"/>
+            </a:solidFill>
+            <a:prstDash val="solid"/>
+          </a:ln>
+        </p:spPr>
+        <p:txBody>
+          <a:bodyPr/>
+          <a:p/>
+        </p:txBody>
+      </p:sp>
+      <p:sp>
+        <p:nvSpPr>
+          <p:cNvPr id="105" name="Legal 1-109728"/>
+          <p:cNvSpPr txBox="1"/>
+          <p:nvPr/>
+        </p:nvSpPr>
+        <p:spPr>
+          <a:xfrm>
+            <a:off x="731520" y="3154680"/>
+            <a:ext cx="5088636" cy="411480"/>
+          </a:xfrm>
+          <a:prstGeom prst="rect">
+            <a:avLst/>
+          </a:prstGeom>
+          <a:noFill/>
+          <a:ln/>
+        </p:spPr>
+        <p:txBody>
+          <a:bodyPr wrap="square" lIns="0" tIns="0" rIns="0" bIns="0" rtlCol="0" anchor="t"/>
+          <a:lstStyle/>
+          <a:p>
+            <a:pPr marL="0" indent="0">
+              <a:buNone/>
+            </a:pPr>
+            <a:r>
+              <a:rPr lang="en-US" sz="1400" b="1" dirty="0">
+                <a:solidFill>
+                  <a:srgbClr val="2A2A26"/>
+                </a:solidFill>
+                <a:latin typeface="Arial" pitchFamily="34" charset="0"/>
+                <a:ea typeface="Arial" pitchFamily="34" charset="-122"/>
+                <a:cs typeface="Arial" pitchFamily="34" charset="-120"/>
+              </a:rPr>
+              <a:t>Метрика до согласия</a:t>
+            </a:r>
+            <a:endParaRPr lang="en-US" sz="1800" dirty="0"/>
+          </a:p>
+        </p:txBody>
+      </p:sp>
+      <p:sp>
+        <p:nvSpPr>
+          <p:cNvPr id="106" name="Legal 1-402336"/>
+          <p:cNvSpPr txBox="1"/>
+          <p:nvPr/>
+        </p:nvSpPr>
+        <p:spPr>
+          <a:xfrm>
+            <a:off x="731520" y="3447288"/>
+            <a:ext cx="5088636" cy="583272"/>
+          </a:xfrm>
+          <a:prstGeom prst="rect">
+            <a:avLst/>
+          </a:prstGeom>
+          <a:noFill/>
+          <a:ln/>
+        </p:spPr>
+        <p:txBody>
+          <a:bodyPr wrap="square" lIns="0" tIns="0" rIns="0" bIns="0" rtlCol="0" anchor="t"/>
+          <a:lstStyle/>
+          <a:p>
+            <a:pPr marL="0" indent="0">
+              <a:lnSpc>
+                <a:spcPct val="120000"/>
+              </a:lnSpc>
+              <a:buNone/>
+            </a:pPr>
+            <a:r>
+              <a:rPr lang="en-US" sz="1200" dirty="0">
+                <a:solidFill>
+                  <a:srgbClr val="5E5D56"/>
+                </a:solidFill>
+                <a:latin typeface="Arial" pitchFamily="34" charset="0"/>
+                <a:ea typeface="Arial" pitchFamily="34" charset="-122"/>
+                <a:cs typeface="Arial" pitchFamily="34" charset="-120"/>
+              </a:rPr>
+              <a:t>Метрика с Вебвизором включается сразу, до согласия на cookie. В политике о ней ничего нет.</a:t>
+            </a:r>
+            <a:endParaRPr lang="en-US" sz="1500" dirty="0"/>
+          </a:p>
+        </p:txBody>
+      </p:sp>
+      <p:sp>
+        <p:nvSpPr>
+          <p:cNvPr id="107" name="Legal 2-0"/>
+          <p:cNvSpPr/>
+          <p:nvPr/>
+        </p:nvSpPr>
+        <p:spPr>
+          <a:xfrm>
+            <a:off x="731520" y="4078224"/>
+            <a:ext cx="5088636" cy="0"/>
+          </a:xfrm>
+          <a:prstGeom prst="line">
+            <a:avLst/>
+          </a:prstGeom>
+          <a:noFill/>
+          <a:ln w="9525">
+            <a:solidFill>
+              <a:srgbClr val="B9B3A8"/>
+            </a:solidFill>
+            <a:prstDash val="solid"/>
+          </a:ln>
+        </p:spPr>
+        <p:txBody>
+          <a:bodyPr/>
+          <a:p/>
+        </p:txBody>
+      </p:sp>
+      <p:sp>
+        <p:nvSpPr>
+          <p:cNvPr id="108" name="Legal 2-109728"/>
+          <p:cNvSpPr txBox="1"/>
+          <p:nvPr/>
+        </p:nvSpPr>
+        <p:spPr>
+          <a:xfrm>
+            <a:off x="731520" y="4187952"/>
+            <a:ext cx="5088636" cy="411480"/>
+          </a:xfrm>
+          <a:prstGeom prst="rect">
+            <a:avLst/>
+          </a:prstGeom>
+          <a:noFill/>
+          <a:ln/>
+        </p:spPr>
+        <p:txBody>
+          <a:bodyPr wrap="square" lIns="0" tIns="0" rIns="0" bIns="0" rtlCol="0" anchor="t"/>
+          <a:lstStyle/>
+          <a:p>
+            <a:pPr marL="0" indent="0">
+              <a:buNone/>
+            </a:pPr>
+            <a:r>
+              <a:rPr lang="en-US" sz="1400" b="1" dirty="0">
+                <a:solidFill>
+                  <a:srgbClr val="2A2A26"/>
+                </a:solidFill>
+                <a:latin typeface="Arial" pitchFamily="34" charset="0"/>
+                <a:ea typeface="Arial" pitchFamily="34" charset="-122"/>
+                <a:cs typeface="Arial" pitchFamily="34" charset="-120"/>
+              </a:rPr>
+              <a:t>В политике нет ИНН и почты для обращений</a:t>
+            </a:r>
+            <a:endParaRPr lang="en-US" sz="1800" dirty="0"/>
+          </a:p>
+        </p:txBody>
+      </p:sp>
+      <p:sp>
+        <p:nvSpPr>
+          <p:cNvPr id="109" name="Legal 2-402336"/>
+          <p:cNvSpPr txBox="1"/>
+          <p:nvPr/>
+        </p:nvSpPr>
+        <p:spPr>
+          <a:xfrm>
+            <a:off x="731520" y="4480560"/>
+            <a:ext cx="5088636" cy="583272"/>
+          </a:xfrm>
+          <a:prstGeom prst="rect">
+            <a:avLst/>
+          </a:prstGeom>
+          <a:noFill/>
+          <a:ln/>
+        </p:spPr>
+        <p:txBody>
+          <a:bodyPr wrap="square" lIns="0" tIns="0" rIns="0" bIns="0" rtlCol="0" anchor="t"/>
+          <a:lstStyle/>
+          <a:p>
+            <a:pPr marL="0" indent="0">
+              <a:lnSpc>
+                <a:spcPct val="120000"/>
+              </a:lnSpc>
+              <a:buNone/>
+            </a:pPr>
+            <a:r>
+              <a:rPr lang="en-US" sz="1200" dirty="0">
+                <a:solidFill>
+                  <a:srgbClr val="5E5D56"/>
+                </a:solidFill>
+                <a:latin typeface="Arial" pitchFamily="34" charset="0"/>
+                <a:ea typeface="Arial" pitchFamily="34" charset="-122"/>
+                <a:cs typeface="Arial" pitchFamily="34" charset="-120"/>
+              </a:rPr>
+              <a:t>Нет даты и cookie. Написано, что данные не передаются третьим лицам, а заказы едут через СДЭК.</a:t>
+            </a:r>
+            <a:endParaRPr lang="en-US" sz="1500" dirty="0"/>
+          </a:p>
+        </p:txBody>
+      </p:sp>
+      <p:sp>
+        <p:nvSpPr>
+          <p:cNvPr id="110" name="Legal 3-0"/>
+          <p:cNvSpPr/>
+          <p:nvPr/>
+        </p:nvSpPr>
+        <p:spPr>
+          <a:xfrm>
+            <a:off x="731520" y="5111496"/>
+            <a:ext cx="5088636" cy="0"/>
+          </a:xfrm>
+          <a:prstGeom prst="line">
+            <a:avLst/>
+          </a:prstGeom>
+          <a:noFill/>
+          <a:ln w="9525">
+            <a:solidFill>
+              <a:srgbClr val="B9B3A8"/>
+            </a:solidFill>
+            <a:prstDash val="solid"/>
+          </a:ln>
+        </p:spPr>
+        <p:txBody>
+          <a:bodyPr/>
+          <a:p/>
+        </p:txBody>
+      </p:sp>
+      <p:sp>
+        <p:nvSpPr>
+          <p:cNvPr id="111" name="Legal 3-109728"/>
+          <p:cNvSpPr txBox="1"/>
+          <p:nvPr/>
+        </p:nvSpPr>
+        <p:spPr>
+          <a:xfrm>
+            <a:off x="731520" y="5221224"/>
+            <a:ext cx="5088636" cy="411480"/>
+          </a:xfrm>
+          <a:prstGeom prst="rect">
+            <a:avLst/>
+          </a:prstGeom>
+          <a:noFill/>
+          <a:ln/>
+        </p:spPr>
+        <p:txBody>
+          <a:bodyPr wrap="square" lIns="0" tIns="0" rIns="0" bIns="0" rtlCol="0" anchor="t"/>
+          <a:lstStyle/>
+          <a:p>
+            <a:pPr marL="0" indent="0">
+              <a:buNone/>
+            </a:pPr>
+            <a:r>
+              <a:rPr lang="en-US" sz="1400" b="1" dirty="0">
+                <a:solidFill>
+                  <a:srgbClr val="2A2A26"/>
+                </a:solidFill>
+                <a:latin typeface="Arial" pitchFamily="34" charset="0"/>
+                <a:ea typeface="Arial" pitchFamily="34" charset="-122"/>
+                <a:cs typeface="Arial" pitchFamily="34" charset="-120"/>
+              </a:rPr>
+              <a:t>Не сказано, где хранятся данные</a:t>
+            </a:r>
+            <a:endParaRPr lang="en-US" sz="1800" dirty="0"/>
+          </a:p>
+        </p:txBody>
+      </p:sp>
+      <p:sp>
+        <p:nvSpPr>
+          <p:cNvPr id="112" name="Legal 3-402336"/>
+          <p:cNvSpPr txBox="1"/>
+          <p:nvPr/>
+        </p:nvSpPr>
+        <p:spPr>
+          <a:xfrm>
+            <a:off x="731520" y="5513832"/>
+            <a:ext cx="5088636" cy="583272"/>
+          </a:xfrm>
+          <a:prstGeom prst="rect">
+            <a:avLst/>
+          </a:prstGeom>
+          <a:noFill/>
+          <a:ln/>
+        </p:spPr>
+        <p:txBody>
+          <a:bodyPr wrap="square" lIns="0" tIns="0" rIns="0" bIns="0" rtlCol="0" anchor="t"/>
+          <a:lstStyle/>
+          <a:p>
+            <a:pPr marL="0" indent="0">
+              <a:lnSpc>
+                <a:spcPct val="120000"/>
+              </a:lnSpc>
+              <a:buNone/>
+            </a:pPr>
+            <a:r>
+              <a:rPr lang="en-US" sz="1200" dirty="0">
+                <a:solidFill>
+                  <a:srgbClr val="5E5D56"/>
+                </a:solidFill>
+                <a:latin typeface="Arial" pitchFamily="34" charset="0"/>
+                <a:ea typeface="Arial" pitchFamily="34" charset="-122"/>
+                <a:cs typeface="Arial" pitchFamily="34" charset="-120"/>
+              </a:rPr>
+              <a:t>С 1.07.2025 базы с данными россиян — только в России. Штраф до 6 млн ₽, повторно до 18 млн.</a:t>
+            </a:r>
+            <a:endParaRPr lang="en-US" sz="1500" dirty="0"/>
+          </a:p>
+        </p:txBody>
+      </p:sp>
+      <p:sp>
+        <p:nvSpPr>
+          <p:cNvPr id="113" name="Legal 4-0"/>
+          <p:cNvSpPr/>
+          <p:nvPr/>
+        </p:nvSpPr>
+        <p:spPr>
+          <a:xfrm>
+            <a:off x="6368796" y="2011680"/>
+            <a:ext cx="5088636" cy="0"/>
+          </a:xfrm>
+          <a:prstGeom prst="line">
+            <a:avLst/>
+          </a:prstGeom>
+          <a:noFill/>
+          <a:ln w="9525">
+            <a:solidFill>
+              <a:srgbClr val="B9B3A8"/>
+            </a:solidFill>
+            <a:prstDash val="solid"/>
+          </a:ln>
+        </p:spPr>
+        <p:txBody>
+          <a:bodyPr/>
+          <a:p/>
+        </p:txBody>
+      </p:sp>
+      <p:sp>
+        <p:nvSpPr>
+          <p:cNvPr id="114" name="Legal 4-109728"/>
+          <p:cNvSpPr txBox="1"/>
+          <p:nvPr/>
+        </p:nvSpPr>
+        <p:spPr>
+          <a:xfrm>
+            <a:off x="6368796" y="2121408"/>
+            <a:ext cx="5088636" cy="411480"/>
+          </a:xfrm>
+          <a:prstGeom prst="rect">
+            <a:avLst/>
+          </a:prstGeom>
+          <a:noFill/>
+          <a:ln/>
+        </p:spPr>
+        <p:txBody>
+          <a:bodyPr wrap="square" lIns="0" tIns="0" rIns="0" bIns="0" rtlCol="0" anchor="t"/>
+          <a:lstStyle/>
+          <a:p>
+            <a:pPr marL="0" indent="0">
+              <a:buNone/>
+            </a:pPr>
+            <a:r>
+              <a:rPr lang="en-US" sz="1400" b="1" dirty="0">
+                <a:solidFill>
+                  <a:srgbClr val="2A2A26"/>
+                </a:solidFill>
+                <a:latin typeface="Arial" pitchFamily="34" charset="0"/>
+                <a:ea typeface="Arial" pitchFamily="34" charset="-122"/>
+                <a:cs typeface="Arial" pitchFamily="34" charset="-120"/>
+              </a:rPr>
+              <a:t>Нет контактов для претензий</a:t>
+            </a:r>
+            <a:endParaRPr lang="en-US" sz="1800" dirty="0"/>
+          </a:p>
+        </p:txBody>
+      </p:sp>
+      <p:sp>
+        <p:nvSpPr>
+          <p:cNvPr id="115" name="Legal 4-402336"/>
+          <p:cNvSpPr txBox="1"/>
+          <p:nvPr/>
+        </p:nvSpPr>
+        <p:spPr>
+          <a:xfrm>
+            <a:off x="6368796" y="2414016"/>
+            <a:ext cx="5088636" cy="583272"/>
+          </a:xfrm>
+          <a:prstGeom prst="rect">
+            <a:avLst/>
+          </a:prstGeom>
+          <a:noFill/>
+          <a:ln/>
+        </p:spPr>
+        <p:txBody>
+          <a:bodyPr wrap="square" lIns="0" tIns="0" rIns="0" bIns="0" rtlCol="0" anchor="t"/>
+          <a:lstStyle/>
+          <a:p>
+            <a:pPr marL="0" indent="0">
+              <a:lnSpc>
+                <a:spcPct val="120000"/>
+              </a:lnSpc>
+              <a:buNone/>
+            </a:pPr>
+            <a:r>
+              <a:rPr lang="en-US" sz="1200" dirty="0">
+                <a:solidFill>
+                  <a:srgbClr val="5E5D56"/>
+                </a:solidFill>
+                <a:latin typeface="Arial" pitchFamily="34" charset="0"/>
+                <a:ea typeface="Arial" pitchFamily="34" charset="-122"/>
+                <a:cs typeface="Arial" pitchFamily="34" charset="-120"/>
+              </a:rPr>
+              <a:t>В оферте нет почты и телефона продавца и порядка претензий. Этого требуют Правила продажи № 657.</a:t>
+            </a:r>
+            <a:endParaRPr lang="en-US" sz="1500" dirty="0"/>
+          </a:p>
+        </p:txBody>
+      </p:sp>
+      <p:sp>
+        <p:nvSpPr>
+          <p:cNvPr id="116" name="Legal 5-0"/>
+          <p:cNvSpPr/>
+          <p:nvPr/>
+        </p:nvSpPr>
+        <p:spPr>
+          <a:xfrm>
+            <a:off x="6368796" y="3044952"/>
+            <a:ext cx="5088636" cy="0"/>
+          </a:xfrm>
+          <a:prstGeom prst="line">
+            <a:avLst/>
+          </a:prstGeom>
+          <a:noFill/>
+          <a:ln w="9525">
+            <a:solidFill>
+              <a:srgbClr val="B9B3A8"/>
+            </a:solidFill>
+            <a:prstDash val="solid"/>
+          </a:ln>
+        </p:spPr>
+        <p:txBody>
+          <a:bodyPr/>
+          <a:p/>
+        </p:txBody>
+      </p:sp>
+      <p:sp>
+        <p:nvSpPr>
+          <p:cNvPr id="117" name="Legal 5-109728"/>
+          <p:cNvSpPr txBox="1"/>
+          <p:nvPr/>
+        </p:nvSpPr>
+        <p:spPr>
+          <a:xfrm>
+            <a:off x="6368796" y="3154680"/>
+            <a:ext cx="5088636" cy="411480"/>
+          </a:xfrm>
+          <a:prstGeom prst="rect">
+            <a:avLst/>
+          </a:prstGeom>
+          <a:noFill/>
+          <a:ln/>
+        </p:spPr>
+        <p:txBody>
+          <a:bodyPr wrap="square" lIns="0" tIns="0" rIns="0" bIns="0" rtlCol="0" anchor="t"/>
+          <a:lstStyle/>
+          <a:p>
+            <a:pPr marL="0" indent="0">
+              <a:buNone/>
+            </a:pPr>
+            <a:r>
+              <a:rPr lang="en-US" sz="1400" b="1" dirty="0">
+                <a:solidFill>
+                  <a:srgbClr val="2A2A26"/>
+                </a:solidFill>
+                <a:latin typeface="Arial" pitchFamily="34" charset="0"/>
+                <a:ea typeface="Arial" pitchFamily="34" charset="-122"/>
+                <a:cs typeface="Arial" pitchFamily="34" charset="-120"/>
+              </a:rPr>
+              <a:t>Запрет отказаться от товара</a:t>
+            </a:r>
+            <a:endParaRPr lang="en-US" sz="1800" dirty="0"/>
+          </a:p>
+        </p:txBody>
+      </p:sp>
+      <p:sp>
+        <p:nvSpPr>
+          <p:cNvPr id="118" name="Legal 5-402336"/>
+          <p:cNvSpPr txBox="1"/>
+          <p:nvPr/>
+        </p:nvSpPr>
+        <p:spPr>
+          <a:xfrm>
+            <a:off x="6368796" y="3447288"/>
+            <a:ext cx="5088636" cy="583272"/>
+          </a:xfrm>
+          <a:prstGeom prst="rect">
+            <a:avLst/>
+          </a:prstGeom>
+          <a:noFill/>
+          <a:ln/>
+        </p:spPr>
+        <p:txBody>
+          <a:bodyPr wrap="square" lIns="0" tIns="0" rIns="0" bIns="0" rtlCol="0" anchor="t"/>
+          <a:lstStyle/>
+          <a:p>
+            <a:pPr marL="0" indent="0">
+              <a:lnSpc>
+                <a:spcPct val="120000"/>
+              </a:lnSpc>
+              <a:buNone/>
+            </a:pPr>
+            <a:r>
+              <a:rPr lang="en-US" sz="1200" dirty="0">
+                <a:solidFill>
+                  <a:srgbClr val="5E5D56"/>
+                </a:solidFill>
+                <a:latin typeface="Arial" pitchFamily="34" charset="0"/>
+                <a:ea typeface="Arial" pitchFamily="34" charset="-122"/>
+                <a:cs typeface="Arial" pitchFamily="34" charset="-120"/>
+              </a:rPr>
+              <a:t>В оферте: «Покупатель не имеет права отказаться от получения товара». По закону вправе до передачи (ЗоЗПП ст. 26.1).</a:t>
+            </a:r>
+            <a:endParaRPr lang="en-US" sz="1500" dirty="0"/>
+          </a:p>
+        </p:txBody>
+      </p:sp>
+      <p:sp>
+        <p:nvSpPr>
+          <p:cNvPr id="119" name="Legal 6-0"/>
+          <p:cNvSpPr/>
+          <p:nvPr/>
+        </p:nvSpPr>
+        <p:spPr>
+          <a:xfrm>
+            <a:off x="6368796" y="4078224"/>
+            <a:ext cx="5088636" cy="0"/>
+          </a:xfrm>
+          <a:prstGeom prst="line">
+            <a:avLst/>
+          </a:prstGeom>
+          <a:noFill/>
+          <a:ln w="9525">
+            <a:solidFill>
+              <a:srgbClr val="B9B3A8"/>
+            </a:solidFill>
+            <a:prstDash val="solid"/>
+          </a:ln>
+        </p:spPr>
+        <p:txBody>
+          <a:bodyPr/>
+          <a:p/>
+        </p:txBody>
+      </p:sp>
+      <p:sp>
+        <p:nvSpPr>
+          <p:cNvPr id="120" name="Legal 6-109728"/>
+          <p:cNvSpPr txBox="1"/>
+          <p:nvPr/>
+        </p:nvSpPr>
+        <p:spPr>
+          <a:xfrm>
+            <a:off x="6368796" y="4187952"/>
+            <a:ext cx="5088636" cy="411480"/>
+          </a:xfrm>
+          <a:prstGeom prst="rect">
+            <a:avLst/>
+          </a:prstGeom>
+          <a:noFill/>
+          <a:ln/>
+        </p:spPr>
+        <p:txBody>
+          <a:bodyPr wrap="square" lIns="0" tIns="0" rIns="0" bIns="0" rtlCol="0" anchor="t"/>
+          <a:lstStyle/>
+          <a:p>
+            <a:pPr marL="0" indent="0">
+              <a:buNone/>
+            </a:pPr>
+            <a:r>
+              <a:rPr lang="en-US" sz="1400" b="1" dirty="0">
+                <a:solidFill>
+                  <a:srgbClr val="2A2A26"/>
+                </a:solidFill>
+                <a:latin typeface="Arial" pitchFamily="34" charset="0"/>
+                <a:ea typeface="Arial" pitchFamily="34" charset="-122"/>
+                <a:cs typeface="Arial" pitchFamily="34" charset="-120"/>
+              </a:rPr>
+              <a:t>Не все сведения о продуктах</a:t>
+            </a:r>
+            <a:endParaRPr lang="en-US" sz="1800" dirty="0"/>
+          </a:p>
+        </p:txBody>
+      </p:sp>
+      <p:sp>
+        <p:nvSpPr>
+          <p:cNvPr id="121" name="Legal 6-402336"/>
+          <p:cNvSpPr txBox="1"/>
+          <p:nvPr/>
+        </p:nvSpPr>
+        <p:spPr>
+          <a:xfrm>
+            <a:off x="6368796" y="4480560"/>
+            <a:ext cx="5088636" cy="583272"/>
+          </a:xfrm>
+          <a:prstGeom prst="rect">
+            <a:avLst/>
+          </a:prstGeom>
+          <a:noFill/>
+          <a:ln/>
+        </p:spPr>
+        <p:txBody>
+          <a:bodyPr wrap="square" lIns="0" tIns="0" rIns="0" bIns="0" rtlCol="0" anchor="t"/>
+          <a:lstStyle/>
+          <a:p>
+            <a:pPr marL="0" indent="0">
+              <a:lnSpc>
+                <a:spcPct val="120000"/>
+              </a:lnSpc>
+              <a:buNone/>
+            </a:pPr>
+            <a:r>
+              <a:rPr lang="en-US" sz="1200" dirty="0">
+                <a:solidFill>
+                  <a:srgbClr val="5E5D56"/>
+                </a:solidFill>
+                <a:latin typeface="Arial" pitchFamily="34" charset="0"/>
+                <a:ea typeface="Arial" pitchFamily="34" charset="-122"/>
+                <a:cs typeface="Arial" pitchFamily="34" charset="-120"/>
+              </a:rPr>
+              <a:t>Состав, вес и срок есть. Нет условий хранения и пищевой ценности, хотя закон их требует (ЗоЗПП ст. 10).</a:t>
+            </a:r>
+            <a:endParaRPr lang="en-US" sz="1500" dirty="0"/>
+          </a:p>
+        </p:txBody>
+      </p:sp>
+      <p:sp>
+        <p:nvSpPr>
+          <p:cNvPr id="122" name="Legal 7-0"/>
+          <p:cNvSpPr/>
+          <p:nvPr/>
+        </p:nvSpPr>
+        <p:spPr>
+          <a:xfrm>
+            <a:off x="6368796" y="5111496"/>
+            <a:ext cx="5088636" cy="0"/>
+          </a:xfrm>
+          <a:prstGeom prst="line">
+            <a:avLst/>
+          </a:prstGeom>
+          <a:noFill/>
+          <a:ln w="9525">
+            <a:solidFill>
+              <a:srgbClr val="B9B3A8"/>
+            </a:solidFill>
+            <a:prstDash val="solid"/>
+          </a:ln>
+        </p:spPr>
+        <p:txBody>
+          <a:bodyPr/>
+          <a:p/>
+        </p:txBody>
+      </p:sp>
+      <p:sp>
+        <p:nvSpPr>
+          <p:cNvPr id="123" name="Legal 7-109728"/>
+          <p:cNvSpPr txBox="1"/>
+          <p:nvPr/>
+        </p:nvSpPr>
+        <p:spPr>
+          <a:xfrm>
+            <a:off x="6368796" y="5221224"/>
+            <a:ext cx="5088636" cy="411480"/>
+          </a:xfrm>
+          <a:prstGeom prst="rect">
+            <a:avLst/>
+          </a:prstGeom>
+          <a:noFill/>
+          <a:ln/>
+        </p:spPr>
+        <p:txBody>
+          <a:bodyPr wrap="square" lIns="0" tIns="0" rIns="0" bIns="0" rtlCol="0" anchor="t"/>
+          <a:lstStyle/>
+          <a:p>
+            <a:pPr marL="0" indent="0">
+              <a:buNone/>
+            </a:pPr>
+            <a:r>
+              <a:rPr lang="en-US" sz="1400" b="1" dirty="0">
+                <a:solidFill>
+                  <a:srgbClr val="2A2A26"/>
+                </a:solidFill>
+                <a:latin typeface="Arial" pitchFamily="34" charset="0"/>
+                <a:ea typeface="Arial" pitchFamily="34" charset="-122"/>
+                <a:cs typeface="Arial" pitchFamily="34" charset="-120"/>
+              </a:rPr>
+              <a:t>Проверим на созвоне</a:t>
+            </a:r>
+            <a:endParaRPr lang="en-US" sz="1800" dirty="0"/>
+          </a:p>
+        </p:txBody>
+      </p:sp>
+      <p:sp>
+        <p:nvSpPr>
+          <p:cNvPr id="124" name="Legal 7-402336"/>
+          <p:cNvSpPr txBox="1"/>
+          <p:nvPr/>
+        </p:nvSpPr>
+        <p:spPr>
+          <a:xfrm>
+            <a:off x="6368796" y="5513832"/>
+            <a:ext cx="5088636" cy="583272"/>
+          </a:xfrm>
+          <a:prstGeom prst="rect">
+            <a:avLst/>
+          </a:prstGeom>
+          <a:noFill/>
+          <a:ln/>
+        </p:spPr>
+        <p:txBody>
+          <a:bodyPr wrap="square" lIns="0" tIns="0" rIns="0" bIns="0" rtlCol="0" anchor="t"/>
+          <a:lstStyle/>
+          <a:p>
+            <a:pPr marL="0" indent="0">
+              <a:lnSpc>
+                <a:spcPct val="120000"/>
+              </a:lnSpc>
+              <a:buNone/>
+            </a:pPr>
+            <a:r>
+              <a:rPr lang="en-US" sz="1200" dirty="0">
+                <a:solidFill>
+                  <a:srgbClr val="5E5D56"/>
+                </a:solidFill>
+                <a:latin typeface="Arial" pitchFamily="34" charset="0"/>
+                <a:ea typeface="Arial" pitchFamily="34" charset="-122"/>
+                <a:cs typeface="Arial" pitchFamily="34" charset="-120"/>
+              </a:rPr>
+              <a:t>Уведомление в реестре Роскомнадзора, чеки по 54-ФЗ и куда Tilda отправляет данные из корзины.</a:t>
+            </a:r>
+            <a:endParaRPr lang="en-US" sz="1500" dirty="0"/>
+          </a:p>
+        </p:txBody>
+      </p:sp>
+      <p:sp>
+        <p:nvSpPr>
+          <p:cNvPr id="200" name="Sources"/>
+          <p:cNvSpPr txBox="1"/>
+          <p:nvPr/>
+        </p:nvSpPr>
+        <p:spPr>
+          <a:xfrm>
+            <a:off x="4572000" y="6263640"/>
+            <a:ext cx="6885432" cy="274320"/>
+          </a:xfrm>
+          <a:prstGeom prst="rect">
+            <a:avLst/>
+          </a:prstGeom>
+          <a:noFill/>
+          <a:ln/>
+        </p:spPr>
+        <p:txBody>
+          <a:bodyPr wrap="square" lIns="0" tIns="0" rIns="0" bIns="0" rtlCol="0" anchor="t"/>
+          <a:lstStyle/>
+          <a:p>
+            <a:pPr marL="0" indent="0">
+              <a:buNone/>
+            </a:pPr>
+            <a:r>
+              <a:rPr lang="en-US" sz="1000" dirty="0">
+                <a:solidFill>
+                  <a:srgbClr val="5E5D56"/>
+                </a:solidFill>
+                <a:latin typeface="Arial" pitchFamily="34" charset="0"/>
+                <a:ea typeface="Arial" pitchFamily="34" charset="-122"/>
+                <a:cs typeface="Arial" pitchFamily="34" charset="-120"/>
+              </a:rPr>
+              <a:t>Источники: 152-ФЗ, КоАП ст. 13.11, ЗоЗПП, ПП № 657. Проверено по lesnaya-yagodka.ru, сентябрь 2026.</a:t>
+            </a:r>
+            <a:endParaRPr lang="en-US" sz="1100" dirty="0"/>
+          </a:p>
+        </p:txBody>
+      </p:sp>
+    </p:spTree>
+  </p:cSld>
+  <p:clrMapOvr>
+    <a:masterClrMapping/>
+  </p:clrMapOvr>
+</p:sld>
+</file>
+
 <file path=ppt/slides/slide2.xml><?xml version="1.0" encoding="utf-8"?>
 <p:sld xmlns:a="http://schemas.openxmlformats.org/drawingml/2006/main" xmlns:r="http://schemas.openxmlformats.org/officeDocument/2006/relationships" xmlns:p="http://schemas.openxmlformats.org/presentationml/2006/main">
   <p:cSld name="Slide 2">
@@ -7111,7 +8158,7 @@
                 <a:ea typeface="Arial" pitchFamily="34" charset="-122"/>
                 <a:cs typeface="Arial" pitchFamily="34" charset="-120"/>
               </a:rPr>
-              <a:t>Метрика с Вебвизором запускается до согласия, согласие на данные не отдельным документом. Штрафы с 2025 года выросли.</a:t>
+              <a:t>Метрика до согласия, согласие не отдельным документом, в политике нет ИНН и почты для обращений. Подробно — на следующем слайде.</a:t>
             </a:r>
             <a:endParaRPr lang="en-US" sz="1500" dirty="0"/>
           </a:p>
@@ -7892,7 +8939,7 @@
                 <a:ea typeface="Arial" pitchFamily="34" charset="-122"/>
                 <a:cs typeface="Arial" pitchFamily="34" charset="-120"/>
               </a:rPr>
-              <a:t>Лесная ягодка · 3</a:t>
+              <a:t>Лесная ягодка · 4</a:t>
             </a:r>
             <a:endParaRPr lang="en-US" sz="1100" dirty="0"/>
           </a:p>
@@ -8727,7 +9774,7 @@
                 <a:ea typeface="Arial" pitchFamily="34" charset="-122"/>
                 <a:cs typeface="Arial" pitchFamily="34" charset="-120"/>
               </a:rPr>
-              <a:t>Лесная ягодка · 4</a:t>
+              <a:t>Лесная ягодка · 5</a:t>
             </a:r>
             <a:endParaRPr lang="en-US" sz="1100" dirty="0"/>
           </a:p>
@@ -11461,7 +12508,7 @@
                 <a:ea typeface="Arial" pitchFamily="34" charset="-122"/>
                 <a:cs typeface="Arial" pitchFamily="34" charset="-120"/>
               </a:rPr>
-              <a:t>Лесная ягодка · 7</a:t>
+              <a:t>Лесная ягодка · 8</a:t>
             </a:r>
             <a:endParaRPr lang="en-US" sz="1100" dirty="0"/>
           </a:p>
